--- a/Casino_Pride_Digital_Strategy.pptx
+++ b/Casino_Pride_Digital_Strategy.pptx
@@ -1213,7 +1213,7 @@
     <p:bg>
       <p:bgPr>
         <a:solidFill>
-          <a:srgbClr val="0F1B3D"/>
+          <a:srgbClr val="0A0E1A"/>
         </a:solidFill>
       </p:bgPr>
     </p:bg>
@@ -1233,32 +1233,74 @@
       </p:grpSpPr>
       <p:sp>
         <p:nvSpPr>
-          <p:cNvPr id="2" name="Text 0"/>
-          <p:cNvSpPr/>
-          <p:nvPr/>
-        </p:nvSpPr>
-        <p:spPr>
-          <a:xfrm>
-            <a:off x="457200" y="365760"/>
-            <a:ext cx="8229600" cy="365760"/>
-          </a:xfrm>
-          <a:prstGeom prst="rect">
-            <a:avLst/>
-          </a:prstGeom>
-          <a:noFill/>
-          <a:ln/>
-        </p:spPr>
-        <p:txBody>
-          <a:bodyPr wrap="square" lIns="0" tIns="0" rIns="0" bIns="0" rtlCol="0" anchor="ctr"/>
-          <a:lstStyle/>
-          <a:p>
-            <a:pPr algn="l" indent="0" marL="0">
-              <a:buNone/>
-            </a:pPr>
-            <a:r>
-              <a:rPr lang="en-US" sz="1100" b="1" spc="200" kern="0" dirty="0">
-                <a:solidFill>
-                  <a:srgbClr val="C4A35A"/>
+          <p:cNvPr id="2" name="Shape 0"/>
+          <p:cNvSpPr/>
+          <p:nvPr/>
+        </p:nvSpPr>
+        <p:spPr>
+          <a:xfrm>
+            <a:off x="-1371600" y="-1371600"/>
+            <a:ext cx="4114800" cy="4114800"/>
+          </a:xfrm>
+          <a:prstGeom prst="ellipse">
+            <a:avLst/>
+          </a:prstGeom>
+          <a:solidFill>
+            <a:srgbClr val="141B2D"/>
+          </a:solidFill>
+          <a:ln/>
+        </p:spPr>
+      </p:sp>
+      <p:sp>
+        <p:nvSpPr>
+          <p:cNvPr id="3" name="Shape 1"/>
+          <p:cNvSpPr/>
+          <p:nvPr/>
+        </p:nvSpPr>
+        <p:spPr>
+          <a:xfrm>
+            <a:off x="548640" y="457200"/>
+            <a:ext cx="1463040" cy="292608"/>
+          </a:xfrm>
+          <a:prstGeom prst="roundRect">
+            <a:avLst>
+              <a:gd name="adj" fmla="val 50000"/>
+            </a:avLst>
+          </a:prstGeom>
+          <a:solidFill>
+            <a:srgbClr val="8B7535"/>
+          </a:solidFill>
+          <a:ln/>
+        </p:spPr>
+      </p:sp>
+      <p:sp>
+        <p:nvSpPr>
+          <p:cNvPr id="4" name="Text 2"/>
+          <p:cNvSpPr/>
+          <p:nvPr/>
+        </p:nvSpPr>
+        <p:spPr>
+          <a:xfrm>
+            <a:off x="548640" y="457200"/>
+            <a:ext cx="1463040" cy="292608"/>
+          </a:xfrm>
+          <a:prstGeom prst="rect">
+            <a:avLst/>
+          </a:prstGeom>
+          <a:noFill/>
+          <a:ln/>
+        </p:spPr>
+        <p:txBody>
+          <a:bodyPr wrap="square" lIns="0" tIns="0" rIns="0" bIns="0" rtlCol="0" anchor="ctr"/>
+          <a:lstStyle/>
+          <a:p>
+            <a:pPr algn="ctr" indent="0" marL="0">
+              <a:buNone/>
+            </a:pPr>
+            <a:r>
+              <a:rPr lang="en-US" sz="800" b="1" spc="150" kern="0" dirty="0">
+                <a:solidFill>
+                  <a:srgbClr val="FFFFFF"/>
                 </a:solidFill>
                 <a:latin typeface="Calibri" pitchFamily="34" charset="0"/>
                 <a:ea typeface="Calibri" pitchFamily="34" charset="-122"/>
@@ -1266,20 +1308,20 @@
               </a:rPr>
               <a:t>THE CHALLENGE</a:t>
             </a:r>
-            <a:endParaRPr lang="en-US" sz="1100" dirty="0"/>
-          </a:p>
-        </p:txBody>
-      </p:sp>
-      <p:sp>
-        <p:nvSpPr>
-          <p:cNvPr id="3" name="Text 1"/>
-          <p:cNvSpPr/>
-          <p:nvPr/>
-        </p:nvSpPr>
-        <p:spPr>
-          <a:xfrm>
-            <a:off x="457200" y="822960"/>
-            <a:ext cx="8229600" cy="1463040"/>
+            <a:endParaRPr lang="en-US" sz="800" dirty="0"/>
+          </a:p>
+        </p:txBody>
+      </p:sp>
+      <p:sp>
+        <p:nvSpPr>
+          <p:cNvPr id="5" name="Text 3"/>
+          <p:cNvSpPr/>
+          <p:nvPr/>
+        </p:nvSpPr>
+        <p:spPr>
+          <a:xfrm>
+            <a:off x="548640" y="1005840"/>
+            <a:ext cx="5029200" cy="1645920"/>
           </a:xfrm>
           <a:prstGeom prst="rect">
             <a:avLst/>
@@ -1293,12 +1335,12 @@
           <a:p>
             <a:pPr algn="l" indent="0" marL="0">
               <a:lnSpc>
-                <a:spcPct val="120000"/>
+                <a:spcPct val="115000"/>
               </a:lnSpc>
               <a:buNone/>
             </a:pPr>
             <a:r>
-              <a:rPr lang="en-US" sz="3200" b="1" dirty="0">
+              <a:rPr lang="en-US" sz="3000" b="1" dirty="0">
                 <a:solidFill>
                   <a:srgbClr val="FFFFFF"/>
                 </a:solidFill>
@@ -1306,19 +1348,19 @@
                 <a:ea typeface="Cambria" pitchFamily="34" charset="-122"/>
                 <a:cs typeface="Cambria" pitchFamily="34" charset="-120"/>
               </a:rPr>
-              <a:t>Creating an Alternative Digital</a:t>
-            </a:r>
-            <a:endParaRPr lang="en-US" sz="3200" dirty="0"/>
+              <a:t>Creating an Alternative</a:t>
+            </a:r>
+            <a:endParaRPr lang="en-US" sz="3000" dirty="0"/>
           </a:p>
           <a:p>
             <a:pPr algn="l" indent="0" marL="0">
               <a:lnSpc>
-                <a:spcPct val="120000"/>
+                <a:spcPct val="115000"/>
               </a:lnSpc>
               <a:buNone/>
             </a:pPr>
             <a:r>
-              <a:rPr lang="en-US" sz="3200" b="1" dirty="0">
+              <a:rPr lang="en-US" sz="3000" b="1" dirty="0">
                 <a:solidFill>
                   <a:srgbClr val="FFFFFF"/>
                 </a:solidFill>
@@ -1326,19 +1368,19 @@
                 <a:ea typeface="Cambria" pitchFamily="34" charset="-122"/>
                 <a:cs typeface="Cambria" pitchFamily="34" charset="-120"/>
               </a:rPr>
-              <a:t>Presence for Payment Gateway</a:t>
-            </a:r>
-            <a:endParaRPr lang="en-US" sz="3200" dirty="0"/>
+              <a:t>Digital Presence for</a:t>
+            </a:r>
+            <a:endParaRPr lang="en-US" sz="3000" dirty="0"/>
           </a:p>
           <a:p>
             <a:pPr algn="l" indent="0" marL="0">
               <a:lnSpc>
-                <a:spcPct val="120000"/>
+                <a:spcPct val="115000"/>
               </a:lnSpc>
               <a:buNone/>
             </a:pPr>
             <a:r>
-              <a:rPr lang="en-US" sz="3200" b="1" dirty="0">
+              <a:rPr lang="en-US" sz="3000" b="1" dirty="0">
                 <a:solidFill>
                   <a:srgbClr val="FFFFFF"/>
                 </a:solidFill>
@@ -1346,22 +1388,196 @@
                 <a:ea typeface="Cambria" pitchFamily="34" charset="-122"/>
                 <a:cs typeface="Cambria" pitchFamily="34" charset="-120"/>
               </a:rPr>
-              <a:t>Evaluation</a:t>
-            </a:r>
-            <a:endParaRPr lang="en-US" sz="3200" dirty="0"/>
-          </a:p>
-        </p:txBody>
-      </p:sp>
-      <p:sp>
-        <p:nvSpPr>
-          <p:cNvPr id="4" name="Text 2"/>
-          <p:cNvSpPr/>
-          <p:nvPr/>
-        </p:nvSpPr>
-        <p:spPr>
-          <a:xfrm>
-            <a:off x="457200" y="2468880"/>
-            <a:ext cx="5303520" cy="914400"/>
+              <a:t>Payment Gateway Evaluation</a:t>
+            </a:r>
+            <a:endParaRPr lang="en-US" sz="3000" dirty="0"/>
+          </a:p>
+        </p:txBody>
+      </p:sp>
+      <p:sp>
+        <p:nvSpPr>
+          <p:cNvPr id="6" name="Text 4"/>
+          <p:cNvSpPr/>
+          <p:nvPr/>
+        </p:nvSpPr>
+        <p:spPr>
+          <a:xfrm>
+            <a:off x="548640" y="2834640"/>
+            <a:ext cx="4754880" cy="777240"/>
+          </a:xfrm>
+          <a:prstGeom prst="rect">
+            <a:avLst/>
+          </a:prstGeom>
+          <a:noFill/>
+          <a:ln/>
+        </p:spPr>
+        <p:txBody>
+          <a:bodyPr wrap="square" lIns="0" tIns="0" rIns="0" bIns="0" rtlCol="0" anchor="ctr"/>
+          <a:lstStyle/>
+          <a:p>
+            <a:pPr algn="l" indent="0" marL="0">
+              <a:lnSpc>
+                <a:spcPct val="150000"/>
+              </a:lnSpc>
+              <a:buNone/>
+            </a:pPr>
+            <a:r>
+              <a:rPr lang="en-US" sz="1050" dirty="0">
+                <a:solidFill>
+                  <a:srgbClr val="9CA3AF"/>
+                </a:solidFill>
+                <a:latin typeface="Calibri" pitchFamily="34" charset="0"/>
+                <a:ea typeface="Calibri" pitchFamily="34" charset="-122"/>
+                <a:cs typeface="Calibri" pitchFamily="34" charset="-120"/>
+              </a:rPr>
+              <a:t>Casino Pride operates as an offshore casino in Goa. Casino and gaming-related businesses fall under restricted/high-risk categories for many banks and payment gateway providers, resulting in additional scrutiny or rejection during merchant onboarding.</a:t>
+            </a:r>
+            <a:endParaRPr lang="en-US" sz="1050" dirty="0"/>
+          </a:p>
+        </p:txBody>
+      </p:sp>
+      <p:sp>
+        <p:nvSpPr>
+          <p:cNvPr id="7" name="Text 5"/>
+          <p:cNvSpPr/>
+          <p:nvPr/>
+        </p:nvSpPr>
+        <p:spPr>
+          <a:xfrm>
+            <a:off x="548640" y="3703320"/>
+            <a:ext cx="4754880" cy="640080"/>
+          </a:xfrm>
+          <a:prstGeom prst="rect">
+            <a:avLst/>
+          </a:prstGeom>
+          <a:noFill/>
+          <a:ln/>
+        </p:spPr>
+        <p:txBody>
+          <a:bodyPr wrap="square" lIns="0" tIns="0" rIns="0" bIns="0" rtlCol="0" anchor="ctr"/>
+          <a:lstStyle/>
+          <a:p>
+            <a:pPr algn="l" indent="0" marL="0">
+              <a:lnSpc>
+                <a:spcPct val="150000"/>
+              </a:lnSpc>
+              <a:buNone/>
+            </a:pPr>
+            <a:r>
+              <a:rPr lang="en-US" sz="1050" dirty="0">
+                <a:solidFill>
+                  <a:srgbClr val="9CA3AF"/>
+                </a:solidFill>
+                <a:latin typeface="Calibri" pitchFamily="34" charset="0"/>
+                <a:ea typeface="Calibri" pitchFamily="34" charset="-122"/>
+                <a:cs typeface="Calibri" pitchFamily="34" charset="-120"/>
+              </a:rPr>
+              <a:t>The current website (cpofficial.in) is primarily positioned around the Casino Pride casino/gaming business — a factor considered during payment gateway merchant assessment.</a:t>
+            </a:r>
+            <a:endParaRPr lang="en-US" sz="1050" dirty="0"/>
+          </a:p>
+        </p:txBody>
+      </p:sp>
+      <p:sp>
+        <p:nvSpPr>
+          <p:cNvPr id="8" name="Shape 6"/>
+          <p:cNvSpPr/>
+          <p:nvPr/>
+        </p:nvSpPr>
+        <p:spPr>
+          <a:xfrm>
+            <a:off x="5669280" y="731520"/>
+            <a:ext cx="3108960" cy="3840480"/>
+          </a:xfrm>
+          <a:prstGeom prst="roundRect">
+            <a:avLst>
+              <a:gd name="adj" fmla="val 4412"/>
+            </a:avLst>
+          </a:prstGeom>
+          <a:solidFill>
+            <a:srgbClr val="141B2D"/>
+          </a:solidFill>
+          <a:ln/>
+          <a:effectLst>
+            <a:outerShdw sx="100000" sy="100000" kx="0" ky="0" algn="bl" rotWithShape="0" blurRad="152400" dist="50800" dir="16200000">
+              <a:srgbClr val="000000">
+                <a:alpha val="30000"/>
+              </a:srgbClr>
+            </a:outerShdw>
+          </a:effectLst>
+        </p:spPr>
+      </p:sp>
+      <p:sp>
+        <p:nvSpPr>
+          <p:cNvPr id="9" name="Shape 7"/>
+          <p:cNvSpPr/>
+          <p:nvPr/>
+        </p:nvSpPr>
+        <p:spPr>
+          <a:xfrm>
+            <a:off x="5943600" y="960120"/>
+            <a:ext cx="1828800" cy="36576"/>
+          </a:xfrm>
+          <a:prstGeom prst="roundRect">
+            <a:avLst>
+              <a:gd name="adj" fmla="val 50000"/>
+            </a:avLst>
+          </a:prstGeom>
+          <a:solidFill>
+            <a:srgbClr val="D4A853"/>
+          </a:solidFill>
+          <a:ln/>
+        </p:spPr>
+      </p:sp>
+      <p:sp>
+        <p:nvSpPr>
+          <p:cNvPr id="10" name="Text 8"/>
+          <p:cNvSpPr/>
+          <p:nvPr/>
+        </p:nvSpPr>
+        <p:spPr>
+          <a:xfrm>
+            <a:off x="5943600" y="1143000"/>
+            <a:ext cx="2560320" cy="365760"/>
+          </a:xfrm>
+          <a:prstGeom prst="rect">
+            <a:avLst/>
+          </a:prstGeom>
+          <a:noFill/>
+          <a:ln/>
+        </p:spPr>
+        <p:txBody>
+          <a:bodyPr wrap="square" lIns="0" tIns="0" rIns="0" bIns="0" rtlCol="0" anchor="ctr"/>
+          <a:lstStyle/>
+          <a:p>
+            <a:pPr algn="l" indent="0" marL="0">
+              <a:buNone/>
+            </a:pPr>
+            <a:r>
+              <a:rPr lang="en-US" sz="1400" b="1" dirty="0">
+                <a:solidFill>
+                  <a:srgbClr val="FFFFFF"/>
+                </a:solidFill>
+                <a:latin typeface="Cambria" pitchFamily="34" charset="0"/>
+                <a:ea typeface="Cambria" pitchFamily="34" charset="-122"/>
+                <a:cs typeface="Cambria" pitchFamily="34" charset="-120"/>
+              </a:rPr>
+              <a:t>Proposed Approach</a:t>
+            </a:r>
+            <a:endParaRPr lang="en-US" sz="1400" dirty="0"/>
+          </a:p>
+        </p:txBody>
+      </p:sp>
+      <p:sp>
+        <p:nvSpPr>
+          <p:cNvPr id="11" name="Text 9"/>
+          <p:cNvSpPr/>
+          <p:nvPr/>
+        </p:nvSpPr>
+        <p:spPr>
+          <a:xfrm>
+            <a:off x="5943600" y="1554480"/>
+            <a:ext cx="2560320" cy="502920"/>
           </a:xfrm>
           <a:prstGeom prst="rect">
             <a:avLst/>
@@ -1380,30 +1596,50 @@
               <a:buNone/>
             </a:pPr>
             <a:r>
-              <a:rPr lang="en-US" sz="1100" dirty="0">
-                <a:solidFill>
-                  <a:srgbClr val="F5F6FA"/>
-                </a:solidFill>
-                <a:latin typeface="Calibri" pitchFamily="34" charset="0"/>
-                <a:ea typeface="Calibri" pitchFamily="34" charset="-122"/>
-                <a:cs typeface="Calibri" pitchFamily="34" charset="-120"/>
-              </a:rPr>
-              <a:t>Casino Pride operates as an offshore casino in Goa. However, casino and gaming-related businesses fall under restricted/high-risk categories for many banks and payment gateway providers, which can result in additional scrutiny or rejection during merchant onboarding.</a:t>
-            </a:r>
-            <a:endParaRPr lang="en-US" sz="1100" dirty="0"/>
-          </a:p>
-        </p:txBody>
-      </p:sp>
-      <p:sp>
-        <p:nvSpPr>
-          <p:cNvPr id="5" name="Text 3"/>
-          <p:cNvSpPr/>
-          <p:nvPr/>
-        </p:nvSpPr>
-        <p:spPr>
-          <a:xfrm>
-            <a:off x="457200" y="3429000"/>
-            <a:ext cx="5303520" cy="777240"/>
+              <a:rPr lang="en-US" sz="1000" dirty="0">
+                <a:solidFill>
+                  <a:srgbClr val="9CA3AF"/>
+                </a:solidFill>
+                <a:latin typeface="Calibri" pitchFamily="34" charset="0"/>
+                <a:ea typeface="Calibri" pitchFamily="34" charset="-122"/>
+                <a:cs typeface="Calibri" pitchFamily="34" charset="-120"/>
+              </a:rPr>
+              <a:t>Create a separate, professionally designed website with a broader focus:</a:t>
+            </a:r>
+            <a:endParaRPr lang="en-US" sz="1000" dirty="0"/>
+          </a:p>
+        </p:txBody>
+      </p:sp>
+      <p:sp>
+        <p:nvSpPr>
+          <p:cNvPr id="12" name="Shape 10"/>
+          <p:cNvSpPr/>
+          <p:nvPr/>
+        </p:nvSpPr>
+        <p:spPr>
+          <a:xfrm>
+            <a:off x="5943600" y="2267712"/>
+            <a:ext cx="109728" cy="109728"/>
+          </a:xfrm>
+          <a:prstGeom prst="ellipse">
+            <a:avLst/>
+          </a:prstGeom>
+          <a:solidFill>
+            <a:srgbClr val="D4A853"/>
+          </a:solidFill>
+          <a:ln/>
+        </p:spPr>
+      </p:sp>
+      <p:sp>
+        <p:nvSpPr>
+          <p:cNvPr id="13" name="Text 11"/>
+          <p:cNvSpPr/>
+          <p:nvPr/>
+        </p:nvSpPr>
+        <p:spPr>
+          <a:xfrm>
+            <a:off x="6217920" y="2194560"/>
+            <a:ext cx="2286000" cy="274320"/>
           </a:xfrm>
           <a:prstGeom prst="rect">
             <a:avLst/>
@@ -1416,58 +1652,53 @@
           <a:lstStyle/>
           <a:p>
             <a:pPr algn="l" indent="0" marL="0">
-              <a:lnSpc>
-                <a:spcPct val="140000"/>
-              </a:lnSpc>
-              <a:buNone/>
-            </a:pPr>
-            <a:r>
-              <a:rPr lang="en-US" sz="1100" dirty="0">
-                <a:solidFill>
-                  <a:srgbClr val="F5F6FA"/>
-                </a:solidFill>
-                <a:latin typeface="Calibri" pitchFamily="34" charset="0"/>
-                <a:ea typeface="Calibri" pitchFamily="34" charset="-122"/>
-                <a:cs typeface="Calibri" pitchFamily="34" charset="-120"/>
-              </a:rPr>
-              <a:t>The current website, www.cpofficial.in, is primarily positioned around the Casino Pride casino/gaming business. This may be one of the factors considered during the payment gateway's website and merchant assessment.</a:t>
-            </a:r>
-            <a:endParaRPr lang="en-US" sz="1100" dirty="0"/>
-          </a:p>
-        </p:txBody>
-      </p:sp>
-      <p:sp>
-        <p:nvSpPr>
-          <p:cNvPr id="6" name="Shape 4"/>
-          <p:cNvSpPr/>
-          <p:nvPr/>
-        </p:nvSpPr>
-        <p:spPr>
-          <a:xfrm>
-            <a:off x="6126480" y="2468880"/>
-            <a:ext cx="2651760" cy="2377440"/>
-          </a:xfrm>
-          <a:prstGeom prst="roundRect">
-            <a:avLst>
-              <a:gd name="adj" fmla="val 3077"/>
-            </a:avLst>
-          </a:prstGeom>
-          <a:solidFill>
-            <a:srgbClr val="1A2A5E"/>
-          </a:solidFill>
-          <a:ln/>
-        </p:spPr>
-      </p:sp>
-      <p:sp>
-        <p:nvSpPr>
-          <p:cNvPr id="7" name="Text 5"/>
-          <p:cNvSpPr/>
-          <p:nvPr/>
-        </p:nvSpPr>
-        <p:spPr>
-          <a:xfrm>
-            <a:off x="6309360" y="2606040"/>
-            <a:ext cx="2286000" cy="365760"/>
+              <a:buNone/>
+            </a:pPr>
+            <a:r>
+              <a:rPr lang="en-US" sz="1200" b="1" dirty="0">
+                <a:solidFill>
+                  <a:srgbClr val="FFFFFF"/>
+                </a:solidFill>
+                <a:latin typeface="Calibri" pitchFamily="34" charset="0"/>
+                <a:ea typeface="Calibri" pitchFamily="34" charset="-122"/>
+                <a:cs typeface="Calibri" pitchFamily="34" charset="-120"/>
+              </a:rPr>
+              <a:t>Entertainment</a:t>
+            </a:r>
+            <a:endParaRPr lang="en-US" sz="1200" dirty="0"/>
+          </a:p>
+        </p:txBody>
+      </p:sp>
+      <p:sp>
+        <p:nvSpPr>
+          <p:cNvPr id="14" name="Shape 12"/>
+          <p:cNvSpPr/>
+          <p:nvPr/>
+        </p:nvSpPr>
+        <p:spPr>
+          <a:xfrm>
+            <a:off x="5943600" y="2651760"/>
+            <a:ext cx="109728" cy="109728"/>
+          </a:xfrm>
+          <a:prstGeom prst="ellipse">
+            <a:avLst/>
+          </a:prstGeom>
+          <a:solidFill>
+            <a:srgbClr val="D4A853"/>
+          </a:solidFill>
+          <a:ln/>
+        </p:spPr>
+      </p:sp>
+      <p:sp>
+        <p:nvSpPr>
+          <p:cNvPr id="15" name="Text 13"/>
+          <p:cNvSpPr/>
+          <p:nvPr/>
+        </p:nvSpPr>
+        <p:spPr>
+          <a:xfrm>
+            <a:off x="6217920" y="2578608"/>
+            <a:ext cx="2286000" cy="274320"/>
           </a:xfrm>
           <a:prstGeom prst="rect">
             <a:avLst/>
@@ -1485,13 +1716,13 @@
             <a:r>
               <a:rPr lang="en-US" sz="1200" b="1" dirty="0">
                 <a:solidFill>
-                  <a:srgbClr val="C4A35A"/>
-                </a:solidFill>
-                <a:latin typeface="Cambria" pitchFamily="34" charset="0"/>
-                <a:ea typeface="Cambria" pitchFamily="34" charset="-122"/>
-                <a:cs typeface="Cambria" pitchFamily="34" charset="-120"/>
-              </a:rPr>
-              <a:t>Proposed Approach</a:t>
+                  <a:srgbClr val="FFFFFF"/>
+                </a:solidFill>
+                <a:latin typeface="Calibri" pitchFamily="34" charset="0"/>
+                <a:ea typeface="Calibri" pitchFamily="34" charset="-122"/>
+                <a:cs typeface="Calibri" pitchFamily="34" charset="-120"/>
+              </a:rPr>
+              <a:t>Nightlife</a:t>
             </a:r>
             <a:endParaRPr lang="en-US" sz="1200" dirty="0"/>
           </a:p>
@@ -1499,14 +1730,34 @@
       </p:sp>
       <p:sp>
         <p:nvSpPr>
-          <p:cNvPr id="8" name="Text 6"/>
-          <p:cNvSpPr/>
-          <p:nvPr/>
-        </p:nvSpPr>
-        <p:spPr>
-          <a:xfrm>
-            <a:off x="6309360" y="3017520"/>
-            <a:ext cx="2286000" cy="548640"/>
+          <p:cNvPr id="16" name="Shape 14"/>
+          <p:cNvSpPr/>
+          <p:nvPr/>
+        </p:nvSpPr>
+        <p:spPr>
+          <a:xfrm>
+            <a:off x="5943600" y="3035808"/>
+            <a:ext cx="109728" cy="109728"/>
+          </a:xfrm>
+          <a:prstGeom prst="ellipse">
+            <a:avLst/>
+          </a:prstGeom>
+          <a:solidFill>
+            <a:srgbClr val="D4A853"/>
+          </a:solidFill>
+          <a:ln/>
+        </p:spPr>
+      </p:sp>
+      <p:sp>
+        <p:nvSpPr>
+          <p:cNvPr id="17" name="Text 15"/>
+          <p:cNvSpPr/>
+          <p:nvPr/>
+        </p:nvSpPr>
+        <p:spPr>
+          <a:xfrm>
+            <a:off x="6217920" y="2962656"/>
+            <a:ext cx="2286000" cy="274320"/>
           </a:xfrm>
           <a:prstGeom prst="rect">
             <a:avLst/>
@@ -1519,36 +1770,53 @@
           <a:lstStyle/>
           <a:p>
             <a:pPr algn="l" indent="0" marL="0">
-              <a:lnSpc>
-                <a:spcPct val="130000"/>
-              </a:lnSpc>
-              <a:buNone/>
-            </a:pPr>
-            <a:r>
-              <a:rPr lang="en-US" sz="1000" dirty="0">
-                <a:solidFill>
-                  <a:srgbClr val="F5F6FA"/>
-                </a:solidFill>
-                <a:latin typeface="Calibri" pitchFamily="34" charset="0"/>
-                <a:ea typeface="Calibri" pitchFamily="34" charset="-122"/>
-                <a:cs typeface="Calibri" pitchFamily="34" charset="-120"/>
-              </a:rPr>
-              <a:t>Create a separate, professionally designed website with a broader focus on:</a:t>
-            </a:r>
-            <a:endParaRPr lang="en-US" sz="1000" dirty="0"/>
-          </a:p>
-        </p:txBody>
-      </p:sp>
-      <p:sp>
-        <p:nvSpPr>
-          <p:cNvPr id="9" name="Text 7"/>
-          <p:cNvSpPr/>
-          <p:nvPr/>
-        </p:nvSpPr>
-        <p:spPr>
-          <a:xfrm>
-            <a:off x="6309360" y="3611880"/>
-            <a:ext cx="2286000" cy="1005840"/>
+              <a:buNone/>
+            </a:pPr>
+            <a:r>
+              <a:rPr lang="en-US" sz="1200" b="1" dirty="0">
+                <a:solidFill>
+                  <a:srgbClr val="FFFFFF"/>
+                </a:solidFill>
+                <a:latin typeface="Calibri" pitchFamily="34" charset="0"/>
+                <a:ea typeface="Calibri" pitchFamily="34" charset="-122"/>
+                <a:cs typeface="Calibri" pitchFamily="34" charset="-120"/>
+              </a:rPr>
+              <a:t>Hospitality</a:t>
+            </a:r>
+            <a:endParaRPr lang="en-US" sz="1200" dirty="0"/>
+          </a:p>
+        </p:txBody>
+      </p:sp>
+      <p:sp>
+        <p:nvSpPr>
+          <p:cNvPr id="18" name="Shape 16"/>
+          <p:cNvSpPr/>
+          <p:nvPr/>
+        </p:nvSpPr>
+        <p:spPr>
+          <a:xfrm>
+            <a:off x="5943600" y="3419856"/>
+            <a:ext cx="109728" cy="109728"/>
+          </a:xfrm>
+          <a:prstGeom prst="ellipse">
+            <a:avLst/>
+          </a:prstGeom>
+          <a:solidFill>
+            <a:srgbClr val="D4A853"/>
+          </a:solidFill>
+          <a:ln/>
+        </p:spPr>
+      </p:sp>
+      <p:sp>
+        <p:nvSpPr>
+          <p:cNvPr id="19" name="Text 17"/>
+          <p:cNvSpPr/>
+          <p:nvPr/>
+        </p:nvSpPr>
+        <p:spPr>
+          <a:xfrm>
+            <a:off x="6217920" y="3346704"/>
+            <a:ext cx="2286000" cy="274320"/>
           </a:xfrm>
           <a:prstGeom prst="rect">
             <a:avLst/>
@@ -1561,142 +1829,118 @@
           <a:lstStyle/>
           <a:p>
             <a:pPr algn="l" indent="0" marL="0">
-              <a:lnSpc>
-                <a:spcPct val="150000"/>
-              </a:lnSpc>
-              <a:buNone/>
-            </a:pPr>
-            <a:r>
-              <a:rPr lang="en-US" sz="1100" b="1" dirty="0">
-                <a:solidFill>
-                  <a:srgbClr val="C4A35A"/>
-                </a:solidFill>
-                <a:latin typeface="Calibri" pitchFamily="34" charset="0"/>
-                <a:ea typeface="Calibri" pitchFamily="34" charset="-122"/>
-                <a:cs typeface="Calibri" pitchFamily="34" charset="-120"/>
-              </a:rPr>
-              <a:t>Entertainment</a:t>
-            </a:r>
-            <a:endParaRPr lang="en-US" sz="1100" dirty="0"/>
-          </a:p>
+              <a:buNone/>
+            </a:pPr>
+            <a:r>
+              <a:rPr lang="en-US" sz="1200" b="1" dirty="0">
+                <a:solidFill>
+                  <a:srgbClr val="FFFFFF"/>
+                </a:solidFill>
+                <a:latin typeface="Calibri" pitchFamily="34" charset="0"/>
+                <a:ea typeface="Calibri" pitchFamily="34" charset="-122"/>
+                <a:cs typeface="Calibri" pitchFamily="34" charset="-120"/>
+              </a:rPr>
+              <a:t>Recreation</a:t>
+            </a:r>
+            <a:endParaRPr lang="en-US" sz="1200" dirty="0"/>
+          </a:p>
+        </p:txBody>
+      </p:sp>
+      <p:sp>
+        <p:nvSpPr>
+          <p:cNvPr id="20" name="Shape 18"/>
+          <p:cNvSpPr/>
+          <p:nvPr/>
+        </p:nvSpPr>
+        <p:spPr>
+          <a:xfrm>
+            <a:off x="5943600" y="3803904"/>
+            <a:ext cx="109728" cy="109728"/>
+          </a:xfrm>
+          <a:prstGeom prst="ellipse">
+            <a:avLst/>
+          </a:prstGeom>
+          <a:solidFill>
+            <a:srgbClr val="D4A853"/>
+          </a:solidFill>
+          <a:ln/>
+        </p:spPr>
+      </p:sp>
+      <p:sp>
+        <p:nvSpPr>
+          <p:cNvPr id="21" name="Text 19"/>
+          <p:cNvSpPr/>
+          <p:nvPr/>
+        </p:nvSpPr>
+        <p:spPr>
+          <a:xfrm>
+            <a:off x="6217920" y="3730752"/>
+            <a:ext cx="2286000" cy="274320"/>
+          </a:xfrm>
+          <a:prstGeom prst="rect">
+            <a:avLst/>
+          </a:prstGeom>
+          <a:noFill/>
+          <a:ln/>
+        </p:spPr>
+        <p:txBody>
+          <a:bodyPr wrap="square" lIns="0" tIns="0" rIns="0" bIns="0" rtlCol="0" anchor="ctr"/>
+          <a:lstStyle/>
           <a:p>
             <a:pPr algn="l" indent="0" marL="0">
-              <a:lnSpc>
-                <a:spcPct val="150000"/>
-              </a:lnSpc>
-              <a:buNone/>
-            </a:pPr>
-            <a:r>
-              <a:rPr lang="en-US" sz="1100" b="1" dirty="0">
-                <a:solidFill>
-                  <a:srgbClr val="C4A35A"/>
-                </a:solidFill>
-                <a:latin typeface="Calibri" pitchFamily="34" charset="0"/>
-                <a:ea typeface="Calibri" pitchFamily="34" charset="-122"/>
-                <a:cs typeface="Calibri" pitchFamily="34" charset="-120"/>
-              </a:rPr>
-              <a:t>Nightlife</a:t>
-            </a:r>
-            <a:endParaRPr lang="en-US" sz="1100" dirty="0"/>
-          </a:p>
+              <a:buNone/>
+            </a:pPr>
+            <a:r>
+              <a:rPr lang="en-US" sz="1200" b="1" dirty="0">
+                <a:solidFill>
+                  <a:srgbClr val="FFFFFF"/>
+                </a:solidFill>
+                <a:latin typeface="Calibri" pitchFamily="34" charset="0"/>
+                <a:ea typeface="Calibri" pitchFamily="34" charset="-122"/>
+                <a:cs typeface="Calibri" pitchFamily="34" charset="-120"/>
+              </a:rPr>
+              <a:t>Events</a:t>
+            </a:r>
+            <a:endParaRPr lang="en-US" sz="1200" dirty="0"/>
+          </a:p>
+        </p:txBody>
+      </p:sp>
+      <p:sp>
+        <p:nvSpPr>
+          <p:cNvPr id="22" name="Text 20"/>
+          <p:cNvSpPr/>
+          <p:nvPr/>
+        </p:nvSpPr>
+        <p:spPr>
+          <a:xfrm>
+            <a:off x="548640" y="4709160"/>
+            <a:ext cx="8046720" cy="274320"/>
+          </a:xfrm>
+          <a:prstGeom prst="rect">
+            <a:avLst/>
+          </a:prstGeom>
+          <a:noFill/>
+          <a:ln/>
+        </p:spPr>
+        <p:txBody>
+          <a:bodyPr wrap="square" lIns="0" tIns="0" rIns="0" bIns="0" rtlCol="0" anchor="ctr"/>
+          <a:lstStyle/>
           <a:p>
             <a:pPr algn="l" indent="0" marL="0">
-              <a:lnSpc>
-                <a:spcPct val="150000"/>
-              </a:lnSpc>
-              <a:buNone/>
-            </a:pPr>
-            <a:r>
-              <a:rPr lang="en-US" sz="1100" b="1" dirty="0">
-                <a:solidFill>
-                  <a:srgbClr val="C4A35A"/>
-                </a:solidFill>
-                <a:latin typeface="Calibri" pitchFamily="34" charset="0"/>
-                <a:ea typeface="Calibri" pitchFamily="34" charset="-122"/>
-                <a:cs typeface="Calibri" pitchFamily="34" charset="-120"/>
-              </a:rPr>
-              <a:t>Hospitality</a:t>
-            </a:r>
-            <a:endParaRPr lang="en-US" sz="1100" dirty="0"/>
-          </a:p>
-          <a:p>
-            <a:pPr algn="l" indent="0" marL="0">
-              <a:lnSpc>
-                <a:spcPct val="150000"/>
-              </a:lnSpc>
-              <a:buNone/>
-            </a:pPr>
-            <a:r>
-              <a:rPr lang="en-US" sz="1100" b="1" dirty="0">
-                <a:solidFill>
-                  <a:srgbClr val="C4A35A"/>
-                </a:solidFill>
-                <a:latin typeface="Calibri" pitchFamily="34" charset="0"/>
-                <a:ea typeface="Calibri" pitchFamily="34" charset="-122"/>
-                <a:cs typeface="Calibri" pitchFamily="34" charset="-120"/>
-              </a:rPr>
-              <a:t>Recreation</a:t>
-            </a:r>
-            <a:endParaRPr lang="en-US" sz="1100" dirty="0"/>
-          </a:p>
-          <a:p>
-            <a:pPr algn="l" indent="0" marL="0">
-              <a:lnSpc>
-                <a:spcPct val="150000"/>
-              </a:lnSpc>
-              <a:buNone/>
-            </a:pPr>
-            <a:r>
-              <a:rPr lang="en-US" sz="1100" b="1" dirty="0">
-                <a:solidFill>
-                  <a:srgbClr val="C4A35A"/>
-                </a:solidFill>
-                <a:latin typeface="Calibri" pitchFamily="34" charset="0"/>
-                <a:ea typeface="Calibri" pitchFamily="34" charset="-122"/>
-                <a:cs typeface="Calibri" pitchFamily="34" charset="-120"/>
-              </a:rPr>
-              <a:t>Events</a:t>
-            </a:r>
-            <a:endParaRPr lang="en-US" sz="1100" dirty="0"/>
-          </a:p>
-        </p:txBody>
-      </p:sp>
-      <p:sp>
-        <p:nvSpPr>
-          <p:cNvPr id="10" name="Text 8"/>
-          <p:cNvSpPr/>
-          <p:nvPr/>
-        </p:nvSpPr>
-        <p:spPr>
-          <a:xfrm>
-            <a:off x="457200" y="4572000"/>
-            <a:ext cx="8229600" cy="365760"/>
-          </a:xfrm>
-          <a:prstGeom prst="rect">
-            <a:avLst/>
-          </a:prstGeom>
-          <a:noFill/>
-          <a:ln/>
-        </p:spPr>
-        <p:txBody>
-          <a:bodyPr wrap="square" lIns="0" tIns="0" rIns="0" bIns="0" rtlCol="0" anchor="ctr"/>
-          <a:lstStyle/>
-          <a:p>
-            <a:pPr algn="l" indent="0" marL="0">
-              <a:buNone/>
-            </a:pPr>
-            <a:r>
-              <a:rPr lang="en-US" sz="800" i="1" dirty="0">
-                <a:solidFill>
-                  <a:srgbClr val="6B7280"/>
-                </a:solidFill>
-                <a:latin typeface="Calibri" pitchFamily="34" charset="0"/>
-                <a:ea typeface="Calibri" pitchFamily="34" charset="-122"/>
-                <a:cs typeface="Calibri" pitchFamily="34" charset="-120"/>
-              </a:rPr>
-              <a:t>Note: Website development cannot guarantee payment gateway approval. Final approval depends on the bank/payment gateway's KYC, merchant category, business activity, compliance and risk policies.</a:t>
-            </a:r>
-            <a:endParaRPr lang="en-US" sz="800" dirty="0"/>
+              <a:buNone/>
+            </a:pPr>
+            <a:r>
+              <a:rPr lang="en-US" sz="750" i="1" dirty="0">
+                <a:solidFill>
+                  <a:srgbClr val="4B5563"/>
+                </a:solidFill>
+                <a:latin typeface="Calibri" pitchFamily="34" charset="0"/>
+                <a:ea typeface="Calibri" pitchFamily="34" charset="-122"/>
+                <a:cs typeface="Calibri" pitchFamily="34" charset="-120"/>
+              </a:rPr>
+              <a:t>Note: Website development cannot guarantee payment gateway approval. Final approval depends on the bank/payment gateway’s KYC, compliance and risk policies.</a:t>
+            </a:r>
+            <a:endParaRPr lang="en-US" sz="750" dirty="0"/>
           </a:p>
         </p:txBody>
       </p:sp>
@@ -1714,7 +1958,7 @@
     <p:bg>
       <p:bgPr>
         <a:solidFill>
-          <a:srgbClr val="FFFFFF"/>
+          <a:srgbClr val="F8FAFC"/>
         </a:solidFill>
       </p:bgPr>
     </p:bg>
@@ -1734,14 +1978,165 @@
       </p:grpSpPr>
       <p:sp>
         <p:nvSpPr>
-          <p:cNvPr id="2" name="Text 0"/>
+          <p:cNvPr id="2" name="Shape 0"/>
           <p:cNvSpPr/>
           <p:nvPr/>
         </p:nvSpPr>
         <p:spPr>
           <a:xfrm>
             <a:off x="457200" y="365760"/>
-            <a:ext cx="8229600" cy="320040"/>
+            <a:ext cx="2194560" cy="274320"/>
+          </a:xfrm>
+          <a:prstGeom prst="roundRect">
+            <a:avLst>
+              <a:gd name="adj" fmla="val 50000"/>
+            </a:avLst>
+          </a:prstGeom>
+          <a:solidFill>
+            <a:srgbClr val="0A0E1A"/>
+          </a:solidFill>
+          <a:ln/>
+        </p:spPr>
+      </p:sp>
+      <p:sp>
+        <p:nvSpPr>
+          <p:cNvPr id="3" name="Text 1"/>
+          <p:cNvSpPr/>
+          <p:nvPr/>
+        </p:nvSpPr>
+        <p:spPr>
+          <a:xfrm>
+            <a:off x="457200" y="365760"/>
+            <a:ext cx="2194560" cy="274320"/>
+          </a:xfrm>
+          <a:prstGeom prst="rect">
+            <a:avLst/>
+          </a:prstGeom>
+          <a:noFill/>
+          <a:ln/>
+        </p:spPr>
+        <p:txBody>
+          <a:bodyPr wrap="square" lIns="0" tIns="0" rIns="0" bIns="0" rtlCol="0" anchor="ctr"/>
+          <a:lstStyle/>
+          <a:p>
+            <a:pPr algn="ctr" indent="0" marL="0">
+              <a:buNone/>
+            </a:pPr>
+            <a:r>
+              <a:rPr lang="en-US" sz="750" b="1" spc="120" kern="0" dirty="0">
+                <a:solidFill>
+                  <a:srgbClr val="FFFFFF"/>
+                </a:solidFill>
+                <a:latin typeface="Calibri" pitchFamily="34" charset="0"/>
+                <a:ea typeface="Calibri" pitchFamily="34" charset="-122"/>
+                <a:cs typeface="Calibri" pitchFamily="34" charset="-120"/>
+              </a:rPr>
+              <a:t>TWO POSSIBLE SOLUTIONS</a:t>
+            </a:r>
+            <a:endParaRPr lang="en-US" sz="750" dirty="0"/>
+          </a:p>
+        </p:txBody>
+      </p:sp>
+      <p:sp>
+        <p:nvSpPr>
+          <p:cNvPr id="4" name="Shape 2"/>
+          <p:cNvSpPr/>
+          <p:nvPr/>
+        </p:nvSpPr>
+        <p:spPr>
+          <a:xfrm>
+            <a:off x="457200" y="868680"/>
+            <a:ext cx="4023360" cy="4023360"/>
+          </a:xfrm>
+          <a:prstGeom prst="roundRect">
+            <a:avLst>
+              <a:gd name="adj" fmla="val 2727"/>
+            </a:avLst>
+          </a:prstGeom>
+          <a:solidFill>
+            <a:srgbClr val="FFFFFF"/>
+          </a:solidFill>
+          <a:ln/>
+          <a:effectLst>
+            <a:outerShdw sx="100000" sy="100000" kx="0" ky="0" algn="bl" rotWithShape="0" blurRad="101600" dist="25400" dir="16200000">
+              <a:srgbClr val="000000">
+                <a:alpha val="8000"/>
+              </a:srgbClr>
+            </a:outerShdw>
+          </a:effectLst>
+        </p:spPr>
+      </p:sp>
+      <p:sp>
+        <p:nvSpPr>
+          <p:cNvPr id="5" name="Shape 3"/>
+          <p:cNvSpPr/>
+          <p:nvPr/>
+        </p:nvSpPr>
+        <p:spPr>
+          <a:xfrm>
+            <a:off x="731520" y="1097280"/>
+            <a:ext cx="1005840" cy="256032"/>
+          </a:xfrm>
+          <a:prstGeom prst="roundRect">
+            <a:avLst>
+              <a:gd name="adj" fmla="val 50000"/>
+            </a:avLst>
+          </a:prstGeom>
+          <a:solidFill>
+            <a:srgbClr val="3B82F6"/>
+          </a:solidFill>
+          <a:ln/>
+        </p:spPr>
+      </p:sp>
+      <p:sp>
+        <p:nvSpPr>
+          <p:cNvPr id="6" name="Text 4"/>
+          <p:cNvSpPr/>
+          <p:nvPr/>
+        </p:nvSpPr>
+        <p:spPr>
+          <a:xfrm>
+            <a:off x="731520" y="1097280"/>
+            <a:ext cx="1005840" cy="256032"/>
+          </a:xfrm>
+          <a:prstGeom prst="rect">
+            <a:avLst/>
+          </a:prstGeom>
+          <a:noFill/>
+          <a:ln/>
+        </p:spPr>
+        <p:txBody>
+          <a:bodyPr wrap="square" lIns="0" tIns="0" rIns="0" bIns="0" rtlCol="0" anchor="ctr"/>
+          <a:lstStyle/>
+          <a:p>
+            <a:pPr algn="ctr" indent="0" marL="0">
+              <a:buNone/>
+            </a:pPr>
+            <a:r>
+              <a:rPr lang="en-US" sz="750" b="1" dirty="0">
+                <a:solidFill>
+                  <a:srgbClr val="FFFFFF"/>
+                </a:solidFill>
+                <a:latin typeface="Calibri" pitchFamily="34" charset="0"/>
+                <a:ea typeface="Calibri" pitchFamily="34" charset="-122"/>
+                <a:cs typeface="Calibri" pitchFamily="34" charset="-120"/>
+              </a:rPr>
+              <a:t>OPTION 1</a:t>
+            </a:r>
+            <a:endParaRPr lang="en-US" sz="750" dirty="0"/>
+          </a:p>
+        </p:txBody>
+      </p:sp>
+      <p:sp>
+        <p:nvSpPr>
+          <p:cNvPr id="7" name="Text 5"/>
+          <p:cNvSpPr/>
+          <p:nvPr/>
+        </p:nvSpPr>
+        <p:spPr>
+          <a:xfrm>
+            <a:off x="731520" y="1508760"/>
+            <a:ext cx="3474720" cy="411480"/>
           </a:xfrm>
           <a:prstGeom prst="rect">
             <a:avLst/>
@@ -1757,87 +2152,9 @@
               <a:buNone/>
             </a:pPr>
             <a:r>
-              <a:rPr lang="en-US" sz="1000" b="1" spc="200" kern="0" dirty="0">
-                <a:solidFill>
-                  <a:srgbClr val="C4A35A"/>
-                </a:solidFill>
-                <a:latin typeface="Calibri" pitchFamily="34" charset="0"/>
-                <a:ea typeface="Calibri" pitchFamily="34" charset="-122"/>
-                <a:cs typeface="Calibri" pitchFamily="34" charset="-120"/>
-              </a:rPr>
-              <a:t>TWO POSSIBLE SOLUTIONS</a:t>
-            </a:r>
-            <a:endParaRPr lang="en-US" sz="1000" dirty="0"/>
-          </a:p>
-        </p:txBody>
-      </p:sp>
-      <p:sp>
-        <p:nvSpPr>
-          <p:cNvPr id="3" name="Text 1"/>
-          <p:cNvSpPr/>
-          <p:nvPr/>
-        </p:nvSpPr>
-        <p:spPr>
-          <a:xfrm>
-            <a:off x="457200" y="777240"/>
-            <a:ext cx="3931920" cy="320040"/>
-          </a:xfrm>
-          <a:prstGeom prst="rect">
-            <a:avLst/>
-          </a:prstGeom>
-          <a:noFill/>
-          <a:ln/>
-        </p:spPr>
-        <p:txBody>
-          <a:bodyPr wrap="square" lIns="0" tIns="0" rIns="0" bIns="0" rtlCol="0" anchor="ctr"/>
-          <a:lstStyle/>
-          <a:p>
-            <a:pPr algn="l" indent="0" marL="0">
-              <a:buNone/>
-            </a:pPr>
-            <a:r>
-              <a:rPr lang="en-US" sz="1000" b="1" dirty="0">
-                <a:solidFill>
-                  <a:srgbClr val="2563EB"/>
-                </a:solidFill>
-                <a:latin typeface="Calibri" pitchFamily="34" charset="0"/>
-                <a:ea typeface="Calibri" pitchFamily="34" charset="-122"/>
-                <a:cs typeface="Calibri" pitchFamily="34" charset="-120"/>
-              </a:rPr>
-              <a:t>OPTION 1</a:t>
-            </a:r>
-            <a:endParaRPr lang="en-US" sz="1000" dirty="0"/>
-          </a:p>
-        </p:txBody>
-      </p:sp>
-      <p:sp>
-        <p:nvSpPr>
-          <p:cNvPr id="4" name="Text 2"/>
-          <p:cNvSpPr/>
-          <p:nvPr/>
-        </p:nvSpPr>
-        <p:spPr>
-          <a:xfrm>
-            <a:off x="457200" y="1051560"/>
-            <a:ext cx="3931920" cy="457200"/>
-          </a:xfrm>
-          <a:prstGeom prst="rect">
-            <a:avLst/>
-          </a:prstGeom>
-          <a:noFill/>
-          <a:ln/>
-        </p:spPr>
-        <p:txBody>
-          <a:bodyPr wrap="square" lIns="0" tIns="0" rIns="0" bIns="0" rtlCol="0" anchor="ctr"/>
-          <a:lstStyle/>
-          <a:p>
-            <a:pPr algn="l" indent="0" marL="0">
-              <a:buNone/>
-            </a:pPr>
-            <a:r>
-              <a:rPr lang="en-US" sz="2400" b="1" dirty="0">
-                <a:solidFill>
-                  <a:srgbClr val="0F1B3D"/>
+              <a:rPr lang="en-US" sz="2200" b="1" dirty="0">
+                <a:solidFill>
+                  <a:srgbClr val="111827"/>
                 </a:solidFill>
                 <a:latin typeface="Cambria" pitchFamily="34" charset="0"/>
                 <a:ea typeface="Cambria" pitchFamily="34" charset="-122"/>
@@ -1845,20 +2162,20 @@
               </a:rPr>
               <a:t>CP Goa</a:t>
             </a:r>
-            <a:endParaRPr lang="en-US" sz="2400" dirty="0"/>
-          </a:p>
-        </p:txBody>
-      </p:sp>
-      <p:sp>
-        <p:nvSpPr>
-          <p:cNvPr id="5" name="Text 3"/>
-          <p:cNvSpPr/>
-          <p:nvPr/>
-        </p:nvSpPr>
-        <p:spPr>
-          <a:xfrm>
-            <a:off x="457200" y="1463040"/>
-            <a:ext cx="3931920" cy="320040"/>
+            <a:endParaRPr lang="en-US" sz="2200" dirty="0"/>
+          </a:p>
+        </p:txBody>
+      </p:sp>
+      <p:sp>
+        <p:nvSpPr>
+          <p:cNvPr id="8" name="Text 6"/>
+          <p:cNvSpPr/>
+          <p:nvPr/>
+        </p:nvSpPr>
+        <p:spPr>
+          <a:xfrm>
+            <a:off x="731520" y="1874520"/>
+            <a:ext cx="3474720" cy="274320"/>
           </a:xfrm>
           <a:prstGeom prst="rect">
             <a:avLst/>
@@ -1874,7 +2191,7 @@
               <a:buNone/>
             </a:pPr>
             <a:r>
-              <a:rPr lang="en-US" sz="1200" i="1" dirty="0">
+              <a:rPr lang="en-US" sz="1000" dirty="0">
                 <a:solidFill>
                   <a:srgbClr val="6B7280"/>
                 </a:solidFill>
@@ -1884,20 +2201,60 @@
               </a:rPr>
               <a:t>Entertainment &amp; Nightlife Website</a:t>
             </a:r>
-            <a:endParaRPr lang="en-US" sz="1200" dirty="0"/>
-          </a:p>
-        </p:txBody>
-      </p:sp>
-      <p:sp>
-        <p:nvSpPr>
-          <p:cNvPr id="6" name="Text 4"/>
-          <p:cNvSpPr/>
-          <p:nvPr/>
-        </p:nvSpPr>
-        <p:spPr>
-          <a:xfrm>
-            <a:off x="457200" y="1874520"/>
-            <a:ext cx="3931920" cy="502920"/>
+            <a:endParaRPr lang="en-US" sz="1000" dirty="0"/>
+          </a:p>
+        </p:txBody>
+      </p:sp>
+      <p:sp>
+        <p:nvSpPr>
+          <p:cNvPr id="9" name="Shape 7"/>
+          <p:cNvSpPr/>
+          <p:nvPr/>
+        </p:nvSpPr>
+        <p:spPr>
+          <a:xfrm>
+            <a:off x="731520" y="2240280"/>
+            <a:ext cx="3474720" cy="13716"/>
+          </a:xfrm>
+          <a:prstGeom prst="rect">
+            <a:avLst/>
+          </a:prstGeom>
+          <a:solidFill>
+            <a:srgbClr val="E5E7EB"/>
+          </a:solidFill>
+          <a:ln/>
+        </p:spPr>
+      </p:sp>
+      <p:sp>
+        <p:nvSpPr>
+          <p:cNvPr id="10" name="Shape 8"/>
+          <p:cNvSpPr/>
+          <p:nvPr/>
+        </p:nvSpPr>
+        <p:spPr>
+          <a:xfrm>
+            <a:off x="731520" y="2468880"/>
+            <a:ext cx="82296" cy="82296"/>
+          </a:xfrm>
+          <a:prstGeom prst="ellipse">
+            <a:avLst/>
+          </a:prstGeom>
+          <a:solidFill>
+            <a:srgbClr val="3B82F6"/>
+          </a:solidFill>
+          <a:ln/>
+        </p:spPr>
+      </p:sp>
+      <p:sp>
+        <p:nvSpPr>
+          <p:cNvPr id="11" name="Text 9"/>
+          <p:cNvSpPr/>
+          <p:nvPr/>
+        </p:nvSpPr>
+        <p:spPr>
+          <a:xfrm>
+            <a:off x="960120" y="2377440"/>
+            <a:ext cx="3200400" cy="256032"/>
           </a:xfrm>
           <a:prstGeom prst="rect">
             <a:avLst/>
@@ -1910,36 +2267,53 @@
           <a:lstStyle/>
           <a:p>
             <a:pPr algn="l" indent="0" marL="0">
-              <a:lnSpc>
-                <a:spcPct val="130000"/>
-              </a:lnSpc>
-              <a:buNone/>
-            </a:pPr>
-            <a:r>
-              <a:rPr lang="en-US" sz="1100" dirty="0">
-                <a:solidFill>
-                  <a:srgbClr val="1A1A2E"/>
-                </a:solidFill>
-                <a:latin typeface="Calibri" pitchFamily="34" charset="0"/>
-                <a:ea typeface="Calibri" pitchFamily="34" charset="-122"/>
-                <a:cs typeface="Calibri" pitchFamily="34" charset="-120"/>
-              </a:rPr>
-              <a:t>Create a dedicated sub-domain website positioned around CP Goa rather than making the website primarily casino-focused.</a:t>
-            </a:r>
-            <a:endParaRPr lang="en-US" sz="1100" dirty="0"/>
-          </a:p>
-        </p:txBody>
-      </p:sp>
-      <p:sp>
-        <p:nvSpPr>
-          <p:cNvPr id="7" name="Text 5"/>
-          <p:cNvSpPr/>
-          <p:nvPr/>
-        </p:nvSpPr>
-        <p:spPr>
-          <a:xfrm>
-            <a:off x="457200" y="2468880"/>
-            <a:ext cx="3931920" cy="274320"/>
+              <a:buNone/>
+            </a:pPr>
+            <a:r>
+              <a:rPr lang="en-US" sz="1000" dirty="0">
+                <a:solidFill>
+                  <a:srgbClr val="374151"/>
+                </a:solidFill>
+                <a:latin typeface="Calibri" pitchFamily="34" charset="0"/>
+                <a:ea typeface="Calibri" pitchFamily="34" charset="-122"/>
+                <a:cs typeface="Calibri" pitchFamily="34" charset="-120"/>
+              </a:rPr>
+              <a:t>Entertainment &amp; nightlife</a:t>
+            </a:r>
+            <a:endParaRPr lang="en-US" sz="1000" dirty="0"/>
+          </a:p>
+        </p:txBody>
+      </p:sp>
+      <p:sp>
+        <p:nvSpPr>
+          <p:cNvPr id="12" name="Shape 10"/>
+          <p:cNvSpPr/>
+          <p:nvPr/>
+        </p:nvSpPr>
+        <p:spPr>
+          <a:xfrm>
+            <a:off x="731520" y="2798064"/>
+            <a:ext cx="82296" cy="82296"/>
+          </a:xfrm>
+          <a:prstGeom prst="ellipse">
+            <a:avLst/>
+          </a:prstGeom>
+          <a:solidFill>
+            <a:srgbClr val="3B82F6"/>
+          </a:solidFill>
+          <a:ln/>
+        </p:spPr>
+      </p:sp>
+      <p:sp>
+        <p:nvSpPr>
+          <p:cNvPr id="13" name="Text 11"/>
+          <p:cNvSpPr/>
+          <p:nvPr/>
+        </p:nvSpPr>
+        <p:spPr>
+          <a:xfrm>
+            <a:off x="960120" y="2706624"/>
+            <a:ext cx="3200400" cy="256032"/>
           </a:xfrm>
           <a:prstGeom prst="rect">
             <a:avLst/>
@@ -1955,15 +2329,15 @@
               <a:buNone/>
             </a:pPr>
             <a:r>
-              <a:rPr lang="en-US" sz="1000" b="1" dirty="0">
-                <a:solidFill>
-                  <a:srgbClr val="0F1B3D"/>
-                </a:solidFill>
-                <a:latin typeface="Calibri" pitchFamily="34" charset="0"/>
-                <a:ea typeface="Calibri" pitchFamily="34" charset="-122"/>
-                <a:cs typeface="Calibri" pitchFamily="34" charset="-120"/>
-              </a:rPr>
-              <a:t>Website Focus</a:t>
+              <a:rPr lang="en-US" sz="1000" dirty="0">
+                <a:solidFill>
+                  <a:srgbClr val="374151"/>
+                </a:solidFill>
+                <a:latin typeface="Calibri" pitchFamily="34" charset="0"/>
+                <a:ea typeface="Calibri" pitchFamily="34" charset="-122"/>
+                <a:cs typeface="Calibri" pitchFamily="34" charset="-120"/>
+              </a:rPr>
+              <a:t>Live events &amp; performances</a:t>
             </a:r>
             <a:endParaRPr lang="en-US" sz="1000" dirty="0"/>
           </a:p>
@@ -1971,184 +2345,213 @@
       </p:sp>
       <p:sp>
         <p:nvSpPr>
-          <p:cNvPr id="8" name="Text 6"/>
-          <p:cNvSpPr/>
-          <p:nvPr/>
-        </p:nvSpPr>
-        <p:spPr>
-          <a:xfrm>
-            <a:off x="457200" y="2743200"/>
-            <a:ext cx="3931920" cy="1280160"/>
-          </a:xfrm>
-          <a:prstGeom prst="rect">
-            <a:avLst/>
-          </a:prstGeom>
-          <a:noFill/>
-          <a:ln/>
-        </p:spPr>
-        <p:txBody>
-          <a:bodyPr wrap="square" lIns="0" tIns="0" rIns="0" bIns="0" rtlCol="0" anchor="ctr"/>
-          <a:lstStyle/>
-          <a:p>
-            <a:pPr algn="l" marL="342900" indent="-342900">
-              <a:spcAft>
-                <a:spcPts val="300"/>
-              </a:spcAft>
-              <a:buSzPct val="100000"/>
-              <a:buChar char="•"/>
+          <p:cNvPr id="14" name="Shape 12"/>
+          <p:cNvSpPr/>
+          <p:nvPr/>
+        </p:nvSpPr>
+        <p:spPr>
+          <a:xfrm>
+            <a:off x="731520" y="3127248"/>
+            <a:ext cx="82296" cy="82296"/>
+          </a:xfrm>
+          <a:prstGeom prst="ellipse">
+            <a:avLst/>
+          </a:prstGeom>
+          <a:solidFill>
+            <a:srgbClr val="3B82F6"/>
+          </a:solidFill>
+          <a:ln/>
+        </p:spPr>
+      </p:sp>
+      <p:sp>
+        <p:nvSpPr>
+          <p:cNvPr id="15" name="Text 13"/>
+          <p:cNvSpPr/>
+          <p:nvPr/>
+        </p:nvSpPr>
+        <p:spPr>
+          <a:xfrm>
+            <a:off x="960120" y="3035808"/>
+            <a:ext cx="3200400" cy="256032"/>
+          </a:xfrm>
+          <a:prstGeom prst="rect">
+            <a:avLst/>
+          </a:prstGeom>
+          <a:noFill/>
+          <a:ln/>
+        </p:spPr>
+        <p:txBody>
+          <a:bodyPr wrap="square" lIns="0" tIns="0" rIns="0" bIns="0" rtlCol="0" anchor="ctr"/>
+          <a:lstStyle/>
+          <a:p>
+            <a:pPr algn="l" indent="0" marL="0">
+              <a:buNone/>
             </a:pPr>
             <a:r>
               <a:rPr lang="en-US" sz="1000" dirty="0">
                 <a:solidFill>
-                  <a:srgbClr val="1A1A2E"/>
-                </a:solidFill>
-                <a:latin typeface="Calibri" pitchFamily="34" charset="0"/>
-                <a:ea typeface="Calibri" pitchFamily="34" charset="-122"/>
-                <a:cs typeface="Calibri" pitchFamily="34" charset="-120"/>
-              </a:rPr>
-              <a:t>Entertainment</a:t>
+                  <a:srgbClr val="374151"/>
+                </a:solidFill>
+                <a:latin typeface="Calibri" pitchFamily="34" charset="0"/>
+                <a:ea typeface="Calibri" pitchFamily="34" charset="-122"/>
+                <a:cs typeface="Calibri" pitchFamily="34" charset="-120"/>
+              </a:rPr>
+              <a:t>Dining experiences</a:t>
             </a:r>
             <a:endParaRPr lang="en-US" sz="1000" dirty="0"/>
           </a:p>
-          <a:p>
-            <a:pPr algn="l" marL="342900" indent="-342900">
-              <a:spcAft>
-                <a:spcPts val="300"/>
-              </a:spcAft>
-              <a:buSzPct val="100000"/>
-              <a:buChar char="•"/>
+        </p:txBody>
+      </p:sp>
+      <p:sp>
+        <p:nvSpPr>
+          <p:cNvPr id="16" name="Shape 14"/>
+          <p:cNvSpPr/>
+          <p:nvPr/>
+        </p:nvSpPr>
+        <p:spPr>
+          <a:xfrm>
+            <a:off x="731520" y="3456432"/>
+            <a:ext cx="82296" cy="82296"/>
+          </a:xfrm>
+          <a:prstGeom prst="ellipse">
+            <a:avLst/>
+          </a:prstGeom>
+          <a:solidFill>
+            <a:srgbClr val="3B82F6"/>
+          </a:solidFill>
+          <a:ln/>
+        </p:spPr>
+      </p:sp>
+      <p:sp>
+        <p:nvSpPr>
+          <p:cNvPr id="17" name="Text 15"/>
+          <p:cNvSpPr/>
+          <p:nvPr/>
+        </p:nvSpPr>
+        <p:spPr>
+          <a:xfrm>
+            <a:off x="960120" y="3364992"/>
+            <a:ext cx="3200400" cy="256032"/>
+          </a:xfrm>
+          <a:prstGeom prst="rect">
+            <a:avLst/>
+          </a:prstGeom>
+          <a:noFill/>
+          <a:ln/>
+        </p:spPr>
+        <p:txBody>
+          <a:bodyPr wrap="square" lIns="0" tIns="0" rIns="0" bIns="0" rtlCol="0" anchor="ctr"/>
+          <a:lstStyle/>
+          <a:p>
+            <a:pPr algn="l" indent="0" marL="0">
+              <a:buNone/>
             </a:pPr>
             <a:r>
               <a:rPr lang="en-US" sz="1000" dirty="0">
                 <a:solidFill>
-                  <a:srgbClr val="1A1A2E"/>
-                </a:solidFill>
-                <a:latin typeface="Calibri" pitchFamily="34" charset="0"/>
-                <a:ea typeface="Calibri" pitchFamily="34" charset="-122"/>
-                <a:cs typeface="Calibri" pitchFamily="34" charset="-120"/>
-              </a:rPr>
-              <a:t>Nightlife</a:t>
+                  <a:srgbClr val="374151"/>
+                </a:solidFill>
+                <a:latin typeface="Calibri" pitchFamily="34" charset="0"/>
+                <a:ea typeface="Calibri" pitchFamily="34" charset="-122"/>
+                <a:cs typeface="Calibri" pitchFamily="34" charset="-120"/>
+              </a:rPr>
+              <a:t>Premium ambience</a:t>
             </a:r>
             <a:endParaRPr lang="en-US" sz="1000" dirty="0"/>
           </a:p>
-          <a:p>
-            <a:pPr algn="l" marL="342900" indent="-342900">
-              <a:spcAft>
-                <a:spcPts val="300"/>
-              </a:spcAft>
-              <a:buSzPct val="100000"/>
-              <a:buChar char="•"/>
+        </p:txBody>
+      </p:sp>
+      <p:sp>
+        <p:nvSpPr>
+          <p:cNvPr id="18" name="Shape 16"/>
+          <p:cNvSpPr/>
+          <p:nvPr/>
+        </p:nvSpPr>
+        <p:spPr>
+          <a:xfrm>
+            <a:off x="731520" y="3785616"/>
+            <a:ext cx="82296" cy="82296"/>
+          </a:xfrm>
+          <a:prstGeom prst="ellipse">
+            <a:avLst/>
+          </a:prstGeom>
+          <a:solidFill>
+            <a:srgbClr val="3B82F6"/>
+          </a:solidFill>
+          <a:ln/>
+        </p:spPr>
+      </p:sp>
+      <p:sp>
+        <p:nvSpPr>
+          <p:cNvPr id="19" name="Text 17"/>
+          <p:cNvSpPr/>
+          <p:nvPr/>
+        </p:nvSpPr>
+        <p:spPr>
+          <a:xfrm>
+            <a:off x="960120" y="3694176"/>
+            <a:ext cx="3200400" cy="256032"/>
+          </a:xfrm>
+          <a:prstGeom prst="rect">
+            <a:avLst/>
+          </a:prstGeom>
+          <a:noFill/>
+          <a:ln/>
+        </p:spPr>
+        <p:txBody>
+          <a:bodyPr wrap="square" lIns="0" tIns="0" rIns="0" bIns="0" rtlCol="0" anchor="ctr"/>
+          <a:lstStyle/>
+          <a:p>
+            <a:pPr algn="l" indent="0" marL="0">
+              <a:buNone/>
             </a:pPr>
             <a:r>
               <a:rPr lang="en-US" sz="1000" dirty="0">
                 <a:solidFill>
-                  <a:srgbClr val="1A1A2E"/>
-                </a:solidFill>
-                <a:latin typeface="Calibri" pitchFamily="34" charset="0"/>
-                <a:ea typeface="Calibri" pitchFamily="34" charset="-122"/>
-                <a:cs typeface="Calibri" pitchFamily="34" charset="-120"/>
-              </a:rPr>
-              <a:t>Live events &amp; performances</a:t>
+                  <a:srgbClr val="374151"/>
+                </a:solidFill>
+                <a:latin typeface="Calibri" pitchFamily="34" charset="0"/>
+                <a:ea typeface="Calibri" pitchFamily="34" charset="-122"/>
+                <a:cs typeface="Calibri" pitchFamily="34" charset="-120"/>
+              </a:rPr>
+              <a:t>Guest experiences &amp; enquiries</a:t>
             </a:r>
             <a:endParaRPr lang="en-US" sz="1000" dirty="0"/>
           </a:p>
-          <a:p>
-            <a:pPr algn="l" marL="342900" indent="-342900">
-              <a:spcAft>
-                <a:spcPts val="300"/>
-              </a:spcAft>
-              <a:buSzPct val="100000"/>
-              <a:buChar char="•"/>
-            </a:pPr>
-            <a:r>
-              <a:rPr lang="en-US" sz="1000" dirty="0">
-                <a:solidFill>
-                  <a:srgbClr val="1A1A2E"/>
-                </a:solidFill>
-                <a:latin typeface="Calibri" pitchFamily="34" charset="0"/>
-                <a:ea typeface="Calibri" pitchFamily="34" charset="-122"/>
-                <a:cs typeface="Calibri" pitchFamily="34" charset="-120"/>
-              </a:rPr>
-              <a:t>Dining experiences</a:t>
-            </a:r>
-            <a:endParaRPr lang="en-US" sz="1000" dirty="0"/>
-          </a:p>
-          <a:p>
-            <a:pPr algn="l" marL="342900" indent="-342900">
-              <a:spcAft>
-                <a:spcPts val="300"/>
-              </a:spcAft>
-              <a:buSzPct val="100000"/>
-              <a:buChar char="•"/>
-            </a:pPr>
-            <a:r>
-              <a:rPr lang="en-US" sz="1000" dirty="0">
-                <a:solidFill>
-                  <a:srgbClr val="1A1A2E"/>
-                </a:solidFill>
-                <a:latin typeface="Calibri" pitchFamily="34" charset="0"/>
-                <a:ea typeface="Calibri" pitchFamily="34" charset="-122"/>
-                <a:cs typeface="Calibri" pitchFamily="34" charset="-120"/>
-              </a:rPr>
-              <a:t>Premium ambience &amp; recreation</a:t>
-            </a:r>
-            <a:endParaRPr lang="en-US" sz="1000" dirty="0"/>
-          </a:p>
-          <a:p>
-            <a:pPr algn="l" marL="342900" indent="-342900">
-              <a:spcAft>
-                <a:spcPts val="300"/>
-              </a:spcAft>
-              <a:buSzPct val="100000"/>
-              <a:buChar char="•"/>
-            </a:pPr>
-            <a:r>
-              <a:rPr lang="en-US" sz="1000" dirty="0">
-                <a:solidFill>
-                  <a:srgbClr val="1A1A2E"/>
-                </a:solidFill>
-                <a:latin typeface="Calibri" pitchFamily="34" charset="0"/>
-                <a:ea typeface="Calibri" pitchFamily="34" charset="-122"/>
-                <a:cs typeface="Calibri" pitchFamily="34" charset="-120"/>
-              </a:rPr>
-              <a:t>Guest experiences &amp; event enquiries</a:t>
-            </a:r>
-            <a:endParaRPr lang="en-US" sz="1000" dirty="0"/>
-          </a:p>
-        </p:txBody>
-      </p:sp>
-      <p:sp>
-        <p:nvSpPr>
-          <p:cNvPr id="9" name="Shape 7"/>
-          <p:cNvSpPr/>
-          <p:nvPr/>
-        </p:nvSpPr>
-        <p:spPr>
-          <a:xfrm>
-            <a:off x="457200" y="4069080"/>
-            <a:ext cx="3931920" cy="640080"/>
+        </p:txBody>
+      </p:sp>
+      <p:sp>
+        <p:nvSpPr>
+          <p:cNvPr id="20" name="Shape 18"/>
+          <p:cNvSpPr/>
+          <p:nvPr/>
+        </p:nvSpPr>
+        <p:spPr>
+          <a:xfrm>
+            <a:off x="731520" y="4160520"/>
+            <a:ext cx="3474720" cy="548640"/>
           </a:xfrm>
           <a:prstGeom prst="roundRect">
             <a:avLst>
-              <a:gd name="adj" fmla="val 7143"/>
+              <a:gd name="adj" fmla="val 10000"/>
             </a:avLst>
           </a:prstGeom>
           <a:solidFill>
-            <a:srgbClr val="F8F9FC"/>
-          </a:solidFill>
-          <a:ln/>
-        </p:spPr>
-      </p:sp>
-      <p:sp>
-        <p:nvSpPr>
-          <p:cNvPr id="10" name="Text 8"/>
-          <p:cNvSpPr/>
-          <p:nvPr/>
-        </p:nvSpPr>
-        <p:spPr>
-          <a:xfrm>
-            <a:off x="640080" y="4114800"/>
-            <a:ext cx="3657600" cy="548640"/>
+            <a:srgbClr val="F9FAFB"/>
+          </a:solidFill>
+          <a:ln/>
+        </p:spPr>
+      </p:sp>
+      <p:sp>
+        <p:nvSpPr>
+          <p:cNvPr id="21" name="Text 19"/>
+          <p:cNvSpPr/>
+          <p:nvPr/>
+        </p:nvSpPr>
+        <p:spPr>
+          <a:xfrm>
+            <a:off x="868680" y="4187952"/>
+            <a:ext cx="3200400" cy="182880"/>
           </a:xfrm>
           <a:prstGeom prst="rect">
             <a:avLst/>
@@ -2161,56 +2564,33 @@
           <a:lstStyle/>
           <a:p>
             <a:pPr algn="l" indent="0" marL="0">
-              <a:lnSpc>
-                <a:spcPct val="130000"/>
-              </a:lnSpc>
-              <a:buNone/>
-            </a:pPr>
-            <a:r>
-              <a:rPr lang="en-US" sz="900" dirty="0">
-                <a:solidFill>
-                  <a:srgbClr val="0F1B3D"/>
-                </a:solidFill>
-                <a:latin typeface="Calibri" pitchFamily="34" charset="0"/>
-                <a:ea typeface="Calibri" pitchFamily="34" charset="-122"/>
-                <a:cs typeface="Calibri" pitchFamily="34" charset="-120"/>
-              </a:rPr>
-              <a:t>Proposed 5 Pages:  Home  |  About CP Goa  |  Entertainment &amp; Nightlife  |  Experiences &amp; Events  |  Contact</a:t>
-            </a:r>
-            <a:endParaRPr lang="en-US" sz="900" dirty="0"/>
-          </a:p>
-        </p:txBody>
-      </p:sp>
-      <p:sp>
-        <p:nvSpPr>
-          <p:cNvPr id="11" name="Shape 9"/>
-          <p:cNvSpPr/>
-          <p:nvPr/>
-        </p:nvSpPr>
-        <p:spPr>
-          <a:xfrm>
-            <a:off x="4526280" y="777240"/>
-            <a:ext cx="18288" cy="4023360"/>
-          </a:xfrm>
-          <a:prstGeom prst="rect">
-            <a:avLst/>
-          </a:prstGeom>
-          <a:solidFill>
-            <a:srgbClr val="E5E7EB"/>
-          </a:solidFill>
-          <a:ln/>
-        </p:spPr>
-      </p:sp>
-      <p:sp>
-        <p:nvSpPr>
-          <p:cNvPr id="12" name="Text 10"/>
-          <p:cNvSpPr/>
-          <p:nvPr/>
-        </p:nvSpPr>
-        <p:spPr>
-          <a:xfrm>
-            <a:off x="4754880" y="777240"/>
-            <a:ext cx="3931920" cy="320040"/>
+              <a:buNone/>
+            </a:pPr>
+            <a:r>
+              <a:rPr lang="en-US" sz="750" b="1" dirty="0">
+                <a:solidFill>
+                  <a:srgbClr val="6B7280"/>
+                </a:solidFill>
+                <a:latin typeface="Calibri" pitchFamily="34" charset="0"/>
+                <a:ea typeface="Calibri" pitchFamily="34" charset="-122"/>
+                <a:cs typeface="Calibri" pitchFamily="34" charset="-120"/>
+              </a:rPr>
+              <a:t>5 Pages</a:t>
+            </a:r>
+            <a:endParaRPr lang="en-US" sz="750" dirty="0"/>
+          </a:p>
+        </p:txBody>
+      </p:sp>
+      <p:sp>
+        <p:nvSpPr>
+          <p:cNvPr id="22" name="Text 20"/>
+          <p:cNvSpPr/>
+          <p:nvPr/>
+        </p:nvSpPr>
+        <p:spPr>
+          <a:xfrm>
+            <a:off x="868680" y="4389120"/>
+            <a:ext cx="3200400" cy="274320"/>
           </a:xfrm>
           <a:prstGeom prst="rect">
             <a:avLst/>
@@ -2226,30 +2606,125 @@
               <a:buNone/>
             </a:pPr>
             <a:r>
-              <a:rPr lang="en-US" sz="1000" b="1" dirty="0">
-                <a:solidFill>
-                  <a:srgbClr val="059669"/>
-                </a:solidFill>
-                <a:latin typeface="Calibri" pitchFamily="34" charset="0"/>
-                <a:ea typeface="Calibri" pitchFamily="34" charset="-122"/>
-                <a:cs typeface="Calibri" pitchFamily="34" charset="-120"/>
-              </a:rPr>
-              <a:t>OPTION 2</a:t>
-            </a:r>
-            <a:endParaRPr lang="en-US" sz="1000" dirty="0"/>
-          </a:p>
-        </p:txBody>
-      </p:sp>
-      <p:sp>
-        <p:nvSpPr>
-          <p:cNvPr id="13" name="Text 11"/>
-          <p:cNvSpPr/>
-          <p:nvPr/>
-        </p:nvSpPr>
-        <p:spPr>
-          <a:xfrm>
-            <a:off x="4754880" y="1051560"/>
-            <a:ext cx="3931920" cy="594360"/>
+              <a:rPr lang="en-US" sz="850" dirty="0">
+                <a:solidFill>
+                  <a:srgbClr val="374151"/>
+                </a:solidFill>
+                <a:latin typeface="Calibri" pitchFamily="34" charset="0"/>
+                <a:ea typeface="Calibri" pitchFamily="34" charset="-122"/>
+                <a:cs typeface="Calibri" pitchFamily="34" charset="-120"/>
+              </a:rPr>
+              <a:t>Home • About CP Goa • Entertainment • Experiences • Contact</a:t>
+            </a:r>
+            <a:endParaRPr lang="en-US" sz="850" dirty="0"/>
+          </a:p>
+        </p:txBody>
+      </p:sp>
+      <p:sp>
+        <p:nvSpPr>
+          <p:cNvPr id="23" name="Shape 21"/>
+          <p:cNvSpPr/>
+          <p:nvPr/>
+        </p:nvSpPr>
+        <p:spPr>
+          <a:xfrm>
+            <a:off x="4663440" y="868680"/>
+            <a:ext cx="4023360" cy="4023360"/>
+          </a:xfrm>
+          <a:prstGeom prst="roundRect">
+            <a:avLst>
+              <a:gd name="adj" fmla="val 2727"/>
+            </a:avLst>
+          </a:prstGeom>
+          <a:solidFill>
+            <a:srgbClr val="FFFFFF"/>
+          </a:solidFill>
+          <a:ln w="19050">
+            <a:solidFill>
+              <a:srgbClr val="10B981"/>
+            </a:solidFill>
+            <a:prstDash val="solid"/>
+          </a:ln>
+          <a:effectLst>
+            <a:outerShdw sx="100000" sy="100000" kx="0" ky="0" algn="bl" rotWithShape="0" blurRad="127000" dist="38100" dir="16200000">
+              <a:srgbClr val="000000">
+                <a:alpha val="10000"/>
+              </a:srgbClr>
+            </a:outerShdw>
+          </a:effectLst>
+        </p:spPr>
+      </p:sp>
+      <p:sp>
+        <p:nvSpPr>
+          <p:cNvPr id="24" name="Shape 22"/>
+          <p:cNvSpPr/>
+          <p:nvPr/>
+        </p:nvSpPr>
+        <p:spPr>
+          <a:xfrm>
+            <a:off x="4937760" y="1097280"/>
+            <a:ext cx="1554480" cy="256032"/>
+          </a:xfrm>
+          <a:prstGeom prst="roundRect">
+            <a:avLst>
+              <a:gd name="adj" fmla="val 50000"/>
+            </a:avLst>
+          </a:prstGeom>
+          <a:solidFill>
+            <a:srgbClr val="10B981"/>
+          </a:solidFill>
+          <a:ln/>
+        </p:spPr>
+      </p:sp>
+      <p:sp>
+        <p:nvSpPr>
+          <p:cNvPr id="25" name="Text 23"/>
+          <p:cNvSpPr/>
+          <p:nvPr/>
+        </p:nvSpPr>
+        <p:spPr>
+          <a:xfrm>
+            <a:off x="4937760" y="1097280"/>
+            <a:ext cx="1554480" cy="256032"/>
+          </a:xfrm>
+          <a:prstGeom prst="rect">
+            <a:avLst/>
+          </a:prstGeom>
+          <a:noFill/>
+          <a:ln/>
+        </p:spPr>
+        <p:txBody>
+          <a:bodyPr wrap="square" lIns="0" tIns="0" rIns="0" bIns="0" rtlCol="0" anchor="ctr"/>
+          <a:lstStyle/>
+          <a:p>
+            <a:pPr algn="ctr" indent="0" marL="0">
+              <a:buNone/>
+            </a:pPr>
+            <a:r>
+              <a:rPr lang="en-US" sz="650" b="1" dirty="0">
+                <a:solidFill>
+                  <a:srgbClr val="FFFFFF"/>
+                </a:solidFill>
+                <a:latin typeface="Calibri" pitchFamily="34" charset="0"/>
+                <a:ea typeface="Calibri" pitchFamily="34" charset="-122"/>
+                <a:cs typeface="Calibri" pitchFamily="34" charset="-120"/>
+              </a:rPr>
+              <a:t>OPTION 2 — RECOMMENDED</a:t>
+            </a:r>
+            <a:endParaRPr lang="en-US" sz="650" dirty="0"/>
+          </a:p>
+        </p:txBody>
+      </p:sp>
+      <p:sp>
+        <p:nvSpPr>
+          <p:cNvPr id="26" name="Text 24"/>
+          <p:cNvSpPr/>
+          <p:nvPr/>
+        </p:nvSpPr>
+        <p:spPr>
+          <a:xfrm>
+            <a:off x="4937760" y="1463040"/>
+            <a:ext cx="3474720" cy="640080"/>
           </a:xfrm>
           <a:prstGeom prst="rect">
             <a:avLst/>
@@ -2268,17 +2743,17 @@
               <a:buNone/>
             </a:pPr>
             <a:r>
-              <a:rPr lang="en-US" sz="2000" b="1" dirty="0">
-                <a:solidFill>
-                  <a:srgbClr val="0F1B3D"/>
+              <a:rPr lang="en-US" sz="1800" b="1" dirty="0">
+                <a:solidFill>
+                  <a:srgbClr val="111827"/>
                 </a:solidFill>
                 <a:latin typeface="Cambria" pitchFamily="34" charset="0"/>
                 <a:ea typeface="Cambria" pitchFamily="34" charset="-122"/>
                 <a:cs typeface="Cambria" pitchFamily="34" charset="-120"/>
               </a:rPr>
-              <a:t>Goa Coastal Resorts &amp;</a:t>
-            </a:r>
-            <a:endParaRPr lang="en-US" sz="2000" dirty="0"/>
+              <a:t>Goa Coastal Resorts</a:t>
+            </a:r>
+            <a:endParaRPr lang="en-US" sz="1800" dirty="0"/>
           </a:p>
           <a:p>
             <a:pPr algn="l" indent="0" marL="0">
@@ -2288,30 +2763,30 @@
               <a:buNone/>
             </a:pPr>
             <a:r>
-              <a:rPr lang="en-US" sz="2000" b="1" dirty="0">
-                <a:solidFill>
-                  <a:srgbClr val="0F1B3D"/>
+              <a:rPr lang="en-US" sz="1800" b="1" dirty="0">
+                <a:solidFill>
+                  <a:srgbClr val="111827"/>
                 </a:solidFill>
                 <a:latin typeface="Cambria" pitchFamily="34" charset="0"/>
                 <a:ea typeface="Cambria" pitchFamily="34" charset="-122"/>
                 <a:cs typeface="Cambria" pitchFamily="34" charset="-120"/>
               </a:rPr>
-              <a:t>Recreation Pvt. Ltd.</a:t>
-            </a:r>
-            <a:endParaRPr lang="en-US" sz="2000" dirty="0"/>
-          </a:p>
-        </p:txBody>
-      </p:sp>
-      <p:sp>
-        <p:nvSpPr>
-          <p:cNvPr id="14" name="Text 12"/>
-          <p:cNvSpPr/>
-          <p:nvPr/>
-        </p:nvSpPr>
-        <p:spPr>
-          <a:xfrm>
-            <a:off x="4754880" y="1645920"/>
-            <a:ext cx="3931920" cy="274320"/>
+              <a:t>&amp; Recreation Pvt. Ltd.</a:t>
+            </a:r>
+            <a:endParaRPr lang="en-US" sz="1800" dirty="0"/>
+          </a:p>
+        </p:txBody>
+      </p:sp>
+      <p:sp>
+        <p:nvSpPr>
+          <p:cNvPr id="27" name="Text 25"/>
+          <p:cNvSpPr/>
+          <p:nvPr/>
+        </p:nvSpPr>
+        <p:spPr>
+          <a:xfrm>
+            <a:off x="4937760" y="2103120"/>
+            <a:ext cx="3474720" cy="274320"/>
           </a:xfrm>
           <a:prstGeom prst="rect">
             <a:avLst/>
@@ -2327,7 +2802,7 @@
               <a:buNone/>
             </a:pPr>
             <a:r>
-              <a:rPr lang="en-US" sz="1200" i="1" dirty="0">
+              <a:rPr lang="en-US" sz="1000" dirty="0">
                 <a:solidFill>
                   <a:srgbClr val="6B7280"/>
                 </a:solidFill>
@@ -2337,20 +2812,60 @@
               </a:rPr>
               <a:t>Corporate Business Website</a:t>
             </a:r>
-            <a:endParaRPr lang="en-US" sz="1200" dirty="0"/>
-          </a:p>
-        </p:txBody>
-      </p:sp>
-      <p:sp>
-        <p:nvSpPr>
-          <p:cNvPr id="15" name="Text 13"/>
-          <p:cNvSpPr/>
-          <p:nvPr/>
-        </p:nvSpPr>
-        <p:spPr>
-          <a:xfrm>
-            <a:off x="4754880" y="1965960"/>
-            <a:ext cx="3931920" cy="548640"/>
+            <a:endParaRPr lang="en-US" sz="1000" dirty="0"/>
+          </a:p>
+        </p:txBody>
+      </p:sp>
+      <p:sp>
+        <p:nvSpPr>
+          <p:cNvPr id="28" name="Shape 26"/>
+          <p:cNvSpPr/>
+          <p:nvPr/>
+        </p:nvSpPr>
+        <p:spPr>
+          <a:xfrm>
+            <a:off x="4937760" y="2423160"/>
+            <a:ext cx="3474720" cy="13716"/>
+          </a:xfrm>
+          <a:prstGeom prst="rect">
+            <a:avLst/>
+          </a:prstGeom>
+          <a:solidFill>
+            <a:srgbClr val="E5E7EB"/>
+          </a:solidFill>
+          <a:ln/>
+        </p:spPr>
+      </p:sp>
+      <p:sp>
+        <p:nvSpPr>
+          <p:cNvPr id="29" name="Shape 27"/>
+          <p:cNvSpPr/>
+          <p:nvPr/>
+        </p:nvSpPr>
+        <p:spPr>
+          <a:xfrm>
+            <a:off x="4937760" y="2651760"/>
+            <a:ext cx="82296" cy="82296"/>
+          </a:xfrm>
+          <a:prstGeom prst="ellipse">
+            <a:avLst/>
+          </a:prstGeom>
+          <a:solidFill>
+            <a:srgbClr val="10B981"/>
+          </a:solidFill>
+          <a:ln/>
+        </p:spPr>
+      </p:sp>
+      <p:sp>
+        <p:nvSpPr>
+          <p:cNvPr id="30" name="Text 28"/>
+          <p:cNvSpPr/>
+          <p:nvPr/>
+        </p:nvSpPr>
+        <p:spPr>
+          <a:xfrm>
+            <a:off x="5166360" y="2560320"/>
+            <a:ext cx="3200400" cy="256032"/>
           </a:xfrm>
           <a:prstGeom prst="rect">
             <a:avLst/>
@@ -2363,36 +2878,53 @@
           <a:lstStyle/>
           <a:p>
             <a:pPr algn="l" indent="0" marL="0">
-              <a:lnSpc>
-                <a:spcPct val="130000"/>
-              </a:lnSpc>
-              <a:buNone/>
-            </a:pPr>
-            <a:r>
-              <a:rPr lang="en-US" sz="1100" dirty="0">
-                <a:solidFill>
-                  <a:srgbClr val="1A1A2E"/>
-                </a:solidFill>
-                <a:latin typeface="Calibri" pitchFamily="34" charset="0"/>
-                <a:ea typeface="Calibri" pitchFamily="34" charset="-122"/>
-                <a:cs typeface="Calibri" pitchFamily="34" charset="-120"/>
-              </a:rPr>
-              <a:t>Develop a new 5-page website under the domain of the company associated with Casino Pride. The website presents the company's broader business identity.</a:t>
-            </a:r>
-            <a:endParaRPr lang="en-US" sz="1100" dirty="0"/>
-          </a:p>
-        </p:txBody>
-      </p:sp>
-      <p:sp>
-        <p:nvSpPr>
-          <p:cNvPr id="16" name="Text 14"/>
-          <p:cNvSpPr/>
-          <p:nvPr/>
-        </p:nvSpPr>
-        <p:spPr>
-          <a:xfrm>
-            <a:off x="4754880" y="2560320"/>
-            <a:ext cx="3931920" cy="274320"/>
+              <a:buNone/>
+            </a:pPr>
+            <a:r>
+              <a:rPr lang="en-US" sz="1000" dirty="0">
+                <a:solidFill>
+                  <a:srgbClr val="374151"/>
+                </a:solidFill>
+                <a:latin typeface="Calibri" pitchFamily="34" charset="0"/>
+                <a:ea typeface="Calibri" pitchFamily="34" charset="-122"/>
+                <a:cs typeface="Calibri" pitchFamily="34" charset="-120"/>
+              </a:rPr>
+              <a:t>Hospitality &amp; recreation</a:t>
+            </a:r>
+            <a:endParaRPr lang="en-US" sz="1000" dirty="0"/>
+          </a:p>
+        </p:txBody>
+      </p:sp>
+      <p:sp>
+        <p:nvSpPr>
+          <p:cNvPr id="31" name="Shape 29"/>
+          <p:cNvSpPr/>
+          <p:nvPr/>
+        </p:nvSpPr>
+        <p:spPr>
+          <a:xfrm>
+            <a:off x="4937760" y="2980944"/>
+            <a:ext cx="82296" cy="82296"/>
+          </a:xfrm>
+          <a:prstGeom prst="ellipse">
+            <a:avLst/>
+          </a:prstGeom>
+          <a:solidFill>
+            <a:srgbClr val="10B981"/>
+          </a:solidFill>
+          <a:ln/>
+        </p:spPr>
+      </p:sp>
+      <p:sp>
+        <p:nvSpPr>
+          <p:cNvPr id="32" name="Text 30"/>
+          <p:cNvSpPr/>
+          <p:nvPr/>
+        </p:nvSpPr>
+        <p:spPr>
+          <a:xfrm>
+            <a:off x="5166360" y="2889504"/>
+            <a:ext cx="3200400" cy="256032"/>
           </a:xfrm>
           <a:prstGeom prst="rect">
             <a:avLst/>
@@ -2408,15 +2940,15 @@
               <a:buNone/>
             </a:pPr>
             <a:r>
-              <a:rPr lang="en-US" sz="1000" b="1" dirty="0">
-                <a:solidFill>
-                  <a:srgbClr val="0F1B3D"/>
-                </a:solidFill>
-                <a:latin typeface="Calibri" pitchFamily="34" charset="0"/>
-                <a:ea typeface="Calibri" pitchFamily="34" charset="-122"/>
-                <a:cs typeface="Calibri" pitchFamily="34" charset="-120"/>
-              </a:rPr>
-              <a:t>Website Focus</a:t>
+              <a:rPr lang="en-US" sz="1000" dirty="0">
+                <a:solidFill>
+                  <a:srgbClr val="374151"/>
+                </a:solidFill>
+                <a:latin typeface="Calibri" pitchFamily="34" charset="0"/>
+                <a:ea typeface="Calibri" pitchFamily="34" charset="-122"/>
+                <a:cs typeface="Calibri" pitchFamily="34" charset="-120"/>
+              </a:rPr>
+              <a:t>Entertainment &amp; events</a:t>
             </a:r>
             <a:endParaRPr lang="en-US" sz="1000" dirty="0"/>
           </a:p>
@@ -2424,205 +2956,191 @@
       </p:sp>
       <p:sp>
         <p:nvSpPr>
-          <p:cNvPr id="17" name="Text 15"/>
-          <p:cNvSpPr/>
-          <p:nvPr/>
-        </p:nvSpPr>
-        <p:spPr>
-          <a:xfrm>
-            <a:off x="4754880" y="2834640"/>
-            <a:ext cx="3931920" cy="1097280"/>
-          </a:xfrm>
-          <a:prstGeom prst="rect">
-            <a:avLst/>
-          </a:prstGeom>
-          <a:noFill/>
-          <a:ln/>
-        </p:spPr>
-        <p:txBody>
-          <a:bodyPr wrap="square" lIns="0" tIns="0" rIns="0" bIns="0" rtlCol="0" anchor="ctr"/>
-          <a:lstStyle/>
-          <a:p>
-            <a:pPr algn="l" marL="342900" indent="-342900">
-              <a:spcAft>
-                <a:spcPts val="300"/>
-              </a:spcAft>
-              <a:buSzPct val="100000"/>
-              <a:buChar char="•"/>
+          <p:cNvPr id="33" name="Shape 31"/>
+          <p:cNvSpPr/>
+          <p:nvPr/>
+        </p:nvSpPr>
+        <p:spPr>
+          <a:xfrm>
+            <a:off x="4937760" y="3310128"/>
+            <a:ext cx="82296" cy="82296"/>
+          </a:xfrm>
+          <a:prstGeom prst="ellipse">
+            <a:avLst/>
+          </a:prstGeom>
+          <a:solidFill>
+            <a:srgbClr val="10B981"/>
+          </a:solidFill>
+          <a:ln/>
+        </p:spPr>
+      </p:sp>
+      <p:sp>
+        <p:nvSpPr>
+          <p:cNvPr id="34" name="Text 32"/>
+          <p:cNvSpPr/>
+          <p:nvPr/>
+        </p:nvSpPr>
+        <p:spPr>
+          <a:xfrm>
+            <a:off x="5166360" y="3218688"/>
+            <a:ext cx="3200400" cy="256032"/>
+          </a:xfrm>
+          <a:prstGeom prst="rect">
+            <a:avLst/>
+          </a:prstGeom>
+          <a:noFill/>
+          <a:ln/>
+        </p:spPr>
+        <p:txBody>
+          <a:bodyPr wrap="square" lIns="0" tIns="0" rIns="0" bIns="0" rtlCol="0" anchor="ctr"/>
+          <a:lstStyle/>
+          <a:p>
+            <a:pPr algn="l" indent="0" marL="0">
+              <a:buNone/>
             </a:pPr>
             <a:r>
               <a:rPr lang="en-US" sz="1000" dirty="0">
                 <a:solidFill>
-                  <a:srgbClr val="1A1A2E"/>
-                </a:solidFill>
-                <a:latin typeface="Calibri" pitchFamily="34" charset="0"/>
-                <a:ea typeface="Calibri" pitchFamily="34" charset="-122"/>
-                <a:cs typeface="Calibri" pitchFamily="34" charset="-120"/>
-              </a:rPr>
-              <a:t>Hospitality</a:t>
+                  <a:srgbClr val="374151"/>
+                </a:solidFill>
+                <a:latin typeface="Calibri" pitchFamily="34" charset="0"/>
+                <a:ea typeface="Calibri" pitchFamily="34" charset="-122"/>
+                <a:cs typeface="Calibri" pitchFamily="34" charset="-120"/>
+              </a:rPr>
+              <a:t>Dining &amp; lifestyle</a:t>
             </a:r>
             <a:endParaRPr lang="en-US" sz="1000" dirty="0"/>
           </a:p>
-          <a:p>
-            <a:pPr algn="l" marL="342900" indent="-342900">
-              <a:spcAft>
-                <a:spcPts val="300"/>
-              </a:spcAft>
-              <a:buSzPct val="100000"/>
-              <a:buChar char="•"/>
+        </p:txBody>
+      </p:sp>
+      <p:sp>
+        <p:nvSpPr>
+          <p:cNvPr id="35" name="Shape 33"/>
+          <p:cNvSpPr/>
+          <p:nvPr/>
+        </p:nvSpPr>
+        <p:spPr>
+          <a:xfrm>
+            <a:off x="4937760" y="3639312"/>
+            <a:ext cx="82296" cy="82296"/>
+          </a:xfrm>
+          <a:prstGeom prst="ellipse">
+            <a:avLst/>
+          </a:prstGeom>
+          <a:solidFill>
+            <a:srgbClr val="10B981"/>
+          </a:solidFill>
+          <a:ln/>
+        </p:spPr>
+      </p:sp>
+      <p:sp>
+        <p:nvSpPr>
+          <p:cNvPr id="36" name="Text 34"/>
+          <p:cNvSpPr/>
+          <p:nvPr/>
+        </p:nvSpPr>
+        <p:spPr>
+          <a:xfrm>
+            <a:off x="5166360" y="3547872"/>
+            <a:ext cx="3200400" cy="256032"/>
+          </a:xfrm>
+          <a:prstGeom prst="rect">
+            <a:avLst/>
+          </a:prstGeom>
+          <a:noFill/>
+          <a:ln/>
+        </p:spPr>
+        <p:txBody>
+          <a:bodyPr wrap="square" lIns="0" tIns="0" rIns="0" bIns="0" rtlCol="0" anchor="ctr"/>
+          <a:lstStyle/>
+          <a:p>
+            <a:pPr algn="l" indent="0" marL="0">
+              <a:buNone/>
             </a:pPr>
             <a:r>
               <a:rPr lang="en-US" sz="1000" dirty="0">
                 <a:solidFill>
-                  <a:srgbClr val="1A1A2E"/>
-                </a:solidFill>
-                <a:latin typeface="Calibri" pitchFamily="34" charset="0"/>
-                <a:ea typeface="Calibri" pitchFamily="34" charset="-122"/>
-                <a:cs typeface="Calibri" pitchFamily="34" charset="-120"/>
-              </a:rPr>
-              <a:t>Entertainment</a:t>
+                  <a:srgbClr val="374151"/>
+                </a:solidFill>
+                <a:latin typeface="Calibri" pitchFamily="34" charset="0"/>
+                <a:ea typeface="Calibri" pitchFamily="34" charset="-122"/>
+                <a:cs typeface="Calibri" pitchFamily="34" charset="-120"/>
+              </a:rPr>
+              <a:t>Corporate identity</a:t>
             </a:r>
             <a:endParaRPr lang="en-US" sz="1000" dirty="0"/>
           </a:p>
-          <a:p>
-            <a:pPr algn="l" marL="342900" indent="-342900">
-              <a:spcAft>
-                <a:spcPts val="300"/>
-              </a:spcAft>
-              <a:buSzPct val="100000"/>
-              <a:buChar char="•"/>
+        </p:txBody>
+      </p:sp>
+      <p:sp>
+        <p:nvSpPr>
+          <p:cNvPr id="37" name="Shape 35"/>
+          <p:cNvSpPr/>
+          <p:nvPr/>
+        </p:nvSpPr>
+        <p:spPr>
+          <a:xfrm>
+            <a:off x="4937760" y="3968496"/>
+            <a:ext cx="82296" cy="82296"/>
+          </a:xfrm>
+          <a:prstGeom prst="ellipse">
+            <a:avLst/>
+          </a:prstGeom>
+          <a:solidFill>
+            <a:srgbClr val="10B981"/>
+          </a:solidFill>
+          <a:ln/>
+        </p:spPr>
+      </p:sp>
+      <p:sp>
+        <p:nvSpPr>
+          <p:cNvPr id="38" name="Text 36"/>
+          <p:cNvSpPr/>
+          <p:nvPr/>
+        </p:nvSpPr>
+        <p:spPr>
+          <a:xfrm>
+            <a:off x="5166360" y="3877056"/>
+            <a:ext cx="3200400" cy="256032"/>
+          </a:xfrm>
+          <a:prstGeom prst="rect">
+            <a:avLst/>
+          </a:prstGeom>
+          <a:noFill/>
+          <a:ln/>
+        </p:spPr>
+        <p:txBody>
+          <a:bodyPr wrap="square" lIns="0" tIns="0" rIns="0" bIns="0" rtlCol="0" anchor="ctr"/>
+          <a:lstStyle/>
+          <a:p>
+            <a:pPr algn="l" indent="0" marL="0">
+              <a:buNone/>
             </a:pPr>
             <a:r>
               <a:rPr lang="en-US" sz="1000" dirty="0">
                 <a:solidFill>
-                  <a:srgbClr val="1A1A2E"/>
-                </a:solidFill>
-                <a:latin typeface="Calibri" pitchFamily="34" charset="0"/>
-                <a:ea typeface="Calibri" pitchFamily="34" charset="-122"/>
-                <a:cs typeface="Calibri" pitchFamily="34" charset="-120"/>
-              </a:rPr>
-              <a:t>Recreation</a:t>
+                  <a:srgbClr val="374151"/>
+                </a:solidFill>
+                <a:latin typeface="Calibri" pitchFamily="34" charset="0"/>
+                <a:ea typeface="Calibri" pitchFamily="34" charset="-122"/>
+                <a:cs typeface="Calibri" pitchFamily="34" charset="-120"/>
+              </a:rPr>
+              <a:t>Multi-brand scalability</a:t>
             </a:r>
             <a:endParaRPr lang="en-US" sz="1000" dirty="0"/>
           </a:p>
-          <a:p>
-            <a:pPr algn="l" marL="342900" indent="-342900">
-              <a:spcAft>
-                <a:spcPts val="300"/>
-              </a:spcAft>
-              <a:buSzPct val="100000"/>
-              <a:buChar char="•"/>
-            </a:pPr>
-            <a:r>
-              <a:rPr lang="en-US" sz="1000" dirty="0">
-                <a:solidFill>
-                  <a:srgbClr val="1A1A2E"/>
-                </a:solidFill>
-                <a:latin typeface="Calibri" pitchFamily="34" charset="0"/>
-                <a:ea typeface="Calibri" pitchFamily="34" charset="-122"/>
-                <a:cs typeface="Calibri" pitchFamily="34" charset="-120"/>
-              </a:rPr>
-              <a:t>Dining</a:t>
-            </a:r>
-            <a:endParaRPr lang="en-US" sz="1000" dirty="0"/>
-          </a:p>
-          <a:p>
-            <a:pPr algn="l" marL="342900" indent="-342900">
-              <a:spcAft>
-                <a:spcPts val="300"/>
-              </a:spcAft>
-              <a:buSzPct val="100000"/>
-              <a:buChar char="•"/>
-            </a:pPr>
-            <a:r>
-              <a:rPr lang="en-US" sz="1000" dirty="0">
-                <a:solidFill>
-                  <a:srgbClr val="1A1A2E"/>
-                </a:solidFill>
-                <a:latin typeface="Calibri" pitchFamily="34" charset="0"/>
-                <a:ea typeface="Calibri" pitchFamily="34" charset="-122"/>
-                <a:cs typeface="Calibri" pitchFamily="34" charset="-120"/>
-              </a:rPr>
-              <a:t>Events</a:t>
-            </a:r>
-            <a:endParaRPr lang="en-US" sz="1000" dirty="0"/>
-          </a:p>
-        </p:txBody>
-      </p:sp>
-      <p:sp>
-        <p:nvSpPr>
-          <p:cNvPr id="18" name="Shape 16"/>
-          <p:cNvSpPr/>
-          <p:nvPr/>
-        </p:nvSpPr>
-        <p:spPr>
-          <a:xfrm>
-            <a:off x="4754880" y="3977640"/>
-            <a:ext cx="3931920" cy="502920"/>
-          </a:xfrm>
-          <a:prstGeom prst="roundRect">
-            <a:avLst>
-              <a:gd name="adj" fmla="val 9091"/>
-            </a:avLst>
-          </a:prstGeom>
-          <a:solidFill>
-            <a:srgbClr val="F8F9FC"/>
-          </a:solidFill>
-          <a:ln/>
-        </p:spPr>
-      </p:sp>
-      <p:sp>
-        <p:nvSpPr>
-          <p:cNvPr id="19" name="Text 17"/>
-          <p:cNvSpPr/>
-          <p:nvPr/>
-        </p:nvSpPr>
-        <p:spPr>
-          <a:xfrm>
-            <a:off x="4937760" y="4023360"/>
-            <a:ext cx="3566160" cy="457200"/>
-          </a:xfrm>
-          <a:prstGeom prst="rect">
-            <a:avLst/>
-          </a:prstGeom>
-          <a:noFill/>
-          <a:ln/>
-        </p:spPr>
-        <p:txBody>
-          <a:bodyPr wrap="square" lIns="0" tIns="0" rIns="0" bIns="0" rtlCol="0" anchor="ctr"/>
-          <a:lstStyle/>
-          <a:p>
-            <a:pPr algn="l" indent="0" marL="0">
-              <a:lnSpc>
-                <a:spcPct val="130000"/>
-              </a:lnSpc>
-              <a:buNone/>
-            </a:pPr>
-            <a:r>
-              <a:rPr lang="en-US" sz="900" dirty="0">
-                <a:solidFill>
-                  <a:srgbClr val="0F1B3D"/>
-                </a:solidFill>
-                <a:latin typeface="Calibri" pitchFamily="34" charset="0"/>
-                <a:ea typeface="Calibri" pitchFamily="34" charset="-122"/>
-                <a:cs typeface="Calibri" pitchFamily="34" charset="-120"/>
-              </a:rPr>
-              <a:t>Proposed 5 Pages:  Home  |  About the Company  |  Our Businesses  |  Brands  |  Contact</a:t>
-            </a:r>
-            <a:endParaRPr lang="en-US" sz="900" dirty="0"/>
-          </a:p>
-        </p:txBody>
-      </p:sp>
-      <p:sp>
-        <p:nvSpPr>
-          <p:cNvPr id="20" name="Shape 18"/>
-          <p:cNvSpPr/>
-          <p:nvPr/>
-        </p:nvSpPr>
-        <p:spPr>
-          <a:xfrm>
-            <a:off x="4754880" y="4526280"/>
-            <a:ext cx="3931920" cy="365760"/>
+        </p:txBody>
+      </p:sp>
+      <p:sp>
+        <p:nvSpPr>
+          <p:cNvPr id="39" name="Shape 37"/>
+          <p:cNvSpPr/>
+          <p:nvPr/>
+        </p:nvSpPr>
+        <p:spPr>
+          <a:xfrm>
+            <a:off x="4937760" y="4160520"/>
+            <a:ext cx="3474720" cy="548640"/>
           </a:xfrm>
           <a:prstGeom prst="roundRect">
             <a:avLst>
@@ -2630,21 +3148,21 @@
             </a:avLst>
           </a:prstGeom>
           <a:solidFill>
-            <a:srgbClr val="D1FAE5"/>
-          </a:solidFill>
-          <a:ln/>
-        </p:spPr>
-      </p:sp>
-      <p:sp>
-        <p:nvSpPr>
-          <p:cNvPr id="21" name="Text 19"/>
-          <p:cNvSpPr/>
-          <p:nvPr/>
-        </p:nvSpPr>
-        <p:spPr>
-          <a:xfrm>
-            <a:off x="4937760" y="4553712"/>
-            <a:ext cx="3657600" cy="320040"/>
+            <a:srgbClr val="ECFDF5"/>
+          </a:solidFill>
+          <a:ln/>
+        </p:spPr>
+      </p:sp>
+      <p:sp>
+        <p:nvSpPr>
+          <p:cNvPr id="40" name="Text 38"/>
+          <p:cNvSpPr/>
+          <p:nvPr/>
+        </p:nvSpPr>
+        <p:spPr>
+          <a:xfrm>
+            <a:off x="5074920" y="4187952"/>
+            <a:ext cx="3200400" cy="182880"/>
           </a:xfrm>
           <a:prstGeom prst="rect">
             <a:avLst/>
@@ -2660,15 +3178,54 @@
               <a:buNone/>
             </a:pPr>
             <a:r>
-              <a:rPr lang="en-US" sz="850" b="1" dirty="0">
-                <a:solidFill>
-                  <a:srgbClr val="059669"/>
-                </a:solidFill>
-                <a:latin typeface="Calibri" pitchFamily="34" charset="0"/>
-                <a:ea typeface="Calibri" pitchFamily="34" charset="-122"/>
-                <a:cs typeface="Calibri" pitchFamily="34" charset="-120"/>
-              </a:rPr>
-              <a:t>Key: Creates stronger corporate identity for current &amp; future businesses</a:t>
+              <a:rPr lang="en-US" sz="750" b="1" dirty="0">
+                <a:solidFill>
+                  <a:srgbClr val="10B981"/>
+                </a:solidFill>
+                <a:latin typeface="Calibri" pitchFamily="34" charset="0"/>
+                <a:ea typeface="Calibri" pitchFamily="34" charset="-122"/>
+                <a:cs typeface="Calibri" pitchFamily="34" charset="-120"/>
+              </a:rPr>
+              <a:t>5 Pages</a:t>
+            </a:r>
+            <a:endParaRPr lang="en-US" sz="750" dirty="0"/>
+          </a:p>
+        </p:txBody>
+      </p:sp>
+      <p:sp>
+        <p:nvSpPr>
+          <p:cNvPr id="41" name="Text 39"/>
+          <p:cNvSpPr/>
+          <p:nvPr/>
+        </p:nvSpPr>
+        <p:spPr>
+          <a:xfrm>
+            <a:off x="5074920" y="4389120"/>
+            <a:ext cx="3200400" cy="274320"/>
+          </a:xfrm>
+          <a:prstGeom prst="rect">
+            <a:avLst/>
+          </a:prstGeom>
+          <a:noFill/>
+          <a:ln/>
+        </p:spPr>
+        <p:txBody>
+          <a:bodyPr wrap="square" lIns="0" tIns="0" rIns="0" bIns="0" rtlCol="0" anchor="ctr"/>
+          <a:lstStyle/>
+          <a:p>
+            <a:pPr algn="l" indent="0" marL="0">
+              <a:buNone/>
+            </a:pPr>
+            <a:r>
+              <a:rPr lang="en-US" sz="850" dirty="0">
+                <a:solidFill>
+                  <a:srgbClr val="374151"/>
+                </a:solidFill>
+                <a:latin typeface="Calibri" pitchFamily="34" charset="0"/>
+                <a:ea typeface="Calibri" pitchFamily="34" charset="-122"/>
+                <a:cs typeface="Calibri" pitchFamily="34" charset="-120"/>
+              </a:rPr>
+              <a:t>Home • About • Businesses &amp; Experiences • Brands • Contact</a:t>
             </a:r>
             <a:endParaRPr lang="en-US" sz="850" dirty="0"/>
           </a:p>
@@ -2708,173 +3265,34 @@
       </p:grpSpPr>
       <p:sp>
         <p:nvSpPr>
-          <p:cNvPr id="2" name="Text 0"/>
-          <p:cNvSpPr/>
-          <p:nvPr/>
-        </p:nvSpPr>
-        <p:spPr>
-          <a:xfrm>
-            <a:off x="457200" y="365760"/>
-            <a:ext cx="8229600" cy="320040"/>
-          </a:xfrm>
-          <a:prstGeom prst="rect">
-            <a:avLst/>
-          </a:prstGeom>
-          <a:noFill/>
-          <a:ln/>
-        </p:spPr>
-        <p:txBody>
-          <a:bodyPr wrap="square" lIns="0" tIns="0" rIns="0" bIns="0" rtlCol="0" anchor="ctr"/>
-          <a:lstStyle/>
-          <a:p>
-            <a:pPr algn="l" indent="0" marL="0">
-              <a:buNone/>
-            </a:pPr>
-            <a:r>
-              <a:rPr lang="en-US" sz="1000" b="1" spc="200" kern="0" dirty="0">
-                <a:solidFill>
-                  <a:srgbClr val="059669"/>
-                </a:solidFill>
-                <a:latin typeface="Calibri" pitchFamily="34" charset="0"/>
-                <a:ea typeface="Calibri" pitchFamily="34" charset="-122"/>
-                <a:cs typeface="Calibri" pitchFamily="34" charset="-120"/>
-              </a:rPr>
-              <a:t>OPTION 2 — RECOMMENDED</a:t>
-            </a:r>
-            <a:endParaRPr lang="en-US" sz="1000" dirty="0"/>
-          </a:p>
-        </p:txBody>
-      </p:sp>
-      <p:sp>
-        <p:nvSpPr>
-          <p:cNvPr id="3" name="Text 1"/>
-          <p:cNvSpPr/>
-          <p:nvPr/>
-        </p:nvSpPr>
-        <p:spPr>
-          <a:xfrm>
-            <a:off x="457200" y="777240"/>
-            <a:ext cx="8229600" cy="502920"/>
-          </a:xfrm>
-          <a:prstGeom prst="rect">
-            <a:avLst/>
-          </a:prstGeom>
-          <a:noFill/>
-          <a:ln/>
-        </p:spPr>
-        <p:txBody>
-          <a:bodyPr wrap="square" lIns="0" tIns="0" rIns="0" bIns="0" rtlCol="0" anchor="ctr"/>
-          <a:lstStyle/>
-          <a:p>
-            <a:pPr algn="l" indent="0" marL="0">
-              <a:buNone/>
-            </a:pPr>
-            <a:r>
-              <a:rPr lang="en-US" sz="2600" b="1" dirty="0">
-                <a:solidFill>
-                  <a:srgbClr val="0F1B3D"/>
-                </a:solidFill>
-                <a:latin typeface="Cambria" pitchFamily="34" charset="0"/>
-                <a:ea typeface="Cambria" pitchFamily="34" charset="-122"/>
-                <a:cs typeface="Cambria" pitchFamily="34" charset="-120"/>
-              </a:rPr>
-              <a:t>Goa Coastal Resorts &amp; Recreation Pvt. Ltd.</a:t>
-            </a:r>
-            <a:endParaRPr lang="en-US" sz="2600" dirty="0"/>
-          </a:p>
-        </p:txBody>
-      </p:sp>
-      <p:sp>
-        <p:nvSpPr>
-          <p:cNvPr id="4" name="Text 2"/>
-          <p:cNvSpPr/>
-          <p:nvPr/>
-        </p:nvSpPr>
-        <p:spPr>
-          <a:xfrm>
-            <a:off x="457200" y="1280160"/>
-            <a:ext cx="8229600" cy="320040"/>
-          </a:xfrm>
-          <a:prstGeom prst="rect">
-            <a:avLst/>
-          </a:prstGeom>
-          <a:noFill/>
-          <a:ln/>
-        </p:spPr>
-        <p:txBody>
-          <a:bodyPr wrap="square" lIns="0" tIns="0" rIns="0" bIns="0" rtlCol="0" anchor="ctr"/>
-          <a:lstStyle/>
-          <a:p>
-            <a:pPr algn="l" indent="0" marL="0">
-              <a:buNone/>
-            </a:pPr>
-            <a:r>
-              <a:rPr lang="en-US" sz="1300" i="1" dirty="0">
-                <a:solidFill>
-                  <a:srgbClr val="6B7280"/>
-                </a:solidFill>
-                <a:latin typeface="Calibri" pitchFamily="34" charset="0"/>
-                <a:ea typeface="Calibri" pitchFamily="34" charset="-122"/>
-                <a:cs typeface="Calibri" pitchFamily="34" charset="-120"/>
-              </a:rPr>
-              <a:t>Corporate Business Website — Broader Business Identity</a:t>
-            </a:r>
-            <a:endParaRPr lang="en-US" sz="1300" dirty="0"/>
-          </a:p>
-        </p:txBody>
-      </p:sp>
-      <p:sp>
-        <p:nvSpPr>
-          <p:cNvPr id="5" name="Text 3"/>
-          <p:cNvSpPr/>
-          <p:nvPr/>
-        </p:nvSpPr>
-        <p:spPr>
-          <a:xfrm>
-            <a:off x="457200" y="1737360"/>
-            <a:ext cx="8229600" cy="685800"/>
-          </a:xfrm>
-          <a:prstGeom prst="rect">
-            <a:avLst/>
-          </a:prstGeom>
-          <a:noFill/>
-          <a:ln/>
-        </p:spPr>
-        <p:txBody>
-          <a:bodyPr wrap="square" lIns="0" tIns="0" rIns="0" bIns="0" rtlCol="0" anchor="ctr"/>
-          <a:lstStyle/>
-          <a:p>
-            <a:pPr algn="l" indent="0" marL="0">
-              <a:lnSpc>
-                <a:spcPct val="140000"/>
-              </a:lnSpc>
-              <a:buNone/>
-            </a:pPr>
-            <a:r>
-              <a:rPr lang="en-US" sz="1100" dirty="0">
-                <a:solidFill>
-                  <a:srgbClr val="1A1A2E"/>
-                </a:solidFill>
-                <a:latin typeface="Calibri" pitchFamily="34" charset="0"/>
-                <a:ea typeface="Calibri" pitchFamily="34" charset="-122"/>
-                <a:cs typeface="Calibri" pitchFamily="34" charset="-120"/>
-              </a:rPr>
-              <a:t>Develop a new 5-page website under the domain of Goa Coastal Resorts &amp; Recreation Pvt. Ltd., the company associated with Casino Pride. Instead of positioning the entire website around casino/gaming, the website will present the company's broader business identity and legitimate activities.</a:t>
-            </a:r>
-            <a:endParaRPr lang="en-US" sz="1100" dirty="0"/>
-          </a:p>
-        </p:txBody>
-      </p:sp>
-      <p:sp>
-        <p:nvSpPr>
-          <p:cNvPr id="6" name="Shape 4"/>
-          <p:cNvSpPr/>
-          <p:nvPr/>
-        </p:nvSpPr>
-        <p:spPr>
-          <a:xfrm>
-            <a:off x="457200" y="2560320"/>
-            <a:ext cx="1554480" cy="365760"/>
+          <p:cNvPr id="2" name="Shape 0"/>
+          <p:cNvSpPr/>
+          <p:nvPr/>
+        </p:nvSpPr>
+        <p:spPr>
+          <a:xfrm>
+            <a:off x="0" y="0"/>
+            <a:ext cx="9144000" cy="1645920"/>
+          </a:xfrm>
+          <a:prstGeom prst="rect">
+            <a:avLst/>
+          </a:prstGeom>
+          <a:solidFill>
+            <a:srgbClr val="0A0E1A"/>
+          </a:solidFill>
+          <a:ln/>
+        </p:spPr>
+      </p:sp>
+      <p:sp>
+        <p:nvSpPr>
+          <p:cNvPr id="3" name="Shape 1"/>
+          <p:cNvSpPr/>
+          <p:nvPr/>
+        </p:nvSpPr>
+        <p:spPr>
+          <a:xfrm>
+            <a:off x="457200" y="320040"/>
+            <a:ext cx="1463040" cy="237744"/>
           </a:xfrm>
           <a:prstGeom prst="roundRect">
             <a:avLst>
@@ -2882,10 +3300,127 @@
             </a:avLst>
           </a:prstGeom>
           <a:solidFill>
-            <a:srgbClr val="0F1B3D"/>
-          </a:solidFill>
-          <a:ln/>
-        </p:spPr>
+            <a:srgbClr val="10B981"/>
+          </a:solidFill>
+          <a:ln/>
+        </p:spPr>
+      </p:sp>
+      <p:sp>
+        <p:nvSpPr>
+          <p:cNvPr id="4" name="Text 2"/>
+          <p:cNvSpPr/>
+          <p:nvPr/>
+        </p:nvSpPr>
+        <p:spPr>
+          <a:xfrm>
+            <a:off x="457200" y="320040"/>
+            <a:ext cx="1463040" cy="237744"/>
+          </a:xfrm>
+          <a:prstGeom prst="rect">
+            <a:avLst/>
+          </a:prstGeom>
+          <a:noFill/>
+          <a:ln/>
+        </p:spPr>
+        <p:txBody>
+          <a:bodyPr wrap="square" lIns="0" tIns="0" rIns="0" bIns="0" rtlCol="0" anchor="ctr"/>
+          <a:lstStyle/>
+          <a:p>
+            <a:pPr algn="ctr" indent="0" marL="0">
+              <a:buNone/>
+            </a:pPr>
+            <a:r>
+              <a:rPr lang="en-US" sz="700" b="1" dirty="0">
+                <a:solidFill>
+                  <a:srgbClr val="FFFFFF"/>
+                </a:solidFill>
+                <a:latin typeface="Calibri" pitchFamily="34" charset="0"/>
+                <a:ea typeface="Calibri" pitchFamily="34" charset="-122"/>
+                <a:cs typeface="Calibri" pitchFamily="34" charset="-120"/>
+              </a:rPr>
+              <a:t>RECOMMENDED</a:t>
+            </a:r>
+            <a:endParaRPr lang="en-US" sz="700" dirty="0"/>
+          </a:p>
+        </p:txBody>
+      </p:sp>
+      <p:sp>
+        <p:nvSpPr>
+          <p:cNvPr id="5" name="Text 3"/>
+          <p:cNvSpPr/>
+          <p:nvPr/>
+        </p:nvSpPr>
+        <p:spPr>
+          <a:xfrm>
+            <a:off x="457200" y="685800"/>
+            <a:ext cx="8229600" cy="457200"/>
+          </a:xfrm>
+          <a:prstGeom prst="rect">
+            <a:avLst/>
+          </a:prstGeom>
+          <a:noFill/>
+          <a:ln/>
+        </p:spPr>
+        <p:txBody>
+          <a:bodyPr wrap="square" lIns="0" tIns="0" rIns="0" bIns="0" rtlCol="0" anchor="ctr"/>
+          <a:lstStyle/>
+          <a:p>
+            <a:pPr algn="l" indent="0" marL="0">
+              <a:buNone/>
+            </a:pPr>
+            <a:r>
+              <a:rPr lang="en-US" sz="2400" b="1" dirty="0">
+                <a:solidFill>
+                  <a:srgbClr val="FFFFFF"/>
+                </a:solidFill>
+                <a:latin typeface="Cambria" pitchFamily="34" charset="0"/>
+                <a:ea typeface="Cambria" pitchFamily="34" charset="-122"/>
+                <a:cs typeface="Cambria" pitchFamily="34" charset="-120"/>
+              </a:rPr>
+              <a:t>Goa Coastal Resorts &amp; Recreation Pvt. Ltd.</a:t>
+            </a:r>
+            <a:endParaRPr lang="en-US" sz="2400" dirty="0"/>
+          </a:p>
+        </p:txBody>
+      </p:sp>
+      <p:sp>
+        <p:nvSpPr>
+          <p:cNvPr id="6" name="Text 4"/>
+          <p:cNvSpPr/>
+          <p:nvPr/>
+        </p:nvSpPr>
+        <p:spPr>
+          <a:xfrm>
+            <a:off x="457200" y="1188720"/>
+            <a:ext cx="8229600" cy="274320"/>
+          </a:xfrm>
+          <a:prstGeom prst="rect">
+            <a:avLst/>
+          </a:prstGeom>
+          <a:noFill/>
+          <a:ln/>
+        </p:spPr>
+        <p:txBody>
+          <a:bodyPr wrap="square" lIns="0" tIns="0" rIns="0" bIns="0" rtlCol="0" anchor="ctr"/>
+          <a:lstStyle/>
+          <a:p>
+            <a:pPr algn="l" indent="0" marL="0">
+              <a:buNone/>
+            </a:pPr>
+            <a:r>
+              <a:rPr lang="en-US" sz="1100" dirty="0">
+                <a:solidFill>
+                  <a:srgbClr val="9CA3AF"/>
+                </a:solidFill>
+                <a:latin typeface="Calibri" pitchFamily="34" charset="0"/>
+                <a:ea typeface="Calibri" pitchFamily="34" charset="-122"/>
+                <a:cs typeface="Calibri" pitchFamily="34" charset="-120"/>
+              </a:rPr>
+              <a:t>Corporate Business Website — Representing the Company’s Broader Identity</a:t>
+            </a:r>
+            <a:endParaRPr lang="en-US" sz="1100" dirty="0"/>
+          </a:p>
+        </p:txBody>
       </p:sp>
       <p:sp>
         <p:nvSpPr>
@@ -2895,34 +3430,37 @@
         </p:nvSpPr>
         <p:spPr>
           <a:xfrm>
-            <a:off x="457200" y="2560320"/>
-            <a:ext cx="1554480" cy="365760"/>
-          </a:xfrm>
-          <a:prstGeom prst="rect">
-            <a:avLst/>
-          </a:prstGeom>
-          <a:noFill/>
-          <a:ln/>
-        </p:spPr>
-        <p:txBody>
-          <a:bodyPr wrap="square" lIns="0" tIns="0" rIns="0" bIns="0" rtlCol="0" anchor="ctr"/>
-          <a:lstStyle/>
-          <a:p>
-            <a:pPr algn="ctr" indent="0" marL="0">
-              <a:buNone/>
-            </a:pPr>
-            <a:r>
-              <a:rPr lang="en-US" sz="1000" b="1" dirty="0">
-                <a:solidFill>
-                  <a:srgbClr val="FFFFFF"/>
-                </a:solidFill>
-                <a:latin typeface="Calibri" pitchFamily="34" charset="0"/>
-                <a:ea typeface="Calibri" pitchFamily="34" charset="-122"/>
-                <a:cs typeface="Calibri" pitchFamily="34" charset="-120"/>
-              </a:rPr>
-              <a:t>Hospitality</a:t>
-            </a:r>
-            <a:endParaRPr lang="en-US" sz="1000" dirty="0"/>
+            <a:off x="457200" y="1920240"/>
+            <a:ext cx="8229600" cy="594360"/>
+          </a:xfrm>
+          <a:prstGeom prst="rect">
+            <a:avLst/>
+          </a:prstGeom>
+          <a:noFill/>
+          <a:ln/>
+        </p:spPr>
+        <p:txBody>
+          <a:bodyPr wrap="square" lIns="0" tIns="0" rIns="0" bIns="0" rtlCol="0" anchor="ctr"/>
+          <a:lstStyle/>
+          <a:p>
+            <a:pPr algn="l" indent="0" marL="0">
+              <a:lnSpc>
+                <a:spcPct val="150000"/>
+              </a:lnSpc>
+              <a:buNone/>
+            </a:pPr>
+            <a:r>
+              <a:rPr lang="en-US" sz="1100" dirty="0">
+                <a:solidFill>
+                  <a:srgbClr val="374151"/>
+                </a:solidFill>
+                <a:latin typeface="Calibri" pitchFamily="34" charset="0"/>
+                <a:ea typeface="Calibri" pitchFamily="34" charset="-122"/>
+                <a:cs typeface="Calibri" pitchFamily="34" charset="-120"/>
+              </a:rPr>
+              <a:t>Develop a new 5-page website under the domain of Goa Coastal Resorts &amp; Recreation Pvt. Ltd., the company associated with Casino Pride. Instead of positioning the website around casino/gaming, it presents the company’s broader business identity and legitimate activities.</a:t>
+            </a:r>
+            <a:endParaRPr lang="en-US" sz="1100" dirty="0"/>
           </a:p>
         </p:txBody>
       </p:sp>
@@ -2934,8 +3472,8 @@
         </p:nvSpPr>
         <p:spPr>
           <a:xfrm>
-            <a:off x="2148840" y="2560320"/>
-            <a:ext cx="1554480" cy="365760"/>
+            <a:off x="457200" y="2697480"/>
+            <a:ext cx="1600200" cy="347472"/>
           </a:xfrm>
           <a:prstGeom prst="roundRect">
             <a:avLst>
@@ -2943,7 +3481,7 @@
             </a:avLst>
           </a:prstGeom>
           <a:solidFill>
-            <a:srgbClr val="0F1B3D"/>
+            <a:srgbClr val="0A0E1A"/>
           </a:solidFill>
           <a:ln/>
         </p:spPr>
@@ -2956,8 +3494,8 @@
         </p:nvSpPr>
         <p:spPr>
           <a:xfrm>
-            <a:off x="2148840" y="2560320"/>
-            <a:ext cx="1554480" cy="365760"/>
+            <a:off x="457200" y="2697480"/>
+            <a:ext cx="1600200" cy="347472"/>
           </a:xfrm>
           <a:prstGeom prst="rect">
             <a:avLst/>
@@ -2973,7 +3511,7 @@
               <a:buNone/>
             </a:pPr>
             <a:r>
-              <a:rPr lang="en-US" sz="1000" b="1" dirty="0">
+              <a:rPr lang="en-US" sz="950" b="1" dirty="0">
                 <a:solidFill>
                   <a:srgbClr val="FFFFFF"/>
                 </a:solidFill>
@@ -2981,9 +3519,9 @@
                 <a:ea typeface="Calibri" pitchFamily="34" charset="-122"/>
                 <a:cs typeface="Calibri" pitchFamily="34" charset="-120"/>
               </a:rPr>
-              <a:t>Entertainment</a:t>
-            </a:r>
-            <a:endParaRPr lang="en-US" sz="1000" dirty="0"/>
+              <a:t>Hospitality</a:t>
+            </a:r>
+            <a:endParaRPr lang="en-US" sz="950" dirty="0"/>
           </a:p>
         </p:txBody>
       </p:sp>
@@ -2995,8 +3533,8 @@
         </p:nvSpPr>
         <p:spPr>
           <a:xfrm>
-            <a:off x="3840480" y="2560320"/>
-            <a:ext cx="1554480" cy="365760"/>
+            <a:off x="2194560" y="2697480"/>
+            <a:ext cx="1600200" cy="347472"/>
           </a:xfrm>
           <a:prstGeom prst="roundRect">
             <a:avLst>
@@ -3004,7 +3542,7 @@
             </a:avLst>
           </a:prstGeom>
           <a:solidFill>
-            <a:srgbClr val="0F1B3D"/>
+            <a:srgbClr val="0A0E1A"/>
           </a:solidFill>
           <a:ln/>
         </p:spPr>
@@ -3017,8 +3555,8 @@
         </p:nvSpPr>
         <p:spPr>
           <a:xfrm>
-            <a:off x="3840480" y="2560320"/>
-            <a:ext cx="1554480" cy="365760"/>
+            <a:off x="2194560" y="2697480"/>
+            <a:ext cx="1600200" cy="347472"/>
           </a:xfrm>
           <a:prstGeom prst="rect">
             <a:avLst/>
@@ -3034,7 +3572,7 @@
               <a:buNone/>
             </a:pPr>
             <a:r>
-              <a:rPr lang="en-US" sz="1000" b="1" dirty="0">
+              <a:rPr lang="en-US" sz="950" b="1" dirty="0">
                 <a:solidFill>
                   <a:srgbClr val="FFFFFF"/>
                 </a:solidFill>
@@ -3042,9 +3580,9 @@
                 <a:ea typeface="Calibri" pitchFamily="34" charset="-122"/>
                 <a:cs typeface="Calibri" pitchFamily="34" charset="-120"/>
               </a:rPr>
-              <a:t>Recreation</a:t>
-            </a:r>
-            <a:endParaRPr lang="en-US" sz="1000" dirty="0"/>
+              <a:t>Entertainment</a:t>
+            </a:r>
+            <a:endParaRPr lang="en-US" sz="950" dirty="0"/>
           </a:p>
         </p:txBody>
       </p:sp>
@@ -3056,8 +3594,8 @@
         </p:nvSpPr>
         <p:spPr>
           <a:xfrm>
-            <a:off x="5532120" y="2560320"/>
-            <a:ext cx="1554480" cy="365760"/>
+            <a:off x="3931920" y="2697480"/>
+            <a:ext cx="1600200" cy="347472"/>
           </a:xfrm>
           <a:prstGeom prst="roundRect">
             <a:avLst>
@@ -3065,7 +3603,7 @@
             </a:avLst>
           </a:prstGeom>
           <a:solidFill>
-            <a:srgbClr val="0F1B3D"/>
+            <a:srgbClr val="0A0E1A"/>
           </a:solidFill>
           <a:ln/>
         </p:spPr>
@@ -3078,8 +3616,8 @@
         </p:nvSpPr>
         <p:spPr>
           <a:xfrm>
-            <a:off x="5532120" y="2560320"/>
-            <a:ext cx="1554480" cy="365760"/>
+            <a:off x="3931920" y="2697480"/>
+            <a:ext cx="1600200" cy="347472"/>
           </a:xfrm>
           <a:prstGeom prst="rect">
             <a:avLst/>
@@ -3095,7 +3633,7 @@
               <a:buNone/>
             </a:pPr>
             <a:r>
-              <a:rPr lang="en-US" sz="1000" b="1" dirty="0">
+              <a:rPr lang="en-US" sz="950" b="1" dirty="0">
                 <a:solidFill>
                   <a:srgbClr val="FFFFFF"/>
                 </a:solidFill>
@@ -3103,9 +3641,9 @@
                 <a:ea typeface="Calibri" pitchFamily="34" charset="-122"/>
                 <a:cs typeface="Calibri" pitchFamily="34" charset="-120"/>
               </a:rPr>
-              <a:t>Dining</a:t>
-            </a:r>
-            <a:endParaRPr lang="en-US" sz="1000" dirty="0"/>
+              <a:t>Recreation</a:t>
+            </a:r>
+            <a:endParaRPr lang="en-US" sz="950" dirty="0"/>
           </a:p>
         </p:txBody>
       </p:sp>
@@ -3117,8 +3655,8 @@
         </p:nvSpPr>
         <p:spPr>
           <a:xfrm>
-            <a:off x="7223760" y="2560320"/>
-            <a:ext cx="1554480" cy="365760"/>
+            <a:off x="5669280" y="2697480"/>
+            <a:ext cx="1600200" cy="347472"/>
           </a:xfrm>
           <a:prstGeom prst="roundRect">
             <a:avLst>
@@ -3126,7 +3664,7 @@
             </a:avLst>
           </a:prstGeom>
           <a:solidFill>
-            <a:srgbClr val="0F1B3D"/>
+            <a:srgbClr val="0A0E1A"/>
           </a:solidFill>
           <a:ln/>
         </p:spPr>
@@ -3139,8 +3677,8 @@
         </p:nvSpPr>
         <p:spPr>
           <a:xfrm>
-            <a:off x="7223760" y="2560320"/>
-            <a:ext cx="1554480" cy="365760"/>
+            <a:off x="5669280" y="2697480"/>
+            <a:ext cx="1600200" cy="347472"/>
           </a:xfrm>
           <a:prstGeom prst="rect">
             <a:avLst/>
@@ -3156,7 +3694,7 @@
               <a:buNone/>
             </a:pPr>
             <a:r>
-              <a:rPr lang="en-US" sz="1000" b="1" dirty="0">
+              <a:rPr lang="en-US" sz="950" b="1" dirty="0">
                 <a:solidFill>
                   <a:srgbClr val="FFFFFF"/>
                 </a:solidFill>
@@ -3164,9 +3702,9 @@
                 <a:ea typeface="Calibri" pitchFamily="34" charset="-122"/>
                 <a:cs typeface="Calibri" pitchFamily="34" charset="-120"/>
               </a:rPr>
-              <a:t>Events</a:t>
-            </a:r>
-            <a:endParaRPr lang="en-US" sz="1000" dirty="0"/>
+              <a:t>Dining</a:t>
+            </a:r>
+            <a:endParaRPr lang="en-US" sz="950" dirty="0"/>
           </a:p>
         </p:txBody>
       </p:sp>
@@ -3178,16 +3716,16 @@
         </p:nvSpPr>
         <p:spPr>
           <a:xfrm>
-            <a:off x="457200" y="3108960"/>
-            <a:ext cx="8229600" cy="548640"/>
+            <a:off x="7406640" y="2697480"/>
+            <a:ext cx="1600200" cy="347472"/>
           </a:xfrm>
           <a:prstGeom prst="roundRect">
             <a:avLst>
-              <a:gd name="adj" fmla="val 10000"/>
+              <a:gd name="adj" fmla="val 50000"/>
             </a:avLst>
           </a:prstGeom>
           <a:solidFill>
-            <a:srgbClr val="F8F9FC"/>
+            <a:srgbClr val="0A0E1A"/>
           </a:solidFill>
           <a:ln/>
         </p:spPr>
@@ -3200,97 +3738,97 @@
         </p:nvSpPr>
         <p:spPr>
           <a:xfrm>
-            <a:off x="640080" y="3154680"/>
-            <a:ext cx="7863840" cy="457200"/>
-          </a:xfrm>
-          <a:prstGeom prst="rect">
-            <a:avLst/>
-          </a:prstGeom>
-          <a:noFill/>
-          <a:ln/>
-        </p:spPr>
-        <p:txBody>
-          <a:bodyPr wrap="square" lIns="0" tIns="0" rIns="0" bIns="0" rtlCol="0" anchor="ctr"/>
-          <a:lstStyle/>
-          <a:p>
-            <a:pPr algn="l" indent="0" marL="0">
-              <a:buNone/>
-            </a:pPr>
-            <a:r>
-              <a:rPr lang="en-US" sz="1100" b="1" dirty="0">
-                <a:solidFill>
-                  <a:srgbClr val="0F1B3D"/>
-                </a:solidFill>
-                <a:latin typeface="Calibri" pitchFamily="34" charset="0"/>
-                <a:ea typeface="Calibri" pitchFamily="34" charset="-122"/>
-                <a:cs typeface="Calibri" pitchFamily="34" charset="-120"/>
-              </a:rPr>
-              <a:t>Proposed 5 Pages:   Home   |   About the Company   |   Our Businesses &amp; Experiences   |   Brands / Business Interests   |   Contact</a:t>
-            </a:r>
-            <a:endParaRPr lang="en-US" sz="1100" dirty="0"/>
-          </a:p>
-        </p:txBody>
-      </p:sp>
-      <p:sp>
-        <p:nvSpPr>
-          <p:cNvPr id="18" name="Text 16"/>
-          <p:cNvSpPr/>
-          <p:nvPr/>
-        </p:nvSpPr>
-        <p:spPr>
-          <a:xfrm>
-            <a:off x="457200" y="3794760"/>
-            <a:ext cx="8229600" cy="320040"/>
-          </a:xfrm>
-          <a:prstGeom prst="rect">
-            <a:avLst/>
-          </a:prstGeom>
-          <a:noFill/>
-          <a:ln/>
-        </p:spPr>
-        <p:txBody>
-          <a:bodyPr wrap="square" lIns="0" tIns="0" rIns="0" bIns="0" rtlCol="0" anchor="ctr"/>
-          <a:lstStyle/>
-          <a:p>
-            <a:pPr algn="l" indent="0" marL="0">
-              <a:buNone/>
-            </a:pPr>
-            <a:r>
-              <a:rPr lang="en-US" sz="1100" i="1" dirty="0">
-                <a:solidFill>
-                  <a:srgbClr val="1A1A2E"/>
-                </a:solidFill>
-                <a:latin typeface="Calibri" pitchFamily="34" charset="0"/>
-                <a:ea typeface="Calibri" pitchFamily="34" charset="-122"/>
-                <a:cs typeface="Calibri" pitchFamily="34" charset="-120"/>
-              </a:rPr>
-              <a:t>Casino Pride can be presented accurately as one of the company's brands/business interests where appropriate.</a:t>
-            </a:r>
-            <a:endParaRPr lang="en-US" sz="1100" dirty="0"/>
-          </a:p>
-        </p:txBody>
-      </p:sp>
-      <p:sp>
-        <p:nvSpPr>
-          <p:cNvPr id="19" name="Shape 17"/>
-          <p:cNvSpPr/>
-          <p:nvPr/>
-        </p:nvSpPr>
-        <p:spPr>
-          <a:xfrm>
-            <a:off x="457200" y="4206240"/>
-            <a:ext cx="8229600" cy="731520"/>
+            <a:off x="7406640" y="2697480"/>
+            <a:ext cx="1600200" cy="347472"/>
+          </a:xfrm>
+          <a:prstGeom prst="rect">
+            <a:avLst/>
+          </a:prstGeom>
+          <a:noFill/>
+          <a:ln/>
+        </p:spPr>
+        <p:txBody>
+          <a:bodyPr wrap="square" lIns="0" tIns="0" rIns="0" bIns="0" rtlCol="0" anchor="ctr"/>
+          <a:lstStyle/>
+          <a:p>
+            <a:pPr algn="ctr" indent="0" marL="0">
+              <a:buNone/>
+            </a:pPr>
+            <a:r>
+              <a:rPr lang="en-US" sz="950" b="1" dirty="0">
+                <a:solidFill>
+                  <a:srgbClr val="FFFFFF"/>
+                </a:solidFill>
+                <a:latin typeface="Calibri" pitchFamily="34" charset="0"/>
+                <a:ea typeface="Calibri" pitchFamily="34" charset="-122"/>
+                <a:cs typeface="Calibri" pitchFamily="34" charset="-120"/>
+              </a:rPr>
+              <a:t>Events</a:t>
+            </a:r>
+            <a:endParaRPr lang="en-US" sz="950" dirty="0"/>
+          </a:p>
+        </p:txBody>
+      </p:sp>
+      <p:sp>
+        <p:nvSpPr>
+          <p:cNvPr id="18" name="Shape 16"/>
+          <p:cNvSpPr/>
+          <p:nvPr/>
+        </p:nvSpPr>
+        <p:spPr>
+          <a:xfrm>
+            <a:off x="457200" y="3246120"/>
+            <a:ext cx="8229600" cy="502920"/>
           </a:xfrm>
           <a:prstGeom prst="roundRect">
             <a:avLst>
-              <a:gd name="adj" fmla="val 7500"/>
+              <a:gd name="adj" fmla="val 14545"/>
             </a:avLst>
           </a:prstGeom>
           <a:solidFill>
-            <a:srgbClr val="D1FAE5"/>
-          </a:solidFill>
-          <a:ln/>
-        </p:spPr>
+            <a:srgbClr val="F9FAFB"/>
+          </a:solidFill>
+          <a:ln/>
+        </p:spPr>
+      </p:sp>
+      <p:sp>
+        <p:nvSpPr>
+          <p:cNvPr id="19" name="Text 17"/>
+          <p:cNvSpPr/>
+          <p:nvPr/>
+        </p:nvSpPr>
+        <p:spPr>
+          <a:xfrm>
+            <a:off x="640080" y="3246120"/>
+            <a:ext cx="7863840" cy="502920"/>
+          </a:xfrm>
+          <a:prstGeom prst="rect">
+            <a:avLst/>
+          </a:prstGeom>
+          <a:noFill/>
+          <a:ln/>
+        </p:spPr>
+        <p:txBody>
+          <a:bodyPr wrap="square" lIns="0" tIns="0" rIns="0" bIns="0" rtlCol="0" anchor="ctr"/>
+          <a:lstStyle/>
+          <a:p>
+            <a:pPr algn="l" indent="0" marL="0">
+              <a:buNone/>
+            </a:pPr>
+            <a:r>
+              <a:rPr lang="en-US" sz="1000" b="1" dirty="0">
+                <a:solidFill>
+                  <a:srgbClr val="1F2937"/>
+                </a:solidFill>
+                <a:latin typeface="Calibri" pitchFamily="34" charset="0"/>
+                <a:ea typeface="Calibri" pitchFamily="34" charset="-122"/>
+                <a:cs typeface="Calibri" pitchFamily="34" charset="-120"/>
+              </a:rPr>
+              <a:t>PROPOSED PAGES:   Home   •   About the Company   •   Our Businesses &amp; Experiences   •   Brands / Business Interests   •   Contact</a:t>
+            </a:r>
+            <a:endParaRPr lang="en-US" sz="1000" dirty="0"/>
+          </a:p>
+        </p:txBody>
       </p:sp>
       <p:sp>
         <p:nvSpPr>
@@ -3300,8 +3838,8 @@
         </p:nvSpPr>
         <p:spPr>
           <a:xfrm>
-            <a:off x="640080" y="4251960"/>
-            <a:ext cx="7863840" cy="228600"/>
+            <a:off x="457200" y="3886200"/>
+            <a:ext cx="8229600" cy="274320"/>
           </a:xfrm>
           <a:prstGeom prst="rect">
             <a:avLst/>
@@ -3317,9 +3855,134 @@
               <a:buNone/>
             </a:pPr>
             <a:r>
-              <a:rPr lang="en-US" sz="900" b="1" spc="150" kern="0" dirty="0">
-                <a:solidFill>
-                  <a:srgbClr val="059669"/>
+              <a:rPr lang="en-US" sz="1050" i="1" dirty="0">
+                <a:solidFill>
+                  <a:srgbClr val="4B5563"/>
+                </a:solidFill>
+                <a:latin typeface="Calibri" pitchFamily="34" charset="0"/>
+                <a:ea typeface="Calibri" pitchFamily="34" charset="-122"/>
+                <a:cs typeface="Calibri" pitchFamily="34" charset="-120"/>
+              </a:rPr>
+              <a:t>Casino Pride can be presented accurately as one of the company’s brands/business interests where appropriate.</a:t>
+            </a:r>
+            <a:endParaRPr lang="en-US" sz="1050" dirty="0"/>
+          </a:p>
+        </p:txBody>
+      </p:sp>
+      <p:sp>
+        <p:nvSpPr>
+          <p:cNvPr id="21" name="Shape 19"/>
+          <p:cNvSpPr/>
+          <p:nvPr/>
+        </p:nvSpPr>
+        <p:spPr>
+          <a:xfrm>
+            <a:off x="457200" y="4297680"/>
+            <a:ext cx="8229600" cy="685800"/>
+          </a:xfrm>
+          <a:prstGeom prst="roundRect">
+            <a:avLst>
+              <a:gd name="adj" fmla="val 10667"/>
+            </a:avLst>
+          </a:prstGeom>
+          <a:solidFill>
+            <a:srgbClr val="ECFDF5"/>
+          </a:solidFill>
+          <a:ln w="9525">
+            <a:solidFill>
+              <a:srgbClr val="10B981"/>
+            </a:solidFill>
+            <a:prstDash val="solid"/>
+          </a:ln>
+        </p:spPr>
+      </p:sp>
+      <p:sp>
+        <p:nvSpPr>
+          <p:cNvPr id="22" name="Shape 20"/>
+          <p:cNvSpPr/>
+          <p:nvPr/>
+        </p:nvSpPr>
+        <p:spPr>
+          <a:xfrm>
+            <a:off x="685800" y="4462272"/>
+            <a:ext cx="320040" cy="320040"/>
+          </a:xfrm>
+          <a:prstGeom prst="ellipse">
+            <a:avLst/>
+          </a:prstGeom>
+          <a:solidFill>
+            <a:srgbClr val="10B981"/>
+          </a:solidFill>
+          <a:ln/>
+        </p:spPr>
+      </p:sp>
+      <p:sp>
+        <p:nvSpPr>
+          <p:cNvPr id="23" name="Text 21"/>
+          <p:cNvSpPr/>
+          <p:nvPr/>
+        </p:nvSpPr>
+        <p:spPr>
+          <a:xfrm>
+            <a:off x="685800" y="4462272"/>
+            <a:ext cx="320040" cy="320040"/>
+          </a:xfrm>
+          <a:prstGeom prst="rect">
+            <a:avLst/>
+          </a:prstGeom>
+          <a:noFill/>
+          <a:ln/>
+        </p:spPr>
+        <p:txBody>
+          <a:bodyPr wrap="square" lIns="0" tIns="0" rIns="0" bIns="0" rtlCol="0" anchor="ctr"/>
+          <a:lstStyle/>
+          <a:p>
+            <a:pPr algn="ctr" indent="0" marL="0">
+              <a:buNone/>
+            </a:pPr>
+            <a:r>
+              <a:rPr lang="en-US" sz="1400" b="1" dirty="0">
+                <a:solidFill>
+                  <a:srgbClr val="FFFFFF"/>
+                </a:solidFill>
+                <a:latin typeface="Calibri" pitchFamily="34" charset="0"/>
+                <a:ea typeface="Calibri" pitchFamily="34" charset="-122"/>
+                <a:cs typeface="Calibri" pitchFamily="34" charset="-120"/>
+              </a:rPr>
+              <a:t>✓</a:t>
+            </a:r>
+            <a:endParaRPr lang="en-US" sz="1400" dirty="0"/>
+          </a:p>
+        </p:txBody>
+      </p:sp>
+      <p:sp>
+        <p:nvSpPr>
+          <p:cNvPr id="24" name="Text 22"/>
+          <p:cNvSpPr/>
+          <p:nvPr/>
+        </p:nvSpPr>
+        <p:spPr>
+          <a:xfrm>
+            <a:off x="1143000" y="4370832"/>
+            <a:ext cx="7315200" cy="182880"/>
+          </a:xfrm>
+          <a:prstGeom prst="rect">
+            <a:avLst/>
+          </a:prstGeom>
+          <a:noFill/>
+          <a:ln/>
+        </p:spPr>
+        <p:txBody>
+          <a:bodyPr wrap="square" lIns="0" tIns="0" rIns="0" bIns="0" rtlCol="0" anchor="ctr"/>
+          <a:lstStyle/>
+          <a:p>
+            <a:pPr algn="l" indent="0" marL="0">
+              <a:buNone/>
+            </a:pPr>
+            <a:r>
+              <a:rPr lang="en-US" sz="800" b="1" spc="100" kern="0" dirty="0">
+                <a:solidFill>
+                  <a:srgbClr val="10B981"/>
                 </a:solidFill>
                 <a:latin typeface="Calibri" pitchFamily="34" charset="0"/>
                 <a:ea typeface="Calibri" pitchFamily="34" charset="-122"/>
@@ -3327,20 +3990,20 @@
               </a:rPr>
               <a:t>KEY ADVANTAGE</a:t>
             </a:r>
-            <a:endParaRPr lang="en-US" sz="900" dirty="0"/>
-          </a:p>
-        </p:txBody>
-      </p:sp>
-      <p:sp>
-        <p:nvSpPr>
-          <p:cNvPr id="21" name="Text 19"/>
-          <p:cNvSpPr/>
-          <p:nvPr/>
-        </p:nvSpPr>
-        <p:spPr>
-          <a:xfrm>
-            <a:off x="640080" y="4480560"/>
-            <a:ext cx="7863840" cy="411480"/>
+            <a:endParaRPr lang="en-US" sz="800" dirty="0"/>
+          </a:p>
+        </p:txBody>
+      </p:sp>
+      <p:sp>
+        <p:nvSpPr>
+          <p:cNvPr id="25" name="Text 23"/>
+          <p:cNvSpPr/>
+          <p:nvPr/>
+        </p:nvSpPr>
+        <p:spPr>
+          <a:xfrm>
+            <a:off x="1143000" y="4553712"/>
+            <a:ext cx="7315200" cy="365760"/>
           </a:xfrm>
           <a:prstGeom prst="rect">
             <a:avLst/>
@@ -3359,17 +4022,17 @@
               <a:buNone/>
             </a:pPr>
             <a:r>
-              <a:rPr lang="en-US" sz="1050" dirty="0">
-                <a:solidFill>
-                  <a:srgbClr val="059669"/>
-                </a:solidFill>
-                <a:latin typeface="Calibri" pitchFamily="34" charset="0"/>
-                <a:ea typeface="Calibri" pitchFamily="34" charset="-122"/>
-                <a:cs typeface="Calibri" pitchFamily="34" charset="-120"/>
-              </a:rPr>
-              <a:t>This creates a stronger corporate digital identity that can accommodate the company's existing and future business activities, rather than creating a website solely around one entertainment brand.</a:t>
-            </a:r>
-            <a:endParaRPr lang="en-US" sz="1050" dirty="0"/>
+              <a:rPr lang="en-US" sz="1000" dirty="0">
+                <a:solidFill>
+                  <a:srgbClr val="064E3B"/>
+                </a:solidFill>
+                <a:latin typeface="Calibri" pitchFamily="34" charset="0"/>
+                <a:ea typeface="Calibri" pitchFamily="34" charset="-122"/>
+                <a:cs typeface="Calibri" pitchFamily="34" charset="-120"/>
+              </a:rPr>
+              <a:t>Creates a stronger corporate digital identity that accommodates existing and future business activities, rather than a website solely around one entertainment brand.</a:t>
+            </a:r>
+            <a:endParaRPr lang="en-US" sz="1000" dirty="0"/>
           </a:p>
         </p:txBody>
       </p:sp>
@@ -3387,7 +4050,7 @@
     <p:bg>
       <p:bgPr>
         <a:solidFill>
-          <a:srgbClr val="0F1B3D"/>
+          <a:srgbClr val="0A0E1A"/>
         </a:solidFill>
       </p:bgPr>
     </p:bg>
@@ -3407,14 +4070,95 @@
       </p:grpSpPr>
       <p:sp>
         <p:nvSpPr>
-          <p:cNvPr id="2" name="Text 0"/>
+          <p:cNvPr id="2" name="Shape 0"/>
+          <p:cNvSpPr/>
+          <p:nvPr/>
+        </p:nvSpPr>
+        <p:spPr>
+          <a:xfrm>
+            <a:off x="6400800" y="-1828800"/>
+            <a:ext cx="5486400" cy="5486400"/>
+          </a:xfrm>
+          <a:prstGeom prst="ellipse">
+            <a:avLst/>
+          </a:prstGeom>
+          <a:solidFill>
+            <a:srgbClr val="141B2D"/>
+          </a:solidFill>
+          <a:ln/>
+        </p:spPr>
+      </p:sp>
+      <p:sp>
+        <p:nvSpPr>
+          <p:cNvPr id="3" name="Shape 1"/>
           <p:cNvSpPr/>
           <p:nvPr/>
         </p:nvSpPr>
         <p:spPr>
           <a:xfrm>
             <a:off x="457200" y="365760"/>
-            <a:ext cx="8229600" cy="320040"/>
+            <a:ext cx="2011680" cy="256032"/>
+          </a:xfrm>
+          <a:prstGeom prst="roundRect">
+            <a:avLst>
+              <a:gd name="adj" fmla="val 50000"/>
+            </a:avLst>
+          </a:prstGeom>
+          <a:solidFill>
+            <a:srgbClr val="D4A853"/>
+          </a:solidFill>
+          <a:ln/>
+        </p:spPr>
+      </p:sp>
+      <p:sp>
+        <p:nvSpPr>
+          <p:cNvPr id="4" name="Text 2"/>
+          <p:cNvSpPr/>
+          <p:nvPr/>
+        </p:nvSpPr>
+        <p:spPr>
+          <a:xfrm>
+            <a:off x="457200" y="365760"/>
+            <a:ext cx="2011680" cy="256032"/>
+          </a:xfrm>
+          <a:prstGeom prst="rect">
+            <a:avLst/>
+          </a:prstGeom>
+          <a:noFill/>
+          <a:ln/>
+        </p:spPr>
+        <p:txBody>
+          <a:bodyPr wrap="square" lIns="0" tIns="0" rIns="0" bIns="0" rtlCol="0" anchor="ctr"/>
+          <a:lstStyle/>
+          <a:p>
+            <a:pPr algn="ctr" indent="0" marL="0">
+              <a:buNone/>
+            </a:pPr>
+            <a:r>
+              <a:rPr lang="en-US" sz="750" b="1" spc="100" kern="0" dirty="0">
+                <a:solidFill>
+                  <a:srgbClr val="0A0E1A"/>
+                </a:solidFill>
+                <a:latin typeface="Calibri" pitchFamily="34" charset="0"/>
+                <a:ea typeface="Calibri" pitchFamily="34" charset="-122"/>
+                <a:cs typeface="Calibri" pitchFamily="34" charset="-120"/>
+              </a:rPr>
+              <a:t>OUR RECOMMENDATION</a:t>
+            </a:r>
+            <a:endParaRPr lang="en-US" sz="750" dirty="0"/>
+          </a:p>
+        </p:txBody>
+      </p:sp>
+      <p:sp>
+        <p:nvSpPr>
+          <p:cNvPr id="5" name="Text 3"/>
+          <p:cNvSpPr/>
+          <p:nvPr/>
+        </p:nvSpPr>
+        <p:spPr>
+          <a:xfrm>
+            <a:off x="457200" y="822960"/>
+            <a:ext cx="8229600" cy="502920"/>
           </a:xfrm>
           <a:prstGeom prst="rect">
             <a:avLst/>
@@ -3430,46 +4174,7 @@
               <a:buNone/>
             </a:pPr>
             <a:r>
-              <a:rPr lang="en-US" sz="1000" b="1" spc="200" kern="0" dirty="0">
-                <a:solidFill>
-                  <a:srgbClr val="C4A35A"/>
-                </a:solidFill>
-                <a:latin typeface="Calibri" pitchFamily="34" charset="0"/>
-                <a:ea typeface="Calibri" pitchFamily="34" charset="-122"/>
-                <a:cs typeface="Calibri" pitchFamily="34" charset="-120"/>
-              </a:rPr>
-              <a:t>OUR RECOMMENDATION</a:t>
-            </a:r>
-            <a:endParaRPr lang="en-US" sz="1000" dirty="0"/>
-          </a:p>
-        </p:txBody>
-      </p:sp>
-      <p:sp>
-        <p:nvSpPr>
-          <p:cNvPr id="3" name="Text 1"/>
-          <p:cNvSpPr/>
-          <p:nvPr/>
-        </p:nvSpPr>
-        <p:spPr>
-          <a:xfrm>
-            <a:off x="457200" y="777240"/>
-            <a:ext cx="8229600" cy="502920"/>
-          </a:xfrm>
-          <a:prstGeom prst="rect">
-            <a:avLst/>
-          </a:prstGeom>
-          <a:noFill/>
-          <a:ln/>
-        </p:spPr>
-        <p:txBody>
-          <a:bodyPr wrap="square" lIns="0" tIns="0" rIns="0" bIns="0" rtlCol="0" anchor="ctr"/>
-          <a:lstStyle/>
-          <a:p>
-            <a:pPr algn="l" indent="0" marL="0">
-              <a:buNone/>
-            </a:pPr>
-            <a:r>
-              <a:rPr lang="en-US" sz="2800" b="1" dirty="0">
+              <a:rPr lang="en-US" sz="2600" b="1" dirty="0">
                 <a:solidFill>
                   <a:srgbClr val="FFFFFF"/>
                 </a:solidFill>
@@ -3477,22 +4182,22 @@
                 <a:ea typeface="Cambria" pitchFamily="34" charset="-122"/>
                 <a:cs typeface="Cambria" pitchFamily="34" charset="-120"/>
               </a:rPr>
-              <a:t>OPTION 2 — Corporate Website</a:t>
-            </a:r>
-            <a:endParaRPr lang="en-US" sz="2800" dirty="0"/>
-          </a:p>
-        </p:txBody>
-      </p:sp>
-      <p:sp>
-        <p:nvSpPr>
-          <p:cNvPr id="4" name="Text 2"/>
-          <p:cNvSpPr/>
-          <p:nvPr/>
-        </p:nvSpPr>
-        <p:spPr>
-          <a:xfrm>
-            <a:off x="457200" y="1280160"/>
-            <a:ext cx="8229600" cy="320040"/>
+              <a:t>Option 2 — Corporate Website</a:t>
+            </a:r>
+            <a:endParaRPr lang="en-US" sz="2600" dirty="0"/>
+          </a:p>
+        </p:txBody>
+      </p:sp>
+      <p:sp>
+        <p:nvSpPr>
+          <p:cNvPr id="6" name="Text 4"/>
+          <p:cNvSpPr/>
+          <p:nvPr/>
+        </p:nvSpPr>
+        <p:spPr>
+          <a:xfrm>
+            <a:off x="457200" y="1325880"/>
+            <a:ext cx="8229600" cy="274320"/>
           </a:xfrm>
           <a:prstGeom prst="rect">
             <a:avLst/>
@@ -3508,9 +4213,9 @@
               <a:buNone/>
             </a:pPr>
             <a:r>
-              <a:rPr lang="en-US" sz="1400" i="1" dirty="0">
-                <a:solidFill>
-                  <a:srgbClr val="C4A35A"/>
+              <a:rPr lang="en-US" sz="1200" i="1" dirty="0">
+                <a:solidFill>
+                  <a:srgbClr val="D4A853"/>
                 </a:solidFill>
                 <a:latin typeface="Calibri" pitchFamily="34" charset="0"/>
                 <a:ea typeface="Calibri" pitchFamily="34" charset="-122"/>
@@ -3518,42 +4223,64 @@
               </a:rPr>
               <a:t>Goa Coastal Resorts &amp; Recreation Pvt. Ltd.</a:t>
             </a:r>
-            <a:endParaRPr lang="en-US" sz="1400" dirty="0"/>
-          </a:p>
-        </p:txBody>
-      </p:sp>
-      <p:sp>
-        <p:nvSpPr>
-          <p:cNvPr id="5" name="Shape 3"/>
+            <a:endParaRPr lang="en-US" sz="1200" dirty="0"/>
+          </a:p>
+        </p:txBody>
+      </p:sp>
+      <p:sp>
+        <p:nvSpPr>
+          <p:cNvPr id="7" name="Shape 5"/>
           <p:cNvSpPr/>
           <p:nvPr/>
         </p:nvSpPr>
         <p:spPr>
           <a:xfrm>
             <a:off x="457200" y="1828800"/>
-            <a:ext cx="4023360" cy="1005840"/>
+            <a:ext cx="4023360" cy="1097280"/>
           </a:xfrm>
           <a:prstGeom prst="roundRect">
             <a:avLst>
-              <a:gd name="adj" fmla="val 5455"/>
+              <a:gd name="adj" fmla="val 8333"/>
             </a:avLst>
           </a:prstGeom>
           <a:solidFill>
-            <a:srgbClr val="1A2A5E"/>
-          </a:solidFill>
-          <a:ln/>
-        </p:spPr>
-      </p:sp>
-      <p:sp>
-        <p:nvSpPr>
-          <p:cNvPr id="6" name="Text 4"/>
-          <p:cNvSpPr/>
-          <p:nvPr/>
-        </p:nvSpPr>
-        <p:spPr>
-          <a:xfrm>
-            <a:off x="640080" y="1920240"/>
-            <a:ext cx="3657600" cy="365760"/>
+            <a:srgbClr val="1C2438"/>
+          </a:solidFill>
+          <a:ln/>
+        </p:spPr>
+      </p:sp>
+      <p:sp>
+        <p:nvSpPr>
+          <p:cNvPr id="8" name="Shape 6"/>
+          <p:cNvSpPr/>
+          <p:nvPr/>
+        </p:nvSpPr>
+        <p:spPr>
+          <a:xfrm>
+            <a:off x="594360" y="2057400"/>
+            <a:ext cx="36576" cy="640080"/>
+          </a:xfrm>
+          <a:prstGeom prst="roundRect">
+            <a:avLst>
+              <a:gd name="adj" fmla="val 50000"/>
+            </a:avLst>
+          </a:prstGeom>
+          <a:solidFill>
+            <a:srgbClr val="D4A853"/>
+          </a:solidFill>
+          <a:ln/>
+        </p:spPr>
+      </p:sp>
+      <p:sp>
+        <p:nvSpPr>
+          <p:cNvPr id="9" name="Text 7"/>
+          <p:cNvSpPr/>
+          <p:nvPr/>
+        </p:nvSpPr>
+        <p:spPr>
+          <a:xfrm>
+            <a:off x="822960" y="1965960"/>
+            <a:ext cx="3474720" cy="365760"/>
           </a:xfrm>
           <a:prstGeom prst="rect">
             <a:avLst/>
@@ -3571,7 +4298,7 @@
             <a:r>
               <a:rPr lang="en-US" sz="1300" b="1" dirty="0">
                 <a:solidFill>
-                  <a:srgbClr val="C4A35A"/>
+                  <a:srgbClr val="FFFFFF"/>
                 </a:solidFill>
                 <a:latin typeface="Cambria" pitchFamily="34" charset="0"/>
                 <a:ea typeface="Cambria" pitchFamily="34" charset="-122"/>
@@ -3585,14 +4312,14 @@
       </p:sp>
       <p:sp>
         <p:nvSpPr>
-          <p:cNvPr id="7" name="Text 5"/>
-          <p:cNvSpPr/>
-          <p:nvPr/>
-        </p:nvSpPr>
-        <p:spPr>
-          <a:xfrm>
-            <a:off x="640080" y="2286000"/>
-            <a:ext cx="3657600" cy="457200"/>
+          <p:cNvPr id="10" name="Text 8"/>
+          <p:cNvSpPr/>
+          <p:nvPr/>
+        </p:nvSpPr>
+        <p:spPr>
+          <a:xfrm>
+            <a:off x="822960" y="2331720"/>
+            <a:ext cx="3474720" cy="457200"/>
           </a:xfrm>
           <a:prstGeom prst="rect">
             <a:avLst/>
@@ -3611,9 +4338,9 @@
               <a:buNone/>
             </a:pPr>
             <a:r>
-              <a:rPr lang="en-US" sz="1050" dirty="0">
-                <a:solidFill>
-                  <a:srgbClr val="F5F6FA"/>
+              <a:rPr lang="en-US" sz="1000" dirty="0">
+                <a:solidFill>
+                  <a:srgbClr val="9CA3AF"/>
                 </a:solidFill>
                 <a:latin typeface="Calibri" pitchFamily="34" charset="0"/>
                 <a:ea typeface="Calibri" pitchFamily="34" charset="-122"/>
@@ -3621,42 +4348,64 @@
               </a:rPr>
               <a:t>Represents the actual corporate/business entity</a:t>
             </a:r>
-            <a:endParaRPr lang="en-US" sz="1050" dirty="0"/>
-          </a:p>
-        </p:txBody>
-      </p:sp>
-      <p:sp>
-        <p:nvSpPr>
-          <p:cNvPr id="8" name="Shape 6"/>
+            <a:endParaRPr lang="en-US" sz="1000" dirty="0"/>
+          </a:p>
+        </p:txBody>
+      </p:sp>
+      <p:sp>
+        <p:nvSpPr>
+          <p:cNvPr id="11" name="Shape 9"/>
           <p:cNvSpPr/>
           <p:nvPr/>
         </p:nvSpPr>
         <p:spPr>
           <a:xfrm>
             <a:off x="4754880" y="1828800"/>
-            <a:ext cx="4023360" cy="1005840"/>
+            <a:ext cx="4023360" cy="1097280"/>
           </a:xfrm>
           <a:prstGeom prst="roundRect">
             <a:avLst>
-              <a:gd name="adj" fmla="val 5455"/>
+              <a:gd name="adj" fmla="val 8333"/>
             </a:avLst>
           </a:prstGeom>
           <a:solidFill>
-            <a:srgbClr val="1A2A5E"/>
-          </a:solidFill>
-          <a:ln/>
-        </p:spPr>
-      </p:sp>
-      <p:sp>
-        <p:nvSpPr>
-          <p:cNvPr id="9" name="Text 7"/>
-          <p:cNvSpPr/>
-          <p:nvPr/>
-        </p:nvSpPr>
-        <p:spPr>
-          <a:xfrm>
-            <a:off x="4937760" y="1920240"/>
-            <a:ext cx="3657600" cy="365760"/>
+            <a:srgbClr val="1C2438"/>
+          </a:solidFill>
+          <a:ln/>
+        </p:spPr>
+      </p:sp>
+      <p:sp>
+        <p:nvSpPr>
+          <p:cNvPr id="12" name="Shape 10"/>
+          <p:cNvSpPr/>
+          <p:nvPr/>
+        </p:nvSpPr>
+        <p:spPr>
+          <a:xfrm>
+            <a:off x="4892040" y="2057400"/>
+            <a:ext cx="36576" cy="640080"/>
+          </a:xfrm>
+          <a:prstGeom prst="roundRect">
+            <a:avLst>
+              <a:gd name="adj" fmla="val 50000"/>
+            </a:avLst>
+          </a:prstGeom>
+          <a:solidFill>
+            <a:srgbClr val="D4A853"/>
+          </a:solidFill>
+          <a:ln/>
+        </p:spPr>
+      </p:sp>
+      <p:sp>
+        <p:nvSpPr>
+          <p:cNvPr id="13" name="Text 11"/>
+          <p:cNvSpPr/>
+          <p:nvPr/>
+        </p:nvSpPr>
+        <p:spPr>
+          <a:xfrm>
+            <a:off x="5120640" y="1965960"/>
+            <a:ext cx="3474720" cy="365760"/>
           </a:xfrm>
           <a:prstGeom prst="rect">
             <a:avLst/>
@@ -3674,7 +4423,7 @@
             <a:r>
               <a:rPr lang="en-US" sz="1300" b="1" dirty="0">
                 <a:solidFill>
-                  <a:srgbClr val="C4A35A"/>
+                  <a:srgbClr val="FFFFFF"/>
                 </a:solidFill>
                 <a:latin typeface="Cambria" pitchFamily="34" charset="0"/>
                 <a:ea typeface="Cambria" pitchFamily="34" charset="-122"/>
@@ -3688,14 +4437,14 @@
       </p:sp>
       <p:sp>
         <p:nvSpPr>
-          <p:cNvPr id="10" name="Text 8"/>
-          <p:cNvSpPr/>
-          <p:nvPr/>
-        </p:nvSpPr>
-        <p:spPr>
-          <a:xfrm>
-            <a:off x="4937760" y="2286000"/>
-            <a:ext cx="3657600" cy="457200"/>
+          <p:cNvPr id="14" name="Text 12"/>
+          <p:cNvSpPr/>
+          <p:nvPr/>
+        </p:nvSpPr>
+        <p:spPr>
+          <a:xfrm>
+            <a:off x="5120640" y="2331720"/>
+            <a:ext cx="3474720" cy="457200"/>
           </a:xfrm>
           <a:prstGeom prst="rect">
             <a:avLst/>
@@ -3714,9 +4463,9 @@
               <a:buNone/>
             </a:pPr>
             <a:r>
-              <a:rPr lang="en-US" sz="1050" dirty="0">
-                <a:solidFill>
-                  <a:srgbClr val="F5F6FA"/>
+              <a:rPr lang="en-US" sz="1000" dirty="0">
+                <a:solidFill>
+                  <a:srgbClr val="9CA3AF"/>
                 </a:solidFill>
                 <a:latin typeface="Calibri" pitchFamily="34" charset="0"/>
                 <a:ea typeface="Calibri" pitchFamily="34" charset="-122"/>
@@ -3724,42 +4473,64 @@
               </a:rPr>
               <a:t>Showcases hospitality, entertainment, recreation, dining &amp; other activities</a:t>
             </a:r>
-            <a:endParaRPr lang="en-US" sz="1050" dirty="0"/>
-          </a:p>
-        </p:txBody>
-      </p:sp>
-      <p:sp>
-        <p:nvSpPr>
-          <p:cNvPr id="11" name="Shape 9"/>
-          <p:cNvSpPr/>
-          <p:nvPr/>
-        </p:nvSpPr>
-        <p:spPr>
-          <a:xfrm>
-            <a:off x="457200" y="3017520"/>
-            <a:ext cx="4023360" cy="1005840"/>
+            <a:endParaRPr lang="en-US" sz="1000" dirty="0"/>
+          </a:p>
+        </p:txBody>
+      </p:sp>
+      <p:sp>
+        <p:nvSpPr>
+          <p:cNvPr id="15" name="Shape 13"/>
+          <p:cNvSpPr/>
+          <p:nvPr/>
+        </p:nvSpPr>
+        <p:spPr>
+          <a:xfrm>
+            <a:off x="457200" y="3108960"/>
+            <a:ext cx="4023360" cy="1097280"/>
           </a:xfrm>
           <a:prstGeom prst="roundRect">
             <a:avLst>
-              <a:gd name="adj" fmla="val 5455"/>
+              <a:gd name="adj" fmla="val 8333"/>
             </a:avLst>
           </a:prstGeom>
           <a:solidFill>
-            <a:srgbClr val="1A2A5E"/>
-          </a:solidFill>
-          <a:ln/>
-        </p:spPr>
-      </p:sp>
-      <p:sp>
-        <p:nvSpPr>
-          <p:cNvPr id="12" name="Text 10"/>
-          <p:cNvSpPr/>
-          <p:nvPr/>
-        </p:nvSpPr>
-        <p:spPr>
-          <a:xfrm>
-            <a:off x="640080" y="3108960"/>
-            <a:ext cx="3657600" cy="365760"/>
+            <a:srgbClr val="1C2438"/>
+          </a:solidFill>
+          <a:ln/>
+        </p:spPr>
+      </p:sp>
+      <p:sp>
+        <p:nvSpPr>
+          <p:cNvPr id="16" name="Shape 14"/>
+          <p:cNvSpPr/>
+          <p:nvPr/>
+        </p:nvSpPr>
+        <p:spPr>
+          <a:xfrm>
+            <a:off x="594360" y="3337560"/>
+            <a:ext cx="36576" cy="640080"/>
+          </a:xfrm>
+          <a:prstGeom prst="roundRect">
+            <a:avLst>
+              <a:gd name="adj" fmla="val 50000"/>
+            </a:avLst>
+          </a:prstGeom>
+          <a:solidFill>
+            <a:srgbClr val="D4A853"/>
+          </a:solidFill>
+          <a:ln/>
+        </p:spPr>
+      </p:sp>
+      <p:sp>
+        <p:nvSpPr>
+          <p:cNvPr id="17" name="Text 15"/>
+          <p:cNvSpPr/>
+          <p:nvPr/>
+        </p:nvSpPr>
+        <p:spPr>
+          <a:xfrm>
+            <a:off x="822960" y="3246120"/>
+            <a:ext cx="3474720" cy="365760"/>
           </a:xfrm>
           <a:prstGeom prst="rect">
             <a:avLst/>
@@ -3777,7 +4548,7 @@
             <a:r>
               <a:rPr lang="en-US" sz="1300" b="1" dirty="0">
                 <a:solidFill>
-                  <a:srgbClr val="C4A35A"/>
+                  <a:srgbClr val="FFFFFF"/>
                 </a:solidFill>
                 <a:latin typeface="Cambria" pitchFamily="34" charset="0"/>
                 <a:ea typeface="Cambria" pitchFamily="34" charset="-122"/>
@@ -3791,14 +4562,14 @@
       </p:sp>
       <p:sp>
         <p:nvSpPr>
-          <p:cNvPr id="13" name="Text 11"/>
-          <p:cNvSpPr/>
-          <p:nvPr/>
-        </p:nvSpPr>
-        <p:spPr>
-          <a:xfrm>
-            <a:off x="640080" y="3474720"/>
-            <a:ext cx="3657600" cy="457200"/>
+          <p:cNvPr id="18" name="Text 16"/>
+          <p:cNvSpPr/>
+          <p:nvPr/>
+        </p:nvSpPr>
+        <p:spPr>
+          <a:xfrm>
+            <a:off x="822960" y="3611880"/>
+            <a:ext cx="3474720" cy="457200"/>
           </a:xfrm>
           <a:prstGeom prst="rect">
             <a:avLst/>
@@ -3817,9 +4588,9 @@
               <a:buNone/>
             </a:pPr>
             <a:r>
-              <a:rPr lang="en-US" sz="1050" dirty="0">
-                <a:solidFill>
-                  <a:srgbClr val="F5F6FA"/>
+              <a:rPr lang="en-US" sz="1000" dirty="0">
+                <a:solidFill>
+                  <a:srgbClr val="9CA3AF"/>
                 </a:solidFill>
                 <a:latin typeface="Calibri" pitchFamily="34" charset="0"/>
                 <a:ea typeface="Calibri" pitchFamily="34" charset="-122"/>
@@ -3827,42 +4598,64 @@
               </a:rPr>
               <a:t>Additional brands, properties or business interests can be added in future</a:t>
             </a:r>
-            <a:endParaRPr lang="en-US" sz="1050" dirty="0"/>
-          </a:p>
-        </p:txBody>
-      </p:sp>
-      <p:sp>
-        <p:nvSpPr>
-          <p:cNvPr id="14" name="Shape 12"/>
-          <p:cNvSpPr/>
-          <p:nvPr/>
-        </p:nvSpPr>
-        <p:spPr>
-          <a:xfrm>
-            <a:off x="4754880" y="3017520"/>
-            <a:ext cx="4023360" cy="1005840"/>
+            <a:endParaRPr lang="en-US" sz="1000" dirty="0"/>
+          </a:p>
+        </p:txBody>
+      </p:sp>
+      <p:sp>
+        <p:nvSpPr>
+          <p:cNvPr id="19" name="Shape 17"/>
+          <p:cNvSpPr/>
+          <p:nvPr/>
+        </p:nvSpPr>
+        <p:spPr>
+          <a:xfrm>
+            <a:off x="4754880" y="3108960"/>
+            <a:ext cx="4023360" cy="1097280"/>
           </a:xfrm>
           <a:prstGeom prst="roundRect">
             <a:avLst>
-              <a:gd name="adj" fmla="val 5455"/>
+              <a:gd name="adj" fmla="val 8333"/>
             </a:avLst>
           </a:prstGeom>
           <a:solidFill>
-            <a:srgbClr val="1A2A5E"/>
-          </a:solidFill>
-          <a:ln/>
-        </p:spPr>
-      </p:sp>
-      <p:sp>
-        <p:nvSpPr>
-          <p:cNvPr id="15" name="Text 13"/>
-          <p:cNvSpPr/>
-          <p:nvPr/>
-        </p:nvSpPr>
-        <p:spPr>
-          <a:xfrm>
-            <a:off x="4937760" y="3108960"/>
-            <a:ext cx="3657600" cy="365760"/>
+            <a:srgbClr val="1C2438"/>
+          </a:solidFill>
+          <a:ln/>
+        </p:spPr>
+      </p:sp>
+      <p:sp>
+        <p:nvSpPr>
+          <p:cNvPr id="20" name="Shape 18"/>
+          <p:cNvSpPr/>
+          <p:nvPr/>
+        </p:nvSpPr>
+        <p:spPr>
+          <a:xfrm>
+            <a:off x="4892040" y="3337560"/>
+            <a:ext cx="36576" cy="640080"/>
+          </a:xfrm>
+          <a:prstGeom prst="roundRect">
+            <a:avLst>
+              <a:gd name="adj" fmla="val 50000"/>
+            </a:avLst>
+          </a:prstGeom>
+          <a:solidFill>
+            <a:srgbClr val="D4A853"/>
+          </a:solidFill>
+          <a:ln/>
+        </p:spPr>
+      </p:sp>
+      <p:sp>
+        <p:nvSpPr>
+          <p:cNvPr id="21" name="Text 19"/>
+          <p:cNvSpPr/>
+          <p:nvPr/>
+        </p:nvSpPr>
+        <p:spPr>
+          <a:xfrm>
+            <a:off x="5120640" y="3246120"/>
+            <a:ext cx="3474720" cy="365760"/>
           </a:xfrm>
           <a:prstGeom prst="rect">
             <a:avLst/>
@@ -3880,7 +4673,7 @@
             <a:r>
               <a:rPr lang="en-US" sz="1300" b="1" dirty="0">
                 <a:solidFill>
-                  <a:srgbClr val="C4A35A"/>
+                  <a:srgbClr val="FFFFFF"/>
                 </a:solidFill>
                 <a:latin typeface="Cambria" pitchFamily="34" charset="0"/>
                 <a:ea typeface="Cambria" pitchFamily="34" charset="-122"/>
@@ -3894,14 +4687,14 @@
       </p:sp>
       <p:sp>
         <p:nvSpPr>
-          <p:cNvPr id="16" name="Text 14"/>
-          <p:cNvSpPr/>
-          <p:nvPr/>
-        </p:nvSpPr>
-        <p:spPr>
-          <a:xfrm>
-            <a:off x="4937760" y="3474720"/>
-            <a:ext cx="3657600" cy="457200"/>
+          <p:cNvPr id="22" name="Text 20"/>
+          <p:cNvSpPr/>
+          <p:nvPr/>
+        </p:nvSpPr>
+        <p:spPr>
+          <a:xfrm>
+            <a:off x="5120640" y="3611880"/>
+            <a:ext cx="3474720" cy="457200"/>
           </a:xfrm>
           <a:prstGeom prst="rect">
             <a:avLst/>
@@ -3920,9 +4713,9 @@
               <a:buNone/>
             </a:pPr>
             <a:r>
-              <a:rPr lang="en-US" sz="1050" dirty="0">
-                <a:solidFill>
-                  <a:srgbClr val="F5F6FA"/>
+              <a:rPr lang="en-US" sz="1000" dirty="0">
+                <a:solidFill>
+                  <a:srgbClr val="9CA3AF"/>
                 </a:solidFill>
                 <a:latin typeface="Calibri" pitchFamily="34" charset="0"/>
                 <a:ea typeface="Calibri" pitchFamily="34" charset="-122"/>
@@ -3930,19 +4723,78 @@
               </a:rPr>
               <a:t>Remains useful as a corporate digital asset beyond gateway requirement</a:t>
             </a:r>
-            <a:endParaRPr lang="en-US" sz="1050" dirty="0"/>
-          </a:p>
-        </p:txBody>
-      </p:sp>
-      <p:sp>
-        <p:nvSpPr>
-          <p:cNvPr id="17" name="Text 15"/>
-          <p:cNvSpPr/>
-          <p:nvPr/>
-        </p:nvSpPr>
-        <p:spPr>
-          <a:xfrm>
-            <a:off x="457200" y="4343400"/>
+            <a:endParaRPr lang="en-US" sz="1000" dirty="0"/>
+          </a:p>
+        </p:txBody>
+      </p:sp>
+      <p:sp>
+        <p:nvSpPr>
+          <p:cNvPr id="23" name="Shape 21"/>
+          <p:cNvSpPr/>
+          <p:nvPr/>
+        </p:nvSpPr>
+        <p:spPr>
+          <a:xfrm>
+            <a:off x="457200" y="4526280"/>
+            <a:ext cx="2743200" cy="18288"/>
+          </a:xfrm>
+          <a:prstGeom prst="rect">
+            <a:avLst/>
+          </a:prstGeom>
+          <a:solidFill>
+            <a:srgbClr val="D4A853"/>
+          </a:solidFill>
+          <a:ln/>
+        </p:spPr>
+      </p:sp>
+      <p:sp>
+        <p:nvSpPr>
+          <p:cNvPr id="24" name="Text 22"/>
+          <p:cNvSpPr/>
+          <p:nvPr/>
+        </p:nvSpPr>
+        <p:spPr>
+          <a:xfrm>
+            <a:off x="457200" y="4617720"/>
+            <a:ext cx="8229600" cy="182880"/>
+          </a:xfrm>
+          <a:prstGeom prst="rect">
+            <a:avLst/>
+          </a:prstGeom>
+          <a:noFill/>
+          <a:ln/>
+        </p:spPr>
+        <p:txBody>
+          <a:bodyPr wrap="square" lIns="0" tIns="0" rIns="0" bIns="0" rtlCol="0" anchor="ctr"/>
+          <a:lstStyle/>
+          <a:p>
+            <a:pPr algn="l" indent="0" marL="0">
+              <a:buNone/>
+            </a:pPr>
+            <a:r>
+              <a:rPr lang="en-US" sz="800" b="1" spc="150" kern="0" dirty="0">
+                <a:solidFill>
+                  <a:srgbClr val="D4A853"/>
+                </a:solidFill>
+                <a:latin typeface="Calibri" pitchFamily="34" charset="0"/>
+                <a:ea typeface="Calibri" pitchFamily="34" charset="-122"/>
+                <a:cs typeface="Calibri" pitchFamily="34" charset="-120"/>
+              </a:rPr>
+              <a:t>OUR APPROACH</a:t>
+            </a:r>
+            <a:endParaRPr lang="en-US" sz="800" dirty="0"/>
+          </a:p>
+        </p:txBody>
+      </p:sp>
+      <p:sp>
+        <p:nvSpPr>
+          <p:cNvPr id="25" name="Text 23"/>
+          <p:cNvSpPr/>
+          <p:nvPr/>
+        </p:nvSpPr>
+        <p:spPr>
+          <a:xfrm>
+            <a:off x="457200" y="4800600"/>
             <a:ext cx="8229600" cy="274320"/>
           </a:xfrm>
           <a:prstGeom prst="rect">
@@ -3959,57 +4811,15 @@
               <a:buNone/>
             </a:pPr>
             <a:r>
-              <a:rPr lang="en-US" sz="1100" b="1" dirty="0">
-                <a:solidFill>
-                  <a:srgbClr val="C4A35A"/>
-                </a:solidFill>
-                <a:latin typeface="Calibri" pitchFamily="34" charset="0"/>
-                <a:ea typeface="Calibri" pitchFamily="34" charset="-122"/>
-                <a:cs typeface="Calibri" pitchFamily="34" charset="-120"/>
-              </a:rPr>
-              <a:t>Our Approach</a:t>
-            </a:r>
-            <a:endParaRPr lang="en-US" sz="1100" dirty="0"/>
-          </a:p>
-        </p:txBody>
-      </p:sp>
-      <p:sp>
-        <p:nvSpPr>
-          <p:cNvPr id="18" name="Text 16"/>
-          <p:cNvSpPr/>
-          <p:nvPr/>
-        </p:nvSpPr>
-        <p:spPr>
-          <a:xfrm>
-            <a:off x="457200" y="4617720"/>
-            <a:ext cx="8229600" cy="365760"/>
-          </a:xfrm>
-          <a:prstGeom prst="rect">
-            <a:avLst/>
-          </a:prstGeom>
-          <a:noFill/>
-          <a:ln/>
-        </p:spPr>
-        <p:txBody>
-          <a:bodyPr wrap="square" lIns="0" tIns="0" rIns="0" bIns="0" rtlCol="0" anchor="ctr"/>
-          <a:lstStyle/>
-          <a:p>
-            <a:pPr algn="l" indent="0" marL="0">
-              <a:lnSpc>
-                <a:spcPct val="130000"/>
-              </a:lnSpc>
-              <a:buNone/>
-            </a:pPr>
-            <a:r>
               <a:rPr lang="en-US" sz="1000" dirty="0">
                 <a:solidFill>
-                  <a:srgbClr val="F5F6FA"/>
-                </a:solidFill>
-                <a:latin typeface="Calibri" pitchFamily="34" charset="0"/>
-                <a:ea typeface="Calibri" pitchFamily="34" charset="-122"/>
-                <a:cs typeface="Calibri" pitchFamily="34" charset="-120"/>
-              </a:rPr>
-              <a:t>The website will be designed as a modern, premium corporate website, with clear business positioning and accurate information rather than simply modifying or hiding the existing Casino Pride identity.</a:t>
+                  <a:srgbClr val="9CA3AF"/>
+                </a:solidFill>
+                <a:latin typeface="Calibri" pitchFamily="34" charset="0"/>
+                <a:ea typeface="Calibri" pitchFamily="34" charset="-122"/>
+                <a:cs typeface="Calibri" pitchFamily="34" charset="-120"/>
+              </a:rPr>
+              <a:t>A modern, premium corporate website with clear business positioning and accurate information — not simply modifying or hiding the existing Casino Pride identity.</a:t>
             </a:r>
             <a:endParaRPr lang="en-US" sz="1000" dirty="0"/>
           </a:p>
@@ -4029,7 +4839,7 @@
     <p:bg>
       <p:bgPr>
         <a:solidFill>
-          <a:srgbClr val="FFFFFF"/>
+          <a:srgbClr val="F8FAFC"/>
         </a:solidFill>
       </p:bgPr>
     </p:bg>
@@ -4049,14 +4859,75 @@
       </p:grpSpPr>
       <p:sp>
         <p:nvSpPr>
-          <p:cNvPr id="2" name="Text 0"/>
+          <p:cNvPr id="2" name="Shape 0"/>
           <p:cNvSpPr/>
           <p:nvPr/>
         </p:nvSpPr>
         <p:spPr>
           <a:xfrm>
             <a:off x="457200" y="365760"/>
-            <a:ext cx="8229600" cy="320040"/>
+            <a:ext cx="2011680" cy="256032"/>
+          </a:xfrm>
+          <a:prstGeom prst="roundRect">
+            <a:avLst>
+              <a:gd name="adj" fmla="val 50000"/>
+            </a:avLst>
+          </a:prstGeom>
+          <a:solidFill>
+            <a:srgbClr val="0A0E1A"/>
+          </a:solidFill>
+          <a:ln/>
+        </p:spPr>
+      </p:sp>
+      <p:sp>
+        <p:nvSpPr>
+          <p:cNvPr id="3" name="Text 1"/>
+          <p:cNvSpPr/>
+          <p:nvPr/>
+        </p:nvSpPr>
+        <p:spPr>
+          <a:xfrm>
+            <a:off x="457200" y="365760"/>
+            <a:ext cx="2011680" cy="256032"/>
+          </a:xfrm>
+          <a:prstGeom prst="rect">
+            <a:avLst/>
+          </a:prstGeom>
+          <a:noFill/>
+          <a:ln/>
+        </p:spPr>
+        <p:txBody>
+          <a:bodyPr wrap="square" lIns="0" tIns="0" rIns="0" bIns="0" rtlCol="0" anchor="ctr"/>
+          <a:lstStyle/>
+          <a:p>
+            <a:pPr algn="ctr" indent="0" marL="0">
+              <a:buNone/>
+            </a:pPr>
+            <a:r>
+              <a:rPr lang="en-US" sz="700" b="1" spc="100" kern="0" dirty="0">
+                <a:solidFill>
+                  <a:srgbClr val="FFFFFF"/>
+                </a:solidFill>
+                <a:latin typeface="Calibri" pitchFamily="34" charset="0"/>
+                <a:ea typeface="Calibri" pitchFamily="34" charset="-122"/>
+                <a:cs typeface="Calibri" pitchFamily="34" charset="-120"/>
+              </a:rPr>
+              <a:t>WEBSITE &amp; COMMERCIAL</a:t>
+            </a:r>
+            <a:endParaRPr lang="en-US" sz="700" dirty="0"/>
+          </a:p>
+        </p:txBody>
+      </p:sp>
+      <p:sp>
+        <p:nvSpPr>
+          <p:cNvPr id="4" name="Text 2"/>
+          <p:cNvSpPr/>
+          <p:nvPr/>
+        </p:nvSpPr>
+        <p:spPr>
+          <a:xfrm>
+            <a:off x="457200" y="777240"/>
+            <a:ext cx="5029200" cy="457200"/>
           </a:xfrm>
           <a:prstGeom prst="rect">
             <a:avLst/>
@@ -4072,48 +4943,9 @@
               <a:buNone/>
             </a:pPr>
             <a:r>
-              <a:rPr lang="en-US" sz="1000" b="1" spc="200" kern="0" dirty="0">
-                <a:solidFill>
-                  <a:srgbClr val="0F1B3D"/>
-                </a:solidFill>
-                <a:latin typeface="Calibri" pitchFamily="34" charset="0"/>
-                <a:ea typeface="Calibri" pitchFamily="34" charset="-122"/>
-                <a:cs typeface="Calibri" pitchFamily="34" charset="-120"/>
-              </a:rPr>
-              <a:t>WEBSITE &amp; COMMERCIAL</a:t>
-            </a:r>
-            <a:endParaRPr lang="en-US" sz="1000" dirty="0"/>
-          </a:p>
-        </p:txBody>
-      </p:sp>
-      <p:sp>
-        <p:nvSpPr>
-          <p:cNvPr id="3" name="Text 1"/>
-          <p:cNvSpPr/>
-          <p:nvPr/>
-        </p:nvSpPr>
-        <p:spPr>
-          <a:xfrm>
-            <a:off x="457200" y="731520"/>
-            <a:ext cx="5029200" cy="457200"/>
-          </a:xfrm>
-          <a:prstGeom prst="rect">
-            <a:avLst/>
-          </a:prstGeom>
-          <a:noFill/>
-          <a:ln/>
-        </p:spPr>
-        <p:txBody>
-          <a:bodyPr wrap="square" lIns="0" tIns="0" rIns="0" bIns="0" rtlCol="0" anchor="ctr"/>
-          <a:lstStyle/>
-          <a:p>
-            <a:pPr algn="l" indent="0" marL="0">
-              <a:buNone/>
-            </a:pPr>
-            <a:r>
               <a:rPr lang="en-US" sz="2200" b="1" dirty="0">
                 <a:solidFill>
-                  <a:srgbClr val="0F1B3D"/>
+                  <a:srgbClr val="111827"/>
                 </a:solidFill>
                 <a:latin typeface="Cambria" pitchFamily="34" charset="0"/>
                 <a:ea typeface="Cambria" pitchFamily="34" charset="-122"/>
@@ -4127,14 +4959,73 @@
       </p:sp>
       <p:sp>
         <p:nvSpPr>
-          <p:cNvPr id="4" name="Text 2"/>
-          <p:cNvSpPr/>
-          <p:nvPr/>
-        </p:nvSpPr>
-        <p:spPr>
-          <a:xfrm>
-            <a:off x="457200" y="1325880"/>
-            <a:ext cx="4572000" cy="274320"/>
+          <p:cNvPr id="5" name="Shape 3"/>
+          <p:cNvSpPr/>
+          <p:nvPr/>
+        </p:nvSpPr>
+        <p:spPr>
+          <a:xfrm>
+            <a:off x="457200" y="1463040"/>
+            <a:ext cx="182880" cy="182880"/>
+          </a:xfrm>
+          <a:prstGeom prst="ellipse">
+            <a:avLst/>
+          </a:prstGeom>
+          <a:solidFill>
+            <a:srgbClr val="10B981"/>
+          </a:solidFill>
+          <a:ln/>
+        </p:spPr>
+      </p:sp>
+      <p:sp>
+        <p:nvSpPr>
+          <p:cNvPr id="6" name="Text 4"/>
+          <p:cNvSpPr/>
+          <p:nvPr/>
+        </p:nvSpPr>
+        <p:spPr>
+          <a:xfrm>
+            <a:off x="457200" y="1444752"/>
+            <a:ext cx="182880" cy="201168"/>
+          </a:xfrm>
+          <a:prstGeom prst="rect">
+            <a:avLst/>
+          </a:prstGeom>
+          <a:noFill/>
+          <a:ln/>
+        </p:spPr>
+        <p:txBody>
+          <a:bodyPr wrap="square" lIns="0" tIns="0" rIns="0" bIns="0" rtlCol="0" anchor="ctr"/>
+          <a:lstStyle/>
+          <a:p>
+            <a:pPr algn="ctr" indent="0" marL="0">
+              <a:buNone/>
+            </a:pPr>
+            <a:r>
+              <a:rPr lang="en-US" sz="800" b="1" dirty="0">
+                <a:solidFill>
+                  <a:srgbClr val="FFFFFF"/>
+                </a:solidFill>
+                <a:latin typeface="Calibri" pitchFamily="34" charset="0"/>
+                <a:ea typeface="Calibri" pitchFamily="34" charset="-122"/>
+                <a:cs typeface="Calibri" pitchFamily="34" charset="-120"/>
+              </a:rPr>
+              <a:t>✓</a:t>
+            </a:r>
+            <a:endParaRPr lang="en-US" sz="800" dirty="0"/>
+          </a:p>
+        </p:txBody>
+      </p:sp>
+      <p:sp>
+        <p:nvSpPr>
+          <p:cNvPr id="7" name="Text 5"/>
+          <p:cNvSpPr/>
+          <p:nvPr/>
+        </p:nvSpPr>
+        <p:spPr>
+          <a:xfrm>
+            <a:off x="731520" y="1417320"/>
+            <a:ext cx="2194560" cy="274320"/>
           </a:xfrm>
           <a:prstGeom prst="rect">
             <a:avLst/>
@@ -4150,52 +5041,9 @@
               <a:buNone/>
             </a:pPr>
             <a:r>
-              <a:rPr lang="en-US" sz="1100" b="1" dirty="0">
-                <a:solidFill>
-                  <a:srgbClr val="0F1B3D"/>
-                </a:solidFill>
-                <a:latin typeface="Calibri" pitchFamily="34" charset="0"/>
-                <a:ea typeface="Calibri" pitchFamily="34" charset="-122"/>
-                <a:cs typeface="Calibri" pitchFamily="34" charset="-120"/>
-              </a:rPr>
-              <a:t>Included</a:t>
-            </a:r>
-            <a:endParaRPr lang="en-US" sz="1100" dirty="0"/>
-          </a:p>
-        </p:txBody>
-      </p:sp>
-      <p:sp>
-        <p:nvSpPr>
-          <p:cNvPr id="5" name="Text 3"/>
-          <p:cNvSpPr/>
-          <p:nvPr/>
-        </p:nvSpPr>
-        <p:spPr>
-          <a:xfrm>
-            <a:off x="457200" y="1600200"/>
-            <a:ext cx="4572000" cy="2377440"/>
-          </a:xfrm>
-          <a:prstGeom prst="rect">
-            <a:avLst/>
-          </a:prstGeom>
-          <a:noFill/>
-          <a:ln/>
-        </p:spPr>
-        <p:txBody>
-          <a:bodyPr wrap="square" lIns="0" tIns="0" rIns="0" bIns="0" rtlCol="0" anchor="ctr"/>
-          <a:lstStyle/>
-          <a:p>
-            <a:pPr algn="l" marL="342900" indent="-342900">
-              <a:spcAft>
-                <a:spcPts val="400"/>
-              </a:spcAft>
-              <a:buSzPct val="100000"/>
-              <a:buChar char="•"/>
-            </a:pPr>
-            <a:r>
-              <a:rPr lang="en-US" sz="1100" dirty="0">
-                <a:solidFill>
-                  <a:srgbClr val="1A1A2E"/>
+              <a:rPr lang="en-US" sz="1050" dirty="0">
+                <a:solidFill>
+                  <a:srgbClr val="374151"/>
                 </a:solidFill>
                 <a:latin typeface="Calibri" pitchFamily="34" charset="0"/>
                 <a:ea typeface="Calibri" pitchFamily="34" charset="-122"/>
@@ -4203,20 +5051,97 @@
               </a:rPr>
               <a:t>Modern UI/UX design</a:t>
             </a:r>
-            <a:endParaRPr lang="en-US" sz="1100" dirty="0"/>
-          </a:p>
-          <a:p>
-            <a:pPr algn="l" marL="342900" indent="-342900">
-              <a:spcAft>
-                <a:spcPts val="400"/>
-              </a:spcAft>
-              <a:buSzPct val="100000"/>
-              <a:buChar char="•"/>
-            </a:pPr>
-            <a:r>
-              <a:rPr lang="en-US" sz="1100" dirty="0">
-                <a:solidFill>
-                  <a:srgbClr val="1A1A2E"/>
+            <a:endParaRPr lang="en-US" sz="1050" dirty="0"/>
+          </a:p>
+        </p:txBody>
+      </p:sp>
+      <p:sp>
+        <p:nvSpPr>
+          <p:cNvPr id="8" name="Shape 6"/>
+          <p:cNvSpPr/>
+          <p:nvPr/>
+        </p:nvSpPr>
+        <p:spPr>
+          <a:xfrm>
+            <a:off x="457200" y="1847088"/>
+            <a:ext cx="182880" cy="182880"/>
+          </a:xfrm>
+          <a:prstGeom prst="ellipse">
+            <a:avLst/>
+          </a:prstGeom>
+          <a:solidFill>
+            <a:srgbClr val="10B981"/>
+          </a:solidFill>
+          <a:ln/>
+        </p:spPr>
+      </p:sp>
+      <p:sp>
+        <p:nvSpPr>
+          <p:cNvPr id="9" name="Text 7"/>
+          <p:cNvSpPr/>
+          <p:nvPr/>
+        </p:nvSpPr>
+        <p:spPr>
+          <a:xfrm>
+            <a:off x="457200" y="1828800"/>
+            <a:ext cx="182880" cy="201168"/>
+          </a:xfrm>
+          <a:prstGeom prst="rect">
+            <a:avLst/>
+          </a:prstGeom>
+          <a:noFill/>
+          <a:ln/>
+        </p:spPr>
+        <p:txBody>
+          <a:bodyPr wrap="square" lIns="0" tIns="0" rIns="0" bIns="0" rtlCol="0" anchor="ctr"/>
+          <a:lstStyle/>
+          <a:p>
+            <a:pPr algn="ctr" indent="0" marL="0">
+              <a:buNone/>
+            </a:pPr>
+            <a:r>
+              <a:rPr lang="en-US" sz="800" b="1" dirty="0">
+                <a:solidFill>
+                  <a:srgbClr val="FFFFFF"/>
+                </a:solidFill>
+                <a:latin typeface="Calibri" pitchFamily="34" charset="0"/>
+                <a:ea typeface="Calibri" pitchFamily="34" charset="-122"/>
+                <a:cs typeface="Calibri" pitchFamily="34" charset="-120"/>
+              </a:rPr>
+              <a:t>✓</a:t>
+            </a:r>
+            <a:endParaRPr lang="en-US" sz="800" dirty="0"/>
+          </a:p>
+        </p:txBody>
+      </p:sp>
+      <p:sp>
+        <p:nvSpPr>
+          <p:cNvPr id="10" name="Text 8"/>
+          <p:cNvSpPr/>
+          <p:nvPr/>
+        </p:nvSpPr>
+        <p:spPr>
+          <a:xfrm>
+            <a:off x="731520" y="1801368"/>
+            <a:ext cx="2194560" cy="274320"/>
+          </a:xfrm>
+          <a:prstGeom prst="rect">
+            <a:avLst/>
+          </a:prstGeom>
+          <a:noFill/>
+          <a:ln/>
+        </p:spPr>
+        <p:txBody>
+          <a:bodyPr wrap="square" lIns="0" tIns="0" rIns="0" bIns="0" rtlCol="0" anchor="ctr"/>
+          <a:lstStyle/>
+          <a:p>
+            <a:pPr algn="l" indent="0" marL="0">
+              <a:buNone/>
+            </a:pPr>
+            <a:r>
+              <a:rPr lang="en-US" sz="1050" dirty="0">
+                <a:solidFill>
+                  <a:srgbClr val="374151"/>
                 </a:solidFill>
                 <a:latin typeface="Calibri" pitchFamily="34" charset="0"/>
                 <a:ea typeface="Calibri" pitchFamily="34" charset="-122"/>
@@ -4224,20 +5149,97 @@
               </a:rPr>
               <a:t>5-page responsive website</a:t>
             </a:r>
-            <a:endParaRPr lang="en-US" sz="1100" dirty="0"/>
-          </a:p>
-          <a:p>
-            <a:pPr algn="l" marL="342900" indent="-342900">
-              <a:spcAft>
-                <a:spcPts val="400"/>
-              </a:spcAft>
-              <a:buSzPct val="100000"/>
-              <a:buChar char="•"/>
-            </a:pPr>
-            <a:r>
-              <a:rPr lang="en-US" sz="1100" dirty="0">
-                <a:solidFill>
-                  <a:srgbClr val="1A1A2E"/>
+            <a:endParaRPr lang="en-US" sz="1050" dirty="0"/>
+          </a:p>
+        </p:txBody>
+      </p:sp>
+      <p:sp>
+        <p:nvSpPr>
+          <p:cNvPr id="11" name="Shape 9"/>
+          <p:cNvSpPr/>
+          <p:nvPr/>
+        </p:nvSpPr>
+        <p:spPr>
+          <a:xfrm>
+            <a:off x="457200" y="2231136"/>
+            <a:ext cx="182880" cy="182880"/>
+          </a:xfrm>
+          <a:prstGeom prst="ellipse">
+            <a:avLst/>
+          </a:prstGeom>
+          <a:solidFill>
+            <a:srgbClr val="10B981"/>
+          </a:solidFill>
+          <a:ln/>
+        </p:spPr>
+      </p:sp>
+      <p:sp>
+        <p:nvSpPr>
+          <p:cNvPr id="12" name="Text 10"/>
+          <p:cNvSpPr/>
+          <p:nvPr/>
+        </p:nvSpPr>
+        <p:spPr>
+          <a:xfrm>
+            <a:off x="457200" y="2212848"/>
+            <a:ext cx="182880" cy="201168"/>
+          </a:xfrm>
+          <a:prstGeom prst="rect">
+            <a:avLst/>
+          </a:prstGeom>
+          <a:noFill/>
+          <a:ln/>
+        </p:spPr>
+        <p:txBody>
+          <a:bodyPr wrap="square" lIns="0" tIns="0" rIns="0" bIns="0" rtlCol="0" anchor="ctr"/>
+          <a:lstStyle/>
+          <a:p>
+            <a:pPr algn="ctr" indent="0" marL="0">
+              <a:buNone/>
+            </a:pPr>
+            <a:r>
+              <a:rPr lang="en-US" sz="800" b="1" dirty="0">
+                <a:solidFill>
+                  <a:srgbClr val="FFFFFF"/>
+                </a:solidFill>
+                <a:latin typeface="Calibri" pitchFamily="34" charset="0"/>
+                <a:ea typeface="Calibri" pitchFamily="34" charset="-122"/>
+                <a:cs typeface="Calibri" pitchFamily="34" charset="-120"/>
+              </a:rPr>
+              <a:t>✓</a:t>
+            </a:r>
+            <a:endParaRPr lang="en-US" sz="800" dirty="0"/>
+          </a:p>
+        </p:txBody>
+      </p:sp>
+      <p:sp>
+        <p:nvSpPr>
+          <p:cNvPr id="13" name="Text 11"/>
+          <p:cNvSpPr/>
+          <p:nvPr/>
+        </p:nvSpPr>
+        <p:spPr>
+          <a:xfrm>
+            <a:off x="731520" y="2185416"/>
+            <a:ext cx="2194560" cy="274320"/>
+          </a:xfrm>
+          <a:prstGeom prst="rect">
+            <a:avLst/>
+          </a:prstGeom>
+          <a:noFill/>
+          <a:ln/>
+        </p:spPr>
+        <p:txBody>
+          <a:bodyPr wrap="square" lIns="0" tIns="0" rIns="0" bIns="0" rtlCol="0" anchor="ctr"/>
+          <a:lstStyle/>
+          <a:p>
+            <a:pPr algn="l" indent="0" marL="0">
+              <a:buNone/>
+            </a:pPr>
+            <a:r>
+              <a:rPr lang="en-US" sz="1050" dirty="0">
+                <a:solidFill>
+                  <a:srgbClr val="374151"/>
                 </a:solidFill>
                 <a:latin typeface="Calibri" pitchFamily="34" charset="0"/>
                 <a:ea typeface="Calibri" pitchFamily="34" charset="-122"/>
@@ -4245,20 +5247,97 @@
               </a:rPr>
               <a:t>Desktop &amp; mobile optimisation</a:t>
             </a:r>
-            <a:endParaRPr lang="en-US" sz="1100" dirty="0"/>
-          </a:p>
-          <a:p>
-            <a:pPr algn="l" marL="342900" indent="-342900">
-              <a:spcAft>
-                <a:spcPts val="400"/>
-              </a:spcAft>
-              <a:buSzPct val="100000"/>
-              <a:buChar char="•"/>
-            </a:pPr>
-            <a:r>
-              <a:rPr lang="en-US" sz="1100" dirty="0">
-                <a:solidFill>
-                  <a:srgbClr val="1A1A2E"/>
+            <a:endParaRPr lang="en-US" sz="1050" dirty="0"/>
+          </a:p>
+        </p:txBody>
+      </p:sp>
+      <p:sp>
+        <p:nvSpPr>
+          <p:cNvPr id="14" name="Shape 12"/>
+          <p:cNvSpPr/>
+          <p:nvPr/>
+        </p:nvSpPr>
+        <p:spPr>
+          <a:xfrm>
+            <a:off x="457200" y="2615184"/>
+            <a:ext cx="182880" cy="182880"/>
+          </a:xfrm>
+          <a:prstGeom prst="ellipse">
+            <a:avLst/>
+          </a:prstGeom>
+          <a:solidFill>
+            <a:srgbClr val="10B981"/>
+          </a:solidFill>
+          <a:ln/>
+        </p:spPr>
+      </p:sp>
+      <p:sp>
+        <p:nvSpPr>
+          <p:cNvPr id="15" name="Text 13"/>
+          <p:cNvSpPr/>
+          <p:nvPr/>
+        </p:nvSpPr>
+        <p:spPr>
+          <a:xfrm>
+            <a:off x="457200" y="2596896"/>
+            <a:ext cx="182880" cy="201168"/>
+          </a:xfrm>
+          <a:prstGeom prst="rect">
+            <a:avLst/>
+          </a:prstGeom>
+          <a:noFill/>
+          <a:ln/>
+        </p:spPr>
+        <p:txBody>
+          <a:bodyPr wrap="square" lIns="0" tIns="0" rIns="0" bIns="0" rtlCol="0" anchor="ctr"/>
+          <a:lstStyle/>
+          <a:p>
+            <a:pPr algn="ctr" indent="0" marL="0">
+              <a:buNone/>
+            </a:pPr>
+            <a:r>
+              <a:rPr lang="en-US" sz="800" b="1" dirty="0">
+                <a:solidFill>
+                  <a:srgbClr val="FFFFFF"/>
+                </a:solidFill>
+                <a:latin typeface="Calibri" pitchFamily="34" charset="0"/>
+                <a:ea typeface="Calibri" pitchFamily="34" charset="-122"/>
+                <a:cs typeface="Calibri" pitchFamily="34" charset="-120"/>
+              </a:rPr>
+              <a:t>✓</a:t>
+            </a:r>
+            <a:endParaRPr lang="en-US" sz="800" dirty="0"/>
+          </a:p>
+        </p:txBody>
+      </p:sp>
+      <p:sp>
+        <p:nvSpPr>
+          <p:cNvPr id="16" name="Text 14"/>
+          <p:cNvSpPr/>
+          <p:nvPr/>
+        </p:nvSpPr>
+        <p:spPr>
+          <a:xfrm>
+            <a:off x="731520" y="2569464"/>
+            <a:ext cx="2194560" cy="274320"/>
+          </a:xfrm>
+          <a:prstGeom prst="rect">
+            <a:avLst/>
+          </a:prstGeom>
+          <a:noFill/>
+          <a:ln/>
+        </p:spPr>
+        <p:txBody>
+          <a:bodyPr wrap="square" lIns="0" tIns="0" rIns="0" bIns="0" rtlCol="0" anchor="ctr"/>
+          <a:lstStyle/>
+          <a:p>
+            <a:pPr algn="l" indent="0" marL="0">
+              <a:buNone/>
+            </a:pPr>
+            <a:r>
+              <a:rPr lang="en-US" sz="1050" dirty="0">
+                <a:solidFill>
+                  <a:srgbClr val="374151"/>
                 </a:solidFill>
                 <a:latin typeface="Calibri" pitchFamily="34" charset="0"/>
                 <a:ea typeface="Calibri" pitchFamily="34" charset="-122"/>
@@ -4266,20 +5345,97 @@
               </a:rPr>
               <a:t>Professional content structuring</a:t>
             </a:r>
-            <a:endParaRPr lang="en-US" sz="1100" dirty="0"/>
-          </a:p>
-          <a:p>
-            <a:pPr algn="l" marL="342900" indent="-342900">
-              <a:spcAft>
-                <a:spcPts val="400"/>
-              </a:spcAft>
-              <a:buSzPct val="100000"/>
-              <a:buChar char="•"/>
-            </a:pPr>
-            <a:r>
-              <a:rPr lang="en-US" sz="1100" dirty="0">
-                <a:solidFill>
-                  <a:srgbClr val="1A1A2E"/>
+            <a:endParaRPr lang="en-US" sz="1050" dirty="0"/>
+          </a:p>
+        </p:txBody>
+      </p:sp>
+      <p:sp>
+        <p:nvSpPr>
+          <p:cNvPr id="17" name="Shape 15"/>
+          <p:cNvSpPr/>
+          <p:nvPr/>
+        </p:nvSpPr>
+        <p:spPr>
+          <a:xfrm>
+            <a:off x="457200" y="2999232"/>
+            <a:ext cx="182880" cy="182880"/>
+          </a:xfrm>
+          <a:prstGeom prst="ellipse">
+            <a:avLst/>
+          </a:prstGeom>
+          <a:solidFill>
+            <a:srgbClr val="10B981"/>
+          </a:solidFill>
+          <a:ln/>
+        </p:spPr>
+      </p:sp>
+      <p:sp>
+        <p:nvSpPr>
+          <p:cNvPr id="18" name="Text 16"/>
+          <p:cNvSpPr/>
+          <p:nvPr/>
+        </p:nvSpPr>
+        <p:spPr>
+          <a:xfrm>
+            <a:off x="457200" y="2980944"/>
+            <a:ext cx="182880" cy="201168"/>
+          </a:xfrm>
+          <a:prstGeom prst="rect">
+            <a:avLst/>
+          </a:prstGeom>
+          <a:noFill/>
+          <a:ln/>
+        </p:spPr>
+        <p:txBody>
+          <a:bodyPr wrap="square" lIns="0" tIns="0" rIns="0" bIns="0" rtlCol="0" anchor="ctr"/>
+          <a:lstStyle/>
+          <a:p>
+            <a:pPr algn="ctr" indent="0" marL="0">
+              <a:buNone/>
+            </a:pPr>
+            <a:r>
+              <a:rPr lang="en-US" sz="800" b="1" dirty="0">
+                <a:solidFill>
+                  <a:srgbClr val="FFFFFF"/>
+                </a:solidFill>
+                <a:latin typeface="Calibri" pitchFamily="34" charset="0"/>
+                <a:ea typeface="Calibri" pitchFamily="34" charset="-122"/>
+                <a:cs typeface="Calibri" pitchFamily="34" charset="-120"/>
+              </a:rPr>
+              <a:t>✓</a:t>
+            </a:r>
+            <a:endParaRPr lang="en-US" sz="800" dirty="0"/>
+          </a:p>
+        </p:txBody>
+      </p:sp>
+      <p:sp>
+        <p:nvSpPr>
+          <p:cNvPr id="19" name="Text 17"/>
+          <p:cNvSpPr/>
+          <p:nvPr/>
+        </p:nvSpPr>
+        <p:spPr>
+          <a:xfrm>
+            <a:off x="731520" y="2953512"/>
+            <a:ext cx="2194560" cy="274320"/>
+          </a:xfrm>
+          <a:prstGeom prst="rect">
+            <a:avLst/>
+          </a:prstGeom>
+          <a:noFill/>
+          <a:ln/>
+        </p:spPr>
+        <p:txBody>
+          <a:bodyPr wrap="square" lIns="0" tIns="0" rIns="0" bIns="0" rtlCol="0" anchor="ctr"/>
+          <a:lstStyle/>
+          <a:p>
+            <a:pPr algn="l" indent="0" marL="0">
+              <a:buNone/>
+            </a:pPr>
+            <a:r>
+              <a:rPr lang="en-US" sz="1050" dirty="0">
+                <a:solidFill>
+                  <a:srgbClr val="374151"/>
                 </a:solidFill>
                 <a:latin typeface="Calibri" pitchFamily="34" charset="0"/>
                 <a:ea typeface="Calibri" pitchFamily="34" charset="-122"/>
@@ -4287,20 +5443,97 @@
               </a:rPr>
               <a:t>Image integration</a:t>
             </a:r>
-            <a:endParaRPr lang="en-US" sz="1100" dirty="0"/>
-          </a:p>
-          <a:p>
-            <a:pPr algn="l" marL="342900" indent="-342900">
-              <a:spcAft>
-                <a:spcPts val="400"/>
-              </a:spcAft>
-              <a:buSzPct val="100000"/>
-              <a:buChar char="•"/>
-            </a:pPr>
-            <a:r>
-              <a:rPr lang="en-US" sz="1100" dirty="0">
-                <a:solidFill>
-                  <a:srgbClr val="1A1A2E"/>
+            <a:endParaRPr lang="en-US" sz="1050" dirty="0"/>
+          </a:p>
+        </p:txBody>
+      </p:sp>
+      <p:sp>
+        <p:nvSpPr>
+          <p:cNvPr id="20" name="Shape 18"/>
+          <p:cNvSpPr/>
+          <p:nvPr/>
+        </p:nvSpPr>
+        <p:spPr>
+          <a:xfrm>
+            <a:off x="3017520" y="1463040"/>
+            <a:ext cx="182880" cy="182880"/>
+          </a:xfrm>
+          <a:prstGeom prst="ellipse">
+            <a:avLst/>
+          </a:prstGeom>
+          <a:solidFill>
+            <a:srgbClr val="10B981"/>
+          </a:solidFill>
+          <a:ln/>
+        </p:spPr>
+      </p:sp>
+      <p:sp>
+        <p:nvSpPr>
+          <p:cNvPr id="21" name="Text 19"/>
+          <p:cNvSpPr/>
+          <p:nvPr/>
+        </p:nvSpPr>
+        <p:spPr>
+          <a:xfrm>
+            <a:off x="3017520" y="1444752"/>
+            <a:ext cx="182880" cy="201168"/>
+          </a:xfrm>
+          <a:prstGeom prst="rect">
+            <a:avLst/>
+          </a:prstGeom>
+          <a:noFill/>
+          <a:ln/>
+        </p:spPr>
+        <p:txBody>
+          <a:bodyPr wrap="square" lIns="0" tIns="0" rIns="0" bIns="0" rtlCol="0" anchor="ctr"/>
+          <a:lstStyle/>
+          <a:p>
+            <a:pPr algn="ctr" indent="0" marL="0">
+              <a:buNone/>
+            </a:pPr>
+            <a:r>
+              <a:rPr lang="en-US" sz="800" b="1" dirty="0">
+                <a:solidFill>
+                  <a:srgbClr val="FFFFFF"/>
+                </a:solidFill>
+                <a:latin typeface="Calibri" pitchFamily="34" charset="0"/>
+                <a:ea typeface="Calibri" pitchFamily="34" charset="-122"/>
+                <a:cs typeface="Calibri" pitchFamily="34" charset="-120"/>
+              </a:rPr>
+              <a:t>✓</a:t>
+            </a:r>
+            <a:endParaRPr lang="en-US" sz="800" dirty="0"/>
+          </a:p>
+        </p:txBody>
+      </p:sp>
+      <p:sp>
+        <p:nvSpPr>
+          <p:cNvPr id="22" name="Text 20"/>
+          <p:cNvSpPr/>
+          <p:nvPr/>
+        </p:nvSpPr>
+        <p:spPr>
+          <a:xfrm>
+            <a:off x="3291840" y="1417320"/>
+            <a:ext cx="2194560" cy="274320"/>
+          </a:xfrm>
+          <a:prstGeom prst="rect">
+            <a:avLst/>
+          </a:prstGeom>
+          <a:noFill/>
+          <a:ln/>
+        </p:spPr>
+        <p:txBody>
+          <a:bodyPr wrap="square" lIns="0" tIns="0" rIns="0" bIns="0" rtlCol="0" anchor="ctr"/>
+          <a:lstStyle/>
+          <a:p>
+            <a:pPr algn="l" indent="0" marL="0">
+              <a:buNone/>
+            </a:pPr>
+            <a:r>
+              <a:rPr lang="en-US" sz="1050" dirty="0">
+                <a:solidFill>
+                  <a:srgbClr val="374151"/>
                 </a:solidFill>
                 <a:latin typeface="Calibri" pitchFamily="34" charset="0"/>
                 <a:ea typeface="Calibri" pitchFamily="34" charset="-122"/>
@@ -4308,20 +5541,97 @@
               </a:rPr>
               <a:t>Contact/enquiry form</a:t>
             </a:r>
-            <a:endParaRPr lang="en-US" sz="1100" dirty="0"/>
-          </a:p>
-          <a:p>
-            <a:pPr algn="l" marL="342900" indent="-342900">
-              <a:spcAft>
-                <a:spcPts val="400"/>
-              </a:spcAft>
-              <a:buSzPct val="100000"/>
-              <a:buChar char="•"/>
-            </a:pPr>
-            <a:r>
-              <a:rPr lang="en-US" sz="1100" dirty="0">
-                <a:solidFill>
-                  <a:srgbClr val="1A1A2E"/>
+            <a:endParaRPr lang="en-US" sz="1050" dirty="0"/>
+          </a:p>
+        </p:txBody>
+      </p:sp>
+      <p:sp>
+        <p:nvSpPr>
+          <p:cNvPr id="23" name="Shape 21"/>
+          <p:cNvSpPr/>
+          <p:nvPr/>
+        </p:nvSpPr>
+        <p:spPr>
+          <a:xfrm>
+            <a:off x="3017520" y="1847088"/>
+            <a:ext cx="182880" cy="182880"/>
+          </a:xfrm>
+          <a:prstGeom prst="ellipse">
+            <a:avLst/>
+          </a:prstGeom>
+          <a:solidFill>
+            <a:srgbClr val="10B981"/>
+          </a:solidFill>
+          <a:ln/>
+        </p:spPr>
+      </p:sp>
+      <p:sp>
+        <p:nvSpPr>
+          <p:cNvPr id="24" name="Text 22"/>
+          <p:cNvSpPr/>
+          <p:nvPr/>
+        </p:nvSpPr>
+        <p:spPr>
+          <a:xfrm>
+            <a:off x="3017520" y="1828800"/>
+            <a:ext cx="182880" cy="201168"/>
+          </a:xfrm>
+          <a:prstGeom prst="rect">
+            <a:avLst/>
+          </a:prstGeom>
+          <a:noFill/>
+          <a:ln/>
+        </p:spPr>
+        <p:txBody>
+          <a:bodyPr wrap="square" lIns="0" tIns="0" rIns="0" bIns="0" rtlCol="0" anchor="ctr"/>
+          <a:lstStyle/>
+          <a:p>
+            <a:pPr algn="ctr" indent="0" marL="0">
+              <a:buNone/>
+            </a:pPr>
+            <a:r>
+              <a:rPr lang="en-US" sz="800" b="1" dirty="0">
+                <a:solidFill>
+                  <a:srgbClr val="FFFFFF"/>
+                </a:solidFill>
+                <a:latin typeface="Calibri" pitchFamily="34" charset="0"/>
+                <a:ea typeface="Calibri" pitchFamily="34" charset="-122"/>
+                <a:cs typeface="Calibri" pitchFamily="34" charset="-120"/>
+              </a:rPr>
+              <a:t>✓</a:t>
+            </a:r>
+            <a:endParaRPr lang="en-US" sz="800" dirty="0"/>
+          </a:p>
+        </p:txBody>
+      </p:sp>
+      <p:sp>
+        <p:nvSpPr>
+          <p:cNvPr id="25" name="Text 23"/>
+          <p:cNvSpPr/>
+          <p:nvPr/>
+        </p:nvSpPr>
+        <p:spPr>
+          <a:xfrm>
+            <a:off x="3291840" y="1801368"/>
+            <a:ext cx="2194560" cy="274320"/>
+          </a:xfrm>
+          <a:prstGeom prst="rect">
+            <a:avLst/>
+          </a:prstGeom>
+          <a:noFill/>
+          <a:ln/>
+        </p:spPr>
+        <p:txBody>
+          <a:bodyPr wrap="square" lIns="0" tIns="0" rIns="0" bIns="0" rtlCol="0" anchor="ctr"/>
+          <a:lstStyle/>
+          <a:p>
+            <a:pPr algn="l" indent="0" marL="0">
+              <a:buNone/>
+            </a:pPr>
+            <a:r>
+              <a:rPr lang="en-US" sz="1050" dirty="0">
+                <a:solidFill>
+                  <a:srgbClr val="374151"/>
                 </a:solidFill>
                 <a:latin typeface="Calibri" pitchFamily="34" charset="0"/>
                 <a:ea typeface="Calibri" pitchFamily="34" charset="-122"/>
@@ -4329,20 +5639,97 @@
               </a:rPr>
               <a:t>Google Maps integration</a:t>
             </a:r>
-            <a:endParaRPr lang="en-US" sz="1100" dirty="0"/>
-          </a:p>
-          <a:p>
-            <a:pPr algn="l" marL="342900" indent="-342900">
-              <a:spcAft>
-                <a:spcPts val="400"/>
-              </a:spcAft>
-              <a:buSzPct val="100000"/>
-              <a:buChar char="•"/>
-            </a:pPr>
-            <a:r>
-              <a:rPr lang="en-US" sz="1100" dirty="0">
-                <a:solidFill>
-                  <a:srgbClr val="1A1A2E"/>
+            <a:endParaRPr lang="en-US" sz="1050" dirty="0"/>
+          </a:p>
+        </p:txBody>
+      </p:sp>
+      <p:sp>
+        <p:nvSpPr>
+          <p:cNvPr id="26" name="Shape 24"/>
+          <p:cNvSpPr/>
+          <p:nvPr/>
+        </p:nvSpPr>
+        <p:spPr>
+          <a:xfrm>
+            <a:off x="3017520" y="2231136"/>
+            <a:ext cx="182880" cy="182880"/>
+          </a:xfrm>
+          <a:prstGeom prst="ellipse">
+            <a:avLst/>
+          </a:prstGeom>
+          <a:solidFill>
+            <a:srgbClr val="10B981"/>
+          </a:solidFill>
+          <a:ln/>
+        </p:spPr>
+      </p:sp>
+      <p:sp>
+        <p:nvSpPr>
+          <p:cNvPr id="27" name="Text 25"/>
+          <p:cNvSpPr/>
+          <p:nvPr/>
+        </p:nvSpPr>
+        <p:spPr>
+          <a:xfrm>
+            <a:off x="3017520" y="2212848"/>
+            <a:ext cx="182880" cy="201168"/>
+          </a:xfrm>
+          <a:prstGeom prst="rect">
+            <a:avLst/>
+          </a:prstGeom>
+          <a:noFill/>
+          <a:ln/>
+        </p:spPr>
+        <p:txBody>
+          <a:bodyPr wrap="square" lIns="0" tIns="0" rIns="0" bIns="0" rtlCol="0" anchor="ctr"/>
+          <a:lstStyle/>
+          <a:p>
+            <a:pPr algn="ctr" indent="0" marL="0">
+              <a:buNone/>
+            </a:pPr>
+            <a:r>
+              <a:rPr lang="en-US" sz="800" b="1" dirty="0">
+                <a:solidFill>
+                  <a:srgbClr val="FFFFFF"/>
+                </a:solidFill>
+                <a:latin typeface="Calibri" pitchFamily="34" charset="0"/>
+                <a:ea typeface="Calibri" pitchFamily="34" charset="-122"/>
+                <a:cs typeface="Calibri" pitchFamily="34" charset="-120"/>
+              </a:rPr>
+              <a:t>✓</a:t>
+            </a:r>
+            <a:endParaRPr lang="en-US" sz="800" dirty="0"/>
+          </a:p>
+        </p:txBody>
+      </p:sp>
+      <p:sp>
+        <p:nvSpPr>
+          <p:cNvPr id="28" name="Text 26"/>
+          <p:cNvSpPr/>
+          <p:nvPr/>
+        </p:nvSpPr>
+        <p:spPr>
+          <a:xfrm>
+            <a:off x="3291840" y="2185416"/>
+            <a:ext cx="2194560" cy="274320"/>
+          </a:xfrm>
+          <a:prstGeom prst="rect">
+            <a:avLst/>
+          </a:prstGeom>
+          <a:noFill/>
+          <a:ln/>
+        </p:spPr>
+        <p:txBody>
+          <a:bodyPr wrap="square" lIns="0" tIns="0" rIns="0" bIns="0" rtlCol="0" anchor="ctr"/>
+          <a:lstStyle/>
+          <a:p>
+            <a:pPr algn="l" indent="0" marL="0">
+              <a:buNone/>
+            </a:pPr>
+            <a:r>
+              <a:rPr lang="en-US" sz="1050" dirty="0">
+                <a:solidFill>
+                  <a:srgbClr val="374151"/>
                 </a:solidFill>
                 <a:latin typeface="Calibri" pitchFamily="34" charset="0"/>
                 <a:ea typeface="Calibri" pitchFamily="34" charset="-122"/>
@@ -4350,20 +5737,97 @@
               </a:rPr>
               <a:t>Social media integration</a:t>
             </a:r>
-            <a:endParaRPr lang="en-US" sz="1100" dirty="0"/>
-          </a:p>
-          <a:p>
-            <a:pPr algn="l" marL="342900" indent="-342900">
-              <a:spcAft>
-                <a:spcPts val="400"/>
-              </a:spcAft>
-              <a:buSzPct val="100000"/>
-              <a:buChar char="•"/>
-            </a:pPr>
-            <a:r>
-              <a:rPr lang="en-US" sz="1100" dirty="0">
-                <a:solidFill>
-                  <a:srgbClr val="1A1A2E"/>
+            <a:endParaRPr lang="en-US" sz="1050" dirty="0"/>
+          </a:p>
+        </p:txBody>
+      </p:sp>
+      <p:sp>
+        <p:nvSpPr>
+          <p:cNvPr id="29" name="Shape 27"/>
+          <p:cNvSpPr/>
+          <p:nvPr/>
+        </p:nvSpPr>
+        <p:spPr>
+          <a:xfrm>
+            <a:off x="3017520" y="2615184"/>
+            <a:ext cx="182880" cy="182880"/>
+          </a:xfrm>
+          <a:prstGeom prst="ellipse">
+            <a:avLst/>
+          </a:prstGeom>
+          <a:solidFill>
+            <a:srgbClr val="10B981"/>
+          </a:solidFill>
+          <a:ln/>
+        </p:spPr>
+      </p:sp>
+      <p:sp>
+        <p:nvSpPr>
+          <p:cNvPr id="30" name="Text 28"/>
+          <p:cNvSpPr/>
+          <p:nvPr/>
+        </p:nvSpPr>
+        <p:spPr>
+          <a:xfrm>
+            <a:off x="3017520" y="2596896"/>
+            <a:ext cx="182880" cy="201168"/>
+          </a:xfrm>
+          <a:prstGeom prst="rect">
+            <a:avLst/>
+          </a:prstGeom>
+          <a:noFill/>
+          <a:ln/>
+        </p:spPr>
+        <p:txBody>
+          <a:bodyPr wrap="square" lIns="0" tIns="0" rIns="0" bIns="0" rtlCol="0" anchor="ctr"/>
+          <a:lstStyle/>
+          <a:p>
+            <a:pPr algn="ctr" indent="0" marL="0">
+              <a:buNone/>
+            </a:pPr>
+            <a:r>
+              <a:rPr lang="en-US" sz="800" b="1" dirty="0">
+                <a:solidFill>
+                  <a:srgbClr val="FFFFFF"/>
+                </a:solidFill>
+                <a:latin typeface="Calibri" pitchFamily="34" charset="0"/>
+                <a:ea typeface="Calibri" pitchFamily="34" charset="-122"/>
+                <a:cs typeface="Calibri" pitchFamily="34" charset="-120"/>
+              </a:rPr>
+              <a:t>✓</a:t>
+            </a:r>
+            <a:endParaRPr lang="en-US" sz="800" dirty="0"/>
+          </a:p>
+        </p:txBody>
+      </p:sp>
+      <p:sp>
+        <p:nvSpPr>
+          <p:cNvPr id="31" name="Text 29"/>
+          <p:cNvSpPr/>
+          <p:nvPr/>
+        </p:nvSpPr>
+        <p:spPr>
+          <a:xfrm>
+            <a:off x="3291840" y="2569464"/>
+            <a:ext cx="2194560" cy="274320"/>
+          </a:xfrm>
+          <a:prstGeom prst="rect">
+            <a:avLst/>
+          </a:prstGeom>
+          <a:noFill/>
+          <a:ln/>
+        </p:spPr>
+        <p:txBody>
+          <a:bodyPr wrap="square" lIns="0" tIns="0" rIns="0" bIns="0" rtlCol="0" anchor="ctr"/>
+          <a:lstStyle/>
+          <a:p>
+            <a:pPr algn="l" indent="0" marL="0">
+              <a:buNone/>
+            </a:pPr>
+            <a:r>
+              <a:rPr lang="en-US" sz="1050" dirty="0">
+                <a:solidFill>
+                  <a:srgbClr val="374151"/>
                 </a:solidFill>
                 <a:latin typeface="Calibri" pitchFamily="34" charset="0"/>
                 <a:ea typeface="Calibri" pitchFamily="34" charset="-122"/>
@@ -4371,97 +5835,126 @@
               </a:rPr>
               <a:t>Testing &amp; deployment</a:t>
             </a:r>
-            <a:endParaRPr lang="en-US" sz="1100" dirty="0"/>
-          </a:p>
-        </p:txBody>
-      </p:sp>
-      <p:sp>
-        <p:nvSpPr>
-          <p:cNvPr id="6" name="Shape 4"/>
-          <p:cNvSpPr/>
-          <p:nvPr/>
-        </p:nvSpPr>
-        <p:spPr>
-          <a:xfrm>
-            <a:off x="5486400" y="1234440"/>
-            <a:ext cx="3291840" cy="3108960"/>
+            <a:endParaRPr lang="en-US" sz="1050" dirty="0"/>
+          </a:p>
+        </p:txBody>
+      </p:sp>
+      <p:sp>
+        <p:nvSpPr>
+          <p:cNvPr id="32" name="Shape 30"/>
+          <p:cNvSpPr/>
+          <p:nvPr/>
+        </p:nvSpPr>
+        <p:spPr>
+          <a:xfrm>
+            <a:off x="5669280" y="777240"/>
+            <a:ext cx="3108960" cy="2926080"/>
           </a:xfrm>
           <a:prstGeom prst="roundRect">
             <a:avLst>
-              <a:gd name="adj" fmla="val 2941"/>
+              <a:gd name="adj" fmla="val 4688"/>
             </a:avLst>
           </a:prstGeom>
           <a:solidFill>
-            <a:srgbClr val="0F1B3D"/>
-          </a:solidFill>
-          <a:ln/>
-        </p:spPr>
-      </p:sp>
-      <p:sp>
-        <p:nvSpPr>
-          <p:cNvPr id="7" name="Text 5"/>
-          <p:cNvSpPr/>
-          <p:nvPr/>
-        </p:nvSpPr>
-        <p:spPr>
-          <a:xfrm>
-            <a:off x="5669280" y="1371600"/>
-            <a:ext cx="2926080" cy="320040"/>
-          </a:xfrm>
-          <a:prstGeom prst="rect">
-            <a:avLst/>
-          </a:prstGeom>
-          <a:noFill/>
-          <a:ln/>
-        </p:spPr>
-        <p:txBody>
-          <a:bodyPr wrap="square" lIns="0" tIns="0" rIns="0" bIns="0" rtlCol="0" anchor="ctr"/>
-          <a:lstStyle/>
-          <a:p>
-            <a:pPr algn="ctr" indent="0" marL="0">
-              <a:buNone/>
-            </a:pPr>
-            <a:r>
-              <a:rPr lang="en-US" sz="1200" b="1" dirty="0">
-                <a:solidFill>
-                  <a:srgbClr val="C4A35A"/>
-                </a:solidFill>
-                <a:latin typeface="Calibri" pitchFamily="34" charset="0"/>
-                <a:ea typeface="Calibri" pitchFamily="34" charset="-122"/>
-                <a:cs typeface="Calibri" pitchFamily="34" charset="-120"/>
-              </a:rPr>
-              <a:t>Commercial</a:t>
-            </a:r>
-            <a:endParaRPr lang="en-US" sz="1200" dirty="0"/>
-          </a:p>
-        </p:txBody>
-      </p:sp>
-      <p:sp>
-        <p:nvSpPr>
-          <p:cNvPr id="8" name="Text 6"/>
-          <p:cNvSpPr/>
-          <p:nvPr/>
-        </p:nvSpPr>
-        <p:spPr>
-          <a:xfrm>
-            <a:off x="5669280" y="1783080"/>
-            <a:ext cx="2926080" cy="274320"/>
-          </a:xfrm>
-          <a:prstGeom prst="rect">
-            <a:avLst/>
-          </a:prstGeom>
-          <a:noFill/>
-          <a:ln/>
-        </p:spPr>
-        <p:txBody>
-          <a:bodyPr wrap="square" lIns="0" tIns="0" rIns="0" bIns="0" rtlCol="0" anchor="ctr"/>
-          <a:lstStyle/>
-          <a:p>
-            <a:pPr algn="ctr" indent="0" marL="0">
-              <a:buNone/>
-            </a:pPr>
-            <a:r>
-              <a:rPr lang="en-US" sz="1100" strike="sngStrike" dirty="0">
+            <a:srgbClr val="0A0E1A"/>
+          </a:solidFill>
+          <a:ln/>
+          <a:effectLst>
+            <a:outerShdw sx="100000" sy="100000" kx="0" ky="0" algn="bl" rotWithShape="0" blurRad="152400" dist="50800" dir="16200000">
+              <a:srgbClr val="000000">
+                <a:alpha val="20000"/>
+              </a:srgbClr>
+            </a:outerShdw>
+          </a:effectLst>
+        </p:spPr>
+      </p:sp>
+      <p:sp>
+        <p:nvSpPr>
+          <p:cNvPr id="33" name="Shape 31"/>
+          <p:cNvSpPr/>
+          <p:nvPr/>
+        </p:nvSpPr>
+        <p:spPr>
+          <a:xfrm>
+            <a:off x="5943600" y="1005840"/>
+            <a:ext cx="1371600" cy="32004"/>
+          </a:xfrm>
+          <a:prstGeom prst="roundRect">
+            <a:avLst>
+              <a:gd name="adj" fmla="val 57143"/>
+            </a:avLst>
+          </a:prstGeom>
+          <a:solidFill>
+            <a:srgbClr val="D4A853"/>
+          </a:solidFill>
+          <a:ln/>
+        </p:spPr>
+      </p:sp>
+      <p:sp>
+        <p:nvSpPr>
+          <p:cNvPr id="34" name="Text 32"/>
+          <p:cNvSpPr/>
+          <p:nvPr/>
+        </p:nvSpPr>
+        <p:spPr>
+          <a:xfrm>
+            <a:off x="5943600" y="1143000"/>
+            <a:ext cx="2560320" cy="274320"/>
+          </a:xfrm>
+          <a:prstGeom prst="rect">
+            <a:avLst/>
+          </a:prstGeom>
+          <a:noFill/>
+          <a:ln/>
+        </p:spPr>
+        <p:txBody>
+          <a:bodyPr wrap="square" lIns="0" tIns="0" rIns="0" bIns="0" rtlCol="0" anchor="ctr"/>
+          <a:lstStyle/>
+          <a:p>
+            <a:pPr algn="l" indent="0" marL="0">
+              <a:buNone/>
+            </a:pPr>
+            <a:r>
+              <a:rPr lang="en-US" sz="1100" dirty="0">
+                <a:solidFill>
+                  <a:srgbClr val="9CA3AF"/>
+                </a:solidFill>
+                <a:latin typeface="Calibri" pitchFamily="34" charset="0"/>
+                <a:ea typeface="Calibri" pitchFamily="34" charset="-122"/>
+                <a:cs typeface="Calibri" pitchFamily="34" charset="-120"/>
+              </a:rPr>
+              <a:t>Investment</a:t>
+            </a:r>
+            <a:endParaRPr lang="en-US" sz="1100" dirty="0"/>
+          </a:p>
+        </p:txBody>
+      </p:sp>
+      <p:sp>
+        <p:nvSpPr>
+          <p:cNvPr id="35" name="Text 33"/>
+          <p:cNvSpPr/>
+          <p:nvPr/>
+        </p:nvSpPr>
+        <p:spPr>
+          <a:xfrm>
+            <a:off x="5943600" y="1417320"/>
+            <a:ext cx="2560320" cy="274320"/>
+          </a:xfrm>
+          <a:prstGeom prst="rect">
+            <a:avLst/>
+          </a:prstGeom>
+          <a:noFill/>
+          <a:ln/>
+        </p:spPr>
+        <p:txBody>
+          <a:bodyPr wrap="square" lIns="0" tIns="0" rIns="0" bIns="0" rtlCol="0" anchor="ctr"/>
+          <a:lstStyle/>
+          <a:p>
+            <a:pPr algn="l" indent="0" marL="0">
+              <a:buNone/>
+            </a:pPr>
+            <a:r>
+              <a:rPr lang="en-US" sz="1300" strike="sngStrike" dirty="0">
                 <a:solidFill>
                   <a:srgbClr val="6B7280"/>
                 </a:solidFill>
@@ -4469,77 +5962,38 @@
                 <a:ea typeface="Calibri" pitchFamily="34" charset="-122"/>
                 <a:cs typeface="Calibri" pitchFamily="34" charset="-120"/>
               </a:rPr>
-              <a:t>Standard: ₹21,000</a:t>
-            </a:r>
-            <a:endParaRPr lang="en-US" sz="1100" dirty="0"/>
-          </a:p>
-        </p:txBody>
-      </p:sp>
-      <p:sp>
-        <p:nvSpPr>
-          <p:cNvPr id="9" name="Text 7"/>
-          <p:cNvSpPr/>
-          <p:nvPr/>
-        </p:nvSpPr>
-        <p:spPr>
-          <a:xfrm>
-            <a:off x="5669280" y="2103120"/>
-            <a:ext cx="2926080" cy="228600"/>
-          </a:xfrm>
-          <a:prstGeom prst="rect">
-            <a:avLst/>
-          </a:prstGeom>
-          <a:noFill/>
-          <a:ln/>
-        </p:spPr>
-        <p:txBody>
-          <a:bodyPr wrap="square" lIns="0" tIns="0" rIns="0" bIns="0" rtlCol="0" anchor="ctr"/>
-          <a:lstStyle/>
-          <a:p>
-            <a:pPr algn="ctr" indent="0" marL="0">
-              <a:buNone/>
-            </a:pPr>
-            <a:r>
-              <a:rPr lang="en-US" sz="900" dirty="0">
-                <a:solidFill>
-                  <a:srgbClr val="F5F6FA"/>
-                </a:solidFill>
-                <a:latin typeface="Calibri" pitchFamily="34" charset="0"/>
-                <a:ea typeface="Calibri" pitchFamily="34" charset="-122"/>
-                <a:cs typeface="Calibri" pitchFamily="34" charset="-120"/>
-              </a:rPr>
-              <a:t>Special Discounted Price</a:t>
-            </a:r>
-            <a:endParaRPr lang="en-US" sz="900" dirty="0"/>
-          </a:p>
-        </p:txBody>
-      </p:sp>
-      <p:sp>
-        <p:nvSpPr>
-          <p:cNvPr id="10" name="Text 8"/>
-          <p:cNvSpPr/>
-          <p:nvPr/>
-        </p:nvSpPr>
-        <p:spPr>
-          <a:xfrm>
-            <a:off x="5669280" y="2331720"/>
-            <a:ext cx="2926080" cy="548640"/>
-          </a:xfrm>
-          <a:prstGeom prst="rect">
-            <a:avLst/>
-          </a:prstGeom>
-          <a:noFill/>
-          <a:ln/>
-        </p:spPr>
-        <p:txBody>
-          <a:bodyPr wrap="square" lIns="0" tIns="0" rIns="0" bIns="0" rtlCol="0" anchor="ctr"/>
-          <a:lstStyle/>
-          <a:p>
-            <a:pPr algn="ctr" indent="0" marL="0">
-              <a:buNone/>
-            </a:pPr>
-            <a:r>
-              <a:rPr lang="en-US" sz="3600" b="1" dirty="0">
+              <a:t>₹21,000</a:t>
+            </a:r>
+            <a:endParaRPr lang="en-US" sz="1300" dirty="0"/>
+          </a:p>
+        </p:txBody>
+      </p:sp>
+      <p:sp>
+        <p:nvSpPr>
+          <p:cNvPr id="36" name="Text 34"/>
+          <p:cNvSpPr/>
+          <p:nvPr/>
+        </p:nvSpPr>
+        <p:spPr>
+          <a:xfrm>
+            <a:off x="5943600" y="1691640"/>
+            <a:ext cx="2560320" cy="594360"/>
+          </a:xfrm>
+          <a:prstGeom prst="rect">
+            <a:avLst/>
+          </a:prstGeom>
+          <a:noFill/>
+          <a:ln/>
+        </p:spPr>
+        <p:txBody>
+          <a:bodyPr wrap="square" lIns="0" tIns="0" rIns="0" bIns="0" rtlCol="0" anchor="ctr"/>
+          <a:lstStyle/>
+          <a:p>
+            <a:pPr algn="l" indent="0" marL="0">
+              <a:buNone/>
+            </a:pPr>
+            <a:r>
+              <a:rPr lang="en-US" sz="3800" b="1" dirty="0">
                 <a:solidFill>
                   <a:srgbClr val="FFFFFF"/>
                 </a:solidFill>
@@ -4549,38 +6003,38 @@
               </a:rPr>
               <a:t>₹16,000</a:t>
             </a:r>
-            <a:endParaRPr lang="en-US" sz="3600" dirty="0"/>
-          </a:p>
-        </p:txBody>
-      </p:sp>
-      <p:sp>
-        <p:nvSpPr>
-          <p:cNvPr id="11" name="Text 9"/>
-          <p:cNvSpPr/>
-          <p:nvPr/>
-        </p:nvSpPr>
-        <p:spPr>
-          <a:xfrm>
-            <a:off x="5669280" y="2834640"/>
-            <a:ext cx="2926080" cy="228600"/>
-          </a:xfrm>
-          <a:prstGeom prst="rect">
-            <a:avLst/>
-          </a:prstGeom>
-          <a:noFill/>
-          <a:ln/>
-        </p:spPr>
-        <p:txBody>
-          <a:bodyPr wrap="square" lIns="0" tIns="0" rIns="0" bIns="0" rtlCol="0" anchor="ctr"/>
-          <a:lstStyle/>
-          <a:p>
-            <a:pPr algn="ctr" indent="0" marL="0">
-              <a:buNone/>
-            </a:pPr>
-            <a:r>
-              <a:rPr lang="en-US" sz="1100" dirty="0">
-                <a:solidFill>
-                  <a:srgbClr val="F5F6FA"/>
+            <a:endParaRPr lang="en-US" sz="3800" dirty="0"/>
+          </a:p>
+        </p:txBody>
+      </p:sp>
+      <p:sp>
+        <p:nvSpPr>
+          <p:cNvPr id="37" name="Text 35"/>
+          <p:cNvSpPr/>
+          <p:nvPr/>
+        </p:nvSpPr>
+        <p:spPr>
+          <a:xfrm>
+            <a:off x="7818120" y="1965960"/>
+            <a:ext cx="731520" cy="274320"/>
+          </a:xfrm>
+          <a:prstGeom prst="rect">
+            <a:avLst/>
+          </a:prstGeom>
+          <a:noFill/>
+          <a:ln/>
+        </p:spPr>
+        <p:txBody>
+          <a:bodyPr wrap="square" lIns="0" tIns="0" rIns="0" bIns="0" rtlCol="0" anchor="ctr"/>
+          <a:lstStyle/>
+          <a:p>
+            <a:pPr algn="l" indent="0" marL="0">
+              <a:buNone/>
+            </a:pPr>
+            <a:r>
+              <a:rPr lang="en-US" sz="1000" dirty="0">
+                <a:solidFill>
+                  <a:srgbClr val="9CA3AF"/>
                 </a:solidFill>
                 <a:latin typeface="Calibri" pitchFamily="34" charset="0"/>
                 <a:ea typeface="Calibri" pitchFamily="34" charset="-122"/>
@@ -4588,81 +6042,140 @@
               </a:rPr>
               <a:t>+ GST</a:t>
             </a:r>
-            <a:endParaRPr lang="en-US" sz="1100" dirty="0"/>
-          </a:p>
-        </p:txBody>
-      </p:sp>
-      <p:sp>
-        <p:nvSpPr>
-          <p:cNvPr id="12" name="Text 10"/>
-          <p:cNvSpPr/>
-          <p:nvPr/>
-        </p:nvSpPr>
-        <p:spPr>
-          <a:xfrm>
-            <a:off x="5669280" y="3200400"/>
-            <a:ext cx="2926080" cy="228600"/>
-          </a:xfrm>
-          <a:prstGeom prst="rect">
-            <a:avLst/>
-          </a:prstGeom>
-          <a:noFill/>
-          <a:ln/>
-        </p:spPr>
-        <p:txBody>
-          <a:bodyPr wrap="square" lIns="0" tIns="0" rIns="0" bIns="0" rtlCol="0" anchor="ctr"/>
-          <a:lstStyle/>
-          <a:p>
-            <a:pPr algn="ctr" indent="0" marL="0">
-              <a:buNone/>
-            </a:pPr>
-            <a:r>
-              <a:rPr lang="en-US" sz="1000" dirty="0">
-                <a:solidFill>
-                  <a:srgbClr val="F5F6FA"/>
-                </a:solidFill>
-                <a:latin typeface="Calibri" pitchFamily="34" charset="0"/>
-                <a:ea typeface="Calibri" pitchFamily="34" charset="-122"/>
-                <a:cs typeface="Calibri" pitchFamily="34" charset="-120"/>
-              </a:rPr>
-              <a:t>GST @ 18%: ₹2,880</a:t>
-            </a:r>
             <a:endParaRPr lang="en-US" sz="1000" dirty="0"/>
           </a:p>
         </p:txBody>
       </p:sp>
       <p:sp>
         <p:nvSpPr>
-          <p:cNvPr id="13" name="Shape 11"/>
-          <p:cNvSpPr/>
-          <p:nvPr/>
-        </p:nvSpPr>
-        <p:spPr>
-          <a:xfrm>
-            <a:off x="5852160" y="3520440"/>
-            <a:ext cx="2560320" cy="411480"/>
+          <p:cNvPr id="38" name="Shape 36"/>
+          <p:cNvSpPr/>
+          <p:nvPr/>
+        </p:nvSpPr>
+        <p:spPr>
+          <a:xfrm>
+            <a:off x="5943600" y="2377440"/>
+            <a:ext cx="2560320" cy="13716"/>
+          </a:xfrm>
+          <a:prstGeom prst="rect">
+            <a:avLst/>
+          </a:prstGeom>
+          <a:solidFill>
+            <a:srgbClr val="1C2438"/>
+          </a:solidFill>
+          <a:ln/>
+        </p:spPr>
+      </p:sp>
+      <p:sp>
+        <p:nvSpPr>
+          <p:cNvPr id="39" name="Text 37"/>
+          <p:cNvSpPr/>
+          <p:nvPr/>
+        </p:nvSpPr>
+        <p:spPr>
+          <a:xfrm>
+            <a:off x="5943600" y="2468880"/>
+            <a:ext cx="1645920" cy="228600"/>
+          </a:xfrm>
+          <a:prstGeom prst="rect">
+            <a:avLst/>
+          </a:prstGeom>
+          <a:noFill/>
+          <a:ln/>
+        </p:spPr>
+        <p:txBody>
+          <a:bodyPr wrap="square" lIns="0" tIns="0" rIns="0" bIns="0" rtlCol="0" anchor="ctr"/>
+          <a:lstStyle/>
+          <a:p>
+            <a:pPr algn="l" indent="0" marL="0">
+              <a:buNone/>
+            </a:pPr>
+            <a:r>
+              <a:rPr lang="en-US" sz="900" dirty="0">
+                <a:solidFill>
+                  <a:srgbClr val="9CA3AF"/>
+                </a:solidFill>
+                <a:latin typeface="Calibri" pitchFamily="34" charset="0"/>
+                <a:ea typeface="Calibri" pitchFamily="34" charset="-122"/>
+                <a:cs typeface="Calibri" pitchFamily="34" charset="-120"/>
+              </a:rPr>
+              <a:t>GST @ 18%</a:t>
+            </a:r>
+            <a:endParaRPr lang="en-US" sz="900" dirty="0"/>
+          </a:p>
+        </p:txBody>
+      </p:sp>
+      <p:sp>
+        <p:nvSpPr>
+          <p:cNvPr id="40" name="Text 38"/>
+          <p:cNvSpPr/>
+          <p:nvPr/>
+        </p:nvSpPr>
+        <p:spPr>
+          <a:xfrm>
+            <a:off x="7406640" y="2468880"/>
+            <a:ext cx="1097280" cy="228600"/>
+          </a:xfrm>
+          <a:prstGeom prst="rect">
+            <a:avLst/>
+          </a:prstGeom>
+          <a:noFill/>
+          <a:ln/>
+        </p:spPr>
+        <p:txBody>
+          <a:bodyPr wrap="square" lIns="0" tIns="0" rIns="0" bIns="0" rtlCol="0" anchor="ctr"/>
+          <a:lstStyle/>
+          <a:p>
+            <a:pPr algn="r" indent="0" marL="0">
+              <a:buNone/>
+            </a:pPr>
+            <a:r>
+              <a:rPr lang="en-US" sz="900" dirty="0">
+                <a:solidFill>
+                  <a:srgbClr val="9CA3AF"/>
+                </a:solidFill>
+                <a:latin typeface="Calibri" pitchFamily="34" charset="0"/>
+                <a:ea typeface="Calibri" pitchFamily="34" charset="-122"/>
+                <a:cs typeface="Calibri" pitchFamily="34" charset="-120"/>
+              </a:rPr>
+              <a:t>₹2,880</a:t>
+            </a:r>
+            <a:endParaRPr lang="en-US" sz="900" dirty="0"/>
+          </a:p>
+        </p:txBody>
+      </p:sp>
+      <p:sp>
+        <p:nvSpPr>
+          <p:cNvPr id="41" name="Shape 39"/>
+          <p:cNvSpPr/>
+          <p:nvPr/>
+        </p:nvSpPr>
+        <p:spPr>
+          <a:xfrm>
+            <a:off x="5943600" y="2788920"/>
+            <a:ext cx="2560320" cy="457200"/>
           </a:xfrm>
           <a:prstGeom prst="roundRect">
             <a:avLst>
-              <a:gd name="adj" fmla="val 8889"/>
+              <a:gd name="adj" fmla="val 12000"/>
             </a:avLst>
           </a:prstGeom>
           <a:solidFill>
-            <a:srgbClr val="C4A35A"/>
-          </a:solidFill>
-          <a:ln/>
-        </p:spPr>
-      </p:sp>
-      <p:sp>
-        <p:nvSpPr>
-          <p:cNvPr id="14" name="Text 12"/>
-          <p:cNvSpPr/>
-          <p:nvPr/>
-        </p:nvSpPr>
-        <p:spPr>
-          <a:xfrm>
-            <a:off x="5852160" y="3520440"/>
-            <a:ext cx="2560320" cy="411480"/>
+            <a:srgbClr val="D4A853"/>
+          </a:solidFill>
+          <a:ln/>
+        </p:spPr>
+      </p:sp>
+      <p:sp>
+        <p:nvSpPr>
+          <p:cNvPr id="42" name="Text 40"/>
+          <p:cNvSpPr/>
+          <p:nvPr/>
+        </p:nvSpPr>
+        <p:spPr>
+          <a:xfrm>
+            <a:off x="5943600" y="2788920"/>
+            <a:ext cx="2560320" cy="457200"/>
           </a:xfrm>
           <a:prstGeom prst="rect">
             <a:avLst/>
@@ -4678,9 +6191,9 @@
               <a:buNone/>
             </a:pPr>
             <a:r>
-              <a:rPr lang="en-US" sz="1400" b="1" dirty="0">
-                <a:solidFill>
-                  <a:srgbClr val="0F1B3D"/>
+              <a:rPr lang="en-US" sz="1600" b="1" dirty="0">
+                <a:solidFill>
+                  <a:srgbClr val="0A0E1A"/>
                 </a:solidFill>
                 <a:latin typeface="Cambria" pitchFamily="34" charset="0"/>
                 <a:ea typeface="Cambria" pitchFamily="34" charset="-122"/>
@@ -4688,81 +6201,110 @@
               </a:rPr>
               <a:t>Total: ₹18,880/-</a:t>
             </a:r>
-            <a:endParaRPr lang="en-US" sz="1400" dirty="0"/>
-          </a:p>
-        </p:txBody>
-      </p:sp>
-      <p:sp>
-        <p:nvSpPr>
-          <p:cNvPr id="15" name="Text 13"/>
-          <p:cNvSpPr/>
-          <p:nvPr/>
-        </p:nvSpPr>
-        <p:spPr>
-          <a:xfrm>
-            <a:off x="5669280" y="4023360"/>
-            <a:ext cx="2926080" cy="228600"/>
-          </a:xfrm>
-          <a:prstGeom prst="rect">
-            <a:avLst/>
-          </a:prstGeom>
-          <a:noFill/>
-          <a:ln/>
-        </p:spPr>
-        <p:txBody>
-          <a:bodyPr wrap="square" lIns="0" tIns="0" rIns="0" bIns="0" rtlCol="0" anchor="ctr"/>
-          <a:lstStyle/>
-          <a:p>
-            <a:pPr algn="ctr" indent="0" marL="0">
-              <a:buNone/>
-            </a:pPr>
-            <a:r>
-              <a:rPr lang="en-US" sz="1000" b="1" dirty="0">
-                <a:solidFill>
-                  <a:srgbClr val="059669"/>
-                </a:solidFill>
-                <a:latin typeface="Calibri" pitchFamily="34" charset="0"/>
-                <a:ea typeface="Calibri" pitchFamily="34" charset="-122"/>
-                <a:cs typeface="Calibri" pitchFamily="34" charset="-120"/>
-              </a:rPr>
-              <a:t>Client Saving: ₹5,000 discount</a:t>
-            </a:r>
-            <a:endParaRPr lang="en-US" sz="1000" dirty="0"/>
-          </a:p>
-        </p:txBody>
-      </p:sp>
-      <p:sp>
-        <p:nvSpPr>
-          <p:cNvPr id="16" name="Shape 14"/>
-          <p:cNvSpPr/>
-          <p:nvPr/>
-        </p:nvSpPr>
-        <p:spPr>
-          <a:xfrm>
-            <a:off x="457200" y="4251960"/>
-            <a:ext cx="8229600" cy="731520"/>
+            <a:endParaRPr lang="en-US" sz="1600" dirty="0"/>
+          </a:p>
+        </p:txBody>
+      </p:sp>
+      <p:sp>
+        <p:nvSpPr>
+          <p:cNvPr id="43" name="Shape 41"/>
+          <p:cNvSpPr/>
+          <p:nvPr/>
+        </p:nvSpPr>
+        <p:spPr>
+          <a:xfrm>
+            <a:off x="5943600" y="3383280"/>
+            <a:ext cx="1645920" cy="256032"/>
           </a:xfrm>
           <a:prstGeom prst="roundRect">
             <a:avLst>
-              <a:gd name="adj" fmla="val 7500"/>
+              <a:gd name="adj" fmla="val 50000"/>
             </a:avLst>
           </a:prstGeom>
           <a:solidFill>
-            <a:srgbClr val="F8F9FC"/>
-          </a:solidFill>
-          <a:ln/>
-        </p:spPr>
-      </p:sp>
-      <p:sp>
-        <p:nvSpPr>
-          <p:cNvPr id="17" name="Text 15"/>
-          <p:cNvSpPr/>
-          <p:nvPr/>
-        </p:nvSpPr>
-        <p:spPr>
-          <a:xfrm>
-            <a:off x="640080" y="4297680"/>
-            <a:ext cx="7863840" cy="228600"/>
+            <a:srgbClr val="064E3B"/>
+          </a:solidFill>
+          <a:ln/>
+        </p:spPr>
+      </p:sp>
+      <p:sp>
+        <p:nvSpPr>
+          <p:cNvPr id="44" name="Text 42"/>
+          <p:cNvSpPr/>
+          <p:nvPr/>
+        </p:nvSpPr>
+        <p:spPr>
+          <a:xfrm>
+            <a:off x="5943600" y="3383280"/>
+            <a:ext cx="1645920" cy="256032"/>
+          </a:xfrm>
+          <a:prstGeom prst="rect">
+            <a:avLst/>
+          </a:prstGeom>
+          <a:noFill/>
+          <a:ln/>
+        </p:spPr>
+        <p:txBody>
+          <a:bodyPr wrap="square" lIns="0" tIns="0" rIns="0" bIns="0" rtlCol="0" anchor="ctr"/>
+          <a:lstStyle/>
+          <a:p>
+            <a:pPr algn="ctr" indent="0" marL="0">
+              <a:buNone/>
+            </a:pPr>
+            <a:r>
+              <a:rPr lang="en-US" sz="800" b="1" dirty="0">
+                <a:solidFill>
+                  <a:srgbClr val="10B981"/>
+                </a:solidFill>
+                <a:latin typeface="Calibri" pitchFamily="34" charset="0"/>
+                <a:ea typeface="Calibri" pitchFamily="34" charset="-122"/>
+                <a:cs typeface="Calibri" pitchFamily="34" charset="-120"/>
+              </a:rPr>
+              <a:t>₹5,000 SAVED</a:t>
+            </a:r>
+            <a:endParaRPr lang="en-US" sz="800" dirty="0"/>
+          </a:p>
+        </p:txBody>
+      </p:sp>
+      <p:sp>
+        <p:nvSpPr>
+          <p:cNvPr id="45" name="Shape 43"/>
+          <p:cNvSpPr/>
+          <p:nvPr/>
+        </p:nvSpPr>
+        <p:spPr>
+          <a:xfrm>
+            <a:off x="457200" y="3977640"/>
+            <a:ext cx="8229600" cy="1005840"/>
+          </a:xfrm>
+          <a:prstGeom prst="roundRect">
+            <a:avLst>
+              <a:gd name="adj" fmla="val 9091"/>
+            </a:avLst>
+          </a:prstGeom>
+          <a:solidFill>
+            <a:srgbClr val="FFFFFF"/>
+          </a:solidFill>
+          <a:ln/>
+          <a:effectLst>
+            <a:outerShdw sx="100000" sy="100000" kx="0" ky="0" algn="bl" rotWithShape="0" blurRad="76200" dist="25400" dir="16200000">
+              <a:srgbClr val="000000">
+                <a:alpha val="6000"/>
+              </a:srgbClr>
+            </a:outerShdw>
+          </a:effectLst>
+        </p:spPr>
+      </p:sp>
+      <p:sp>
+        <p:nvSpPr>
+          <p:cNvPr id="46" name="Text 44"/>
+          <p:cNvSpPr/>
+          <p:nvPr/>
+        </p:nvSpPr>
+        <p:spPr>
+          <a:xfrm>
+            <a:off x="685800" y="4069080"/>
+            <a:ext cx="7772400" cy="201168"/>
           </a:xfrm>
           <a:prstGeom prst="rect">
             <a:avLst/>
@@ -4778,9 +6320,9 @@
               <a:buNone/>
             </a:pPr>
             <a:r>
-              <a:rPr lang="en-US" sz="900" b="1" spc="150" kern="0" dirty="0">
-                <a:solidFill>
-                  <a:srgbClr val="0F1B3D"/>
+              <a:rPr lang="en-US" sz="800" b="1" spc="150" kern="0" dirty="0">
+                <a:solidFill>
+                  <a:srgbClr val="0A0E1A"/>
                 </a:solidFill>
                 <a:latin typeface="Calibri" pitchFamily="34" charset="0"/>
                 <a:ea typeface="Calibri" pitchFamily="34" charset="-122"/>
@@ -4788,20 +6330,581 @@
               </a:rPr>
               <a:t>NEXT STEP</a:t>
             </a:r>
-            <a:endParaRPr lang="en-US" sz="900" dirty="0"/>
-          </a:p>
-        </p:txBody>
-      </p:sp>
-      <p:sp>
-        <p:nvSpPr>
-          <p:cNvPr id="18" name="Text 16"/>
-          <p:cNvSpPr/>
-          <p:nvPr/>
-        </p:nvSpPr>
-        <p:spPr>
-          <a:xfrm>
-            <a:off x="640080" y="4526280"/>
-            <a:ext cx="7863840" cy="228600"/>
+            <a:endParaRPr lang="en-US" sz="800" dirty="0"/>
+          </a:p>
+        </p:txBody>
+      </p:sp>
+      <p:sp>
+        <p:nvSpPr>
+          <p:cNvPr id="47" name="Shape 45"/>
+          <p:cNvSpPr/>
+          <p:nvPr/>
+        </p:nvSpPr>
+        <p:spPr>
+          <a:xfrm>
+            <a:off x="685800" y="4343400"/>
+            <a:ext cx="1188720" cy="274320"/>
+          </a:xfrm>
+          <a:prstGeom prst="roundRect">
+            <a:avLst>
+              <a:gd name="adj" fmla="val 50000"/>
+            </a:avLst>
+          </a:prstGeom>
+          <a:solidFill>
+            <a:srgbClr val="0A0E1A"/>
+          </a:solidFill>
+          <a:ln/>
+        </p:spPr>
+      </p:sp>
+      <p:sp>
+        <p:nvSpPr>
+          <p:cNvPr id="48" name="Text 46"/>
+          <p:cNvSpPr/>
+          <p:nvPr/>
+        </p:nvSpPr>
+        <p:spPr>
+          <a:xfrm>
+            <a:off x="685800" y="4343400"/>
+            <a:ext cx="1188720" cy="274320"/>
+          </a:xfrm>
+          <a:prstGeom prst="rect">
+            <a:avLst/>
+          </a:prstGeom>
+          <a:noFill/>
+          <a:ln/>
+        </p:spPr>
+        <p:txBody>
+          <a:bodyPr wrap="square" lIns="0" tIns="0" rIns="0" bIns="0" rtlCol="0" anchor="ctr"/>
+          <a:lstStyle/>
+          <a:p>
+            <a:pPr algn="ctr" indent="0" marL="0">
+              <a:buNone/>
+            </a:pPr>
+            <a:r>
+              <a:rPr lang="en-US" sz="750" b="1" dirty="0">
+                <a:solidFill>
+                  <a:srgbClr val="FFFFFF"/>
+                </a:solidFill>
+                <a:latin typeface="Calibri" pitchFamily="34" charset="0"/>
+                <a:ea typeface="Calibri" pitchFamily="34" charset="-122"/>
+                <a:cs typeface="Calibri" pitchFamily="34" charset="-120"/>
+              </a:rPr>
+              <a:t>Select approach</a:t>
+            </a:r>
+            <a:endParaRPr lang="en-US" sz="750" dirty="0"/>
+          </a:p>
+        </p:txBody>
+      </p:sp>
+      <p:sp>
+        <p:nvSpPr>
+          <p:cNvPr id="49" name="Text 47"/>
+          <p:cNvSpPr/>
+          <p:nvPr/>
+        </p:nvSpPr>
+        <p:spPr>
+          <a:xfrm>
+            <a:off x="1874520" y="4325112"/>
+            <a:ext cx="164592" cy="274320"/>
+          </a:xfrm>
+          <a:prstGeom prst="rect">
+            <a:avLst/>
+          </a:prstGeom>
+          <a:noFill/>
+          <a:ln/>
+        </p:spPr>
+        <p:txBody>
+          <a:bodyPr wrap="square" lIns="0" tIns="0" rIns="0" bIns="0" rtlCol="0" anchor="ctr"/>
+          <a:lstStyle/>
+          <a:p>
+            <a:pPr algn="ctr" indent="0" marL="0">
+              <a:buNone/>
+            </a:pPr>
+            <a:r>
+              <a:rPr lang="en-US" sz="1200" dirty="0">
+                <a:solidFill>
+                  <a:srgbClr val="9CA3AF"/>
+                </a:solidFill>
+                <a:latin typeface="Calibri" pitchFamily="34" charset="0"/>
+                <a:ea typeface="Calibri" pitchFamily="34" charset="-122"/>
+                <a:cs typeface="Calibri" pitchFamily="34" charset="-120"/>
+              </a:rPr>
+              <a:t>›</a:t>
+            </a:r>
+            <a:endParaRPr lang="en-US" sz="1200" dirty="0"/>
+          </a:p>
+        </p:txBody>
+      </p:sp>
+      <p:sp>
+        <p:nvSpPr>
+          <p:cNvPr id="50" name="Shape 48"/>
+          <p:cNvSpPr/>
+          <p:nvPr/>
+        </p:nvSpPr>
+        <p:spPr>
+          <a:xfrm>
+            <a:off x="2039112" y="4343400"/>
+            <a:ext cx="1188720" cy="274320"/>
+          </a:xfrm>
+          <a:prstGeom prst="roundRect">
+            <a:avLst>
+              <a:gd name="adj" fmla="val 50000"/>
+            </a:avLst>
+          </a:prstGeom>
+          <a:solidFill>
+            <a:srgbClr val="F3F4F6"/>
+          </a:solidFill>
+          <a:ln/>
+        </p:spPr>
+      </p:sp>
+      <p:sp>
+        <p:nvSpPr>
+          <p:cNvPr id="51" name="Text 49"/>
+          <p:cNvSpPr/>
+          <p:nvPr/>
+        </p:nvSpPr>
+        <p:spPr>
+          <a:xfrm>
+            <a:off x="2039112" y="4343400"/>
+            <a:ext cx="1188720" cy="274320"/>
+          </a:xfrm>
+          <a:prstGeom prst="rect">
+            <a:avLst/>
+          </a:prstGeom>
+          <a:noFill/>
+          <a:ln/>
+        </p:spPr>
+        <p:txBody>
+          <a:bodyPr wrap="square" lIns="0" tIns="0" rIns="0" bIns="0" rtlCol="0" anchor="ctr"/>
+          <a:lstStyle/>
+          <a:p>
+            <a:pPr algn="ctr" indent="0" marL="0">
+              <a:buNone/>
+            </a:pPr>
+            <a:r>
+              <a:rPr lang="en-US" sz="750" dirty="0">
+                <a:solidFill>
+                  <a:srgbClr val="374151"/>
+                </a:solidFill>
+                <a:latin typeface="Calibri" pitchFamily="34" charset="0"/>
+                <a:ea typeface="Calibri" pitchFamily="34" charset="-122"/>
+                <a:cs typeface="Calibri" pitchFamily="34" charset="-120"/>
+              </a:rPr>
+              <a:t>Finalise structure</a:t>
+            </a:r>
+            <a:endParaRPr lang="en-US" sz="750" dirty="0"/>
+          </a:p>
+        </p:txBody>
+      </p:sp>
+      <p:sp>
+        <p:nvSpPr>
+          <p:cNvPr id="52" name="Text 50"/>
+          <p:cNvSpPr/>
+          <p:nvPr/>
+        </p:nvSpPr>
+        <p:spPr>
+          <a:xfrm>
+            <a:off x="3227832" y="4325112"/>
+            <a:ext cx="164592" cy="274320"/>
+          </a:xfrm>
+          <a:prstGeom prst="rect">
+            <a:avLst/>
+          </a:prstGeom>
+          <a:noFill/>
+          <a:ln/>
+        </p:spPr>
+        <p:txBody>
+          <a:bodyPr wrap="square" lIns="0" tIns="0" rIns="0" bIns="0" rtlCol="0" anchor="ctr"/>
+          <a:lstStyle/>
+          <a:p>
+            <a:pPr algn="ctr" indent="0" marL="0">
+              <a:buNone/>
+            </a:pPr>
+            <a:r>
+              <a:rPr lang="en-US" sz="1200" dirty="0">
+                <a:solidFill>
+                  <a:srgbClr val="9CA3AF"/>
+                </a:solidFill>
+                <a:latin typeface="Calibri" pitchFamily="34" charset="0"/>
+                <a:ea typeface="Calibri" pitchFamily="34" charset="-122"/>
+                <a:cs typeface="Calibri" pitchFamily="34" charset="-120"/>
+              </a:rPr>
+              <a:t>›</a:t>
+            </a:r>
+            <a:endParaRPr lang="en-US" sz="1200" dirty="0"/>
+          </a:p>
+        </p:txBody>
+      </p:sp>
+      <p:sp>
+        <p:nvSpPr>
+          <p:cNvPr id="53" name="Shape 51"/>
+          <p:cNvSpPr/>
+          <p:nvPr/>
+        </p:nvSpPr>
+        <p:spPr>
+          <a:xfrm>
+            <a:off x="3392424" y="4343400"/>
+            <a:ext cx="1188720" cy="274320"/>
+          </a:xfrm>
+          <a:prstGeom prst="roundRect">
+            <a:avLst>
+              <a:gd name="adj" fmla="val 50000"/>
+            </a:avLst>
+          </a:prstGeom>
+          <a:solidFill>
+            <a:srgbClr val="F3F4F6"/>
+          </a:solidFill>
+          <a:ln/>
+        </p:spPr>
+      </p:sp>
+      <p:sp>
+        <p:nvSpPr>
+          <p:cNvPr id="54" name="Text 52"/>
+          <p:cNvSpPr/>
+          <p:nvPr/>
+        </p:nvSpPr>
+        <p:spPr>
+          <a:xfrm>
+            <a:off x="3392424" y="4343400"/>
+            <a:ext cx="1188720" cy="274320"/>
+          </a:xfrm>
+          <a:prstGeom prst="rect">
+            <a:avLst/>
+          </a:prstGeom>
+          <a:noFill/>
+          <a:ln/>
+        </p:spPr>
+        <p:txBody>
+          <a:bodyPr wrap="square" lIns="0" tIns="0" rIns="0" bIns="0" rtlCol="0" anchor="ctr"/>
+          <a:lstStyle/>
+          <a:p>
+            <a:pPr algn="ctr" indent="0" marL="0">
+              <a:buNone/>
+            </a:pPr>
+            <a:r>
+              <a:rPr lang="en-US" sz="750" dirty="0">
+                <a:solidFill>
+                  <a:srgbClr val="374151"/>
+                </a:solidFill>
+                <a:latin typeface="Calibri" pitchFamily="34" charset="0"/>
+                <a:ea typeface="Calibri" pitchFamily="34" charset="-122"/>
+                <a:cs typeface="Calibri" pitchFamily="34" charset="-120"/>
+              </a:rPr>
+              <a:t>Design</a:t>
+            </a:r>
+            <a:endParaRPr lang="en-US" sz="750" dirty="0"/>
+          </a:p>
+        </p:txBody>
+      </p:sp>
+      <p:sp>
+        <p:nvSpPr>
+          <p:cNvPr id="55" name="Text 53"/>
+          <p:cNvSpPr/>
+          <p:nvPr/>
+        </p:nvSpPr>
+        <p:spPr>
+          <a:xfrm>
+            <a:off x="4581144" y="4325112"/>
+            <a:ext cx="164592" cy="274320"/>
+          </a:xfrm>
+          <a:prstGeom prst="rect">
+            <a:avLst/>
+          </a:prstGeom>
+          <a:noFill/>
+          <a:ln/>
+        </p:spPr>
+        <p:txBody>
+          <a:bodyPr wrap="square" lIns="0" tIns="0" rIns="0" bIns="0" rtlCol="0" anchor="ctr"/>
+          <a:lstStyle/>
+          <a:p>
+            <a:pPr algn="ctr" indent="0" marL="0">
+              <a:buNone/>
+            </a:pPr>
+            <a:r>
+              <a:rPr lang="en-US" sz="1200" dirty="0">
+                <a:solidFill>
+                  <a:srgbClr val="9CA3AF"/>
+                </a:solidFill>
+                <a:latin typeface="Calibri" pitchFamily="34" charset="0"/>
+                <a:ea typeface="Calibri" pitchFamily="34" charset="-122"/>
+                <a:cs typeface="Calibri" pitchFamily="34" charset="-120"/>
+              </a:rPr>
+              <a:t>›</a:t>
+            </a:r>
+            <a:endParaRPr lang="en-US" sz="1200" dirty="0"/>
+          </a:p>
+        </p:txBody>
+      </p:sp>
+      <p:sp>
+        <p:nvSpPr>
+          <p:cNvPr id="56" name="Shape 54"/>
+          <p:cNvSpPr/>
+          <p:nvPr/>
+        </p:nvSpPr>
+        <p:spPr>
+          <a:xfrm>
+            <a:off x="4745736" y="4343400"/>
+            <a:ext cx="1188720" cy="274320"/>
+          </a:xfrm>
+          <a:prstGeom prst="roundRect">
+            <a:avLst>
+              <a:gd name="adj" fmla="val 50000"/>
+            </a:avLst>
+          </a:prstGeom>
+          <a:solidFill>
+            <a:srgbClr val="F3F4F6"/>
+          </a:solidFill>
+          <a:ln/>
+        </p:spPr>
+      </p:sp>
+      <p:sp>
+        <p:nvSpPr>
+          <p:cNvPr id="57" name="Text 55"/>
+          <p:cNvSpPr/>
+          <p:nvPr/>
+        </p:nvSpPr>
+        <p:spPr>
+          <a:xfrm>
+            <a:off x="4745736" y="4343400"/>
+            <a:ext cx="1188720" cy="274320"/>
+          </a:xfrm>
+          <a:prstGeom prst="rect">
+            <a:avLst/>
+          </a:prstGeom>
+          <a:noFill/>
+          <a:ln/>
+        </p:spPr>
+        <p:txBody>
+          <a:bodyPr wrap="square" lIns="0" tIns="0" rIns="0" bIns="0" rtlCol="0" anchor="ctr"/>
+          <a:lstStyle/>
+          <a:p>
+            <a:pPr algn="ctr" indent="0" marL="0">
+              <a:buNone/>
+            </a:pPr>
+            <a:r>
+              <a:rPr lang="en-US" sz="750" dirty="0">
+                <a:solidFill>
+                  <a:srgbClr val="374151"/>
+                </a:solidFill>
+                <a:latin typeface="Calibri" pitchFamily="34" charset="0"/>
+                <a:ea typeface="Calibri" pitchFamily="34" charset="-122"/>
+                <a:cs typeface="Calibri" pitchFamily="34" charset="-120"/>
+              </a:rPr>
+              <a:t>Development</a:t>
+            </a:r>
+            <a:endParaRPr lang="en-US" sz="750" dirty="0"/>
+          </a:p>
+        </p:txBody>
+      </p:sp>
+      <p:sp>
+        <p:nvSpPr>
+          <p:cNvPr id="58" name="Text 56"/>
+          <p:cNvSpPr/>
+          <p:nvPr/>
+        </p:nvSpPr>
+        <p:spPr>
+          <a:xfrm>
+            <a:off x="5934456" y="4325112"/>
+            <a:ext cx="164592" cy="274320"/>
+          </a:xfrm>
+          <a:prstGeom prst="rect">
+            <a:avLst/>
+          </a:prstGeom>
+          <a:noFill/>
+          <a:ln/>
+        </p:spPr>
+        <p:txBody>
+          <a:bodyPr wrap="square" lIns="0" tIns="0" rIns="0" bIns="0" rtlCol="0" anchor="ctr"/>
+          <a:lstStyle/>
+          <a:p>
+            <a:pPr algn="ctr" indent="0" marL="0">
+              <a:buNone/>
+            </a:pPr>
+            <a:r>
+              <a:rPr lang="en-US" sz="1200" dirty="0">
+                <a:solidFill>
+                  <a:srgbClr val="9CA3AF"/>
+                </a:solidFill>
+                <a:latin typeface="Calibri" pitchFamily="34" charset="0"/>
+                <a:ea typeface="Calibri" pitchFamily="34" charset="-122"/>
+                <a:cs typeface="Calibri" pitchFamily="34" charset="-120"/>
+              </a:rPr>
+              <a:t>›</a:t>
+            </a:r>
+            <a:endParaRPr lang="en-US" sz="1200" dirty="0"/>
+          </a:p>
+        </p:txBody>
+      </p:sp>
+      <p:sp>
+        <p:nvSpPr>
+          <p:cNvPr id="59" name="Shape 57"/>
+          <p:cNvSpPr/>
+          <p:nvPr/>
+        </p:nvSpPr>
+        <p:spPr>
+          <a:xfrm>
+            <a:off x="6099048" y="4343400"/>
+            <a:ext cx="1188720" cy="274320"/>
+          </a:xfrm>
+          <a:prstGeom prst="roundRect">
+            <a:avLst>
+              <a:gd name="adj" fmla="val 50000"/>
+            </a:avLst>
+          </a:prstGeom>
+          <a:solidFill>
+            <a:srgbClr val="F3F4F6"/>
+          </a:solidFill>
+          <a:ln/>
+        </p:spPr>
+      </p:sp>
+      <p:sp>
+        <p:nvSpPr>
+          <p:cNvPr id="60" name="Text 58"/>
+          <p:cNvSpPr/>
+          <p:nvPr/>
+        </p:nvSpPr>
+        <p:spPr>
+          <a:xfrm>
+            <a:off x="6099048" y="4343400"/>
+            <a:ext cx="1188720" cy="274320"/>
+          </a:xfrm>
+          <a:prstGeom prst="rect">
+            <a:avLst/>
+          </a:prstGeom>
+          <a:noFill/>
+          <a:ln/>
+        </p:spPr>
+        <p:txBody>
+          <a:bodyPr wrap="square" lIns="0" tIns="0" rIns="0" bIns="0" rtlCol="0" anchor="ctr"/>
+          <a:lstStyle/>
+          <a:p>
+            <a:pPr algn="ctr" indent="0" marL="0">
+              <a:buNone/>
+            </a:pPr>
+            <a:r>
+              <a:rPr lang="en-US" sz="750" dirty="0">
+                <a:solidFill>
+                  <a:srgbClr val="374151"/>
+                </a:solidFill>
+                <a:latin typeface="Calibri" pitchFamily="34" charset="0"/>
+                <a:ea typeface="Calibri" pitchFamily="34" charset="-122"/>
+                <a:cs typeface="Calibri" pitchFamily="34" charset="-120"/>
+              </a:rPr>
+              <a:t>Testing</a:t>
+            </a:r>
+            <a:endParaRPr lang="en-US" sz="750" dirty="0"/>
+          </a:p>
+        </p:txBody>
+      </p:sp>
+      <p:sp>
+        <p:nvSpPr>
+          <p:cNvPr id="61" name="Text 59"/>
+          <p:cNvSpPr/>
+          <p:nvPr/>
+        </p:nvSpPr>
+        <p:spPr>
+          <a:xfrm>
+            <a:off x="7287768" y="4325112"/>
+            <a:ext cx="164592" cy="274320"/>
+          </a:xfrm>
+          <a:prstGeom prst="rect">
+            <a:avLst/>
+          </a:prstGeom>
+          <a:noFill/>
+          <a:ln/>
+        </p:spPr>
+        <p:txBody>
+          <a:bodyPr wrap="square" lIns="0" tIns="0" rIns="0" bIns="0" rtlCol="0" anchor="ctr"/>
+          <a:lstStyle/>
+          <a:p>
+            <a:pPr algn="ctr" indent="0" marL="0">
+              <a:buNone/>
+            </a:pPr>
+            <a:r>
+              <a:rPr lang="en-US" sz="1200" dirty="0">
+                <a:solidFill>
+                  <a:srgbClr val="9CA3AF"/>
+                </a:solidFill>
+                <a:latin typeface="Calibri" pitchFamily="34" charset="0"/>
+                <a:ea typeface="Calibri" pitchFamily="34" charset="-122"/>
+                <a:cs typeface="Calibri" pitchFamily="34" charset="-120"/>
+              </a:rPr>
+              <a:t>›</a:t>
+            </a:r>
+            <a:endParaRPr lang="en-US" sz="1200" dirty="0"/>
+          </a:p>
+        </p:txBody>
+      </p:sp>
+      <p:sp>
+        <p:nvSpPr>
+          <p:cNvPr id="62" name="Shape 60"/>
+          <p:cNvSpPr/>
+          <p:nvPr/>
+        </p:nvSpPr>
+        <p:spPr>
+          <a:xfrm>
+            <a:off x="7452360" y="4343400"/>
+            <a:ext cx="1188720" cy="274320"/>
+          </a:xfrm>
+          <a:prstGeom prst="roundRect">
+            <a:avLst>
+              <a:gd name="adj" fmla="val 50000"/>
+            </a:avLst>
+          </a:prstGeom>
+          <a:solidFill>
+            <a:srgbClr val="F3F4F6"/>
+          </a:solidFill>
+          <a:ln/>
+        </p:spPr>
+      </p:sp>
+      <p:sp>
+        <p:nvSpPr>
+          <p:cNvPr id="63" name="Text 61"/>
+          <p:cNvSpPr/>
+          <p:nvPr/>
+        </p:nvSpPr>
+        <p:spPr>
+          <a:xfrm>
+            <a:off x="7452360" y="4343400"/>
+            <a:ext cx="1188720" cy="274320"/>
+          </a:xfrm>
+          <a:prstGeom prst="rect">
+            <a:avLst/>
+          </a:prstGeom>
+          <a:noFill/>
+          <a:ln/>
+        </p:spPr>
+        <p:txBody>
+          <a:bodyPr wrap="square" lIns="0" tIns="0" rIns="0" bIns="0" rtlCol="0" anchor="ctr"/>
+          <a:lstStyle/>
+          <a:p>
+            <a:pPr algn="ctr" indent="0" marL="0">
+              <a:buNone/>
+            </a:pPr>
+            <a:r>
+              <a:rPr lang="en-US" sz="750" dirty="0">
+                <a:solidFill>
+                  <a:srgbClr val="374151"/>
+                </a:solidFill>
+                <a:latin typeface="Calibri" pitchFamily="34" charset="0"/>
+                <a:ea typeface="Calibri" pitchFamily="34" charset="-122"/>
+                <a:cs typeface="Calibri" pitchFamily="34" charset="-120"/>
+              </a:rPr>
+              <a:t>Deployment</a:t>
+            </a:r>
+            <a:endParaRPr lang="en-US" sz="750" dirty="0"/>
+          </a:p>
+        </p:txBody>
+      </p:sp>
+      <p:sp>
+        <p:nvSpPr>
+          <p:cNvPr id="64" name="Text 62"/>
+          <p:cNvSpPr/>
+          <p:nvPr/>
+        </p:nvSpPr>
+        <p:spPr>
+          <a:xfrm>
+            <a:off x="685800" y="4681728"/>
+            <a:ext cx="7772400" cy="228600"/>
           </a:xfrm>
           <a:prstGeom prst="rect">
             <a:avLst/>
@@ -4817,49 +6920,7 @@
               <a:buNone/>
             </a:pPr>
             <a:r>
-              <a:rPr lang="en-US" sz="1000" b="1" dirty="0">
-                <a:solidFill>
-                  <a:srgbClr val="0F1B3D"/>
-                </a:solidFill>
-                <a:latin typeface="Calibri" pitchFamily="34" charset="0"/>
-                <a:ea typeface="Calibri" pitchFamily="34" charset="-122"/>
-                <a:cs typeface="Calibri" pitchFamily="34" charset="-120"/>
-              </a:rPr>
-              <a:t>Select preferred approach  →  Finalise website structure  →  Design  →  Development  →  Testing  →  Deployment</a:t>
-            </a:r>
-            <a:endParaRPr lang="en-US" sz="1000" dirty="0"/>
-          </a:p>
-        </p:txBody>
-      </p:sp>
-      <p:sp>
-        <p:nvSpPr>
-          <p:cNvPr id="19" name="Text 17"/>
-          <p:cNvSpPr/>
-          <p:nvPr/>
-        </p:nvSpPr>
-        <p:spPr>
-          <a:xfrm>
-            <a:off x="640080" y="4754880"/>
-            <a:ext cx="7863840" cy="320040"/>
-          </a:xfrm>
-          <a:prstGeom prst="rect">
-            <a:avLst/>
-          </a:prstGeom>
-          <a:noFill/>
-          <a:ln/>
-        </p:spPr>
-        <p:txBody>
-          <a:bodyPr wrap="square" lIns="0" tIns="0" rIns="0" bIns="0" rtlCol="0" anchor="ctr"/>
-          <a:lstStyle/>
-          <a:p>
-            <a:pPr algn="l" indent="0" marL="0">
-              <a:lnSpc>
-                <a:spcPct val="130000"/>
-              </a:lnSpc>
-              <a:buNone/>
-            </a:pPr>
-            <a:r>
-              <a:rPr lang="en-US" sz="800" i="1" dirty="0">
+              <a:rPr lang="en-US" sz="750" i="1" dirty="0">
                 <a:solidFill>
                   <a:srgbClr val="6B7280"/>
                 </a:solidFill>
@@ -4867,9 +6928,9 @@
                 <a:ea typeface="Calibri" pitchFamily="34" charset="-122"/>
                 <a:cs typeface="Calibri" pitchFamily="34" charset="-120"/>
               </a:rPr>
-              <a:t>The website will be developed as a professional, accurate and scalable digital presence that can subsequently be submitted to the concerned bank/payment provider for its independent review. Final payment gateway approval remains subject to the bank/payment provider's policies and compliance assessment.</a:t>
-            </a:r>
-            <a:endParaRPr lang="en-US" sz="800" dirty="0"/>
+              <a:t>The website will be developed as a professional, accurate and scalable digital presence. Final payment gateway approval remains subject to the bank/payment provider’s policies and compliance assessment.</a:t>
+            </a:r>
+            <a:endParaRPr lang="en-US" sz="750" dirty="0"/>
           </a:p>
         </p:txBody>
       </p:sp>

--- a/Casino_Pride_Digital_Strategy.pptx
+++ b/Casino_Pride_Digital_Strategy.pptx
@@ -1213,7 +1213,7 @@
     <p:bg>
       <p:bgPr>
         <a:solidFill>
-          <a:srgbClr val="0A0E1A"/>
+          <a:srgbClr val="0D7C5F"/>
         </a:solidFill>
       </p:bgPr>
     </p:bg>
@@ -1239,14 +1239,14 @@
         </p:nvSpPr>
         <p:spPr>
           <a:xfrm>
-            <a:off x="-1371600" y="-1371600"/>
-            <a:ext cx="4114800" cy="4114800"/>
+            <a:off x="5943600" y="-1371600"/>
+            <a:ext cx="5029200" cy="5029200"/>
           </a:xfrm>
           <a:prstGeom prst="ellipse">
             <a:avLst/>
           </a:prstGeom>
           <a:solidFill>
-            <a:srgbClr val="141B2D"/>
+            <a:srgbClr val="065F46"/>
           </a:solidFill>
           <a:ln/>
         </p:spPr>
@@ -1259,8 +1259,28 @@
         </p:nvSpPr>
         <p:spPr>
           <a:xfrm>
+            <a:off x="7772400" y="3200400"/>
+            <a:ext cx="2286000" cy="2286000"/>
+          </a:xfrm>
+          <a:prstGeom prst="ellipse">
+            <a:avLst/>
+          </a:prstGeom>
+          <a:solidFill>
+            <a:srgbClr val="065F46"/>
+          </a:solidFill>
+          <a:ln/>
+        </p:spPr>
+      </p:sp>
+      <p:sp>
+        <p:nvSpPr>
+          <p:cNvPr id="4" name="Shape 2"/>
+          <p:cNvSpPr/>
+          <p:nvPr/>
+        </p:nvSpPr>
+        <p:spPr>
+          <a:xfrm>
             <a:off x="548640" y="457200"/>
-            <a:ext cx="1463040" cy="292608"/>
+            <a:ext cx="1554480" cy="292608"/>
           </a:xfrm>
           <a:prstGeom prst="roundRect">
             <a:avLst>
@@ -1268,21 +1288,21 @@
             </a:avLst>
           </a:prstGeom>
           <a:solidFill>
-            <a:srgbClr val="8B7535"/>
-          </a:solidFill>
-          <a:ln/>
-        </p:spPr>
-      </p:sp>
-      <p:sp>
-        <p:nvSpPr>
-          <p:cNvPr id="4" name="Text 2"/>
+            <a:srgbClr val="FFFFFF"/>
+          </a:solidFill>
+          <a:ln/>
+        </p:spPr>
+      </p:sp>
+      <p:sp>
+        <p:nvSpPr>
+          <p:cNvPr id="5" name="Text 3"/>
           <p:cNvSpPr/>
           <p:nvPr/>
         </p:nvSpPr>
         <p:spPr>
           <a:xfrm>
             <a:off x="548640" y="457200"/>
-            <a:ext cx="1463040" cy="292608"/>
+            <a:ext cx="1554480" cy="292608"/>
           </a:xfrm>
           <a:prstGeom prst="rect">
             <a:avLst/>
@@ -1300,7 +1320,7 @@
             <a:r>
               <a:rPr lang="en-US" sz="800" b="1" spc="150" kern="0" dirty="0">
                 <a:solidFill>
-                  <a:srgbClr val="FFFFFF"/>
+                  <a:srgbClr val="065F46"/>
                 </a:solidFill>
                 <a:latin typeface="Calibri" pitchFamily="34" charset="0"/>
                 <a:ea typeface="Calibri" pitchFamily="34" charset="-122"/>
@@ -1314,14 +1334,14 @@
       </p:sp>
       <p:sp>
         <p:nvSpPr>
-          <p:cNvPr id="5" name="Text 3"/>
+          <p:cNvPr id="6" name="Text 4"/>
           <p:cNvSpPr/>
           <p:nvPr/>
         </p:nvSpPr>
         <p:spPr>
           <a:xfrm>
             <a:off x="548640" y="1005840"/>
-            <a:ext cx="5029200" cy="1645920"/>
+            <a:ext cx="5303520" cy="1645920"/>
           </a:xfrm>
           <a:prstGeom prst="rect">
             <a:avLst/>
@@ -1396,14 +1416,14 @@
       </p:sp>
       <p:sp>
         <p:nvSpPr>
-          <p:cNvPr id="6" name="Text 4"/>
+          <p:cNvPr id="7" name="Text 5"/>
           <p:cNvSpPr/>
           <p:nvPr/>
         </p:nvSpPr>
         <p:spPr>
           <a:xfrm>
             <a:off x="548640" y="2834640"/>
-            <a:ext cx="4754880" cy="777240"/>
+            <a:ext cx="4937760" cy="777240"/>
           </a:xfrm>
           <a:prstGeom prst="rect">
             <a:avLst/>
@@ -1424,7 +1444,7 @@
             <a:r>
               <a:rPr lang="en-US" sz="1050" dirty="0">
                 <a:solidFill>
-                  <a:srgbClr val="9CA3AF"/>
+                  <a:srgbClr val="D1FAE5"/>
                 </a:solidFill>
                 <a:latin typeface="Calibri" pitchFamily="34" charset="0"/>
                 <a:ea typeface="Calibri" pitchFamily="34" charset="-122"/>
@@ -1438,14 +1458,14 @@
       </p:sp>
       <p:sp>
         <p:nvSpPr>
-          <p:cNvPr id="7" name="Text 5"/>
+          <p:cNvPr id="8" name="Text 6"/>
           <p:cNvSpPr/>
           <p:nvPr/>
         </p:nvSpPr>
         <p:spPr>
           <a:xfrm>
             <a:off x="548640" y="3703320"/>
-            <a:ext cx="4754880" cy="640080"/>
+            <a:ext cx="4937760" cy="594360"/>
           </a:xfrm>
           <a:prstGeom prst="rect">
             <a:avLst/>
@@ -1466,7 +1486,7 @@
             <a:r>
               <a:rPr lang="en-US" sz="1050" dirty="0">
                 <a:solidFill>
-                  <a:srgbClr val="9CA3AF"/>
+                  <a:srgbClr val="D1FAE5"/>
                 </a:solidFill>
                 <a:latin typeface="Calibri" pitchFamily="34" charset="0"/>
                 <a:ea typeface="Calibri" pitchFamily="34" charset="-122"/>
@@ -1480,28 +1500,28 @@
       </p:sp>
       <p:sp>
         <p:nvSpPr>
-          <p:cNvPr id="8" name="Shape 6"/>
-          <p:cNvSpPr/>
-          <p:nvPr/>
-        </p:nvSpPr>
-        <p:spPr>
-          <a:xfrm>
-            <a:off x="5669280" y="731520"/>
-            <a:ext cx="3108960" cy="3840480"/>
+          <p:cNvPr id="9" name="Shape 7"/>
+          <p:cNvSpPr/>
+          <p:nvPr/>
+        </p:nvSpPr>
+        <p:spPr>
+          <a:xfrm>
+            <a:off x="5760720" y="914400"/>
+            <a:ext cx="3017520" cy="3474720"/>
           </a:xfrm>
           <a:prstGeom prst="roundRect">
             <a:avLst>
-              <a:gd name="adj" fmla="val 4412"/>
+              <a:gd name="adj" fmla="val 4545"/>
             </a:avLst>
           </a:prstGeom>
           <a:solidFill>
-            <a:srgbClr val="141B2D"/>
+            <a:srgbClr val="FFFFFF"/>
           </a:solidFill>
           <a:ln/>
           <a:effectLst>
-            <a:outerShdw sx="100000" sy="100000" kx="0" ky="0" algn="bl" rotWithShape="0" blurRad="152400" dist="50800" dir="16200000">
+            <a:outerShdw sx="100000" sy="100000" kx="0" ky="0" algn="bl" rotWithShape="0" blurRad="127000" dist="38100" dir="16200000">
               <a:srgbClr val="000000">
-                <a:alpha val="30000"/>
+                <a:alpha val="15000"/>
               </a:srgbClr>
             </a:outerShdw>
           </a:effectLst>
@@ -1509,14 +1529,14 @@
       </p:sp>
       <p:sp>
         <p:nvSpPr>
-          <p:cNvPr id="9" name="Shape 7"/>
-          <p:cNvSpPr/>
-          <p:nvPr/>
-        </p:nvSpPr>
-        <p:spPr>
-          <a:xfrm>
-            <a:off x="5943600" y="960120"/>
-            <a:ext cx="1828800" cy="36576"/>
+          <p:cNvPr id="10" name="Shape 8"/>
+          <p:cNvSpPr/>
+          <p:nvPr/>
+        </p:nvSpPr>
+        <p:spPr>
+          <a:xfrm>
+            <a:off x="6035040" y="1143000"/>
+            <a:ext cx="1645920" cy="36576"/>
           </a:xfrm>
           <a:prstGeom prst="roundRect">
             <a:avLst>
@@ -1524,21 +1544,21 @@
             </a:avLst>
           </a:prstGeom>
           <a:solidFill>
-            <a:srgbClr val="D4A853"/>
-          </a:solidFill>
-          <a:ln/>
-        </p:spPr>
-      </p:sp>
-      <p:sp>
-        <p:nvSpPr>
-          <p:cNvPr id="10" name="Text 8"/>
-          <p:cNvSpPr/>
-          <p:nvPr/>
-        </p:nvSpPr>
-        <p:spPr>
-          <a:xfrm>
-            <a:off x="5943600" y="1143000"/>
-            <a:ext cx="2560320" cy="365760"/>
+            <a:srgbClr val="34D399"/>
+          </a:solidFill>
+          <a:ln/>
+        </p:spPr>
+      </p:sp>
+      <p:sp>
+        <p:nvSpPr>
+          <p:cNvPr id="11" name="Text 9"/>
+          <p:cNvSpPr/>
+          <p:nvPr/>
+        </p:nvSpPr>
+        <p:spPr>
+          <a:xfrm>
+            <a:off x="6035040" y="1325880"/>
+            <a:ext cx="2468880" cy="365760"/>
           </a:xfrm>
           <a:prstGeom prst="rect">
             <a:avLst/>
@@ -1556,7 +1576,7 @@
             <a:r>
               <a:rPr lang="en-US" sz="1400" b="1" dirty="0">
                 <a:solidFill>
-                  <a:srgbClr val="FFFFFF"/>
+                  <a:srgbClr val="065F46"/>
                 </a:solidFill>
                 <a:latin typeface="Cambria" pitchFamily="34" charset="0"/>
                 <a:ea typeface="Cambria" pitchFamily="34" charset="-122"/>
@@ -1570,14 +1590,14 @@
       </p:sp>
       <p:sp>
         <p:nvSpPr>
-          <p:cNvPr id="11" name="Text 9"/>
-          <p:cNvSpPr/>
-          <p:nvPr/>
-        </p:nvSpPr>
-        <p:spPr>
-          <a:xfrm>
-            <a:off x="5943600" y="1554480"/>
-            <a:ext cx="2560320" cy="502920"/>
+          <p:cNvPr id="12" name="Text 10"/>
+          <p:cNvSpPr/>
+          <p:nvPr/>
+        </p:nvSpPr>
+        <p:spPr>
+          <a:xfrm>
+            <a:off x="6035040" y="1737360"/>
+            <a:ext cx="2468880" cy="457200"/>
           </a:xfrm>
           <a:prstGeom prst="rect">
             <a:avLst/>
@@ -1598,7 +1618,7 @@
             <a:r>
               <a:rPr lang="en-US" sz="1000" dirty="0">
                 <a:solidFill>
-                  <a:srgbClr val="9CA3AF"/>
+                  <a:srgbClr val="4B5563"/>
                 </a:solidFill>
                 <a:latin typeface="Calibri" pitchFamily="34" charset="0"/>
                 <a:ea typeface="Calibri" pitchFamily="34" charset="-122"/>
@@ -1612,34 +1632,34 @@
       </p:sp>
       <p:sp>
         <p:nvSpPr>
-          <p:cNvPr id="12" name="Shape 10"/>
-          <p:cNvSpPr/>
-          <p:nvPr/>
-        </p:nvSpPr>
-        <p:spPr>
-          <a:xfrm>
-            <a:off x="5943600" y="2267712"/>
-            <a:ext cx="109728" cy="109728"/>
+          <p:cNvPr id="13" name="Shape 11"/>
+          <p:cNvSpPr/>
+          <p:nvPr/>
+        </p:nvSpPr>
+        <p:spPr>
+          <a:xfrm>
+            <a:off x="6035040" y="2350008"/>
+            <a:ext cx="128016" cy="128016"/>
           </a:xfrm>
           <a:prstGeom prst="ellipse">
             <a:avLst/>
           </a:prstGeom>
           <a:solidFill>
-            <a:srgbClr val="D4A853"/>
-          </a:solidFill>
-          <a:ln/>
-        </p:spPr>
-      </p:sp>
-      <p:sp>
-        <p:nvSpPr>
-          <p:cNvPr id="13" name="Text 11"/>
-          <p:cNvSpPr/>
-          <p:nvPr/>
-        </p:nvSpPr>
-        <p:spPr>
-          <a:xfrm>
-            <a:off x="6217920" y="2194560"/>
-            <a:ext cx="2286000" cy="274320"/>
+            <a:srgbClr val="34D399"/>
+          </a:solidFill>
+          <a:ln/>
+        </p:spPr>
+      </p:sp>
+      <p:sp>
+        <p:nvSpPr>
+          <p:cNvPr id="14" name="Text 12"/>
+          <p:cNvSpPr/>
+          <p:nvPr/>
+        </p:nvSpPr>
+        <p:spPr>
+          <a:xfrm>
+            <a:off x="6309360" y="2286000"/>
+            <a:ext cx="2194560" cy="274320"/>
           </a:xfrm>
           <a:prstGeom prst="rect">
             <a:avLst/>
@@ -1657,7 +1677,7 @@
             <a:r>
               <a:rPr lang="en-US" sz="1200" b="1" dirty="0">
                 <a:solidFill>
-                  <a:srgbClr val="FFFFFF"/>
+                  <a:srgbClr val="1F2937"/>
                 </a:solidFill>
                 <a:latin typeface="Calibri" pitchFamily="34" charset="0"/>
                 <a:ea typeface="Calibri" pitchFamily="34" charset="-122"/>
@@ -1671,34 +1691,34 @@
       </p:sp>
       <p:sp>
         <p:nvSpPr>
-          <p:cNvPr id="14" name="Shape 12"/>
-          <p:cNvSpPr/>
-          <p:nvPr/>
-        </p:nvSpPr>
-        <p:spPr>
-          <a:xfrm>
-            <a:off x="5943600" y="2651760"/>
-            <a:ext cx="109728" cy="109728"/>
+          <p:cNvPr id="15" name="Shape 13"/>
+          <p:cNvSpPr/>
+          <p:nvPr/>
+        </p:nvSpPr>
+        <p:spPr>
+          <a:xfrm>
+            <a:off x="6035040" y="2734056"/>
+            <a:ext cx="128016" cy="128016"/>
           </a:xfrm>
           <a:prstGeom prst="ellipse">
             <a:avLst/>
           </a:prstGeom>
           <a:solidFill>
-            <a:srgbClr val="D4A853"/>
-          </a:solidFill>
-          <a:ln/>
-        </p:spPr>
-      </p:sp>
-      <p:sp>
-        <p:nvSpPr>
-          <p:cNvPr id="15" name="Text 13"/>
-          <p:cNvSpPr/>
-          <p:nvPr/>
-        </p:nvSpPr>
-        <p:spPr>
-          <a:xfrm>
-            <a:off x="6217920" y="2578608"/>
-            <a:ext cx="2286000" cy="274320"/>
+            <a:srgbClr val="34D399"/>
+          </a:solidFill>
+          <a:ln/>
+        </p:spPr>
+      </p:sp>
+      <p:sp>
+        <p:nvSpPr>
+          <p:cNvPr id="16" name="Text 14"/>
+          <p:cNvSpPr/>
+          <p:nvPr/>
+        </p:nvSpPr>
+        <p:spPr>
+          <a:xfrm>
+            <a:off x="6309360" y="2670048"/>
+            <a:ext cx="2194560" cy="274320"/>
           </a:xfrm>
           <a:prstGeom prst="rect">
             <a:avLst/>
@@ -1716,7 +1736,7 @@
             <a:r>
               <a:rPr lang="en-US" sz="1200" b="1" dirty="0">
                 <a:solidFill>
-                  <a:srgbClr val="FFFFFF"/>
+                  <a:srgbClr val="1F2937"/>
                 </a:solidFill>
                 <a:latin typeface="Calibri" pitchFamily="34" charset="0"/>
                 <a:ea typeface="Calibri" pitchFamily="34" charset="-122"/>
@@ -1730,34 +1750,34 @@
       </p:sp>
       <p:sp>
         <p:nvSpPr>
-          <p:cNvPr id="16" name="Shape 14"/>
-          <p:cNvSpPr/>
-          <p:nvPr/>
-        </p:nvSpPr>
-        <p:spPr>
-          <a:xfrm>
-            <a:off x="5943600" y="3035808"/>
-            <a:ext cx="109728" cy="109728"/>
+          <p:cNvPr id="17" name="Shape 15"/>
+          <p:cNvSpPr/>
+          <p:nvPr/>
+        </p:nvSpPr>
+        <p:spPr>
+          <a:xfrm>
+            <a:off x="6035040" y="3118104"/>
+            <a:ext cx="128016" cy="128016"/>
           </a:xfrm>
           <a:prstGeom prst="ellipse">
             <a:avLst/>
           </a:prstGeom>
           <a:solidFill>
-            <a:srgbClr val="D4A853"/>
-          </a:solidFill>
-          <a:ln/>
-        </p:spPr>
-      </p:sp>
-      <p:sp>
-        <p:nvSpPr>
-          <p:cNvPr id="17" name="Text 15"/>
-          <p:cNvSpPr/>
-          <p:nvPr/>
-        </p:nvSpPr>
-        <p:spPr>
-          <a:xfrm>
-            <a:off x="6217920" y="2962656"/>
-            <a:ext cx="2286000" cy="274320"/>
+            <a:srgbClr val="34D399"/>
+          </a:solidFill>
+          <a:ln/>
+        </p:spPr>
+      </p:sp>
+      <p:sp>
+        <p:nvSpPr>
+          <p:cNvPr id="18" name="Text 16"/>
+          <p:cNvSpPr/>
+          <p:nvPr/>
+        </p:nvSpPr>
+        <p:spPr>
+          <a:xfrm>
+            <a:off x="6309360" y="3054096"/>
+            <a:ext cx="2194560" cy="274320"/>
           </a:xfrm>
           <a:prstGeom prst="rect">
             <a:avLst/>
@@ -1775,7 +1795,7 @@
             <a:r>
               <a:rPr lang="en-US" sz="1200" b="1" dirty="0">
                 <a:solidFill>
-                  <a:srgbClr val="FFFFFF"/>
+                  <a:srgbClr val="1F2937"/>
                 </a:solidFill>
                 <a:latin typeface="Calibri" pitchFamily="34" charset="0"/>
                 <a:ea typeface="Calibri" pitchFamily="34" charset="-122"/>
@@ -1789,34 +1809,34 @@
       </p:sp>
       <p:sp>
         <p:nvSpPr>
-          <p:cNvPr id="18" name="Shape 16"/>
-          <p:cNvSpPr/>
-          <p:nvPr/>
-        </p:nvSpPr>
-        <p:spPr>
-          <a:xfrm>
-            <a:off x="5943600" y="3419856"/>
-            <a:ext cx="109728" cy="109728"/>
+          <p:cNvPr id="19" name="Shape 17"/>
+          <p:cNvSpPr/>
+          <p:nvPr/>
+        </p:nvSpPr>
+        <p:spPr>
+          <a:xfrm>
+            <a:off x="6035040" y="3502152"/>
+            <a:ext cx="128016" cy="128016"/>
           </a:xfrm>
           <a:prstGeom prst="ellipse">
             <a:avLst/>
           </a:prstGeom>
           <a:solidFill>
-            <a:srgbClr val="D4A853"/>
-          </a:solidFill>
-          <a:ln/>
-        </p:spPr>
-      </p:sp>
-      <p:sp>
-        <p:nvSpPr>
-          <p:cNvPr id="19" name="Text 17"/>
-          <p:cNvSpPr/>
-          <p:nvPr/>
-        </p:nvSpPr>
-        <p:spPr>
-          <a:xfrm>
-            <a:off x="6217920" y="3346704"/>
-            <a:ext cx="2286000" cy="274320"/>
+            <a:srgbClr val="34D399"/>
+          </a:solidFill>
+          <a:ln/>
+        </p:spPr>
+      </p:sp>
+      <p:sp>
+        <p:nvSpPr>
+          <p:cNvPr id="20" name="Text 18"/>
+          <p:cNvSpPr/>
+          <p:nvPr/>
+        </p:nvSpPr>
+        <p:spPr>
+          <a:xfrm>
+            <a:off x="6309360" y="3438144"/>
+            <a:ext cx="2194560" cy="274320"/>
           </a:xfrm>
           <a:prstGeom prst="rect">
             <a:avLst/>
@@ -1834,7 +1854,7 @@
             <a:r>
               <a:rPr lang="en-US" sz="1200" b="1" dirty="0">
                 <a:solidFill>
-                  <a:srgbClr val="FFFFFF"/>
+                  <a:srgbClr val="1F2937"/>
                 </a:solidFill>
                 <a:latin typeface="Calibri" pitchFamily="34" charset="0"/>
                 <a:ea typeface="Calibri" pitchFamily="34" charset="-122"/>
@@ -1848,34 +1868,34 @@
       </p:sp>
       <p:sp>
         <p:nvSpPr>
-          <p:cNvPr id="20" name="Shape 18"/>
-          <p:cNvSpPr/>
-          <p:nvPr/>
-        </p:nvSpPr>
-        <p:spPr>
-          <a:xfrm>
-            <a:off x="5943600" y="3803904"/>
-            <a:ext cx="109728" cy="109728"/>
+          <p:cNvPr id="21" name="Shape 19"/>
+          <p:cNvSpPr/>
+          <p:nvPr/>
+        </p:nvSpPr>
+        <p:spPr>
+          <a:xfrm>
+            <a:off x="6035040" y="3886200"/>
+            <a:ext cx="128016" cy="128016"/>
           </a:xfrm>
           <a:prstGeom prst="ellipse">
             <a:avLst/>
           </a:prstGeom>
           <a:solidFill>
-            <a:srgbClr val="D4A853"/>
-          </a:solidFill>
-          <a:ln/>
-        </p:spPr>
-      </p:sp>
-      <p:sp>
-        <p:nvSpPr>
-          <p:cNvPr id="21" name="Text 19"/>
-          <p:cNvSpPr/>
-          <p:nvPr/>
-        </p:nvSpPr>
-        <p:spPr>
-          <a:xfrm>
-            <a:off x="6217920" y="3730752"/>
-            <a:ext cx="2286000" cy="274320"/>
+            <a:srgbClr val="34D399"/>
+          </a:solidFill>
+          <a:ln/>
+        </p:spPr>
+      </p:sp>
+      <p:sp>
+        <p:nvSpPr>
+          <p:cNvPr id="22" name="Text 20"/>
+          <p:cNvSpPr/>
+          <p:nvPr/>
+        </p:nvSpPr>
+        <p:spPr>
+          <a:xfrm>
+            <a:off x="6309360" y="3822192"/>
+            <a:ext cx="2194560" cy="274320"/>
           </a:xfrm>
           <a:prstGeom prst="rect">
             <a:avLst/>
@@ -1893,7 +1913,7 @@
             <a:r>
               <a:rPr lang="en-US" sz="1200" b="1" dirty="0">
                 <a:solidFill>
-                  <a:srgbClr val="FFFFFF"/>
+                  <a:srgbClr val="1F2937"/>
                 </a:solidFill>
                 <a:latin typeface="Calibri" pitchFamily="34" charset="0"/>
                 <a:ea typeface="Calibri" pitchFamily="34" charset="-122"/>
@@ -1907,7 +1927,7 @@
       </p:sp>
       <p:sp>
         <p:nvSpPr>
-          <p:cNvPr id="22" name="Text 20"/>
+          <p:cNvPr id="23" name="Text 21"/>
           <p:cNvSpPr/>
           <p:nvPr/>
         </p:nvSpPr>
@@ -1932,7 +1952,7 @@
             <a:r>
               <a:rPr lang="en-US" sz="750" i="1" dirty="0">
                 <a:solidFill>
-                  <a:srgbClr val="4B5563"/>
+                  <a:srgbClr val="D1FAE5"/>
                 </a:solidFill>
                 <a:latin typeface="Calibri" pitchFamily="34" charset="0"/>
                 <a:ea typeface="Calibri" pitchFamily="34" charset="-122"/>
@@ -1958,7 +1978,7 @@
     <p:bg>
       <p:bgPr>
         <a:solidFill>
-          <a:srgbClr val="F8FAFC"/>
+          <a:srgbClr val="F8FAF9"/>
         </a:solidFill>
       </p:bgPr>
     </p:bg>
@@ -1993,7 +2013,7 @@
             </a:avLst>
           </a:prstGeom>
           <a:solidFill>
-            <a:srgbClr val="0A0E1A"/>
+            <a:srgbClr val="0D7C5F"/>
           </a:solidFill>
           <a:ln/>
         </p:spPr>
@@ -2056,7 +2076,12 @@
           <a:solidFill>
             <a:srgbClr val="FFFFFF"/>
           </a:solidFill>
-          <a:ln/>
+          <a:ln w="12700">
+            <a:solidFill>
+              <a:srgbClr val="E5E7EB"/>
+            </a:solidFill>
+            <a:prstDash val="solid"/>
+          </a:ln>
           <a:effectLst>
             <a:outerShdw sx="100000" sy="100000" kx="0" ky="0" algn="bl" rotWithShape="0" blurRad="101600" dist="25400" dir="16200000">
               <a:srgbClr val="000000">
@@ -2083,7 +2108,7 @@
             </a:avLst>
           </a:prstGeom>
           <a:solidFill>
-            <a:srgbClr val="3B82F6"/>
+            <a:srgbClr val="2D5A8B"/>
           </a:solidFill>
           <a:ln/>
         </p:spPr>
@@ -2240,7 +2265,7 @@
             <a:avLst/>
           </a:prstGeom>
           <a:solidFill>
-            <a:srgbClr val="3B82F6"/>
+            <a:srgbClr val="2D5A8B"/>
           </a:solidFill>
           <a:ln/>
         </p:spPr>
@@ -2299,7 +2324,7 @@
             <a:avLst/>
           </a:prstGeom>
           <a:solidFill>
-            <a:srgbClr val="3B82F6"/>
+            <a:srgbClr val="2D5A8B"/>
           </a:solidFill>
           <a:ln/>
         </p:spPr>
@@ -2358,7 +2383,7 @@
             <a:avLst/>
           </a:prstGeom>
           <a:solidFill>
-            <a:srgbClr val="3B82F6"/>
+            <a:srgbClr val="2D5A8B"/>
           </a:solidFill>
           <a:ln/>
         </p:spPr>
@@ -2417,7 +2442,7 @@
             <a:avLst/>
           </a:prstGeom>
           <a:solidFill>
-            <a:srgbClr val="3B82F6"/>
+            <a:srgbClr val="2D5A8B"/>
           </a:solidFill>
           <a:ln/>
         </p:spPr>
@@ -2476,7 +2501,7 @@
             <a:avLst/>
           </a:prstGeom>
           <a:solidFill>
-            <a:srgbClr val="3B82F6"/>
+            <a:srgbClr val="2D5A8B"/>
           </a:solidFill>
           <a:ln/>
         </p:spPr>
@@ -2639,16 +2664,16 @@
           <a:solidFill>
             <a:srgbClr val="FFFFFF"/>
           </a:solidFill>
-          <a:ln w="19050">
+          <a:ln w="12700">
             <a:solidFill>
-              <a:srgbClr val="10B981"/>
+              <a:srgbClr val="E5E7EB"/>
             </a:solidFill>
             <a:prstDash val="solid"/>
           </a:ln>
           <a:effectLst>
-            <a:outerShdw sx="100000" sy="100000" kx="0" ky="0" algn="bl" rotWithShape="0" blurRad="127000" dist="38100" dir="16200000">
+            <a:outerShdw sx="100000" sy="100000" kx="0" ky="0" algn="bl" rotWithShape="0" blurRad="101600" dist="25400" dir="16200000">
               <a:srgbClr val="000000">
-                <a:alpha val="10000"/>
+                <a:alpha val="8000"/>
               </a:srgbClr>
             </a:outerShdw>
           </a:effectLst>
@@ -2663,7 +2688,7 @@
         <p:spPr>
           <a:xfrm>
             <a:off x="4937760" y="1097280"/>
-            <a:ext cx="1554480" cy="256032"/>
+            <a:ext cx="1005840" cy="256032"/>
           </a:xfrm>
           <a:prstGeom prst="roundRect">
             <a:avLst>
@@ -2671,7 +2696,7 @@
             </a:avLst>
           </a:prstGeom>
           <a:solidFill>
-            <a:srgbClr val="10B981"/>
+            <a:srgbClr val="0D7C5F"/>
           </a:solidFill>
           <a:ln/>
         </p:spPr>
@@ -2685,7 +2710,7 @@
         <p:spPr>
           <a:xfrm>
             <a:off x="4937760" y="1097280"/>
-            <a:ext cx="1554480" cy="256032"/>
+            <a:ext cx="1005840" cy="256032"/>
           </a:xfrm>
           <a:prstGeom prst="rect">
             <a:avLst/>
@@ -2701,7 +2726,7 @@
               <a:buNone/>
             </a:pPr>
             <a:r>
-              <a:rPr lang="en-US" sz="650" b="1" dirty="0">
+              <a:rPr lang="en-US" sz="750" b="1" dirty="0">
                 <a:solidFill>
                   <a:srgbClr val="FFFFFF"/>
                 </a:solidFill>
@@ -2709,9 +2734,9 @@
                 <a:ea typeface="Calibri" pitchFamily="34" charset="-122"/>
                 <a:cs typeface="Calibri" pitchFamily="34" charset="-120"/>
               </a:rPr>
-              <a:t>OPTION 2 — RECOMMENDED</a:t>
-            </a:r>
-            <a:endParaRPr lang="en-US" sz="650" dirty="0"/>
+              <a:t>OPTION 2</a:t>
+            </a:r>
+            <a:endParaRPr lang="en-US" sz="750" dirty="0"/>
           </a:p>
         </p:txBody>
       </p:sp>
@@ -2851,7 +2876,7 @@
             <a:avLst/>
           </a:prstGeom>
           <a:solidFill>
-            <a:srgbClr val="10B981"/>
+            <a:srgbClr val="0D7C5F"/>
           </a:solidFill>
           <a:ln/>
         </p:spPr>
@@ -2910,7 +2935,7 @@
             <a:avLst/>
           </a:prstGeom>
           <a:solidFill>
-            <a:srgbClr val="10B981"/>
+            <a:srgbClr val="0D7C5F"/>
           </a:solidFill>
           <a:ln/>
         </p:spPr>
@@ -2969,7 +2994,7 @@
             <a:avLst/>
           </a:prstGeom>
           <a:solidFill>
-            <a:srgbClr val="10B981"/>
+            <a:srgbClr val="0D7C5F"/>
           </a:solidFill>
           <a:ln/>
         </p:spPr>
@@ -3028,7 +3053,7 @@
             <a:avLst/>
           </a:prstGeom>
           <a:solidFill>
-            <a:srgbClr val="10B981"/>
+            <a:srgbClr val="0D7C5F"/>
           </a:solidFill>
           <a:ln/>
         </p:spPr>
@@ -3087,7 +3112,7 @@
             <a:avLst/>
           </a:prstGeom>
           <a:solidFill>
-            <a:srgbClr val="10B981"/>
+            <a:srgbClr val="0D7C5F"/>
           </a:solidFill>
           <a:ln/>
         </p:spPr>
@@ -3180,7 +3205,7 @@
             <a:r>
               <a:rPr lang="en-US" sz="750" b="1" dirty="0">
                 <a:solidFill>
-                  <a:srgbClr val="10B981"/>
+                  <a:srgbClr val="0D7C5F"/>
                 </a:solidFill>
                 <a:latin typeface="Calibri" pitchFamily="34" charset="0"/>
                 <a:ea typeface="Calibri" pitchFamily="34" charset="-122"/>
@@ -3272,13 +3297,13 @@
         <p:spPr>
           <a:xfrm>
             <a:off x="0" y="0"/>
-            <a:ext cx="9144000" cy="1645920"/>
-          </a:xfrm>
-          <a:prstGeom prst="rect">
-            <a:avLst/>
-          </a:prstGeom>
-          <a:solidFill>
-            <a:srgbClr val="0A0E1A"/>
+            <a:ext cx="9144000" cy="1554480"/>
+          </a:xfrm>
+          <a:prstGeom prst="rect">
+            <a:avLst/>
+          </a:prstGeom>
+          <a:solidFill>
+            <a:srgbClr val="2D5A8B"/>
           </a:solidFill>
           <a:ln/>
         </p:spPr>
@@ -3292,7 +3317,7 @@
         <p:spPr>
           <a:xfrm>
             <a:off x="457200" y="320040"/>
-            <a:ext cx="1463040" cy="237744"/>
+            <a:ext cx="1005840" cy="237744"/>
           </a:xfrm>
           <a:prstGeom prst="roundRect">
             <a:avLst>
@@ -3300,7 +3325,7 @@
             </a:avLst>
           </a:prstGeom>
           <a:solidFill>
-            <a:srgbClr val="10B981"/>
+            <a:srgbClr val="FFFFFF"/>
           </a:solidFill>
           <a:ln/>
         </p:spPr>
@@ -3314,7 +3339,7 @@
         <p:spPr>
           <a:xfrm>
             <a:off x="457200" y="320040"/>
-            <a:ext cx="1463040" cy="237744"/>
+            <a:ext cx="1005840" cy="237744"/>
           </a:xfrm>
           <a:prstGeom prst="rect">
             <a:avLst/>
@@ -3330,17 +3355,17 @@
               <a:buNone/>
             </a:pPr>
             <a:r>
-              <a:rPr lang="en-US" sz="700" b="1" dirty="0">
-                <a:solidFill>
-                  <a:srgbClr val="FFFFFF"/>
-                </a:solidFill>
-                <a:latin typeface="Calibri" pitchFamily="34" charset="0"/>
-                <a:ea typeface="Calibri" pitchFamily="34" charset="-122"/>
-                <a:cs typeface="Calibri" pitchFamily="34" charset="-120"/>
-              </a:rPr>
-              <a:t>RECOMMENDED</a:t>
-            </a:r>
-            <a:endParaRPr lang="en-US" sz="700" dirty="0"/>
+              <a:rPr lang="en-US" sz="750" b="1" dirty="0">
+                <a:solidFill>
+                  <a:srgbClr val="2D5A8B"/>
+                </a:solidFill>
+                <a:latin typeface="Calibri" pitchFamily="34" charset="0"/>
+                <a:ea typeface="Calibri" pitchFamily="34" charset="-122"/>
+                <a:cs typeface="Calibri" pitchFamily="34" charset="-120"/>
+              </a:rPr>
+              <a:t>OPTION 1</a:t>
+            </a:r>
+            <a:endParaRPr lang="en-US" sz="750" dirty="0"/>
           </a:p>
         </p:txBody>
       </p:sp>
@@ -3377,7 +3402,7 @@
                 <a:ea typeface="Cambria" pitchFamily="34" charset="-122"/>
                 <a:cs typeface="Cambria" pitchFamily="34" charset="-120"/>
               </a:rPr>
-              <a:t>Goa Coastal Resorts &amp; Recreation Pvt. Ltd.</a:t>
+              <a:t>CP Goa — Entertainment &amp; Nightlife Website</a:t>
             </a:r>
             <a:endParaRPr lang="en-US" sz="2400" dirty="0"/>
           </a:p>
@@ -3391,7 +3416,7 @@
         </p:nvSpPr>
         <p:spPr>
           <a:xfrm>
-            <a:off x="457200" y="1188720"/>
+            <a:off x="457200" y="1143000"/>
             <a:ext cx="8229600" cy="274320"/>
           </a:xfrm>
           <a:prstGeom prst="rect">
@@ -3410,13 +3435,13 @@
             <a:r>
               <a:rPr lang="en-US" sz="1100" dirty="0">
                 <a:solidFill>
-                  <a:srgbClr val="9CA3AF"/>
-                </a:solidFill>
-                <a:latin typeface="Calibri" pitchFamily="34" charset="0"/>
-                <a:ea typeface="Calibri" pitchFamily="34" charset="-122"/>
-                <a:cs typeface="Calibri" pitchFamily="34" charset="-120"/>
-              </a:rPr>
-              <a:t>Corporate Business Website — Representing the Company’s Broader Identity</a:t>
+                  <a:srgbClr val="D1FAE5"/>
+                </a:solidFill>
+                <a:latin typeface="Calibri" pitchFamily="34" charset="0"/>
+                <a:ea typeface="Calibri" pitchFamily="34" charset="-122"/>
+                <a:cs typeface="Calibri" pitchFamily="34" charset="-120"/>
+              </a:rPr>
+              <a:t>A dedicated sub-domain website positioned around CP Goa as an entertainment brand</a:t>
             </a:r>
             <a:endParaRPr lang="en-US" sz="1100" dirty="0"/>
           </a:p>
@@ -3430,8 +3455,8 @@
         </p:nvSpPr>
         <p:spPr>
           <a:xfrm>
-            <a:off x="457200" y="1920240"/>
-            <a:ext cx="8229600" cy="594360"/>
+            <a:off x="457200" y="1828800"/>
+            <a:ext cx="8229600" cy="548640"/>
           </a:xfrm>
           <a:prstGeom prst="rect">
             <a:avLst/>
@@ -3458,7 +3483,7 @@
                 <a:ea typeface="Calibri" pitchFamily="34" charset="-122"/>
                 <a:cs typeface="Calibri" pitchFamily="34" charset="-120"/>
               </a:rPr>
-              <a:t>Develop a new 5-page website under the domain of Goa Coastal Resorts &amp; Recreation Pvt. Ltd., the company associated with Casino Pride. Instead of positioning the website around casino/gaming, it presents the company’s broader business identity and legitimate activities.</a:t>
+              <a:t>Create a dedicated consumer-facing entertainment presence while keeping the existing cpofficial.in website separate. The website will focus on the entertainment, nightlife, and lifestyle aspects of the brand.</a:t>
             </a:r>
             <a:endParaRPr lang="en-US" sz="1100" dirty="0"/>
           </a:p>
@@ -3472,16 +3497,16 @@
         </p:nvSpPr>
         <p:spPr>
           <a:xfrm>
-            <a:off x="457200" y="2697480"/>
-            <a:ext cx="1600200" cy="347472"/>
+            <a:off x="457200" y="2560320"/>
+            <a:ext cx="1280160" cy="320040"/>
           </a:xfrm>
           <a:prstGeom prst="roundRect">
             <a:avLst>
-              <a:gd name="adj" fmla="val 50000"/>
+              <a:gd name="adj" fmla="val 48571"/>
             </a:avLst>
           </a:prstGeom>
           <a:solidFill>
-            <a:srgbClr val="0A0E1A"/>
+            <a:srgbClr val="2D5A8B"/>
           </a:solidFill>
           <a:ln/>
         </p:spPr>
@@ -3494,8 +3519,8 @@
         </p:nvSpPr>
         <p:spPr>
           <a:xfrm>
-            <a:off x="457200" y="2697480"/>
-            <a:ext cx="1600200" cy="347472"/>
+            <a:off x="457200" y="2560320"/>
+            <a:ext cx="1280160" cy="320040"/>
           </a:xfrm>
           <a:prstGeom prst="rect">
             <a:avLst/>
@@ -3511,7 +3536,7 @@
               <a:buNone/>
             </a:pPr>
             <a:r>
-              <a:rPr lang="en-US" sz="950" b="1" dirty="0">
+              <a:rPr lang="en-US" sz="900" b="1" dirty="0">
                 <a:solidFill>
                   <a:srgbClr val="FFFFFF"/>
                 </a:solidFill>
@@ -3519,9 +3544,9 @@
                 <a:ea typeface="Calibri" pitchFamily="34" charset="-122"/>
                 <a:cs typeface="Calibri" pitchFamily="34" charset="-120"/>
               </a:rPr>
-              <a:t>Hospitality</a:t>
-            </a:r>
-            <a:endParaRPr lang="en-US" sz="950" dirty="0"/>
+              <a:t>Entertainment</a:t>
+            </a:r>
+            <a:endParaRPr lang="en-US" sz="900" dirty="0"/>
           </a:p>
         </p:txBody>
       </p:sp>
@@ -3533,16 +3558,16 @@
         </p:nvSpPr>
         <p:spPr>
           <a:xfrm>
-            <a:off x="2194560" y="2697480"/>
-            <a:ext cx="1600200" cy="347472"/>
+            <a:off x="1874520" y="2560320"/>
+            <a:ext cx="1280160" cy="320040"/>
           </a:xfrm>
           <a:prstGeom prst="roundRect">
             <a:avLst>
-              <a:gd name="adj" fmla="val 50000"/>
+              <a:gd name="adj" fmla="val 48571"/>
             </a:avLst>
           </a:prstGeom>
           <a:solidFill>
-            <a:srgbClr val="0A0E1A"/>
+            <a:srgbClr val="2D5A8B"/>
           </a:solidFill>
           <a:ln/>
         </p:spPr>
@@ -3555,8 +3580,8 @@
         </p:nvSpPr>
         <p:spPr>
           <a:xfrm>
-            <a:off x="2194560" y="2697480"/>
-            <a:ext cx="1600200" cy="347472"/>
+            <a:off x="1874520" y="2560320"/>
+            <a:ext cx="1280160" cy="320040"/>
           </a:xfrm>
           <a:prstGeom prst="rect">
             <a:avLst/>
@@ -3572,7 +3597,7 @@
               <a:buNone/>
             </a:pPr>
             <a:r>
-              <a:rPr lang="en-US" sz="950" b="1" dirty="0">
+              <a:rPr lang="en-US" sz="900" b="1" dirty="0">
                 <a:solidFill>
                   <a:srgbClr val="FFFFFF"/>
                 </a:solidFill>
@@ -3580,9 +3605,9 @@
                 <a:ea typeface="Calibri" pitchFamily="34" charset="-122"/>
                 <a:cs typeface="Calibri" pitchFamily="34" charset="-120"/>
               </a:rPr>
-              <a:t>Entertainment</a:t>
-            </a:r>
-            <a:endParaRPr lang="en-US" sz="950" dirty="0"/>
+              <a:t>Nightlife</a:t>
+            </a:r>
+            <a:endParaRPr lang="en-US" sz="900" dirty="0"/>
           </a:p>
         </p:txBody>
       </p:sp>
@@ -3594,16 +3619,16 @@
         </p:nvSpPr>
         <p:spPr>
           <a:xfrm>
-            <a:off x="3931920" y="2697480"/>
-            <a:ext cx="1600200" cy="347472"/>
+            <a:off x="3291840" y="2560320"/>
+            <a:ext cx="1280160" cy="320040"/>
           </a:xfrm>
           <a:prstGeom prst="roundRect">
             <a:avLst>
-              <a:gd name="adj" fmla="val 50000"/>
+              <a:gd name="adj" fmla="val 48571"/>
             </a:avLst>
           </a:prstGeom>
           <a:solidFill>
-            <a:srgbClr val="0A0E1A"/>
+            <a:srgbClr val="2D5A8B"/>
           </a:solidFill>
           <a:ln/>
         </p:spPr>
@@ -3616,8 +3641,8 @@
         </p:nvSpPr>
         <p:spPr>
           <a:xfrm>
-            <a:off x="3931920" y="2697480"/>
-            <a:ext cx="1600200" cy="347472"/>
+            <a:off x="3291840" y="2560320"/>
+            <a:ext cx="1280160" cy="320040"/>
           </a:xfrm>
           <a:prstGeom prst="rect">
             <a:avLst/>
@@ -3633,7 +3658,7 @@
               <a:buNone/>
             </a:pPr>
             <a:r>
-              <a:rPr lang="en-US" sz="950" b="1" dirty="0">
+              <a:rPr lang="en-US" sz="900" b="1" dirty="0">
                 <a:solidFill>
                   <a:srgbClr val="FFFFFF"/>
                 </a:solidFill>
@@ -3641,9 +3666,9 @@
                 <a:ea typeface="Calibri" pitchFamily="34" charset="-122"/>
                 <a:cs typeface="Calibri" pitchFamily="34" charset="-120"/>
               </a:rPr>
-              <a:t>Recreation</a:t>
-            </a:r>
-            <a:endParaRPr lang="en-US" sz="950" dirty="0"/>
+              <a:t>Live Events</a:t>
+            </a:r>
+            <a:endParaRPr lang="en-US" sz="900" dirty="0"/>
           </a:p>
         </p:txBody>
       </p:sp>
@@ -3655,16 +3680,16 @@
         </p:nvSpPr>
         <p:spPr>
           <a:xfrm>
-            <a:off x="5669280" y="2697480"/>
-            <a:ext cx="1600200" cy="347472"/>
+            <a:off x="4709160" y="2560320"/>
+            <a:ext cx="1280160" cy="320040"/>
           </a:xfrm>
           <a:prstGeom prst="roundRect">
             <a:avLst>
-              <a:gd name="adj" fmla="val 50000"/>
+              <a:gd name="adj" fmla="val 48571"/>
             </a:avLst>
           </a:prstGeom>
           <a:solidFill>
-            <a:srgbClr val="0A0E1A"/>
+            <a:srgbClr val="2D5A8B"/>
           </a:solidFill>
           <a:ln/>
         </p:spPr>
@@ -3677,8 +3702,8 @@
         </p:nvSpPr>
         <p:spPr>
           <a:xfrm>
-            <a:off x="5669280" y="2697480"/>
-            <a:ext cx="1600200" cy="347472"/>
+            <a:off x="4709160" y="2560320"/>
+            <a:ext cx="1280160" cy="320040"/>
           </a:xfrm>
           <a:prstGeom prst="rect">
             <a:avLst/>
@@ -3694,7 +3719,7 @@
               <a:buNone/>
             </a:pPr>
             <a:r>
-              <a:rPr lang="en-US" sz="950" b="1" dirty="0">
+              <a:rPr lang="en-US" sz="900" b="1" dirty="0">
                 <a:solidFill>
                   <a:srgbClr val="FFFFFF"/>
                 </a:solidFill>
@@ -3704,7 +3729,7 @@
               </a:rPr>
               <a:t>Dining</a:t>
             </a:r>
-            <a:endParaRPr lang="en-US" sz="950" dirty="0"/>
+            <a:endParaRPr lang="en-US" sz="900" dirty="0"/>
           </a:p>
         </p:txBody>
       </p:sp>
@@ -3716,16 +3741,16 @@
         </p:nvSpPr>
         <p:spPr>
           <a:xfrm>
-            <a:off x="7406640" y="2697480"/>
-            <a:ext cx="1600200" cy="347472"/>
+            <a:off x="6126480" y="2560320"/>
+            <a:ext cx="1280160" cy="320040"/>
           </a:xfrm>
           <a:prstGeom prst="roundRect">
             <a:avLst>
-              <a:gd name="adj" fmla="val 50000"/>
+              <a:gd name="adj" fmla="val 48571"/>
             </a:avLst>
           </a:prstGeom>
           <a:solidFill>
-            <a:srgbClr val="0A0E1A"/>
+            <a:srgbClr val="2D5A8B"/>
           </a:solidFill>
           <a:ln/>
         </p:spPr>
@@ -3738,8 +3763,8 @@
         </p:nvSpPr>
         <p:spPr>
           <a:xfrm>
-            <a:off x="7406640" y="2697480"/>
-            <a:ext cx="1600200" cy="347472"/>
+            <a:off x="6126480" y="2560320"/>
+            <a:ext cx="1280160" cy="320040"/>
           </a:xfrm>
           <a:prstGeom prst="rect">
             <a:avLst/>
@@ -3755,7 +3780,7 @@
               <a:buNone/>
             </a:pPr>
             <a:r>
-              <a:rPr lang="en-US" sz="950" b="1" dirty="0">
+              <a:rPr lang="en-US" sz="900" b="1" dirty="0">
                 <a:solidFill>
                   <a:srgbClr val="FFFFFF"/>
                 </a:solidFill>
@@ -3763,9 +3788,9 @@
                 <a:ea typeface="Calibri" pitchFamily="34" charset="-122"/>
                 <a:cs typeface="Calibri" pitchFamily="34" charset="-120"/>
               </a:rPr>
-              <a:t>Events</a:t>
-            </a:r>
-            <a:endParaRPr lang="en-US" sz="950" dirty="0"/>
+              <a:t>Recreation</a:t>
+            </a:r>
+            <a:endParaRPr lang="en-US" sz="900" dirty="0"/>
           </a:p>
         </p:txBody>
       </p:sp>
@@ -3777,7 +3802,68 @@
         </p:nvSpPr>
         <p:spPr>
           <a:xfrm>
-            <a:off x="457200" y="3246120"/>
+            <a:off x="7543800" y="2560320"/>
+            <a:ext cx="1280160" cy="320040"/>
+          </a:xfrm>
+          <a:prstGeom prst="roundRect">
+            <a:avLst>
+              <a:gd name="adj" fmla="val 48571"/>
+            </a:avLst>
+          </a:prstGeom>
+          <a:solidFill>
+            <a:srgbClr val="2D5A8B"/>
+          </a:solidFill>
+          <a:ln/>
+        </p:spPr>
+      </p:sp>
+      <p:sp>
+        <p:nvSpPr>
+          <p:cNvPr id="19" name="Text 17"/>
+          <p:cNvSpPr/>
+          <p:nvPr/>
+        </p:nvSpPr>
+        <p:spPr>
+          <a:xfrm>
+            <a:off x="7543800" y="2560320"/>
+            <a:ext cx="1280160" cy="320040"/>
+          </a:xfrm>
+          <a:prstGeom prst="rect">
+            <a:avLst/>
+          </a:prstGeom>
+          <a:noFill/>
+          <a:ln/>
+        </p:spPr>
+        <p:txBody>
+          <a:bodyPr wrap="square" lIns="0" tIns="0" rIns="0" bIns="0" rtlCol="0" anchor="ctr"/>
+          <a:lstStyle/>
+          <a:p>
+            <a:pPr algn="ctr" indent="0" marL="0">
+              <a:buNone/>
+            </a:pPr>
+            <a:r>
+              <a:rPr lang="en-US" sz="900" b="1" dirty="0">
+                <a:solidFill>
+                  <a:srgbClr val="FFFFFF"/>
+                </a:solidFill>
+                <a:latin typeface="Calibri" pitchFamily="34" charset="0"/>
+                <a:ea typeface="Calibri" pitchFamily="34" charset="-122"/>
+                <a:cs typeface="Calibri" pitchFamily="34" charset="-120"/>
+              </a:rPr>
+              <a:t>Experiences</a:t>
+            </a:r>
+            <a:endParaRPr lang="en-US" sz="900" dirty="0"/>
+          </a:p>
+        </p:txBody>
+      </p:sp>
+      <p:sp>
+        <p:nvSpPr>
+          <p:cNvPr id="20" name="Shape 18"/>
+          <p:cNvSpPr/>
+          <p:nvPr/>
+        </p:nvSpPr>
+        <p:spPr>
+          <a:xfrm>
+            <a:off x="457200" y="3108960"/>
             <a:ext cx="8229600" cy="502920"/>
           </a:xfrm>
           <a:prstGeom prst="roundRect">
@@ -3793,13 +3879,13 @@
       </p:sp>
       <p:sp>
         <p:nvSpPr>
-          <p:cNvPr id="19" name="Text 17"/>
-          <p:cNvSpPr/>
-          <p:nvPr/>
-        </p:nvSpPr>
-        <p:spPr>
-          <a:xfrm>
-            <a:off x="640080" y="3246120"/>
+          <p:cNvPr id="21" name="Text 19"/>
+          <p:cNvSpPr/>
+          <p:nvPr/>
+        </p:nvSpPr>
+        <p:spPr>
+          <a:xfrm>
+            <a:off x="640080" y="3108960"/>
             <a:ext cx="7863840" cy="502920"/>
           </a:xfrm>
           <a:prstGeom prst="rect">
@@ -3824,7 +3910,7 @@
                 <a:ea typeface="Calibri" pitchFamily="34" charset="-122"/>
                 <a:cs typeface="Calibri" pitchFamily="34" charset="-120"/>
               </a:rPr>
-              <a:t>PROPOSED PAGES:   Home   •   About the Company   •   Our Businesses &amp; Experiences   •   Brands / Business Interests   •   Contact</a:t>
+              <a:t>PROPOSED 5 PAGES:   Home   •   About CP Goa   •   Entertainment &amp; Nightlife   •   Experiences &amp; Events   •   Contact</a:t>
             </a:r>
             <a:endParaRPr lang="en-US" sz="1000" dirty="0"/>
           </a:p>
@@ -3832,14 +3918,14 @@
       </p:sp>
       <p:sp>
         <p:nvSpPr>
-          <p:cNvPr id="20" name="Text 18"/>
-          <p:cNvSpPr/>
-          <p:nvPr/>
-        </p:nvSpPr>
-        <p:spPr>
-          <a:xfrm>
-            <a:off x="457200" y="3886200"/>
-            <a:ext cx="8229600" cy="274320"/>
+          <p:cNvPr id="22" name="Text 20"/>
+          <p:cNvSpPr/>
+          <p:nvPr/>
+        </p:nvSpPr>
+        <p:spPr>
+          <a:xfrm>
+            <a:off x="457200" y="3794760"/>
+            <a:ext cx="3931920" cy="274320"/>
           </a:xfrm>
           <a:prstGeom prst="rect">
             <a:avLst/>
@@ -3855,15 +3941,54 @@
               <a:buNone/>
             </a:pPr>
             <a:r>
+              <a:rPr lang="en-US" sz="1100" b="1" dirty="0">
+                <a:solidFill>
+                  <a:srgbClr val="2D5A8B"/>
+                </a:solidFill>
+                <a:latin typeface="Calibri" pitchFamily="34" charset="0"/>
+                <a:ea typeface="Calibri" pitchFamily="34" charset="-122"/>
+                <a:cs typeface="Calibri" pitchFamily="34" charset="-120"/>
+              </a:rPr>
+              <a:t>Website Direction</a:t>
+            </a:r>
+            <a:endParaRPr lang="en-US" sz="1100" dirty="0"/>
+          </a:p>
+        </p:txBody>
+      </p:sp>
+      <p:sp>
+        <p:nvSpPr>
+          <p:cNvPr id="23" name="Text 21"/>
+          <p:cNvSpPr/>
+          <p:nvPr/>
+        </p:nvSpPr>
+        <p:spPr>
+          <a:xfrm>
+            <a:off x="457200" y="4023360"/>
+            <a:ext cx="3931920" cy="274320"/>
+          </a:xfrm>
+          <a:prstGeom prst="rect">
+            <a:avLst/>
+          </a:prstGeom>
+          <a:noFill/>
+          <a:ln/>
+        </p:spPr>
+        <p:txBody>
+          <a:bodyPr wrap="square" lIns="0" tIns="0" rIns="0" bIns="0" rtlCol="0" anchor="ctr"/>
+          <a:lstStyle/>
+          <a:p>
+            <a:pPr algn="l" indent="0" marL="0">
+              <a:buNone/>
+            </a:pPr>
+            <a:r>
               <a:rPr lang="en-US" sz="1050" i="1" dirty="0">
                 <a:solidFill>
-                  <a:srgbClr val="4B5563"/>
-                </a:solidFill>
-                <a:latin typeface="Calibri" pitchFamily="34" charset="0"/>
-                <a:ea typeface="Calibri" pitchFamily="34" charset="-122"/>
-                <a:cs typeface="Calibri" pitchFamily="34" charset="-120"/>
-              </a:rPr>
-              <a:t>Casino Pride can be presented accurately as one of the company’s brands/business interests where appropriate.</a:t>
+                  <a:srgbClr val="374151"/>
+                </a:solidFill>
+                <a:latin typeface="Calibri" pitchFamily="34" charset="0"/>
+                <a:ea typeface="Calibri" pitchFamily="34" charset="-122"/>
+                <a:cs typeface="Calibri" pitchFamily="34" charset="-120"/>
+              </a:rPr>
+              <a:t>CP Goa — Entertainment • Nightlife • Experiences</a:t>
             </a:r>
             <a:endParaRPr lang="en-US" sz="1050" dirty="0"/>
           </a:p>
@@ -3871,100 +3996,14 @@
       </p:sp>
       <p:sp>
         <p:nvSpPr>
-          <p:cNvPr id="21" name="Shape 19"/>
-          <p:cNvSpPr/>
-          <p:nvPr/>
-        </p:nvSpPr>
-        <p:spPr>
-          <a:xfrm>
-            <a:off x="457200" y="4297680"/>
-            <a:ext cx="8229600" cy="685800"/>
-          </a:xfrm>
-          <a:prstGeom prst="roundRect">
-            <a:avLst>
-              <a:gd name="adj" fmla="val 10667"/>
-            </a:avLst>
-          </a:prstGeom>
-          <a:solidFill>
-            <a:srgbClr val="ECFDF5"/>
-          </a:solidFill>
-          <a:ln w="9525">
-            <a:solidFill>
-              <a:srgbClr val="10B981"/>
-            </a:solidFill>
-            <a:prstDash val="solid"/>
-          </a:ln>
-        </p:spPr>
-      </p:sp>
-      <p:sp>
-        <p:nvSpPr>
-          <p:cNvPr id="22" name="Shape 20"/>
-          <p:cNvSpPr/>
-          <p:nvPr/>
-        </p:nvSpPr>
-        <p:spPr>
-          <a:xfrm>
-            <a:off x="685800" y="4462272"/>
-            <a:ext cx="320040" cy="320040"/>
-          </a:xfrm>
-          <a:prstGeom prst="ellipse">
-            <a:avLst/>
-          </a:prstGeom>
-          <a:solidFill>
-            <a:srgbClr val="10B981"/>
-          </a:solidFill>
-          <a:ln/>
-        </p:spPr>
-      </p:sp>
-      <p:sp>
-        <p:nvSpPr>
-          <p:cNvPr id="23" name="Text 21"/>
-          <p:cNvSpPr/>
-          <p:nvPr/>
-        </p:nvSpPr>
-        <p:spPr>
-          <a:xfrm>
-            <a:off x="685800" y="4462272"/>
-            <a:ext cx="320040" cy="320040"/>
-          </a:xfrm>
-          <a:prstGeom prst="rect">
-            <a:avLst/>
-          </a:prstGeom>
-          <a:noFill/>
-          <a:ln/>
-        </p:spPr>
-        <p:txBody>
-          <a:bodyPr wrap="square" lIns="0" tIns="0" rIns="0" bIns="0" rtlCol="0" anchor="ctr"/>
-          <a:lstStyle/>
-          <a:p>
-            <a:pPr algn="ctr" indent="0" marL="0">
-              <a:buNone/>
-            </a:pPr>
-            <a:r>
-              <a:rPr lang="en-US" sz="1400" b="1" dirty="0">
-                <a:solidFill>
-                  <a:srgbClr val="FFFFFF"/>
-                </a:solidFill>
-                <a:latin typeface="Calibri" pitchFamily="34" charset="0"/>
-                <a:ea typeface="Calibri" pitchFamily="34" charset="-122"/>
-                <a:cs typeface="Calibri" pitchFamily="34" charset="-120"/>
-              </a:rPr>
-              <a:t>✓</a:t>
-            </a:r>
-            <a:endParaRPr lang="en-US" sz="1400" dirty="0"/>
-          </a:p>
-        </p:txBody>
-      </p:sp>
-      <p:sp>
-        <p:nvSpPr>
           <p:cNvPr id="24" name="Text 22"/>
           <p:cNvSpPr/>
           <p:nvPr/>
         </p:nvSpPr>
         <p:spPr>
           <a:xfrm>
-            <a:off x="1143000" y="4370832"/>
-            <a:ext cx="7315200" cy="182880"/>
+            <a:off x="4754880" y="3794760"/>
+            <a:ext cx="3931920" cy="274320"/>
           </a:xfrm>
           <a:prstGeom prst="rect">
             <a:avLst/>
@@ -3980,17 +4019,17 @@
               <a:buNone/>
             </a:pPr>
             <a:r>
-              <a:rPr lang="en-US" sz="800" b="1" spc="100" kern="0" dirty="0">
-                <a:solidFill>
-                  <a:srgbClr val="10B981"/>
-                </a:solidFill>
-                <a:latin typeface="Calibri" pitchFamily="34" charset="0"/>
-                <a:ea typeface="Calibri" pitchFamily="34" charset="-122"/>
-                <a:cs typeface="Calibri" pitchFamily="34" charset="-120"/>
-              </a:rPr>
-              <a:t>KEY ADVANTAGE</a:t>
-            </a:r>
-            <a:endParaRPr lang="en-US" sz="800" dirty="0"/>
+              <a:rPr lang="en-US" sz="1100" b="1" dirty="0">
+                <a:solidFill>
+                  <a:srgbClr val="2D5A8B"/>
+                </a:solidFill>
+                <a:latin typeface="Calibri" pitchFamily="34" charset="0"/>
+                <a:ea typeface="Calibri" pitchFamily="34" charset="-122"/>
+                <a:cs typeface="Calibri" pitchFamily="34" charset="-120"/>
+              </a:rPr>
+              <a:t>Key Benefit</a:t>
+            </a:r>
+            <a:endParaRPr lang="en-US" sz="1100" dirty="0"/>
           </a:p>
         </p:txBody>
       </p:sp>
@@ -4002,8 +4041,8 @@
         </p:nvSpPr>
         <p:spPr>
           <a:xfrm>
-            <a:off x="1143000" y="4553712"/>
-            <a:ext cx="7315200" cy="365760"/>
+            <a:off x="4754880" y="4023360"/>
+            <a:ext cx="3931920" cy="502920"/>
           </a:xfrm>
           <a:prstGeom prst="rect">
             <a:avLst/>
@@ -4017,20 +4056,20 @@
           <a:p>
             <a:pPr algn="l" indent="0" marL="0">
               <a:lnSpc>
-                <a:spcPct val="130000"/>
+                <a:spcPct val="140000"/>
               </a:lnSpc>
               <a:buNone/>
             </a:pPr>
             <a:r>
               <a:rPr lang="en-US" sz="1000" dirty="0">
                 <a:solidFill>
-                  <a:srgbClr val="064E3B"/>
-                </a:solidFill>
-                <a:latin typeface="Calibri" pitchFamily="34" charset="0"/>
-                <a:ea typeface="Calibri" pitchFamily="34" charset="-122"/>
-                <a:cs typeface="Calibri" pitchFamily="34" charset="-120"/>
-              </a:rPr>
-              <a:t>Creates a stronger corporate digital identity that accommodates existing and future business activities, rather than a website solely around one entertainment brand.</a:t>
+                  <a:srgbClr val="374151"/>
+                </a:solidFill>
+                <a:latin typeface="Calibri" pitchFamily="34" charset="0"/>
+                <a:ea typeface="Calibri" pitchFamily="34" charset="-122"/>
+                <a:cs typeface="Calibri" pitchFamily="34" charset="-120"/>
+              </a:rPr>
+              <a:t>Provides a dedicated consumer-facing entertainment presence while keeping the existing cpofficial.in website completely separate.</a:t>
             </a:r>
             <a:endParaRPr lang="en-US" sz="1000" dirty="0"/>
           </a:p>
@@ -4050,7 +4089,7 @@
     <p:bg>
       <p:bgPr>
         <a:solidFill>
-          <a:srgbClr val="0A0E1A"/>
+          <a:srgbClr val="FFFFFF"/>
         </a:solidFill>
       </p:bgPr>
     </p:bg>
@@ -4076,14 +4115,14 @@
         </p:nvSpPr>
         <p:spPr>
           <a:xfrm>
-            <a:off x="6400800" y="-1828800"/>
-            <a:ext cx="5486400" cy="5486400"/>
-          </a:xfrm>
-          <a:prstGeom prst="ellipse">
-            <a:avLst/>
-          </a:prstGeom>
-          <a:solidFill>
-            <a:srgbClr val="141B2D"/>
+            <a:off x="0" y="0"/>
+            <a:ext cx="9144000" cy="1554480"/>
+          </a:xfrm>
+          <a:prstGeom prst="rect">
+            <a:avLst/>
+          </a:prstGeom>
+          <a:solidFill>
+            <a:srgbClr val="0D7C5F"/>
           </a:solidFill>
           <a:ln/>
         </p:spPr>
@@ -4096,8 +4135,8 @@
         </p:nvSpPr>
         <p:spPr>
           <a:xfrm>
-            <a:off x="457200" y="365760"/>
-            <a:ext cx="2011680" cy="256032"/>
+            <a:off x="457200" y="320040"/>
+            <a:ext cx="1005840" cy="237744"/>
           </a:xfrm>
           <a:prstGeom prst="roundRect">
             <a:avLst>
@@ -4105,7 +4144,7 @@
             </a:avLst>
           </a:prstGeom>
           <a:solidFill>
-            <a:srgbClr val="D4A853"/>
+            <a:srgbClr val="FFFFFF"/>
           </a:solidFill>
           <a:ln/>
         </p:spPr>
@@ -4118,8 +4157,8 @@
         </p:nvSpPr>
         <p:spPr>
           <a:xfrm>
-            <a:off x="457200" y="365760"/>
-            <a:ext cx="2011680" cy="256032"/>
+            <a:off x="457200" y="320040"/>
+            <a:ext cx="1005840" cy="237744"/>
           </a:xfrm>
           <a:prstGeom prst="rect">
             <a:avLst/>
@@ -4135,15 +4174,15 @@
               <a:buNone/>
             </a:pPr>
             <a:r>
-              <a:rPr lang="en-US" sz="750" b="1" spc="100" kern="0" dirty="0">
-                <a:solidFill>
-                  <a:srgbClr val="0A0E1A"/>
-                </a:solidFill>
-                <a:latin typeface="Calibri" pitchFamily="34" charset="0"/>
-                <a:ea typeface="Calibri" pitchFamily="34" charset="-122"/>
-                <a:cs typeface="Calibri" pitchFamily="34" charset="-120"/>
-              </a:rPr>
-              <a:t>OUR RECOMMENDATION</a:t>
+              <a:rPr lang="en-US" sz="750" b="1" dirty="0">
+                <a:solidFill>
+                  <a:srgbClr val="0D7C5F"/>
+                </a:solidFill>
+                <a:latin typeface="Calibri" pitchFamily="34" charset="0"/>
+                <a:ea typeface="Calibri" pitchFamily="34" charset="-122"/>
+                <a:cs typeface="Calibri" pitchFamily="34" charset="-120"/>
+              </a:rPr>
+              <a:t>OPTION 2</a:t>
             </a:r>
             <a:endParaRPr lang="en-US" sz="750" dirty="0"/>
           </a:p>
@@ -4157,8 +4196,8 @@
         </p:nvSpPr>
         <p:spPr>
           <a:xfrm>
-            <a:off x="457200" y="822960"/>
-            <a:ext cx="8229600" cy="502920"/>
+            <a:off x="457200" y="685800"/>
+            <a:ext cx="8229600" cy="457200"/>
           </a:xfrm>
           <a:prstGeom prst="rect">
             <a:avLst/>
@@ -4174,7 +4213,7 @@
               <a:buNone/>
             </a:pPr>
             <a:r>
-              <a:rPr lang="en-US" sz="2600" b="1" dirty="0">
+              <a:rPr lang="en-US" sz="2400" b="1" dirty="0">
                 <a:solidFill>
                   <a:srgbClr val="FFFFFF"/>
                 </a:solidFill>
@@ -4182,9 +4221,9 @@
                 <a:ea typeface="Cambria" pitchFamily="34" charset="-122"/>
                 <a:cs typeface="Cambria" pitchFamily="34" charset="-120"/>
               </a:rPr>
-              <a:t>Option 2 — Corporate Website</a:t>
-            </a:r>
-            <a:endParaRPr lang="en-US" sz="2600" dirty="0"/>
+              <a:t>Goa Coastal Resorts &amp; Recreation Pvt. Ltd.</a:t>
+            </a:r>
+            <a:endParaRPr lang="en-US" sz="2400" dirty="0"/>
           </a:p>
         </p:txBody>
       </p:sp>
@@ -4196,7 +4235,7 @@
         </p:nvSpPr>
         <p:spPr>
           <a:xfrm>
-            <a:off x="457200" y="1325880"/>
+            <a:off x="457200" y="1143000"/>
             <a:ext cx="8229600" cy="274320"/>
           </a:xfrm>
           <a:prstGeom prst="rect">
@@ -4213,41 +4252,61 @@
               <a:buNone/>
             </a:pPr>
             <a:r>
-              <a:rPr lang="en-US" sz="1200" i="1" dirty="0">
-                <a:solidFill>
-                  <a:srgbClr val="D4A853"/>
-                </a:solidFill>
-                <a:latin typeface="Calibri" pitchFamily="34" charset="0"/>
-                <a:ea typeface="Calibri" pitchFamily="34" charset="-122"/>
-                <a:cs typeface="Calibri" pitchFamily="34" charset="-120"/>
-              </a:rPr>
-              <a:t>Goa Coastal Resorts &amp; Recreation Pvt. Ltd.</a:t>
-            </a:r>
-            <a:endParaRPr lang="en-US" sz="1200" dirty="0"/>
-          </a:p>
-        </p:txBody>
-      </p:sp>
-      <p:sp>
-        <p:nvSpPr>
-          <p:cNvPr id="7" name="Shape 5"/>
+              <a:rPr lang="en-US" sz="1100" dirty="0">
+                <a:solidFill>
+                  <a:srgbClr val="D1FAE5"/>
+                </a:solidFill>
+                <a:latin typeface="Calibri" pitchFamily="34" charset="0"/>
+                <a:ea typeface="Calibri" pitchFamily="34" charset="-122"/>
+                <a:cs typeface="Calibri" pitchFamily="34" charset="-120"/>
+              </a:rPr>
+              <a:t>Corporate Business Website — Broader Business Identity</a:t>
+            </a:r>
+            <a:endParaRPr lang="en-US" sz="1100" dirty="0"/>
+          </a:p>
+        </p:txBody>
+      </p:sp>
+      <p:sp>
+        <p:nvSpPr>
+          <p:cNvPr id="7" name="Text 5"/>
           <p:cNvSpPr/>
           <p:nvPr/>
         </p:nvSpPr>
         <p:spPr>
           <a:xfrm>
             <a:off x="457200" y="1828800"/>
-            <a:ext cx="4023360" cy="1097280"/>
-          </a:xfrm>
-          <a:prstGeom prst="roundRect">
-            <a:avLst>
-              <a:gd name="adj" fmla="val 8333"/>
-            </a:avLst>
-          </a:prstGeom>
-          <a:solidFill>
-            <a:srgbClr val="1C2438"/>
-          </a:solidFill>
-          <a:ln/>
-        </p:spPr>
+            <a:ext cx="8229600" cy="594360"/>
+          </a:xfrm>
+          <a:prstGeom prst="rect">
+            <a:avLst/>
+          </a:prstGeom>
+          <a:noFill/>
+          <a:ln/>
+        </p:spPr>
+        <p:txBody>
+          <a:bodyPr wrap="square" lIns="0" tIns="0" rIns="0" bIns="0" rtlCol="0" anchor="ctr"/>
+          <a:lstStyle/>
+          <a:p>
+            <a:pPr algn="l" indent="0" marL="0">
+              <a:lnSpc>
+                <a:spcPct val="150000"/>
+              </a:lnSpc>
+              <a:buNone/>
+            </a:pPr>
+            <a:r>
+              <a:rPr lang="en-US" sz="1100" dirty="0">
+                <a:solidFill>
+                  <a:srgbClr val="374151"/>
+                </a:solidFill>
+                <a:latin typeface="Calibri" pitchFamily="34" charset="0"/>
+                <a:ea typeface="Calibri" pitchFamily="34" charset="-122"/>
+                <a:cs typeface="Calibri" pitchFamily="34" charset="-120"/>
+              </a:rPr>
+              <a:t>Develop a new 5-page website under the domain of Goa Coastal Resorts &amp; Recreation Pvt. Ltd., the company associated with Casino Pride. Instead of positioning the website around casino/gaming, it presents the company’s broader business identity and legitimate activities.</a:t>
+            </a:r>
+            <a:endParaRPr lang="en-US" sz="1100" dirty="0"/>
+          </a:p>
+        </p:txBody>
       </p:sp>
       <p:sp>
         <p:nvSpPr>
@@ -4257,8 +4316,8 @@
         </p:nvSpPr>
         <p:spPr>
           <a:xfrm>
-            <a:off x="594360" y="2057400"/>
-            <a:ext cx="36576" cy="640080"/>
+            <a:off x="457200" y="2606040"/>
+            <a:ext cx="1600200" cy="347472"/>
           </a:xfrm>
           <a:prstGeom prst="roundRect">
             <a:avLst>
@@ -4266,7 +4325,7 @@
             </a:avLst>
           </a:prstGeom>
           <a:solidFill>
-            <a:srgbClr val="D4A853"/>
+            <a:srgbClr val="0D7C5F"/>
           </a:solidFill>
           <a:ln/>
         </p:spPr>
@@ -4279,8 +4338,313 @@
         </p:nvSpPr>
         <p:spPr>
           <a:xfrm>
-            <a:off x="822960" y="1965960"/>
-            <a:ext cx="3474720" cy="365760"/>
+            <a:off x="457200" y="2606040"/>
+            <a:ext cx="1600200" cy="347472"/>
+          </a:xfrm>
+          <a:prstGeom prst="rect">
+            <a:avLst/>
+          </a:prstGeom>
+          <a:noFill/>
+          <a:ln/>
+        </p:spPr>
+        <p:txBody>
+          <a:bodyPr wrap="square" lIns="0" tIns="0" rIns="0" bIns="0" rtlCol="0" anchor="ctr"/>
+          <a:lstStyle/>
+          <a:p>
+            <a:pPr algn="ctr" indent="0" marL="0">
+              <a:buNone/>
+            </a:pPr>
+            <a:r>
+              <a:rPr lang="en-US" sz="950" b="1" dirty="0">
+                <a:solidFill>
+                  <a:srgbClr val="FFFFFF"/>
+                </a:solidFill>
+                <a:latin typeface="Calibri" pitchFamily="34" charset="0"/>
+                <a:ea typeface="Calibri" pitchFamily="34" charset="-122"/>
+                <a:cs typeface="Calibri" pitchFamily="34" charset="-120"/>
+              </a:rPr>
+              <a:t>Hospitality</a:t>
+            </a:r>
+            <a:endParaRPr lang="en-US" sz="950" dirty="0"/>
+          </a:p>
+        </p:txBody>
+      </p:sp>
+      <p:sp>
+        <p:nvSpPr>
+          <p:cNvPr id="10" name="Shape 8"/>
+          <p:cNvSpPr/>
+          <p:nvPr/>
+        </p:nvSpPr>
+        <p:spPr>
+          <a:xfrm>
+            <a:off x="2194560" y="2606040"/>
+            <a:ext cx="1600200" cy="347472"/>
+          </a:xfrm>
+          <a:prstGeom prst="roundRect">
+            <a:avLst>
+              <a:gd name="adj" fmla="val 50000"/>
+            </a:avLst>
+          </a:prstGeom>
+          <a:solidFill>
+            <a:srgbClr val="0D7C5F"/>
+          </a:solidFill>
+          <a:ln/>
+        </p:spPr>
+      </p:sp>
+      <p:sp>
+        <p:nvSpPr>
+          <p:cNvPr id="11" name="Text 9"/>
+          <p:cNvSpPr/>
+          <p:nvPr/>
+        </p:nvSpPr>
+        <p:spPr>
+          <a:xfrm>
+            <a:off x="2194560" y="2606040"/>
+            <a:ext cx="1600200" cy="347472"/>
+          </a:xfrm>
+          <a:prstGeom prst="rect">
+            <a:avLst/>
+          </a:prstGeom>
+          <a:noFill/>
+          <a:ln/>
+        </p:spPr>
+        <p:txBody>
+          <a:bodyPr wrap="square" lIns="0" tIns="0" rIns="0" bIns="0" rtlCol="0" anchor="ctr"/>
+          <a:lstStyle/>
+          <a:p>
+            <a:pPr algn="ctr" indent="0" marL="0">
+              <a:buNone/>
+            </a:pPr>
+            <a:r>
+              <a:rPr lang="en-US" sz="950" b="1" dirty="0">
+                <a:solidFill>
+                  <a:srgbClr val="FFFFFF"/>
+                </a:solidFill>
+                <a:latin typeface="Calibri" pitchFamily="34" charset="0"/>
+                <a:ea typeface="Calibri" pitchFamily="34" charset="-122"/>
+                <a:cs typeface="Calibri" pitchFamily="34" charset="-120"/>
+              </a:rPr>
+              <a:t>Entertainment</a:t>
+            </a:r>
+            <a:endParaRPr lang="en-US" sz="950" dirty="0"/>
+          </a:p>
+        </p:txBody>
+      </p:sp>
+      <p:sp>
+        <p:nvSpPr>
+          <p:cNvPr id="12" name="Shape 10"/>
+          <p:cNvSpPr/>
+          <p:nvPr/>
+        </p:nvSpPr>
+        <p:spPr>
+          <a:xfrm>
+            <a:off x="3931920" y="2606040"/>
+            <a:ext cx="1600200" cy="347472"/>
+          </a:xfrm>
+          <a:prstGeom prst="roundRect">
+            <a:avLst>
+              <a:gd name="adj" fmla="val 50000"/>
+            </a:avLst>
+          </a:prstGeom>
+          <a:solidFill>
+            <a:srgbClr val="0D7C5F"/>
+          </a:solidFill>
+          <a:ln/>
+        </p:spPr>
+      </p:sp>
+      <p:sp>
+        <p:nvSpPr>
+          <p:cNvPr id="13" name="Text 11"/>
+          <p:cNvSpPr/>
+          <p:nvPr/>
+        </p:nvSpPr>
+        <p:spPr>
+          <a:xfrm>
+            <a:off x="3931920" y="2606040"/>
+            <a:ext cx="1600200" cy="347472"/>
+          </a:xfrm>
+          <a:prstGeom prst="rect">
+            <a:avLst/>
+          </a:prstGeom>
+          <a:noFill/>
+          <a:ln/>
+        </p:spPr>
+        <p:txBody>
+          <a:bodyPr wrap="square" lIns="0" tIns="0" rIns="0" bIns="0" rtlCol="0" anchor="ctr"/>
+          <a:lstStyle/>
+          <a:p>
+            <a:pPr algn="ctr" indent="0" marL="0">
+              <a:buNone/>
+            </a:pPr>
+            <a:r>
+              <a:rPr lang="en-US" sz="950" b="1" dirty="0">
+                <a:solidFill>
+                  <a:srgbClr val="FFFFFF"/>
+                </a:solidFill>
+                <a:latin typeface="Calibri" pitchFamily="34" charset="0"/>
+                <a:ea typeface="Calibri" pitchFamily="34" charset="-122"/>
+                <a:cs typeface="Calibri" pitchFamily="34" charset="-120"/>
+              </a:rPr>
+              <a:t>Recreation</a:t>
+            </a:r>
+            <a:endParaRPr lang="en-US" sz="950" dirty="0"/>
+          </a:p>
+        </p:txBody>
+      </p:sp>
+      <p:sp>
+        <p:nvSpPr>
+          <p:cNvPr id="14" name="Shape 12"/>
+          <p:cNvSpPr/>
+          <p:nvPr/>
+        </p:nvSpPr>
+        <p:spPr>
+          <a:xfrm>
+            <a:off x="5669280" y="2606040"/>
+            <a:ext cx="1600200" cy="347472"/>
+          </a:xfrm>
+          <a:prstGeom prst="roundRect">
+            <a:avLst>
+              <a:gd name="adj" fmla="val 50000"/>
+            </a:avLst>
+          </a:prstGeom>
+          <a:solidFill>
+            <a:srgbClr val="0D7C5F"/>
+          </a:solidFill>
+          <a:ln/>
+        </p:spPr>
+      </p:sp>
+      <p:sp>
+        <p:nvSpPr>
+          <p:cNvPr id="15" name="Text 13"/>
+          <p:cNvSpPr/>
+          <p:nvPr/>
+        </p:nvSpPr>
+        <p:spPr>
+          <a:xfrm>
+            <a:off x="5669280" y="2606040"/>
+            <a:ext cx="1600200" cy="347472"/>
+          </a:xfrm>
+          <a:prstGeom prst="rect">
+            <a:avLst/>
+          </a:prstGeom>
+          <a:noFill/>
+          <a:ln/>
+        </p:spPr>
+        <p:txBody>
+          <a:bodyPr wrap="square" lIns="0" tIns="0" rIns="0" bIns="0" rtlCol="0" anchor="ctr"/>
+          <a:lstStyle/>
+          <a:p>
+            <a:pPr algn="ctr" indent="0" marL="0">
+              <a:buNone/>
+            </a:pPr>
+            <a:r>
+              <a:rPr lang="en-US" sz="950" b="1" dirty="0">
+                <a:solidFill>
+                  <a:srgbClr val="FFFFFF"/>
+                </a:solidFill>
+                <a:latin typeface="Calibri" pitchFamily="34" charset="0"/>
+                <a:ea typeface="Calibri" pitchFamily="34" charset="-122"/>
+                <a:cs typeface="Calibri" pitchFamily="34" charset="-120"/>
+              </a:rPr>
+              <a:t>Dining</a:t>
+            </a:r>
+            <a:endParaRPr lang="en-US" sz="950" dirty="0"/>
+          </a:p>
+        </p:txBody>
+      </p:sp>
+      <p:sp>
+        <p:nvSpPr>
+          <p:cNvPr id="16" name="Shape 14"/>
+          <p:cNvSpPr/>
+          <p:nvPr/>
+        </p:nvSpPr>
+        <p:spPr>
+          <a:xfrm>
+            <a:off x="7406640" y="2606040"/>
+            <a:ext cx="1600200" cy="347472"/>
+          </a:xfrm>
+          <a:prstGeom prst="roundRect">
+            <a:avLst>
+              <a:gd name="adj" fmla="val 50000"/>
+            </a:avLst>
+          </a:prstGeom>
+          <a:solidFill>
+            <a:srgbClr val="0D7C5F"/>
+          </a:solidFill>
+          <a:ln/>
+        </p:spPr>
+      </p:sp>
+      <p:sp>
+        <p:nvSpPr>
+          <p:cNvPr id="17" name="Text 15"/>
+          <p:cNvSpPr/>
+          <p:nvPr/>
+        </p:nvSpPr>
+        <p:spPr>
+          <a:xfrm>
+            <a:off x="7406640" y="2606040"/>
+            <a:ext cx="1600200" cy="347472"/>
+          </a:xfrm>
+          <a:prstGeom prst="rect">
+            <a:avLst/>
+          </a:prstGeom>
+          <a:noFill/>
+          <a:ln/>
+        </p:spPr>
+        <p:txBody>
+          <a:bodyPr wrap="square" lIns="0" tIns="0" rIns="0" bIns="0" rtlCol="0" anchor="ctr"/>
+          <a:lstStyle/>
+          <a:p>
+            <a:pPr algn="ctr" indent="0" marL="0">
+              <a:buNone/>
+            </a:pPr>
+            <a:r>
+              <a:rPr lang="en-US" sz="950" b="1" dirty="0">
+                <a:solidFill>
+                  <a:srgbClr val="FFFFFF"/>
+                </a:solidFill>
+                <a:latin typeface="Calibri" pitchFamily="34" charset="0"/>
+                <a:ea typeface="Calibri" pitchFamily="34" charset="-122"/>
+                <a:cs typeface="Calibri" pitchFamily="34" charset="-120"/>
+              </a:rPr>
+              <a:t>Events</a:t>
+            </a:r>
+            <a:endParaRPr lang="en-US" sz="950" dirty="0"/>
+          </a:p>
+        </p:txBody>
+      </p:sp>
+      <p:sp>
+        <p:nvSpPr>
+          <p:cNvPr id="18" name="Shape 16"/>
+          <p:cNvSpPr/>
+          <p:nvPr/>
+        </p:nvSpPr>
+        <p:spPr>
+          <a:xfrm>
+            <a:off x="457200" y="3154680"/>
+            <a:ext cx="8229600" cy="502920"/>
+          </a:xfrm>
+          <a:prstGeom prst="roundRect">
+            <a:avLst>
+              <a:gd name="adj" fmla="val 14545"/>
+            </a:avLst>
+          </a:prstGeom>
+          <a:solidFill>
+            <a:srgbClr val="ECFDF5"/>
+          </a:solidFill>
+          <a:ln/>
+        </p:spPr>
+      </p:sp>
+      <p:sp>
+        <p:nvSpPr>
+          <p:cNvPr id="19" name="Text 17"/>
+          <p:cNvSpPr/>
+          <p:nvPr/>
+        </p:nvSpPr>
+        <p:spPr>
+          <a:xfrm>
+            <a:off x="640080" y="3154680"/>
+            <a:ext cx="7863840" cy="502920"/>
           </a:xfrm>
           <a:prstGeom prst="rect">
             <a:avLst/>
@@ -4296,30 +4660,135 @@
               <a:buNone/>
             </a:pPr>
             <a:r>
-              <a:rPr lang="en-US" sz="1300" b="1" dirty="0">
-                <a:solidFill>
-                  <a:srgbClr val="FFFFFF"/>
-                </a:solidFill>
-                <a:latin typeface="Cambria" pitchFamily="34" charset="0"/>
-                <a:ea typeface="Cambria" pitchFamily="34" charset="-122"/>
-                <a:cs typeface="Cambria" pitchFamily="34" charset="-120"/>
-              </a:rPr>
-              <a:t>More Credible</a:t>
-            </a:r>
-            <a:endParaRPr lang="en-US" sz="1300" dirty="0"/>
-          </a:p>
-        </p:txBody>
-      </p:sp>
-      <p:sp>
-        <p:nvSpPr>
-          <p:cNvPr id="10" name="Text 8"/>
-          <p:cNvSpPr/>
-          <p:nvPr/>
-        </p:nvSpPr>
-        <p:spPr>
-          <a:xfrm>
-            <a:off x="822960" y="2331720"/>
-            <a:ext cx="3474720" cy="457200"/>
+              <a:rPr lang="en-US" sz="1000" b="1" dirty="0">
+                <a:solidFill>
+                  <a:srgbClr val="065F46"/>
+                </a:solidFill>
+                <a:latin typeface="Calibri" pitchFamily="34" charset="0"/>
+                <a:ea typeface="Calibri" pitchFamily="34" charset="-122"/>
+                <a:cs typeface="Calibri" pitchFamily="34" charset="-120"/>
+              </a:rPr>
+              <a:t>PROPOSED 5 PAGES:   Home   •   About the Company   •   Our Businesses &amp; Experiences   •   Brands / Business Interests   •   Contact</a:t>
+            </a:r>
+            <a:endParaRPr lang="en-US" sz="1000" dirty="0"/>
+          </a:p>
+        </p:txBody>
+      </p:sp>
+      <p:sp>
+        <p:nvSpPr>
+          <p:cNvPr id="20" name="Text 18"/>
+          <p:cNvSpPr/>
+          <p:nvPr/>
+        </p:nvSpPr>
+        <p:spPr>
+          <a:xfrm>
+            <a:off x="457200" y="3794760"/>
+            <a:ext cx="8229600" cy="274320"/>
+          </a:xfrm>
+          <a:prstGeom prst="rect">
+            <a:avLst/>
+          </a:prstGeom>
+          <a:noFill/>
+          <a:ln/>
+        </p:spPr>
+        <p:txBody>
+          <a:bodyPr wrap="square" lIns="0" tIns="0" rIns="0" bIns="0" rtlCol="0" anchor="ctr"/>
+          <a:lstStyle/>
+          <a:p>
+            <a:pPr algn="l" indent="0" marL="0">
+              <a:buNone/>
+            </a:pPr>
+            <a:r>
+              <a:rPr lang="en-US" sz="1050" i="1" dirty="0">
+                <a:solidFill>
+                  <a:srgbClr val="4B5563"/>
+                </a:solidFill>
+                <a:latin typeface="Calibri" pitchFamily="34" charset="0"/>
+                <a:ea typeface="Calibri" pitchFamily="34" charset="-122"/>
+                <a:cs typeface="Calibri" pitchFamily="34" charset="-120"/>
+              </a:rPr>
+              <a:t>Casino Pride can be presented accurately as one of the company’s brands/business interests where appropriate.</a:t>
+            </a:r>
+            <a:endParaRPr lang="en-US" sz="1050" dirty="0"/>
+          </a:p>
+        </p:txBody>
+      </p:sp>
+      <p:sp>
+        <p:nvSpPr>
+          <p:cNvPr id="21" name="Shape 19"/>
+          <p:cNvSpPr/>
+          <p:nvPr/>
+        </p:nvSpPr>
+        <p:spPr>
+          <a:xfrm>
+            <a:off x="457200" y="4206240"/>
+            <a:ext cx="8229600" cy="777240"/>
+          </a:xfrm>
+          <a:prstGeom prst="roundRect">
+            <a:avLst>
+              <a:gd name="adj" fmla="val 9412"/>
+            </a:avLst>
+          </a:prstGeom>
+          <a:solidFill>
+            <a:srgbClr val="ECFDF5"/>
+          </a:solidFill>
+          <a:ln w="9525">
+            <a:solidFill>
+              <a:srgbClr val="34D399"/>
+            </a:solidFill>
+            <a:prstDash val="solid"/>
+          </a:ln>
+        </p:spPr>
+      </p:sp>
+      <p:sp>
+        <p:nvSpPr>
+          <p:cNvPr id="22" name="Text 20"/>
+          <p:cNvSpPr/>
+          <p:nvPr/>
+        </p:nvSpPr>
+        <p:spPr>
+          <a:xfrm>
+            <a:off x="685800" y="4279392"/>
+            <a:ext cx="7772400" cy="182880"/>
+          </a:xfrm>
+          <a:prstGeom prst="rect">
+            <a:avLst/>
+          </a:prstGeom>
+          <a:noFill/>
+          <a:ln/>
+        </p:spPr>
+        <p:txBody>
+          <a:bodyPr wrap="square" lIns="0" tIns="0" rIns="0" bIns="0" rtlCol="0" anchor="ctr"/>
+          <a:lstStyle/>
+          <a:p>
+            <a:pPr algn="l" indent="0" marL="0">
+              <a:buNone/>
+            </a:pPr>
+            <a:r>
+              <a:rPr lang="en-US" sz="800" b="1" spc="100" kern="0" dirty="0">
+                <a:solidFill>
+                  <a:srgbClr val="0D7C5F"/>
+                </a:solidFill>
+                <a:latin typeface="Calibri" pitchFamily="34" charset="0"/>
+                <a:ea typeface="Calibri" pitchFamily="34" charset="-122"/>
+                <a:cs typeface="Calibri" pitchFamily="34" charset="-120"/>
+              </a:rPr>
+              <a:t>KEY ADVANTAGE</a:t>
+            </a:r>
+            <a:endParaRPr lang="en-US" sz="800" dirty="0"/>
+          </a:p>
+        </p:txBody>
+      </p:sp>
+      <p:sp>
+        <p:nvSpPr>
+          <p:cNvPr id="23" name="Text 21"/>
+          <p:cNvSpPr/>
+          <p:nvPr/>
+        </p:nvSpPr>
+        <p:spPr>
+          <a:xfrm>
+            <a:off x="685800" y="4480560"/>
+            <a:ext cx="7772400" cy="411480"/>
           </a:xfrm>
           <a:prstGeom prst="rect">
             <a:avLst/>
@@ -4338,490 +4807,17 @@
               <a:buNone/>
             </a:pPr>
             <a:r>
-              <a:rPr lang="en-US" sz="1000" dirty="0">
-                <a:solidFill>
-                  <a:srgbClr val="9CA3AF"/>
-                </a:solidFill>
-                <a:latin typeface="Calibri" pitchFamily="34" charset="0"/>
-                <a:ea typeface="Calibri" pitchFamily="34" charset="-122"/>
-                <a:cs typeface="Calibri" pitchFamily="34" charset="-120"/>
-              </a:rPr>
-              <a:t>Represents the actual corporate/business entity</a:t>
-            </a:r>
-            <a:endParaRPr lang="en-US" sz="1000" dirty="0"/>
-          </a:p>
-        </p:txBody>
-      </p:sp>
-      <p:sp>
-        <p:nvSpPr>
-          <p:cNvPr id="11" name="Shape 9"/>
-          <p:cNvSpPr/>
-          <p:nvPr/>
-        </p:nvSpPr>
-        <p:spPr>
-          <a:xfrm>
-            <a:off x="4754880" y="1828800"/>
-            <a:ext cx="4023360" cy="1097280"/>
-          </a:xfrm>
-          <a:prstGeom prst="roundRect">
-            <a:avLst>
-              <a:gd name="adj" fmla="val 8333"/>
-            </a:avLst>
-          </a:prstGeom>
-          <a:solidFill>
-            <a:srgbClr val="1C2438"/>
-          </a:solidFill>
-          <a:ln/>
-        </p:spPr>
-      </p:sp>
-      <p:sp>
-        <p:nvSpPr>
-          <p:cNvPr id="12" name="Shape 10"/>
-          <p:cNvSpPr/>
-          <p:nvPr/>
-        </p:nvSpPr>
-        <p:spPr>
-          <a:xfrm>
-            <a:off x="4892040" y="2057400"/>
-            <a:ext cx="36576" cy="640080"/>
-          </a:xfrm>
-          <a:prstGeom prst="roundRect">
-            <a:avLst>
-              <a:gd name="adj" fmla="val 50000"/>
-            </a:avLst>
-          </a:prstGeom>
-          <a:solidFill>
-            <a:srgbClr val="D4A853"/>
-          </a:solidFill>
-          <a:ln/>
-        </p:spPr>
-      </p:sp>
-      <p:sp>
-        <p:nvSpPr>
-          <p:cNvPr id="13" name="Text 11"/>
-          <p:cNvSpPr/>
-          <p:nvPr/>
-        </p:nvSpPr>
-        <p:spPr>
-          <a:xfrm>
-            <a:off x="5120640" y="1965960"/>
-            <a:ext cx="3474720" cy="365760"/>
-          </a:xfrm>
-          <a:prstGeom prst="rect">
-            <a:avLst/>
-          </a:prstGeom>
-          <a:noFill/>
-          <a:ln/>
-        </p:spPr>
-        <p:txBody>
-          <a:bodyPr wrap="square" lIns="0" tIns="0" rIns="0" bIns="0" rtlCol="0" anchor="ctr"/>
-          <a:lstStyle/>
-          <a:p>
-            <a:pPr algn="l" indent="0" marL="0">
-              <a:buNone/>
-            </a:pPr>
-            <a:r>
-              <a:rPr lang="en-US" sz="1300" b="1" dirty="0">
-                <a:solidFill>
-                  <a:srgbClr val="FFFFFF"/>
-                </a:solidFill>
-                <a:latin typeface="Cambria" pitchFamily="34" charset="0"/>
-                <a:ea typeface="Cambria" pitchFamily="34" charset="-122"/>
-                <a:cs typeface="Cambria" pitchFamily="34" charset="-120"/>
-              </a:rPr>
-              <a:t>More Flexible</a:t>
-            </a:r>
-            <a:endParaRPr lang="en-US" sz="1300" dirty="0"/>
-          </a:p>
-        </p:txBody>
-      </p:sp>
-      <p:sp>
-        <p:nvSpPr>
-          <p:cNvPr id="14" name="Text 12"/>
-          <p:cNvSpPr/>
-          <p:nvPr/>
-        </p:nvSpPr>
-        <p:spPr>
-          <a:xfrm>
-            <a:off x="5120640" y="2331720"/>
-            <a:ext cx="3474720" cy="457200"/>
-          </a:xfrm>
-          <a:prstGeom prst="rect">
-            <a:avLst/>
-          </a:prstGeom>
-          <a:noFill/>
-          <a:ln/>
-        </p:spPr>
-        <p:txBody>
-          <a:bodyPr wrap="square" lIns="0" tIns="0" rIns="0" bIns="0" rtlCol="0" anchor="ctr"/>
-          <a:lstStyle/>
-          <a:p>
-            <a:pPr algn="l" indent="0" marL="0">
-              <a:lnSpc>
-                <a:spcPct val="130000"/>
-              </a:lnSpc>
-              <a:buNone/>
-            </a:pPr>
-            <a:r>
-              <a:rPr lang="en-US" sz="1000" dirty="0">
-                <a:solidFill>
-                  <a:srgbClr val="9CA3AF"/>
-                </a:solidFill>
-                <a:latin typeface="Calibri" pitchFamily="34" charset="0"/>
-                <a:ea typeface="Calibri" pitchFamily="34" charset="-122"/>
-                <a:cs typeface="Calibri" pitchFamily="34" charset="-120"/>
-              </a:rPr>
-              <a:t>Showcases hospitality, entertainment, recreation, dining &amp; other activities</a:t>
-            </a:r>
-            <a:endParaRPr lang="en-US" sz="1000" dirty="0"/>
-          </a:p>
-        </p:txBody>
-      </p:sp>
-      <p:sp>
-        <p:nvSpPr>
-          <p:cNvPr id="15" name="Shape 13"/>
-          <p:cNvSpPr/>
-          <p:nvPr/>
-        </p:nvSpPr>
-        <p:spPr>
-          <a:xfrm>
-            <a:off x="457200" y="3108960"/>
-            <a:ext cx="4023360" cy="1097280"/>
-          </a:xfrm>
-          <a:prstGeom prst="roundRect">
-            <a:avLst>
-              <a:gd name="adj" fmla="val 8333"/>
-            </a:avLst>
-          </a:prstGeom>
-          <a:solidFill>
-            <a:srgbClr val="1C2438"/>
-          </a:solidFill>
-          <a:ln/>
-        </p:spPr>
-      </p:sp>
-      <p:sp>
-        <p:nvSpPr>
-          <p:cNvPr id="16" name="Shape 14"/>
-          <p:cNvSpPr/>
-          <p:nvPr/>
-        </p:nvSpPr>
-        <p:spPr>
-          <a:xfrm>
-            <a:off x="594360" y="3337560"/>
-            <a:ext cx="36576" cy="640080"/>
-          </a:xfrm>
-          <a:prstGeom prst="roundRect">
-            <a:avLst>
-              <a:gd name="adj" fmla="val 50000"/>
-            </a:avLst>
-          </a:prstGeom>
-          <a:solidFill>
-            <a:srgbClr val="D4A853"/>
-          </a:solidFill>
-          <a:ln/>
-        </p:spPr>
-      </p:sp>
-      <p:sp>
-        <p:nvSpPr>
-          <p:cNvPr id="17" name="Text 15"/>
-          <p:cNvSpPr/>
-          <p:nvPr/>
-        </p:nvSpPr>
-        <p:spPr>
-          <a:xfrm>
-            <a:off x="822960" y="3246120"/>
-            <a:ext cx="3474720" cy="365760"/>
-          </a:xfrm>
-          <a:prstGeom prst="rect">
-            <a:avLst/>
-          </a:prstGeom>
-          <a:noFill/>
-          <a:ln/>
-        </p:spPr>
-        <p:txBody>
-          <a:bodyPr wrap="square" lIns="0" tIns="0" rIns="0" bIns="0" rtlCol="0" anchor="ctr"/>
-          <a:lstStyle/>
-          <a:p>
-            <a:pPr algn="l" indent="0" marL="0">
-              <a:buNone/>
-            </a:pPr>
-            <a:r>
-              <a:rPr lang="en-US" sz="1300" b="1" dirty="0">
-                <a:solidFill>
-                  <a:srgbClr val="FFFFFF"/>
-                </a:solidFill>
-                <a:latin typeface="Cambria" pitchFamily="34" charset="0"/>
-                <a:ea typeface="Cambria" pitchFamily="34" charset="-122"/>
-                <a:cs typeface="Cambria" pitchFamily="34" charset="-120"/>
-              </a:rPr>
-              <a:t>More Scalable</a:t>
-            </a:r>
-            <a:endParaRPr lang="en-US" sz="1300" dirty="0"/>
-          </a:p>
-        </p:txBody>
-      </p:sp>
-      <p:sp>
-        <p:nvSpPr>
-          <p:cNvPr id="18" name="Text 16"/>
-          <p:cNvSpPr/>
-          <p:nvPr/>
-        </p:nvSpPr>
-        <p:spPr>
-          <a:xfrm>
-            <a:off x="822960" y="3611880"/>
-            <a:ext cx="3474720" cy="457200"/>
-          </a:xfrm>
-          <a:prstGeom prst="rect">
-            <a:avLst/>
-          </a:prstGeom>
-          <a:noFill/>
-          <a:ln/>
-        </p:spPr>
-        <p:txBody>
-          <a:bodyPr wrap="square" lIns="0" tIns="0" rIns="0" bIns="0" rtlCol="0" anchor="ctr"/>
-          <a:lstStyle/>
-          <a:p>
-            <a:pPr algn="l" indent="0" marL="0">
-              <a:lnSpc>
-                <a:spcPct val="130000"/>
-              </a:lnSpc>
-              <a:buNone/>
-            </a:pPr>
-            <a:r>
-              <a:rPr lang="en-US" sz="1000" dirty="0">
-                <a:solidFill>
-                  <a:srgbClr val="9CA3AF"/>
-                </a:solidFill>
-                <a:latin typeface="Calibri" pitchFamily="34" charset="0"/>
-                <a:ea typeface="Calibri" pitchFamily="34" charset="-122"/>
-                <a:cs typeface="Calibri" pitchFamily="34" charset="-120"/>
-              </a:rPr>
-              <a:t>Additional brands, properties or business interests can be added in future</a:t>
-            </a:r>
-            <a:endParaRPr lang="en-US" sz="1000" dirty="0"/>
-          </a:p>
-        </p:txBody>
-      </p:sp>
-      <p:sp>
-        <p:nvSpPr>
-          <p:cNvPr id="19" name="Shape 17"/>
-          <p:cNvSpPr/>
-          <p:nvPr/>
-        </p:nvSpPr>
-        <p:spPr>
-          <a:xfrm>
-            <a:off x="4754880" y="3108960"/>
-            <a:ext cx="4023360" cy="1097280"/>
-          </a:xfrm>
-          <a:prstGeom prst="roundRect">
-            <a:avLst>
-              <a:gd name="adj" fmla="val 8333"/>
-            </a:avLst>
-          </a:prstGeom>
-          <a:solidFill>
-            <a:srgbClr val="1C2438"/>
-          </a:solidFill>
-          <a:ln/>
-        </p:spPr>
-      </p:sp>
-      <p:sp>
-        <p:nvSpPr>
-          <p:cNvPr id="20" name="Shape 18"/>
-          <p:cNvSpPr/>
-          <p:nvPr/>
-        </p:nvSpPr>
-        <p:spPr>
-          <a:xfrm>
-            <a:off x="4892040" y="3337560"/>
-            <a:ext cx="36576" cy="640080"/>
-          </a:xfrm>
-          <a:prstGeom prst="roundRect">
-            <a:avLst>
-              <a:gd name="adj" fmla="val 50000"/>
-            </a:avLst>
-          </a:prstGeom>
-          <a:solidFill>
-            <a:srgbClr val="D4A853"/>
-          </a:solidFill>
-          <a:ln/>
-        </p:spPr>
-      </p:sp>
-      <p:sp>
-        <p:nvSpPr>
-          <p:cNvPr id="21" name="Text 19"/>
-          <p:cNvSpPr/>
-          <p:nvPr/>
-        </p:nvSpPr>
-        <p:spPr>
-          <a:xfrm>
-            <a:off x="5120640" y="3246120"/>
-            <a:ext cx="3474720" cy="365760"/>
-          </a:xfrm>
-          <a:prstGeom prst="rect">
-            <a:avLst/>
-          </a:prstGeom>
-          <a:noFill/>
-          <a:ln/>
-        </p:spPr>
-        <p:txBody>
-          <a:bodyPr wrap="square" lIns="0" tIns="0" rIns="0" bIns="0" rtlCol="0" anchor="ctr"/>
-          <a:lstStyle/>
-          <a:p>
-            <a:pPr algn="l" indent="0" marL="0">
-              <a:buNone/>
-            </a:pPr>
-            <a:r>
-              <a:rPr lang="en-US" sz="1300" b="1" dirty="0">
-                <a:solidFill>
-                  <a:srgbClr val="FFFFFF"/>
-                </a:solidFill>
-                <a:latin typeface="Cambria" pitchFamily="34" charset="0"/>
-                <a:ea typeface="Cambria" pitchFamily="34" charset="-122"/>
-                <a:cs typeface="Cambria" pitchFamily="34" charset="-120"/>
-              </a:rPr>
-              <a:t>Better Long-Term Value</a:t>
-            </a:r>
-            <a:endParaRPr lang="en-US" sz="1300" dirty="0"/>
-          </a:p>
-        </p:txBody>
-      </p:sp>
-      <p:sp>
-        <p:nvSpPr>
-          <p:cNvPr id="22" name="Text 20"/>
-          <p:cNvSpPr/>
-          <p:nvPr/>
-        </p:nvSpPr>
-        <p:spPr>
-          <a:xfrm>
-            <a:off x="5120640" y="3611880"/>
-            <a:ext cx="3474720" cy="457200"/>
-          </a:xfrm>
-          <a:prstGeom prst="rect">
-            <a:avLst/>
-          </a:prstGeom>
-          <a:noFill/>
-          <a:ln/>
-        </p:spPr>
-        <p:txBody>
-          <a:bodyPr wrap="square" lIns="0" tIns="0" rIns="0" bIns="0" rtlCol="0" anchor="ctr"/>
-          <a:lstStyle/>
-          <a:p>
-            <a:pPr algn="l" indent="0" marL="0">
-              <a:lnSpc>
-                <a:spcPct val="130000"/>
-              </a:lnSpc>
-              <a:buNone/>
-            </a:pPr>
-            <a:r>
-              <a:rPr lang="en-US" sz="1000" dirty="0">
-                <a:solidFill>
-                  <a:srgbClr val="9CA3AF"/>
-                </a:solidFill>
-                <a:latin typeface="Calibri" pitchFamily="34" charset="0"/>
-                <a:ea typeface="Calibri" pitchFamily="34" charset="-122"/>
-                <a:cs typeface="Calibri" pitchFamily="34" charset="-120"/>
-              </a:rPr>
-              <a:t>Remains useful as a corporate digital asset beyond gateway requirement</a:t>
-            </a:r>
-            <a:endParaRPr lang="en-US" sz="1000" dirty="0"/>
-          </a:p>
-        </p:txBody>
-      </p:sp>
-      <p:sp>
-        <p:nvSpPr>
-          <p:cNvPr id="23" name="Shape 21"/>
-          <p:cNvSpPr/>
-          <p:nvPr/>
-        </p:nvSpPr>
-        <p:spPr>
-          <a:xfrm>
-            <a:off x="457200" y="4526280"/>
-            <a:ext cx="2743200" cy="18288"/>
-          </a:xfrm>
-          <a:prstGeom prst="rect">
-            <a:avLst/>
-          </a:prstGeom>
-          <a:solidFill>
-            <a:srgbClr val="D4A853"/>
-          </a:solidFill>
-          <a:ln/>
-        </p:spPr>
-      </p:sp>
-      <p:sp>
-        <p:nvSpPr>
-          <p:cNvPr id="24" name="Text 22"/>
-          <p:cNvSpPr/>
-          <p:nvPr/>
-        </p:nvSpPr>
-        <p:spPr>
-          <a:xfrm>
-            <a:off x="457200" y="4617720"/>
-            <a:ext cx="8229600" cy="182880"/>
-          </a:xfrm>
-          <a:prstGeom prst="rect">
-            <a:avLst/>
-          </a:prstGeom>
-          <a:noFill/>
-          <a:ln/>
-        </p:spPr>
-        <p:txBody>
-          <a:bodyPr wrap="square" lIns="0" tIns="0" rIns="0" bIns="0" rtlCol="0" anchor="ctr"/>
-          <a:lstStyle/>
-          <a:p>
-            <a:pPr algn="l" indent="0" marL="0">
-              <a:buNone/>
-            </a:pPr>
-            <a:r>
-              <a:rPr lang="en-US" sz="800" b="1" spc="150" kern="0" dirty="0">
-                <a:solidFill>
-                  <a:srgbClr val="D4A853"/>
-                </a:solidFill>
-                <a:latin typeface="Calibri" pitchFamily="34" charset="0"/>
-                <a:ea typeface="Calibri" pitchFamily="34" charset="-122"/>
-                <a:cs typeface="Calibri" pitchFamily="34" charset="-120"/>
-              </a:rPr>
-              <a:t>OUR APPROACH</a:t>
-            </a:r>
-            <a:endParaRPr lang="en-US" sz="800" dirty="0"/>
-          </a:p>
-        </p:txBody>
-      </p:sp>
-      <p:sp>
-        <p:nvSpPr>
-          <p:cNvPr id="25" name="Text 23"/>
-          <p:cNvSpPr/>
-          <p:nvPr/>
-        </p:nvSpPr>
-        <p:spPr>
-          <a:xfrm>
-            <a:off x="457200" y="4800600"/>
-            <a:ext cx="8229600" cy="274320"/>
-          </a:xfrm>
-          <a:prstGeom prst="rect">
-            <a:avLst/>
-          </a:prstGeom>
-          <a:noFill/>
-          <a:ln/>
-        </p:spPr>
-        <p:txBody>
-          <a:bodyPr wrap="square" lIns="0" tIns="0" rIns="0" bIns="0" rtlCol="0" anchor="ctr"/>
-          <a:lstStyle/>
-          <a:p>
-            <a:pPr algn="l" indent="0" marL="0">
-              <a:buNone/>
-            </a:pPr>
-            <a:r>
-              <a:rPr lang="en-US" sz="1000" dirty="0">
-                <a:solidFill>
-                  <a:srgbClr val="9CA3AF"/>
-                </a:solidFill>
-                <a:latin typeface="Calibri" pitchFamily="34" charset="0"/>
-                <a:ea typeface="Calibri" pitchFamily="34" charset="-122"/>
-                <a:cs typeface="Calibri" pitchFamily="34" charset="-120"/>
-              </a:rPr>
-              <a:t>A modern, premium corporate website with clear business positioning and accurate information — not simply modifying or hiding the existing Casino Pride identity.</a:t>
-            </a:r>
-            <a:endParaRPr lang="en-US" sz="1000" dirty="0"/>
+              <a:rPr lang="en-US" sz="1050" dirty="0">
+                <a:solidFill>
+                  <a:srgbClr val="065F46"/>
+                </a:solidFill>
+                <a:latin typeface="Calibri" pitchFamily="34" charset="0"/>
+                <a:ea typeface="Calibri" pitchFamily="34" charset="-122"/>
+                <a:cs typeface="Calibri" pitchFamily="34" charset="-120"/>
+              </a:rPr>
+              <a:t>This creates a stronger corporate digital identity that can accommodate the company’s existing and future business activities, rather than creating a website solely around one entertainment brand.</a:t>
+            </a:r>
+            <a:endParaRPr lang="en-US" sz="1050" dirty="0"/>
           </a:p>
         </p:txBody>
       </p:sp>
@@ -4839,7 +4835,7 @@
     <p:bg>
       <p:bgPr>
         <a:solidFill>
-          <a:srgbClr val="F8FAFC"/>
+          <a:srgbClr val="F8FAF9"/>
         </a:solidFill>
       </p:bgPr>
     </p:bg>
@@ -4874,7 +4870,7 @@
             </a:avLst>
           </a:prstGeom>
           <a:solidFill>
-            <a:srgbClr val="0A0E1A"/>
+            <a:srgbClr val="0D7C5F"/>
           </a:solidFill>
           <a:ln/>
         </p:spPr>
@@ -4965,14 +4961,14 @@
         </p:nvSpPr>
         <p:spPr>
           <a:xfrm>
-            <a:off x="457200" y="1463040"/>
+            <a:off x="457200" y="1453896"/>
             <a:ext cx="182880" cy="182880"/>
           </a:xfrm>
           <a:prstGeom prst="ellipse">
             <a:avLst/>
           </a:prstGeom>
           <a:solidFill>
-            <a:srgbClr val="10B981"/>
+            <a:srgbClr val="0D7C5F"/>
           </a:solidFill>
           <a:ln/>
         </p:spPr>
@@ -4985,7 +4981,7 @@
         </p:nvSpPr>
         <p:spPr>
           <a:xfrm>
-            <a:off x="457200" y="1444752"/>
+            <a:off x="457200" y="1435608"/>
             <a:ext cx="182880" cy="201168"/>
           </a:xfrm>
           <a:prstGeom prst="rect">
@@ -5063,14 +5059,14 @@
         </p:nvSpPr>
         <p:spPr>
           <a:xfrm>
-            <a:off x="457200" y="1847088"/>
+            <a:off x="457200" y="1837944"/>
             <a:ext cx="182880" cy="182880"/>
           </a:xfrm>
           <a:prstGeom prst="ellipse">
             <a:avLst/>
           </a:prstGeom>
           <a:solidFill>
-            <a:srgbClr val="10B981"/>
+            <a:srgbClr val="0D7C5F"/>
           </a:solidFill>
           <a:ln/>
         </p:spPr>
@@ -5083,7 +5079,7 @@
         </p:nvSpPr>
         <p:spPr>
           <a:xfrm>
-            <a:off x="457200" y="1828800"/>
+            <a:off x="457200" y="1819656"/>
             <a:ext cx="182880" cy="201168"/>
           </a:xfrm>
           <a:prstGeom prst="rect">
@@ -5161,14 +5157,14 @@
         </p:nvSpPr>
         <p:spPr>
           <a:xfrm>
-            <a:off x="457200" y="2231136"/>
+            <a:off x="457200" y="2221992"/>
             <a:ext cx="182880" cy="182880"/>
           </a:xfrm>
           <a:prstGeom prst="ellipse">
             <a:avLst/>
           </a:prstGeom>
           <a:solidFill>
-            <a:srgbClr val="10B981"/>
+            <a:srgbClr val="0D7C5F"/>
           </a:solidFill>
           <a:ln/>
         </p:spPr>
@@ -5181,7 +5177,7 @@
         </p:nvSpPr>
         <p:spPr>
           <a:xfrm>
-            <a:off x="457200" y="2212848"/>
+            <a:off x="457200" y="2203704"/>
             <a:ext cx="182880" cy="201168"/>
           </a:xfrm>
           <a:prstGeom prst="rect">
@@ -5259,14 +5255,14 @@
         </p:nvSpPr>
         <p:spPr>
           <a:xfrm>
-            <a:off x="457200" y="2615184"/>
+            <a:off x="457200" y="2606040"/>
             <a:ext cx="182880" cy="182880"/>
           </a:xfrm>
           <a:prstGeom prst="ellipse">
             <a:avLst/>
           </a:prstGeom>
           <a:solidFill>
-            <a:srgbClr val="10B981"/>
+            <a:srgbClr val="0D7C5F"/>
           </a:solidFill>
           <a:ln/>
         </p:spPr>
@@ -5279,7 +5275,7 @@
         </p:nvSpPr>
         <p:spPr>
           <a:xfrm>
-            <a:off x="457200" y="2596896"/>
+            <a:off x="457200" y="2587752"/>
             <a:ext cx="182880" cy="201168"/>
           </a:xfrm>
           <a:prstGeom prst="rect">
@@ -5357,14 +5353,14 @@
         </p:nvSpPr>
         <p:spPr>
           <a:xfrm>
-            <a:off x="457200" y="2999232"/>
+            <a:off x="457200" y="2990088"/>
             <a:ext cx="182880" cy="182880"/>
           </a:xfrm>
           <a:prstGeom prst="ellipse">
             <a:avLst/>
           </a:prstGeom>
           <a:solidFill>
-            <a:srgbClr val="10B981"/>
+            <a:srgbClr val="0D7C5F"/>
           </a:solidFill>
           <a:ln/>
         </p:spPr>
@@ -5377,7 +5373,7 @@
         </p:nvSpPr>
         <p:spPr>
           <a:xfrm>
-            <a:off x="457200" y="2980944"/>
+            <a:off x="457200" y="2971800"/>
             <a:ext cx="182880" cy="201168"/>
           </a:xfrm>
           <a:prstGeom prst="rect">
@@ -5455,14 +5451,14 @@
         </p:nvSpPr>
         <p:spPr>
           <a:xfrm>
-            <a:off x="3017520" y="1463040"/>
+            <a:off x="3017520" y="1453896"/>
             <a:ext cx="182880" cy="182880"/>
           </a:xfrm>
           <a:prstGeom prst="ellipse">
             <a:avLst/>
           </a:prstGeom>
           <a:solidFill>
-            <a:srgbClr val="10B981"/>
+            <a:srgbClr val="0D7C5F"/>
           </a:solidFill>
           <a:ln/>
         </p:spPr>
@@ -5475,7 +5471,7 @@
         </p:nvSpPr>
         <p:spPr>
           <a:xfrm>
-            <a:off x="3017520" y="1444752"/>
+            <a:off x="3017520" y="1435608"/>
             <a:ext cx="182880" cy="201168"/>
           </a:xfrm>
           <a:prstGeom prst="rect">
@@ -5553,14 +5549,14 @@
         </p:nvSpPr>
         <p:spPr>
           <a:xfrm>
-            <a:off x="3017520" y="1847088"/>
+            <a:off x="3017520" y="1837944"/>
             <a:ext cx="182880" cy="182880"/>
           </a:xfrm>
           <a:prstGeom prst="ellipse">
             <a:avLst/>
           </a:prstGeom>
           <a:solidFill>
-            <a:srgbClr val="10B981"/>
+            <a:srgbClr val="0D7C5F"/>
           </a:solidFill>
           <a:ln/>
         </p:spPr>
@@ -5573,7 +5569,7 @@
         </p:nvSpPr>
         <p:spPr>
           <a:xfrm>
-            <a:off x="3017520" y="1828800"/>
+            <a:off x="3017520" y="1819656"/>
             <a:ext cx="182880" cy="201168"/>
           </a:xfrm>
           <a:prstGeom prst="rect">
@@ -5651,14 +5647,14 @@
         </p:nvSpPr>
         <p:spPr>
           <a:xfrm>
-            <a:off x="3017520" y="2231136"/>
+            <a:off x="3017520" y="2221992"/>
             <a:ext cx="182880" cy="182880"/>
           </a:xfrm>
           <a:prstGeom prst="ellipse">
             <a:avLst/>
           </a:prstGeom>
           <a:solidFill>
-            <a:srgbClr val="10B981"/>
+            <a:srgbClr val="0D7C5F"/>
           </a:solidFill>
           <a:ln/>
         </p:spPr>
@@ -5671,7 +5667,7 @@
         </p:nvSpPr>
         <p:spPr>
           <a:xfrm>
-            <a:off x="3017520" y="2212848"/>
+            <a:off x="3017520" y="2203704"/>
             <a:ext cx="182880" cy="201168"/>
           </a:xfrm>
           <a:prstGeom prst="rect">
@@ -5749,14 +5745,14 @@
         </p:nvSpPr>
         <p:spPr>
           <a:xfrm>
-            <a:off x="3017520" y="2615184"/>
+            <a:off x="3017520" y="2606040"/>
             <a:ext cx="182880" cy="182880"/>
           </a:xfrm>
           <a:prstGeom prst="ellipse">
             <a:avLst/>
           </a:prstGeom>
           <a:solidFill>
-            <a:srgbClr val="10B981"/>
+            <a:srgbClr val="0D7C5F"/>
           </a:solidFill>
           <a:ln/>
         </p:spPr>
@@ -5769,7 +5765,7 @@
         </p:nvSpPr>
         <p:spPr>
           <a:xfrm>
-            <a:off x="3017520" y="2596896"/>
+            <a:off x="3017520" y="2587752"/>
             <a:ext cx="182880" cy="201168"/>
           </a:xfrm>
           <a:prstGeom prst="rect">
@@ -5848,21 +5844,21 @@
         <p:spPr>
           <a:xfrm>
             <a:off x="5669280" y="777240"/>
-            <a:ext cx="3108960" cy="2926080"/>
+            <a:ext cx="3108960" cy="3017520"/>
           </a:xfrm>
           <a:prstGeom prst="roundRect">
             <a:avLst>
-              <a:gd name="adj" fmla="val 4688"/>
+              <a:gd name="adj" fmla="val 4545"/>
             </a:avLst>
           </a:prstGeom>
           <a:solidFill>
-            <a:srgbClr val="0A0E1A"/>
+            <a:srgbClr val="0D7C5F"/>
           </a:solidFill>
           <a:ln/>
           <a:effectLst>
-            <a:outerShdw sx="100000" sy="100000" kx="0" ky="0" algn="bl" rotWithShape="0" blurRad="152400" dist="50800" dir="16200000">
+            <a:outerShdw sx="100000" sy="100000" kx="0" ky="0" algn="bl" rotWithShape="0" blurRad="127000" dist="38100" dir="16200000">
               <a:srgbClr val="000000">
-                <a:alpha val="20000"/>
+                <a:alpha val="15000"/>
               </a:srgbClr>
             </a:outerShdw>
           </a:effectLst>
@@ -5885,7 +5881,7 @@
             </a:avLst>
           </a:prstGeom>
           <a:solidFill>
-            <a:srgbClr val="D4A853"/>
+            <a:srgbClr val="6EE7B7"/>
           </a:solidFill>
           <a:ln/>
         </p:spPr>
@@ -5917,7 +5913,7 @@
             <a:r>
               <a:rPr lang="en-US" sz="1100" dirty="0">
                 <a:solidFill>
-                  <a:srgbClr val="9CA3AF"/>
+                  <a:srgbClr val="D1FAE5"/>
                 </a:solidFill>
                 <a:latin typeface="Calibri" pitchFamily="34" charset="0"/>
                 <a:ea typeface="Calibri" pitchFamily="34" charset="-122"/>
@@ -5956,7 +5952,7 @@
             <a:r>
               <a:rPr lang="en-US" sz="1300" strike="sngStrike" dirty="0">
                 <a:solidFill>
-                  <a:srgbClr val="6B7280"/>
+                  <a:srgbClr val="6EE7B7"/>
                 </a:solidFill>
                 <a:latin typeface="Calibri" pitchFamily="34" charset="0"/>
                 <a:ea typeface="Calibri" pitchFamily="34" charset="-122"/>
@@ -6015,7 +6011,7 @@
         </p:nvSpPr>
         <p:spPr>
           <a:xfrm>
-            <a:off x="7818120" y="1965960"/>
+            <a:off x="7772400" y="1965960"/>
             <a:ext cx="731520" cy="274320"/>
           </a:xfrm>
           <a:prstGeom prst="rect">
@@ -6034,7 +6030,7 @@
             <a:r>
               <a:rPr lang="en-US" sz="1000" dirty="0">
                 <a:solidFill>
-                  <a:srgbClr val="9CA3AF"/>
+                  <a:srgbClr val="D1FAE5"/>
                 </a:solidFill>
                 <a:latin typeface="Calibri" pitchFamily="34" charset="0"/>
                 <a:ea typeface="Calibri" pitchFamily="34" charset="-122"/>
@@ -6061,7 +6057,7 @@
             <a:avLst/>
           </a:prstGeom>
           <a:solidFill>
-            <a:srgbClr val="1C2438"/>
+            <a:srgbClr val="065F46"/>
           </a:solidFill>
           <a:ln/>
         </p:spPr>
@@ -6093,7 +6089,7 @@
             <a:r>
               <a:rPr lang="en-US" sz="900" dirty="0">
                 <a:solidFill>
-                  <a:srgbClr val="9CA3AF"/>
+                  <a:srgbClr val="D1FAE5"/>
                 </a:solidFill>
                 <a:latin typeface="Calibri" pitchFamily="34" charset="0"/>
                 <a:ea typeface="Calibri" pitchFamily="34" charset="-122"/>
@@ -6132,7 +6128,7 @@
             <a:r>
               <a:rPr lang="en-US" sz="900" dirty="0">
                 <a:solidFill>
-                  <a:srgbClr val="9CA3AF"/>
+                  <a:srgbClr val="D1FAE5"/>
                 </a:solidFill>
                 <a:latin typeface="Calibri" pitchFamily="34" charset="0"/>
                 <a:ea typeface="Calibri" pitchFamily="34" charset="-122"/>
@@ -6161,7 +6157,7 @@
             </a:avLst>
           </a:prstGeom>
           <a:solidFill>
-            <a:srgbClr val="D4A853"/>
+            <a:srgbClr val="FFFFFF"/>
           </a:solidFill>
           <a:ln/>
         </p:spPr>
@@ -6193,7 +6189,7 @@
             <a:r>
               <a:rPr lang="en-US" sz="1600" b="1" dirty="0">
                 <a:solidFill>
-                  <a:srgbClr val="0A0E1A"/>
+                  <a:srgbClr val="0D7C5F"/>
                 </a:solidFill>
                 <a:latin typeface="Cambria" pitchFamily="34" charset="0"/>
                 <a:ea typeface="Cambria" pitchFamily="34" charset="-122"/>
@@ -6222,7 +6218,7 @@
             </a:avLst>
           </a:prstGeom>
           <a:solidFill>
-            <a:srgbClr val="064E3B"/>
+            <a:srgbClr val="065F46"/>
           </a:solidFill>
           <a:ln/>
         </p:spPr>
@@ -6254,7 +6250,7 @@
             <a:r>
               <a:rPr lang="en-US" sz="800" b="1" dirty="0">
                 <a:solidFill>
-                  <a:srgbClr val="10B981"/>
+                  <a:srgbClr val="FFFFFF"/>
                 </a:solidFill>
                 <a:latin typeface="Calibri" pitchFamily="34" charset="0"/>
                 <a:ea typeface="Calibri" pitchFamily="34" charset="-122"/>
@@ -6287,9 +6283,9 @@
           </a:solidFill>
           <a:ln/>
           <a:effectLst>
-            <a:outerShdw sx="100000" sy="100000" kx="0" ky="0" algn="bl" rotWithShape="0" blurRad="76200" dist="25400" dir="16200000">
+            <a:outerShdw sx="100000" sy="100000" kx="0" ky="0" algn="bl" rotWithShape="0" blurRad="63500" dist="25400" dir="16200000">
               <a:srgbClr val="000000">
-                <a:alpha val="6000"/>
+                <a:alpha val="5000"/>
               </a:srgbClr>
             </a:outerShdw>
           </a:effectLst>
@@ -6322,7 +6318,7 @@
             <a:r>
               <a:rPr lang="en-US" sz="800" b="1" spc="150" kern="0" dirty="0">
                 <a:solidFill>
-                  <a:srgbClr val="0A0E1A"/>
+                  <a:srgbClr val="0D7C5F"/>
                 </a:solidFill>
                 <a:latin typeface="Calibri" pitchFamily="34" charset="0"/>
                 <a:ea typeface="Calibri" pitchFamily="34" charset="-122"/>
@@ -6351,7 +6347,7 @@
             </a:avLst>
           </a:prstGeom>
           <a:solidFill>
-            <a:srgbClr val="0A0E1A"/>
+            <a:srgbClr val="0D7C5F"/>
           </a:solidFill>
           <a:ln/>
         </p:spPr>
